--- a/diapositivas/bloque1.pptx
+++ b/diapositivas/bloque1.pptx
@@ -4,6 +4,9 @@
   <p:sldMasterIdLst>
     <p:sldMasterId id="2147483648" r:id="rId1"/>
   </p:sldMasterIdLst>
+  <p:notesMasterIdLst>
+    <p:notesMasterId r:id="rId30"/>
+  </p:notesMasterIdLst>
   <p:sldIdLst>
     <p:sldId id="256" r:id="rId2"/>
     <p:sldId id="257" r:id="rId3"/>
@@ -34,9 +37,6 @@
     <p:sldId id="282" r:id="rId28"/>
     <p:sldId id="283" r:id="rId29"/>
   </p:sldIdLst>
-  <p:notesMasterIdLst>
-    <p:notesMasterId r:id="rId30"/>
-  </p:notesMasterIdLst>
   <p:sldSz cx="12192000" cy="6858000"/>
   <p:notesSz cx="6858000" cy="12192000"/>
   <p:defaultTextStyle>
@@ -134,18 +134,18 @@
   <p:extLst>
     <p:ext uri="{521415D9-36F7-43E2-AB2F-B90AF26B5E84}">
       <p14:sectionLst xmlns:p14="http://schemas.microsoft.com/office/powerpoint/2010/main">
-        <p14:section name="Portada" id="{c301a67a-cd06-4f57-6cc5-935d849b84f1}">
+        <p14:section name="Portada" id="{C301A67A-CD06-4F57-6CC5-935D849B84F1}">
           <p14:sldIdLst>
             <p14:sldId id="256"/>
           </p14:sldIdLst>
         </p14:section>
-        <p14:section name="Bloque 1" id="{3600a6c3-52f6-7588-0a9c-a0762f4818cb}">
+        <p14:section name="Bloque 1" id="{3600A6C3-52F6-7588-0A9C-A0762F4818CB}">
           <p14:sldIdLst>
             <p14:sldId id="257"/>
             <p14:sldId id="258"/>
           </p14:sldIdLst>
         </p14:section>
-        <p14:section name="Creatividad e innovación" id="{2be25609-bf65-e18d-0f36-65565fc69efd}">
+        <p14:section name="Creatividad e innovación" id="{2BE25609-BF65-E18D-0F36-65565FC69EFD}">
           <p14:sldIdLst>
             <p14:sldId id="259"/>
             <p14:sldId id="260"/>
@@ -160,7 +160,7 @@
             <p14:sldId id="269"/>
           </p14:sldIdLst>
         </p14:section>
-        <p14:section name="Divergir y converger" id="{f5af64da-b1f4-a1a7-7800-38eefb65567b}">
+        <p14:section name="Divergir y converger" id="{F5AF64DA-B1F4-A1A7-7800-38EEFB65567B}">
           <p14:sldIdLst>
             <p14:sldId id="270"/>
             <p14:sldId id="271"/>
@@ -168,7 +168,7 @@
             <p14:sldId id="273"/>
           </p14:sldIdLst>
         </p14:section>
-        <p14:section name="Brainstorming" id="{b1d90ea5-e9a1-1fa3-6157-4003d122319b}">
+        <p14:section name="Brainstorming" id="{B1D90EA5-E9A1-1FA3-6157-4003D122319B}">
           <p14:sldIdLst>
             <p14:sldId id="274"/>
             <p14:sldId id="275"/>
@@ -176,14 +176,14 @@
             <p14:sldId id="277"/>
           </p14:sldIdLst>
         </p14:section>
-        <p14:section name="Ejercicio 1" id="{1055ef44-d81e-dbff-d1fc-ed58257bfcf2}">
+        <p14:section name="Ejercicio 1" id="{1055EF44-D81E-DBFF-D1FC-ED58257BFCF2}">
           <p14:sldIdLst>
             <p14:sldId id="278"/>
             <p14:sldId id="279"/>
             <p14:sldId id="280"/>
           </p14:sldIdLst>
         </p14:section>
-        <p14:section name="Comparación y cierre" id="{8494f538-1684-8c82-f4e5-ede3625627df}">
+        <p14:section name="Comparación y cierre" id="{8494F538-1684-8C82-F4E5-EDE3625627DF}">
           <p14:sldIdLst>
             <p14:sldId id="281"/>
             <p14:sldId id="282"/>
@@ -221,234 +221,10 @@
           <a:chExt cx="0" cy="0"/>
         </a:xfrm>
       </p:grpSpPr>
-      <p:sp>
-        <p:nvSpPr>
-          <p:cNvPr id="2" name="Header Placeholder 1"/>
-          <p:cNvSpPr>
-            <a:spLocks noGrp="1"/>
-          </p:cNvSpPr>
-          <p:nvPr>
-            <p:ph type="hdr" sz="quarter"/>
-          </p:nvPr>
-        </p:nvSpPr>
-        <p:spPr>
-          <a:xfrm>
-            <a:off x="0" y="0"/>
-            <a:ext cx="2971800" cy="458788"/>
-          </a:xfrm>
-          <a:prstGeom prst="rect">
-            <a:avLst/>
-          </a:prstGeom>
-        </p:spPr>
-        <p:txBody>
-          <a:bodyPr vert="horz" lIns="91440" tIns="45720" rIns="91440" bIns="45720" rtlCol="0"/>
-          <a:lstStyle>
-            <a:lvl1pPr algn="l">
-              <a:defRPr sz="1200"/>
-            </a:lvl1pPr>
-          </a:lstStyle>
-          <a:p>
-            <a:endParaRPr lang="en-US"/>
-          </a:p>
-        </p:txBody>
-      </p:sp>
-      <p:sp>
-        <p:nvSpPr>
-          <p:cNvPr id="3" name="Date Placeholder 2"/>
-          <p:cNvSpPr>
-            <a:spLocks noGrp="1"/>
-          </p:cNvSpPr>
-          <p:nvPr>
-            <p:ph type="dt" idx="1"/>
-          </p:nvPr>
-        </p:nvSpPr>
-        <p:spPr>
-          <a:xfrm>
-            <a:off x="3884613" y="0"/>
-            <a:ext cx="2971800" cy="458788"/>
-          </a:xfrm>
-          <a:prstGeom prst="rect">
-            <a:avLst/>
-          </a:prstGeom>
-        </p:spPr>
-        <p:txBody>
-          <a:bodyPr vert="horz" lIns="91440" tIns="45720" rIns="91440" bIns="45720" rtlCol="0"/>
-          <a:lstStyle>
-            <a:lvl1pPr algn="r">
-              <a:defRPr sz="1200"/>
-            </a:lvl1pPr>
-          </a:lstStyle>
-          <a:p>
-            <a:fld id="{5282F153-3F37-0F45-9E97-73ACFA13230C}" type="datetimeFigureOut">
-              <a:rPr lang="en-US"/>
-              <a:t>7/23/19</a:t>
-            </a:fld>
-            <a:endParaRPr lang="en-US"/>
-          </a:p>
-        </p:txBody>
-      </p:sp>
-      <p:sp>
-        <p:nvSpPr>
-          <p:cNvPr id="4" name="Slide Image Placeholder 3"/>
-          <p:cNvSpPr>
-            <a:spLocks noGrp="1" noRot="1" noChangeAspect="1"/>
-          </p:cNvSpPr>
-          <p:nvPr>
-            <p:ph type="sldImg" idx="2"/>
-          </p:nvPr>
-        </p:nvSpPr>
-        <p:spPr>
-          <a:xfrm>
-            <a:off x="685800" y="1143000"/>
-            <a:ext cx="5486400" cy="3086100"/>
-          </a:xfrm>
-          <a:prstGeom prst="rect">
-            <a:avLst/>
-          </a:prstGeom>
-          <a:noFill/>
-          <a:ln w="12700">
-            <a:solidFill>
-              <a:prstClr val="black"/>
-            </a:solidFill>
-          </a:ln>
-        </p:spPr>
-        <p:txBody>
-          <a:bodyPr vert="horz" lIns="91440" tIns="45720" rIns="91440" bIns="45720" rtlCol="0" anchor="ctr"/>
-          <a:lstStyle/>
-          <a:p>
-            <a:endParaRPr lang="en-US"/>
-          </a:p>
-        </p:txBody>
-      </p:sp>
-      <p:sp>
-        <p:nvSpPr>
-          <p:cNvPr id="5" name="Notes Placeholder 4"/>
-          <p:cNvSpPr>
-            <a:spLocks noGrp="1"/>
-          </p:cNvSpPr>
-          <p:nvPr>
-            <p:ph type="body" sz="quarter" idx="3"/>
-          </p:nvPr>
-        </p:nvSpPr>
-        <p:spPr>
-          <a:xfrm>
-            <a:off x="685800" y="4400550"/>
-            <a:ext cx="5486400" cy="3600450"/>
-          </a:xfrm>
-          <a:prstGeom prst="rect">
-            <a:avLst/>
-          </a:prstGeom>
-        </p:spPr>
-        <p:txBody>
-          <a:bodyPr vert="horz" lIns="91440" tIns="45720" rIns="91440" bIns="45720" rtlCol="0"/>
-          <a:lstStyle/>
-          <a:p>
-            <a:pPr lvl="0"/>
-            <a:r>
-              <a:rPr lang="en-US"/>
-              <a:t>Click to edit Master text styles</a:t>
-            </a:r>
-          </a:p>
-          <a:p>
-            <a:pPr lvl="1"/>
-            <a:r>
-              <a:rPr lang="en-US"/>
-              <a:t>Second level</a:t>
-            </a:r>
-          </a:p>
-          <a:p>
-            <a:pPr lvl="2"/>
-            <a:r>
-              <a:rPr lang="en-US"/>
-              <a:t>Third level</a:t>
-            </a:r>
-          </a:p>
-          <a:p>
-            <a:pPr lvl="3"/>
-            <a:r>
-              <a:rPr lang="en-US"/>
-              <a:t>Fourth level</a:t>
-            </a:r>
-          </a:p>
-          <a:p>
-            <a:pPr lvl="4"/>
-            <a:r>
-              <a:rPr lang="en-US"/>
-              <a:t>Fifth level</a:t>
-            </a:r>
-          </a:p>
-        </p:txBody>
-      </p:sp>
-      <p:sp>
-        <p:nvSpPr>
-          <p:cNvPr id="6" name="Footer Placeholder 5"/>
-          <p:cNvSpPr>
-            <a:spLocks noGrp="1"/>
-          </p:cNvSpPr>
-          <p:nvPr>
-            <p:ph type="ftr" sz="quarter" idx="4"/>
-          </p:nvPr>
-        </p:nvSpPr>
-        <p:spPr>
-          <a:xfrm>
-            <a:off x="0" y="8685213"/>
-            <a:ext cx="2971800" cy="458787"/>
-          </a:xfrm>
-          <a:prstGeom prst="rect">
-            <a:avLst/>
-          </a:prstGeom>
-        </p:spPr>
-        <p:txBody>
-          <a:bodyPr vert="horz" lIns="91440" tIns="45720" rIns="91440" bIns="45720" rtlCol="0" anchor="b"/>
-          <a:lstStyle>
-            <a:lvl1pPr algn="l">
-              <a:defRPr sz="1200"/>
-            </a:lvl1pPr>
-          </a:lstStyle>
-          <a:p>
-            <a:endParaRPr lang="en-US"/>
-          </a:p>
-        </p:txBody>
-      </p:sp>
-      <p:sp>
-        <p:nvSpPr>
-          <p:cNvPr id="7" name="Slide Number Placeholder 6"/>
-          <p:cNvSpPr>
-            <a:spLocks noGrp="1"/>
-          </p:cNvSpPr>
-          <p:nvPr>
-            <p:ph type="sldNum" sz="quarter" idx="5"/>
-          </p:nvPr>
-        </p:nvSpPr>
-        <p:spPr>
-          <a:xfrm>
-            <a:off x="3884613" y="8685213"/>
-            <a:ext cx="2971800" cy="458787"/>
-          </a:xfrm>
-          <a:prstGeom prst="rect">
-            <a:avLst/>
-          </a:prstGeom>
-        </p:spPr>
-        <p:txBody>
-          <a:bodyPr vert="horz" lIns="91440" tIns="45720" rIns="91440" bIns="45720" rtlCol="0" anchor="b"/>
-          <a:lstStyle>
-            <a:lvl1pPr algn="r">
-              <a:defRPr sz="1200"/>
-            </a:lvl1pPr>
-          </a:lstStyle>
-          <a:p>
-            <a:fld id="{CE5E9CC1-C706-0F49-92D6-E571CC5EEA8F}" type="slidenum">
-              <a:rPr lang="en-US"/>
-              <a:t>‹#›</a:t>
-            </a:fld>
-            <a:endParaRPr lang="en-US"/>
-          </a:p>
-        </p:txBody>
-      </p:sp>
     </p:spTree>
     <p:extLst>
       <p:ext uri="{BB962C8B-B14F-4D97-AF65-F5344CB8AC3E}">
-        <p14:creationId xmlns:p14="http://schemas.microsoft.com/office/powerpoint/2010/main" val="1024086991"/>
+        <p14:creationId xmlns:p14="http://schemas.microsoft.com/office/powerpoint/2010/main" val="1777164825"/>
       </p:ext>
     </p:extLst>
   </p:cSld>
@@ -596,7 +372,6 @@
               <a:rPr lang="en-US" dirty="0"/>
               <a:t>Bienvenida. Presentarse brevemente y explicar que el taller es práctico: se trabaja sobre problemas de pequeñas empresas y organizaciones, no sobre funciones sueltas de los programas.</a:t>
             </a:r>
-            <a:endParaRPr lang="en-US" dirty="0"/>
           </a:p>
         </p:txBody>
       </p:sp>
@@ -685,7 +460,6 @@
               <a:t>Respuesta orientativa: Competencia digital.
 Criterio para resolver las dudas: ¿es solo una idea o ya se ha puesto en práctica? ¿Aporta valor?</a:t>
             </a:r>
-            <a:endParaRPr lang="en-US" dirty="0"/>
           </a:p>
         </p:txBody>
       </p:sp>
@@ -774,7 +548,6 @@
               <a:t>Respuesta orientativa: Innovación.
 Criterio para resolver las dudas: ¿es solo una idea o ya se ha puesto en práctica? ¿Aporta valor?</a:t>
             </a:r>
-            <a:endParaRPr lang="en-US" dirty="0"/>
           </a:p>
         </p:txBody>
       </p:sp>
@@ -863,7 +636,6 @@
               <a:t>Respuesta orientativa: Creatividad; si se pone en práctica y funciona, innovación. Situación discutible a propósito: lo importante es el razonamiento, no acertar.
 Criterio para resolver las dudas: ¿es solo una idea o ya se ha puesto en práctica? ¿Aporta valor?</a:t>
             </a:r>
-            <a:endParaRPr lang="en-US" dirty="0"/>
           </a:p>
         </p:txBody>
       </p:sp>
@@ -952,7 +724,6 @@
               <a:t>Respuesta orientativa: Competencia digital; sería innovación si cambiara cómo se atiende a los clientes extranjeros. Situación discutible a propósito: lo importante es el razonamiento, no acertar.
 Criterio para resolver las dudas: ¿es solo una idea o ya se ha puesto en práctica? ¿Aporta valor?</a:t>
             </a:r>
-            <a:endParaRPr lang="en-US" dirty="0"/>
           </a:p>
         </p:txBody>
       </p:sp>
@@ -1040,7 +811,6 @@
               <a:rPr lang="en-US" dirty="0"/>
               <a:t>Usar esta diapositiva cuando haya votos repartidos o al terminar las seis situaciones. Las situaciones 5 y 6 son discutibles a propósito.</a:t>
             </a:r>
-            <a:endParaRPr lang="en-US" dirty="0"/>
           </a:p>
         </p:txBody>
       </p:sp>
@@ -1128,7 +898,6 @@
               <a:rPr lang="en-US" dirty="0"/>
               <a:t>Minutos 10–12. Cada persona, en silencio y por escrito, anota en 90 segundos todos los usos que se le ocurran para un clip. Después, cada una dice cuántos ha escrito y quien tenga más lee su lista.</a:t>
             </a:r>
-            <a:endParaRPr lang="en-US" dirty="0"/>
           </a:p>
         </p:txBody>
       </p:sp>
@@ -1216,7 +985,6 @@
               <a:rPr lang="en-US" dirty="0"/>
               <a:t>Minutos 12–14. Votar un solo uso. Si al grupo no se le ocurre ningún producto, es normal: pasar a la diapositiva siguiente. No explicar todavía la teoría de divergir y converger: viene después, sobre lo que acaban de hacer.</a:t>
             </a:r>
-            <a:endParaRPr lang="en-US" dirty="0"/>
           </a:p>
         </p:txBody>
       </p:sp>
@@ -1306,7 +1074,6 @@
 Las ideas se generaron con IA. Según la IA, para casi todas existen productos parecidos en el mercado (organizadores de cables de silicona, cierres para bolsas, clips para plantas, sistemas de conexión rápida, soportes plegables para móviles, pinzas para cartelería); conviene comprobarlo antes de afirmarlo en clase.
 Enlaza con la técnica SCAMPER del bloque 2: Adaptar (llevar el concepto a otro sector) y Modificar (cambiar tamaño o material).</a:t>
             </a:r>
-            <a:endParaRPr lang="en-US" dirty="0"/>
           </a:p>
         </p:txBody>
       </p:sp>
@@ -1394,7 +1161,6 @@
               <a:rPr lang="en-US" dirty="0"/>
               <a:t>Minutos 14–15. Lo que acaban de hacer con el clip: primero pensamiento divergente (muchos usos, sin juzgar) y después convergente (elegir uno con criterio). Las tres técnicas del curso sirven para abrir el abanico; la matriz del bloque 3 sirve para cerrarlo.</a:t>
             </a:r>
-            <a:endParaRPr lang="en-US" dirty="0"/>
           </a:p>
         </p:txBody>
       </p:sp>
@@ -1482,7 +1248,6 @@
               <a:rPr lang="en-US" dirty="0"/>
               <a:t>Regla para todo el curso: en cada técnica, primero piensan las personas y después se pide ayuda a la IA. Si la IA va primero, el grupo se ancla en sus propuestas y deja de pensar por su cuenta. Además, así se puede comparar qué aporta cada uno.</a:t>
             </a:r>
-            <a:endParaRPr lang="en-US" dirty="0"/>
           </a:p>
         </p:txBody>
       </p:sp>
@@ -1570,7 +1335,6 @@
               <a:rPr lang="en-US" dirty="0"/>
               <a:t>Objetivo del bloque: entender la diferencia entre creatividad, innovación y competencia digital, y practicar la primera técnica creativa, el brainstorming, primero entre personas y después con IA.</a:t>
             </a:r>
-            <a:endParaRPr lang="en-US" dirty="0"/>
           </a:p>
         </p:txBody>
       </p:sp>
@@ -1658,7 +1422,6 @@
               <a:rPr lang="en-US" dirty="0"/>
               <a:t>Ejemplo que acompaña a las tres técnicas del curso. Es ajeno a los ejercicios: usar siempre el mismo ejemplo deja ver qué tipo de ideas produce cada técnica.</a:t>
             </a:r>
-            <a:endParaRPr lang="en-US" dirty="0"/>
           </a:p>
         </p:txBody>
       </p:sp>
@@ -1746,7 +1509,6 @@
               <a:rPr lang="en-US" dirty="0"/>
               <a:t>Minutos 15–20. Qué es el brainstorming y sus cuatro reglas. La regla 3 (construir sobre la idea de otra persona) se aplicará después también a la combinación de ideas del grupo y de la IA.</a:t>
             </a:r>
-            <a:endParaRPr lang="en-US" dirty="0"/>
           </a:p>
         </p:txBody>
       </p:sp>
@@ -1834,7 +1596,6 @@
               <a:rPr lang="en-US" dirty="0"/>
               <a:t>Lanzar las ideas a buen ritmo para mostrar cómo funciona. Terminar con la idea disparatada y mostrar que, construyendo sobre ella, se llega a una idea sensata: por eso las ideas disparatadas son bienvenidas.</a:t>
             </a:r>
-            <a:endParaRPr lang="en-US" dirty="0"/>
           </a:p>
         </p:txBody>
       </p:sp>
@@ -1922,7 +1683,6 @@
               <a:rPr lang="en-US" dirty="0"/>
               <a:t>Minutos 20–30. Entre todo el grupo, sin IA. Dar el turno en rueda para que participen todas las personas y no solo las más extrovertidas; quien no tenga idea dice «paso» y se continúa. Apuntar todas las ideas numeradas en la pizarra o en un documento compartido, sin comentarlas. Al final, contar el total: se usará en la comparación.</a:t>
             </a:r>
-            <a:endParaRPr lang="en-US" dirty="0"/>
           </a:p>
         </p:txBody>
       </p:sp>
@@ -2010,7 +1770,6 @@
               <a:rPr lang="en-US" dirty="0"/>
               <a:t>Minutos 30–38. Proyectar la IA y pegar la lista de ideas del grupo en el lugar indicado. Leer en voz alta las propuestas de la IA y comentar cuáles sorprenden y cuáles son genéricas o repiten lo ya dicho con otras palabras. El texto del prompt para copiar está en el guion docente.</a:t>
             </a:r>
-            <a:endParaRPr lang="en-US" dirty="0"/>
           </a:p>
         </p:txBody>
       </p:sp>
@@ -2098,7 +1857,6 @@
               <a:rPr lang="en-US" dirty="0"/>
               <a:t>Minutos 30–38. Lanzar este segundo prompt en la misma conversación con la IA, a continuación del primero.</a:t>
             </a:r>
-            <a:endParaRPr lang="en-US" dirty="0"/>
           </a:p>
         </p:txBody>
       </p:sp>
@@ -2186,7 +1944,6 @@
               <a:rPr lang="en-US" dirty="0"/>
               <a:t>Minutos 38–45. Cada persona marca las tres ideas que le parecen más originales, sin fijarse en si vienen del grupo o de la IA. Después, contar y rellenar la tabla: cuántas ideas salieron sin IA y con IA, y cuántas de las más votadas son de cada origen.</a:t>
             </a:r>
-            <a:endParaRPr lang="en-US" dirty="0"/>
           </a:p>
         </p:txBody>
       </p:sp>
@@ -2274,7 +2031,6 @@
               <a:rPr lang="en-US" dirty="0"/>
               <a:t>No adelantar la conclusión: puede salir que la IA aporta más cantidad pero menos originalidad, o lo contrario. Lo importante es que el grupo lo compruebe con sus propios datos de la tabla.</a:t>
             </a:r>
-            <a:endParaRPr lang="en-US" dirty="0"/>
           </a:p>
         </p:txBody>
       </p:sp>
@@ -2362,7 +2118,6 @@
               <a:rPr lang="en-US" dirty="0"/>
               <a:t>Conclusión del bloque. Enlazar con el bloque 2: ahora se aplicarán dos técnicas más estructuradas, SCAMPER y la provocación, por parejas.</a:t>
             </a:r>
-            <a:endParaRPr lang="en-US" dirty="0"/>
           </a:p>
         </p:txBody>
       </p:sp>
@@ -2450,7 +2205,6 @@
               <a:rPr lang="en-US" dirty="0"/>
               <a:t>Mostrar el recorrido del bloque. Explicar el código de color que se usará en todo el curso: en ámbar, lo que piensa el grupo sin ayuda; en verde, lo que se hace con la IA. Las etiquetas de la esquina superior derecha indican siempre los minutos del guion.</a:t>
             </a:r>
-            <a:endParaRPr lang="en-US" dirty="0"/>
           </a:p>
         </p:txBody>
       </p:sp>
@@ -2538,7 +2292,6 @@
               <a:rPr lang="en-US" dirty="0"/>
               <a:t>Minutos 0–3. Leer la pregunta y pedir votación a mano alzada.</a:t>
             </a:r>
-            <a:endParaRPr lang="en-US" dirty="0"/>
           </a:p>
         </p:txBody>
       </p:sp>
@@ -2626,7 +2379,6 @@
               <a:rPr lang="en-US" dirty="0"/>
               <a:t>Minutos 0–3. Pedir a dos o tres voluntarios que cuenten en una frase alguna mejora que vieran (o hicieran) en un trabajo anterior. Apuntarlas: servirán de ejemplos durante la explicación de los tres conceptos.</a:t>
             </a:r>
-            <a:endParaRPr lang="en-US" dirty="0"/>
           </a:p>
         </p:txBody>
       </p:sp>
@@ -2714,7 +2466,6 @@
               <a:rPr lang="en-US" dirty="0"/>
               <a:t>Minutos 3–5. Explicar los tres conceptos usando, si es posible, los ejemplos que acaban de dar los voluntarios. Subrayar que la creatividad no se limita a ámbitos artísticos: también consiste en mejorar tareas cotidianas y procesos de trabajo.</a:t>
             </a:r>
-            <a:endParaRPr lang="en-US" dirty="0"/>
           </a:p>
         </p:txBody>
       </p:sp>
@@ -2802,7 +2553,6 @@
               <a:rPr lang="en-US" dirty="0"/>
               <a:t>Minutos 5–10. Explicar la dinámica: un dedo, creatividad; dos, innovación; tres, competencia digital. Leer cada situación, pedir el voto y, si hay votos repartidos, preguntar a una persona de cada opción. Las respuestas orientativas están en las notas de cada situación.</a:t>
             </a:r>
-            <a:endParaRPr lang="en-US" dirty="0"/>
           </a:p>
         </p:txBody>
       </p:sp>
@@ -2891,7 +2641,6 @@
               <a:t>Respuesta orientativa: Creatividad: es una idea, todavía no se ha aplicado.
 Criterio para resolver las dudas: ¿es solo una idea o ya se ha puesto en práctica? ¿Aporta valor?</a:t>
             </a:r>
-            <a:endParaRPr lang="en-US" dirty="0"/>
           </a:p>
         </p:txBody>
       </p:sp>
@@ -2980,7 +2729,6 @@
               <a:t>Respuesta orientativa: Innovación: se ha aplicado y aporta valor.
 Criterio para resolver las dudas: ¿es solo una idea o ya se ha puesto en práctica? ¿Aporta valor?</a:t>
             </a:r>
-            <a:endParaRPr lang="en-US" dirty="0"/>
           </a:p>
         </p:txBody>
       </p:sp>
@@ -3058,6 +2806,7 @@
         <a:solidFill>
           <a:schemeClr val="tx1"/>
         </a:solidFill>
+        <a:effectLst/>
       </p:bgPr>
     </p:bg>
     <p:spTree>
@@ -3077,9 +2826,11 @@
       <p:sp>
         <p:nvSpPr>
           <p:cNvPr id="2" name="Text 0"/>
-          <p:cNvSpPr/>
+          <p:cNvSpPr>
+            <a:spLocks noGrp="1"/>
+          </p:cNvSpPr>
           <p:nvPr>
-            <p:ph idx="100" type="title" hasCustomPrompt="1"/>
+            <p:ph type="title" idx="100" hasCustomPrompt="1"/>
           </p:nvPr>
         </p:nvSpPr>
         <p:spPr>
@@ -3096,7 +2847,7 @@
         <p:txBody>
           <a:bodyPr wrap="square" rtlCol="0"/>
           <a:lstStyle>
-            <a:lvl1pPr algn="l" indent="0" marL="0">
+            <a:lvl1pPr marL="0" indent="0" algn="l">
               <a:buNone/>
               <a:defRPr lang="en-US" sz="4400" b="1" dirty="0">
                 <a:solidFill>
@@ -3106,7 +2857,7 @@
             </a:lvl1pPr>
           </a:lstStyle>
           <a:p>
-            <a:pPr algn="l" indent="0" marL="0">
+            <a:pPr marL="0" indent="0" algn="l">
               <a:buNone/>
             </a:pPr>
             <a:endParaRPr lang="en-US" sz="4400" dirty="0"/>
@@ -3116,9 +2867,11 @@
       <p:sp>
         <p:nvSpPr>
           <p:cNvPr id="3" name="Text 0"/>
-          <p:cNvSpPr/>
+          <p:cNvSpPr>
+            <a:spLocks noGrp="1"/>
+          </p:cNvSpPr>
           <p:nvPr>
-            <p:ph idx="101" type="body" hasCustomPrompt="1"/>
+            <p:ph type="body" idx="101" hasCustomPrompt="1"/>
           </p:nvPr>
         </p:nvSpPr>
         <p:spPr>
@@ -3135,7 +2888,7 @@
         <p:txBody>
           <a:bodyPr wrap="square" rtlCol="0"/>
           <a:lstStyle>
-            <a:lvl1pPr indent="0" marL="0">
+            <a:lvl1pPr marL="0" indent="0">
               <a:buNone/>
               <a:defRPr lang="en-US" sz="2000" dirty="0">
                 <a:solidFill>
@@ -3145,7 +2898,7 @@
             </a:lvl1pPr>
           </a:lstStyle>
           <a:p>
-            <a:pPr indent="0" marL="0">
+            <a:pPr marL="0" indent="0">
               <a:buNone/>
             </a:pPr>
             <a:endParaRPr lang="en-US" sz="2000" dirty="0"/>
@@ -3168,6 +2921,7 @@
         <a:solidFill>
           <a:schemeClr val="tx1"/>
         </a:solidFill>
+        <a:effectLst/>
       </p:bgPr>
     </p:bg>
     <p:spTree>
@@ -3187,9 +2941,11 @@
       <p:sp>
         <p:nvSpPr>
           <p:cNvPr id="2" name="Text 0"/>
-          <p:cNvSpPr/>
+          <p:cNvSpPr>
+            <a:spLocks noGrp="1"/>
+          </p:cNvSpPr>
           <p:nvPr>
-            <p:ph idx="100" type="title" hasCustomPrompt="1"/>
+            <p:ph type="title" idx="100" hasCustomPrompt="1"/>
           </p:nvPr>
         </p:nvSpPr>
         <p:spPr>
@@ -3206,7 +2962,7 @@
         <p:txBody>
           <a:bodyPr wrap="square" rtlCol="0"/>
           <a:lstStyle>
-            <a:lvl1pPr algn="l" indent="0" marL="0">
+            <a:lvl1pPr marL="0" indent="0" algn="l">
               <a:buNone/>
               <a:defRPr lang="en-US" sz="4000" b="1" dirty="0">
                 <a:solidFill>
@@ -3216,7 +2972,7 @@
             </a:lvl1pPr>
           </a:lstStyle>
           <a:p>
-            <a:pPr algn="l" indent="0" marL="0">
+            <a:pPr marL="0" indent="0" algn="l">
               <a:buNone/>
             </a:pPr>
             <a:endParaRPr lang="en-US" sz="4000" dirty="0"/>
@@ -3226,9 +2982,11 @@
       <p:sp>
         <p:nvSpPr>
           <p:cNvPr id="3" name="Text 0"/>
-          <p:cNvSpPr/>
+          <p:cNvSpPr>
+            <a:spLocks noGrp="1"/>
+          </p:cNvSpPr>
           <p:nvPr>
-            <p:ph idx="101" type="body" hasCustomPrompt="1"/>
+            <p:ph type="body" idx="101" hasCustomPrompt="1"/>
           </p:nvPr>
         </p:nvSpPr>
         <p:spPr>
@@ -3245,7 +3003,7 @@
         <p:txBody>
           <a:bodyPr wrap="square" rtlCol="0"/>
           <a:lstStyle>
-            <a:lvl1pPr indent="0" marL="0">
+            <a:lvl1pPr marL="0" indent="0">
               <a:buNone/>
               <a:defRPr lang="en-US" sz="2200" dirty="0">
                 <a:solidFill>
@@ -3255,7 +3013,7 @@
             </a:lvl1pPr>
           </a:lstStyle>
           <a:p>
-            <a:pPr indent="0" marL="0">
+            <a:pPr marL="0" indent="0">
               <a:buNone/>
             </a:pPr>
             <a:endParaRPr lang="en-US" sz="2200" dirty="0"/>
@@ -3278,6 +3036,7 @@
         <a:solidFill>
           <a:schemeClr val="bg1"/>
         </a:solidFill>
+        <a:effectLst/>
       </p:bgPr>
     </p:bg>
     <p:spTree>
@@ -3297,9 +3056,11 @@
       <p:sp>
         <p:nvSpPr>
           <p:cNvPr id="2" name="Text 0"/>
-          <p:cNvSpPr/>
+          <p:cNvSpPr>
+            <a:spLocks noGrp="1"/>
+          </p:cNvSpPr>
           <p:nvPr>
-            <p:ph idx="100" type="title" hasCustomPrompt="1"/>
+            <p:ph type="title" idx="100" hasCustomPrompt="1"/>
           </p:nvPr>
         </p:nvSpPr>
         <p:spPr>
@@ -3316,7 +3077,7 @@
         <p:txBody>
           <a:bodyPr wrap="square" rtlCol="0"/>
           <a:lstStyle>
-            <a:lvl1pPr algn="l" indent="0" marL="0">
+            <a:lvl1pPr marL="0" indent="0" algn="l">
               <a:buNone/>
               <a:defRPr lang="en-US" sz="3200" b="1" dirty="0">
                 <a:solidFill>
@@ -3326,7 +3087,7 @@
             </a:lvl1pPr>
           </a:lstStyle>
           <a:p>
-            <a:pPr algn="l" indent="0" marL="0">
+            <a:pPr marL="0" indent="0" algn="l">
               <a:buNone/>
             </a:pPr>
             <a:endParaRPr lang="en-US" sz="3200" dirty="0"/>
@@ -3354,7 +3115,7 @@
           <a:bodyPr wrap="square" lIns="0" tIns="0" rIns="0" bIns="0" rtlCol="0" anchor="ctr"/>
           <a:lstStyle/>
           <a:p>
-            <a:pPr indent="0" marL="0">
+            <a:pPr marL="0" indent="0">
               <a:buNone/>
             </a:pPr>
             <a:r>
@@ -3389,7 +3150,7 @@
           </a:prstGeom>
           <a:extLst>
             <a:ext uri="{C572A759-6A51-4108-AA02-DFA0A04FC94B}">
-              <ma14:wrappingTextBoxFlag xmlns:ma14="http://schemas.microsoft.com/office/mac/drawingml/2011/main" val="0"/>
+              <ma14:wrappingTextBoxFlag xmlns:ma14="http://schemas.microsoft.com/office/mac/drawingml/2011/main" xmlns="" val="0"/>
             </a:ext>
           </a:extLst>
         </p:spPr>
@@ -3407,8 +3168,8 @@
           <a:p>
             <a:pPr algn="r"/>
             <a:fld id="{F7021451-1387-4CA6-816F-3879F97B5CBC}" type="slidenum">
-              <a:rPr b="0" lang="en-US"/>
-              <a:t>1004</a:t>
+              <a:rPr lang="en-US" b="0"/>
+              <a:t>‹Nº›</a:t>
             </a:fld>
             <a:endParaRPr lang="en-US"/>
           </a:p>
@@ -3430,6 +3191,7 @@
         <a:solidFill>
           <a:schemeClr val="tx1"/>
         </a:solidFill>
+        <a:effectLst/>
       </p:bgPr>
     </p:bg>
     <p:spTree>
@@ -3449,9 +3211,11 @@
       <p:sp>
         <p:nvSpPr>
           <p:cNvPr id="2" name="Text 0"/>
-          <p:cNvSpPr/>
+          <p:cNvSpPr>
+            <a:spLocks noGrp="1"/>
+          </p:cNvSpPr>
           <p:nvPr>
-            <p:ph idx="100" type="body" hasCustomPrompt="1"/>
+            <p:ph type="body" idx="100" hasCustomPrompt="1"/>
           </p:nvPr>
         </p:nvSpPr>
         <p:spPr>
@@ -3468,7 +3232,7 @@
         <p:txBody>
           <a:bodyPr wrap="square" rtlCol="0"/>
           <a:lstStyle>
-            <a:lvl1pPr indent="0" marL="0">
+            <a:lvl1pPr marL="0" indent="0">
               <a:buNone/>
               <a:defRPr lang="en-US" sz="3400" dirty="0">
                 <a:solidFill>
@@ -3478,7 +3242,7 @@
             </a:lvl1pPr>
           </a:lstStyle>
           <a:p>
-            <a:pPr indent="0" marL="0">
+            <a:pPr marL="0" indent="0">
               <a:buNone/>
             </a:pPr>
             <a:endParaRPr lang="en-US" sz="3400" dirty="0"/>
@@ -3506,7 +3270,7 @@
           <a:bodyPr wrap="square" lIns="0" tIns="0" rIns="0" bIns="0" rtlCol="0" anchor="ctr"/>
           <a:lstStyle/>
           <a:p>
-            <a:pPr indent="0" marL="0">
+            <a:pPr marL="0" indent="0">
               <a:buNone/>
             </a:pPr>
             <a:r>
@@ -3541,7 +3305,7 @@
           </a:prstGeom>
           <a:extLst>
             <a:ext uri="{C572A759-6A51-4108-AA02-DFA0A04FC94B}">
-              <ma14:wrappingTextBoxFlag xmlns:ma14="http://schemas.microsoft.com/office/mac/drawingml/2011/main" val="0"/>
+              <ma14:wrappingTextBoxFlag xmlns:ma14="http://schemas.microsoft.com/office/mac/drawingml/2011/main" xmlns="" val="0"/>
             </a:ext>
           </a:extLst>
         </p:spPr>
@@ -3559,8 +3323,8 @@
           <a:p>
             <a:pPr algn="r"/>
             <a:fld id="{F7021451-1387-4CA6-816F-3879F97B5CBC}" type="slidenum">
-              <a:rPr b="0" lang="en-US"/>
-              <a:t>1005</a:t>
+              <a:rPr lang="en-US" b="0"/>
+              <a:t>‹Nº›</a:t>
             </a:fld>
             <a:endParaRPr lang="en-US"/>
           </a:p>
@@ -3577,6 +3341,11 @@
 <file path=ppt/slideMasters/slideMaster1.xml><?xml version="1.0" encoding="utf-8"?>
 <p:sldMaster xmlns:a="http://schemas.openxmlformats.org/drawingml/2006/main" xmlns:r="http://schemas.openxmlformats.org/officeDocument/2006/relationships" xmlns:p="http://schemas.openxmlformats.org/presentationml/2006/main">
   <p:cSld>
+    <p:bg>
+      <p:bgRef idx="1001">
+        <a:schemeClr val="bg1"/>
+      </p:bgRef>
+    </p:bg>
     <p:spTree>
       <p:nvGrpSpPr>
         <p:cNvPr id="1" name=""/>
@@ -3611,7 +3380,7 @@
           </a:prstGeom>
           <a:extLst>
             <a:ext uri="{C572A759-6A51-4108-AA02-DFA0A04FC94B}">
-              <ma14:wrappingTextBoxFlag xmlns:ma14="http://schemas.microsoft.com/office/mac/drawingml/2011/main" val="0"/>
+              <ma14:wrappingTextBoxFlag xmlns:ma14="http://schemas.microsoft.com/office/mac/drawingml/2011/main" xmlns="" val="0"/>
             </a:ext>
           </a:extLst>
         </p:spPr>
@@ -3629,8 +3398,8 @@
           <a:p>
             <a:pPr algn="r"/>
             <a:fld id="{F7021451-1387-4CA6-816F-3879F97B5CBC}" type="slidenum">
-              <a:rPr b="0" lang="en-US"/>
-              <a:t>null</a:t>
+              <a:rPr lang="en-US" b="0"/>
+              <a:t>‹Nº›</a:t>
             </a:fld>
             <a:endParaRPr lang="en-US"/>
           </a:p>
@@ -3920,9 +3689,11 @@
       <p:sp>
         <p:nvSpPr>
           <p:cNvPr id="2" name="Text 0"/>
-          <p:cNvSpPr/>
+          <p:cNvSpPr>
+            <a:spLocks noGrp="1"/>
+          </p:cNvSpPr>
           <p:nvPr>
-            <p:ph idx="100" type="title" hasCustomPrompt="1"/>
+            <p:ph type="title" idx="100" hasCustomPrompt="1"/>
           </p:nvPr>
         </p:nvSpPr>
         <p:spPr>
@@ -3940,7 +3711,7 @@
           <a:bodyPr wrap="square" lIns="0" tIns="0" rIns="0" bIns="0" rtlCol="0" anchor="b"/>
           <a:lstStyle/>
           <a:p>
-            <a:pPr algn="l" indent="0" marL="0">
+            <a:pPr marL="0" indent="0" algn="l">
               <a:buNone/>
             </a:pPr>
             <a:r>
@@ -3958,9 +3729,11 @@
       <p:sp>
         <p:nvSpPr>
           <p:cNvPr id="3" name="Text 0"/>
-          <p:cNvSpPr/>
+          <p:cNvSpPr>
+            <a:spLocks noGrp="1"/>
+          </p:cNvSpPr>
           <p:nvPr>
-            <p:ph idx="101" type="body" hasCustomPrompt="1"/>
+            <p:ph type="body" idx="101" hasCustomPrompt="1"/>
           </p:nvPr>
         </p:nvSpPr>
         <p:spPr>
@@ -3978,7 +3751,7 @@
           <a:bodyPr wrap="square" lIns="0" tIns="0" rIns="0" bIns="0" rtlCol="0" anchor="t"/>
           <a:lstStyle/>
           <a:p>
-            <a:pPr indent="0" marL="0">
+            <a:pPr marL="0" indent="0">
               <a:buNone/>
             </a:pPr>
             <a:r>
@@ -4015,14 +3788,14 @@
       </p:sp>
       <p:pic>
         <p:nvPicPr>
-          <p:cNvPr id="5" name="Image 0" descr="Bombilla">    </p:cNvPr>
+          <p:cNvPr id="5" name="Image 0" descr="Bombilla"/>
           <p:cNvPicPr>
             <a:picLocks noChangeAspect="1"/>
           </p:cNvPicPr>
           <p:nvPr/>
         </p:nvPicPr>
         <p:blipFill>
-          <a:blip r:embed="rId1"/>
+          <a:blip r:embed="rId3"/>
           <a:stretch>
             <a:fillRect/>
           </a:stretch>
@@ -4058,7 +3831,7 @@
           <a:bodyPr wrap="square" lIns="0" tIns="0" rIns="0" bIns="0" rtlCol="0" anchor="ctr"/>
           <a:lstStyle/>
           <a:p>
-            <a:pPr indent="0" marL="0">
+            <a:pPr marL="0" indent="0">
               <a:buNone/>
             </a:pPr>
             <a:r>
@@ -4101,9 +3874,11 @@
       <p:sp>
         <p:nvSpPr>
           <p:cNvPr id="2" name="Text 0"/>
-          <p:cNvSpPr/>
+          <p:cNvSpPr>
+            <a:spLocks noGrp="1"/>
+          </p:cNvSpPr>
           <p:nvPr>
-            <p:ph idx="100" type="title" hasCustomPrompt="1"/>
+            <p:ph type="title" idx="100" hasCustomPrompt="1"/>
           </p:nvPr>
         </p:nvSpPr>
         <p:spPr>
@@ -4121,7 +3896,7 @@
           <a:bodyPr wrap="square" lIns="0" tIns="0" rIns="0" bIns="0" rtlCol="0" anchor="ctr"/>
           <a:lstStyle/>
           <a:p>
-            <a:pPr algn="l" indent="0" marL="0">
+            <a:pPr marL="0" indent="0" algn="l">
               <a:buNone/>
             </a:pPr>
             <a:r>
@@ -4179,7 +3954,7 @@
           <a:bodyPr wrap="square" lIns="0" tIns="0" rIns="0" bIns="0" rtlCol="0" anchor="ctr"/>
           <a:lstStyle/>
           <a:p>
-            <a:pPr algn="ctr" indent="0" marL="0">
+            <a:pPr marL="0" indent="0" algn="ctr">
               <a:buNone/>
             </a:pPr>
             <a:r>
@@ -4238,14 +4013,14 @@
       </p:sp>
       <p:pic>
         <p:nvPicPr>
-          <p:cNvPr id="7" name="Image 0" descr="Situación">    </p:cNvPr>
+          <p:cNvPr id="7" name="Image 0" descr="Situación"/>
           <p:cNvPicPr>
             <a:picLocks noChangeAspect="1"/>
           </p:cNvPicPr>
           <p:nvPr/>
         </p:nvPicPr>
         <p:blipFill>
-          <a:blip r:embed="rId1"/>
+          <a:blip r:embed="rId3"/>
           <a:stretch>
             <a:fillRect/>
           </a:stretch>
@@ -4281,7 +4056,7 @@
           <a:bodyPr wrap="square" lIns="0" tIns="0" rIns="0" bIns="0" rtlCol="0" anchor="ctr"/>
           <a:lstStyle/>
           <a:p>
-            <a:pPr indent="0" marL="0">
+            <a:pPr marL="0" indent="0">
               <a:buNone/>
             </a:pPr>
             <a:r>
@@ -4337,7 +4112,7 @@
           <a:bodyPr wrap="square" lIns="0" tIns="0" rIns="0" bIns="0" rtlCol="0" anchor="ctr"/>
           <a:lstStyle/>
           <a:p>
-            <a:pPr algn="ctr" indent="0" marL="0">
+            <a:pPr marL="0" indent="0" algn="ctr">
               <a:buNone/>
             </a:pPr>
             <a:r>
@@ -4373,7 +4148,7 @@
           <a:bodyPr wrap="square" lIns="0" tIns="0" rIns="0" bIns="0" rtlCol="0" anchor="ctr"/>
           <a:lstStyle/>
           <a:p>
-            <a:pPr indent="0" marL="0">
+            <a:pPr marL="0" indent="0">
               <a:buNone/>
             </a:pPr>
             <a:r>
@@ -4429,7 +4204,7 @@
           <a:bodyPr wrap="square" lIns="0" tIns="0" rIns="0" bIns="0" rtlCol="0" anchor="ctr"/>
           <a:lstStyle/>
           <a:p>
-            <a:pPr algn="ctr" indent="0" marL="0">
+            <a:pPr marL="0" indent="0" algn="ctr">
               <a:buNone/>
             </a:pPr>
             <a:r>
@@ -4465,7 +4240,7 @@
           <a:bodyPr wrap="square" lIns="0" tIns="0" rIns="0" bIns="0" rtlCol="0" anchor="ctr"/>
           <a:lstStyle/>
           <a:p>
-            <a:pPr indent="0" marL="0">
+            <a:pPr marL="0" indent="0">
               <a:buNone/>
             </a:pPr>
             <a:r>
@@ -4521,7 +4296,7 @@
           <a:bodyPr wrap="square" lIns="0" tIns="0" rIns="0" bIns="0" rtlCol="0" anchor="ctr"/>
           <a:lstStyle/>
           <a:p>
-            <a:pPr algn="ctr" indent="0" marL="0">
+            <a:pPr marL="0" indent="0" algn="ctr">
               <a:buNone/>
             </a:pPr>
             <a:r>
@@ -4557,7 +4332,7 @@
           <a:bodyPr wrap="square" lIns="0" tIns="0" rIns="0" bIns="0" rtlCol="0" anchor="ctr"/>
           <a:lstStyle/>
           <a:p>
-            <a:pPr indent="0" marL="0">
+            <a:pPr marL="0" indent="0">
               <a:buNone/>
             </a:pPr>
             <a:r>
@@ -4592,7 +4367,7 @@
           </a:prstGeom>
           <a:extLst>
             <a:ext uri="{C572A759-6A51-4108-AA02-DFA0A04FC94B}">
-              <ma14:wrappingTextBoxFlag xmlns:ma14="http://schemas.microsoft.com/office/mac/drawingml/2011/main" val="0"/>
+              <ma14:wrappingTextBoxFlag xmlns:ma14="http://schemas.microsoft.com/office/mac/drawingml/2011/main" xmlns="" val="0"/>
             </a:ext>
           </a:extLst>
         </p:spPr>
@@ -4610,7 +4385,7 @@
           <a:p>
             <a:pPr algn="r"/>
             <a:fld id="{F7021451-1387-4CA6-816F-3879F97B5CBC}" type="slidenum">
-              <a:rPr b="0" lang="en-US"/>
+              <a:rPr lang="en-US" b="0"/>
               <a:t>10</a:t>
             </a:fld>
             <a:endParaRPr lang="en-US"/>
@@ -4645,9 +4420,11 @@
       <p:sp>
         <p:nvSpPr>
           <p:cNvPr id="2" name="Text 0"/>
-          <p:cNvSpPr/>
+          <p:cNvSpPr>
+            <a:spLocks noGrp="1"/>
+          </p:cNvSpPr>
           <p:nvPr>
-            <p:ph idx="100" type="title" hasCustomPrompt="1"/>
+            <p:ph type="title" idx="100" hasCustomPrompt="1"/>
           </p:nvPr>
         </p:nvSpPr>
         <p:spPr>
@@ -4665,7 +4442,7 @@
           <a:bodyPr wrap="square" lIns="0" tIns="0" rIns="0" bIns="0" rtlCol="0" anchor="ctr"/>
           <a:lstStyle/>
           <a:p>
-            <a:pPr algn="l" indent="0" marL="0">
+            <a:pPr marL="0" indent="0" algn="l">
               <a:buNone/>
             </a:pPr>
             <a:r>
@@ -4723,7 +4500,7 @@
           <a:bodyPr wrap="square" lIns="0" tIns="0" rIns="0" bIns="0" rtlCol="0" anchor="ctr"/>
           <a:lstStyle/>
           <a:p>
-            <a:pPr algn="ctr" indent="0" marL="0">
+            <a:pPr marL="0" indent="0" algn="ctr">
               <a:buNone/>
             </a:pPr>
             <a:r>
@@ -4782,14 +4559,14 @@
       </p:sp>
       <p:pic>
         <p:nvPicPr>
-          <p:cNvPr id="7" name="Image 0" descr="Situación">    </p:cNvPr>
+          <p:cNvPr id="7" name="Image 0" descr="Situación"/>
           <p:cNvPicPr>
             <a:picLocks noChangeAspect="1"/>
           </p:cNvPicPr>
           <p:nvPr/>
         </p:nvPicPr>
         <p:blipFill>
-          <a:blip r:embed="rId1"/>
+          <a:blip r:embed="rId3"/>
           <a:stretch>
             <a:fillRect/>
           </a:stretch>
@@ -4825,7 +4602,7 @@
           <a:bodyPr wrap="square" lIns="0" tIns="0" rIns="0" bIns="0" rtlCol="0" anchor="ctr"/>
           <a:lstStyle/>
           <a:p>
-            <a:pPr indent="0" marL="0">
+            <a:pPr marL="0" indent="0">
               <a:buNone/>
             </a:pPr>
             <a:r>
@@ -4834,7 +4611,103 @@
                   <a:schemeClr val="tx1"/>
                 </a:solidFill>
               </a:rPr>
-              <a:t>Un taller empieza a enviar al cliente una foto del coche reparado y recibe menos llamadas preguntando.</a:t>
+              <a:t>Un taller empieza a enviar al </a:t>
+            </a:r>
+            <a:r>
+              <a:rPr lang="en-US" sz="3000" dirty="0" err="1">
+                <a:solidFill>
+                  <a:schemeClr val="tx1"/>
+                </a:solidFill>
+              </a:rPr>
+              <a:t>cliente</a:t>
+            </a:r>
+            <a:r>
+              <a:rPr lang="en-US" sz="3000" dirty="0">
+                <a:solidFill>
+                  <a:schemeClr val="tx1"/>
+                </a:solidFill>
+              </a:rPr>
+              <a:t> </a:t>
+            </a:r>
+            <a:r>
+              <a:rPr lang="en-US" sz="3000" dirty="0" err="1">
+                <a:solidFill>
+                  <a:schemeClr val="tx1"/>
+                </a:solidFill>
+              </a:rPr>
+              <a:t>fotos</a:t>
+            </a:r>
+            <a:r>
+              <a:rPr lang="en-US" sz="3000" dirty="0">
+                <a:solidFill>
+                  <a:schemeClr val="tx1"/>
+                </a:solidFill>
+              </a:rPr>
+              <a:t> del </a:t>
+            </a:r>
+            <a:r>
+              <a:rPr lang="en-US" sz="3000" dirty="0" err="1">
+                <a:solidFill>
+                  <a:schemeClr val="tx1"/>
+                </a:solidFill>
+              </a:rPr>
+              <a:t>coche</a:t>
+            </a:r>
+            <a:r>
+              <a:rPr lang="en-US" sz="3000" dirty="0">
+                <a:solidFill>
+                  <a:schemeClr val="tx1"/>
+                </a:solidFill>
+              </a:rPr>
+              <a:t> a </a:t>
+            </a:r>
+            <a:r>
+              <a:rPr lang="en-US" sz="3000" dirty="0" err="1">
+                <a:solidFill>
+                  <a:schemeClr val="tx1"/>
+                </a:solidFill>
+              </a:rPr>
+              <a:t>medida</a:t>
+            </a:r>
+            <a:r>
+              <a:rPr lang="en-US" sz="3000" dirty="0">
+                <a:solidFill>
+                  <a:schemeClr val="tx1"/>
+                </a:solidFill>
+              </a:rPr>
+              <a:t> </a:t>
+            </a:r>
+            <a:r>
+              <a:rPr lang="en-US" sz="3000" dirty="0" err="1">
+                <a:solidFill>
+                  <a:schemeClr val="tx1"/>
+                </a:solidFill>
+              </a:rPr>
+              <a:t>que</a:t>
+            </a:r>
+            <a:r>
+              <a:rPr lang="en-US" sz="3000" dirty="0">
+                <a:solidFill>
+                  <a:schemeClr val="tx1"/>
+                </a:solidFill>
+              </a:rPr>
+              <a:t> lo </a:t>
+            </a:r>
+            <a:r>
+              <a:rPr lang="en-US" sz="3000" dirty="0" err="1">
+                <a:solidFill>
+                  <a:schemeClr val="tx1"/>
+                </a:solidFill>
+              </a:rPr>
+              <a:t>repara</a:t>
+            </a:r>
+            <a:r>
+              <a:rPr lang="en-US" sz="3000" dirty="0">
+                <a:solidFill>
+                  <a:schemeClr val="tx1"/>
+                </a:solidFill>
+              </a:rPr>
+              <a:t> y recibe menos llamadas preguntando.</a:t>
             </a:r>
             <a:endParaRPr lang="en-US" sz="3000" dirty="0"/>
           </a:p>
@@ -4881,7 +4754,7 @@
           <a:bodyPr wrap="square" lIns="0" tIns="0" rIns="0" bIns="0" rtlCol="0" anchor="ctr"/>
           <a:lstStyle/>
           <a:p>
-            <a:pPr algn="ctr" indent="0" marL="0">
+            <a:pPr marL="0" indent="0" algn="ctr">
               <a:buNone/>
             </a:pPr>
             <a:r>
@@ -4917,7 +4790,7 @@
           <a:bodyPr wrap="square" lIns="0" tIns="0" rIns="0" bIns="0" rtlCol="0" anchor="ctr"/>
           <a:lstStyle/>
           <a:p>
-            <a:pPr indent="0" marL="0">
+            <a:pPr marL="0" indent="0">
               <a:buNone/>
             </a:pPr>
             <a:r>
@@ -4973,7 +4846,7 @@
           <a:bodyPr wrap="square" lIns="0" tIns="0" rIns="0" bIns="0" rtlCol="0" anchor="ctr"/>
           <a:lstStyle/>
           <a:p>
-            <a:pPr algn="ctr" indent="0" marL="0">
+            <a:pPr marL="0" indent="0" algn="ctr">
               <a:buNone/>
             </a:pPr>
             <a:r>
@@ -5009,7 +4882,7 @@
           <a:bodyPr wrap="square" lIns="0" tIns="0" rIns="0" bIns="0" rtlCol="0" anchor="ctr"/>
           <a:lstStyle/>
           <a:p>
-            <a:pPr indent="0" marL="0">
+            <a:pPr marL="0" indent="0">
               <a:buNone/>
             </a:pPr>
             <a:r>
@@ -5065,7 +4938,7 @@
           <a:bodyPr wrap="square" lIns="0" tIns="0" rIns="0" bIns="0" rtlCol="0" anchor="ctr"/>
           <a:lstStyle/>
           <a:p>
-            <a:pPr algn="ctr" indent="0" marL="0">
+            <a:pPr marL="0" indent="0" algn="ctr">
               <a:buNone/>
             </a:pPr>
             <a:r>
@@ -5101,7 +4974,7 @@
           <a:bodyPr wrap="square" lIns="0" tIns="0" rIns="0" bIns="0" rtlCol="0" anchor="ctr"/>
           <a:lstStyle/>
           <a:p>
-            <a:pPr indent="0" marL="0">
+            <a:pPr marL="0" indent="0">
               <a:buNone/>
             </a:pPr>
             <a:r>
@@ -5136,7 +5009,7 @@
           </a:prstGeom>
           <a:extLst>
             <a:ext uri="{C572A759-6A51-4108-AA02-DFA0A04FC94B}">
-              <ma14:wrappingTextBoxFlag xmlns:ma14="http://schemas.microsoft.com/office/mac/drawingml/2011/main" val="0"/>
+              <ma14:wrappingTextBoxFlag xmlns:ma14="http://schemas.microsoft.com/office/mac/drawingml/2011/main" xmlns="" val="0"/>
             </a:ext>
           </a:extLst>
         </p:spPr>
@@ -5154,7 +5027,7 @@
           <a:p>
             <a:pPr algn="r"/>
             <a:fld id="{F7021451-1387-4CA6-816F-3879F97B5CBC}" type="slidenum">
-              <a:rPr b="0" lang="en-US"/>
+              <a:rPr lang="en-US" b="0"/>
               <a:t>11</a:t>
             </a:fld>
             <a:endParaRPr lang="en-US"/>
@@ -5189,9 +5062,11 @@
       <p:sp>
         <p:nvSpPr>
           <p:cNvPr id="2" name="Text 0"/>
-          <p:cNvSpPr/>
+          <p:cNvSpPr>
+            <a:spLocks noGrp="1"/>
+          </p:cNvSpPr>
           <p:nvPr>
-            <p:ph idx="100" type="title" hasCustomPrompt="1"/>
+            <p:ph type="title" idx="100" hasCustomPrompt="1"/>
           </p:nvPr>
         </p:nvSpPr>
         <p:spPr>
@@ -5209,7 +5084,7 @@
           <a:bodyPr wrap="square" lIns="0" tIns="0" rIns="0" bIns="0" rtlCol="0" anchor="ctr"/>
           <a:lstStyle/>
           <a:p>
-            <a:pPr algn="l" indent="0" marL="0">
+            <a:pPr marL="0" indent="0" algn="l">
               <a:buNone/>
             </a:pPr>
             <a:r>
@@ -5267,7 +5142,7 @@
           <a:bodyPr wrap="square" lIns="0" tIns="0" rIns="0" bIns="0" rtlCol="0" anchor="ctr"/>
           <a:lstStyle/>
           <a:p>
-            <a:pPr algn="ctr" indent="0" marL="0">
+            <a:pPr marL="0" indent="0" algn="ctr">
               <a:buNone/>
             </a:pPr>
             <a:r>
@@ -5326,14 +5201,14 @@
       </p:sp>
       <p:pic>
         <p:nvPicPr>
-          <p:cNvPr id="7" name="Image 0" descr="Situación">    </p:cNvPr>
+          <p:cNvPr id="7" name="Image 0" descr="Situación"/>
           <p:cNvPicPr>
             <a:picLocks noChangeAspect="1"/>
           </p:cNvPicPr>
           <p:nvPr/>
         </p:nvPicPr>
         <p:blipFill>
-          <a:blip r:embed="rId1"/>
+          <a:blip r:embed="rId3"/>
           <a:stretch>
             <a:fillRect/>
           </a:stretch>
@@ -5369,7 +5244,7 @@
           <a:bodyPr wrap="square" lIns="0" tIns="0" rIns="0" bIns="0" rtlCol="0" anchor="ctr"/>
           <a:lstStyle/>
           <a:p>
-            <a:pPr indent="0" marL="0">
+            <a:pPr marL="0" indent="0">
               <a:buNone/>
             </a:pPr>
             <a:r>
@@ -5425,7 +5300,7 @@
           <a:bodyPr wrap="square" lIns="0" tIns="0" rIns="0" bIns="0" rtlCol="0" anchor="ctr"/>
           <a:lstStyle/>
           <a:p>
-            <a:pPr algn="ctr" indent="0" marL="0">
+            <a:pPr marL="0" indent="0" algn="ctr">
               <a:buNone/>
             </a:pPr>
             <a:r>
@@ -5461,7 +5336,7 @@
           <a:bodyPr wrap="square" lIns="0" tIns="0" rIns="0" bIns="0" rtlCol="0" anchor="ctr"/>
           <a:lstStyle/>
           <a:p>
-            <a:pPr indent="0" marL="0">
+            <a:pPr marL="0" indent="0">
               <a:buNone/>
             </a:pPr>
             <a:r>
@@ -5517,7 +5392,7 @@
           <a:bodyPr wrap="square" lIns="0" tIns="0" rIns="0" bIns="0" rtlCol="0" anchor="ctr"/>
           <a:lstStyle/>
           <a:p>
-            <a:pPr algn="ctr" indent="0" marL="0">
+            <a:pPr marL="0" indent="0" algn="ctr">
               <a:buNone/>
             </a:pPr>
             <a:r>
@@ -5553,7 +5428,7 @@
           <a:bodyPr wrap="square" lIns="0" tIns="0" rIns="0" bIns="0" rtlCol="0" anchor="ctr"/>
           <a:lstStyle/>
           <a:p>
-            <a:pPr indent="0" marL="0">
+            <a:pPr marL="0" indent="0">
               <a:buNone/>
             </a:pPr>
             <a:r>
@@ -5609,7 +5484,7 @@
           <a:bodyPr wrap="square" lIns="0" tIns="0" rIns="0" bIns="0" rtlCol="0" anchor="ctr"/>
           <a:lstStyle/>
           <a:p>
-            <a:pPr algn="ctr" indent="0" marL="0">
+            <a:pPr marL="0" indent="0" algn="ctr">
               <a:buNone/>
             </a:pPr>
             <a:r>
@@ -5645,7 +5520,7 @@
           <a:bodyPr wrap="square" lIns="0" tIns="0" rIns="0" bIns="0" rtlCol="0" anchor="ctr"/>
           <a:lstStyle/>
           <a:p>
-            <a:pPr indent="0" marL="0">
+            <a:pPr marL="0" indent="0">
               <a:buNone/>
             </a:pPr>
             <a:r>
@@ -5680,7 +5555,7 @@
           </a:prstGeom>
           <a:extLst>
             <a:ext uri="{C572A759-6A51-4108-AA02-DFA0A04FC94B}">
-              <ma14:wrappingTextBoxFlag xmlns:ma14="http://schemas.microsoft.com/office/mac/drawingml/2011/main" val="0"/>
+              <ma14:wrappingTextBoxFlag xmlns:ma14="http://schemas.microsoft.com/office/mac/drawingml/2011/main" xmlns="" val="0"/>
             </a:ext>
           </a:extLst>
         </p:spPr>
@@ -5698,7 +5573,7 @@
           <a:p>
             <a:pPr algn="r"/>
             <a:fld id="{F7021451-1387-4CA6-816F-3879F97B5CBC}" type="slidenum">
-              <a:rPr b="0" lang="en-US"/>
+              <a:rPr lang="en-US" b="0"/>
               <a:t>12</a:t>
             </a:fld>
             <a:endParaRPr lang="en-US"/>
@@ -5733,9 +5608,11 @@
       <p:sp>
         <p:nvSpPr>
           <p:cNvPr id="2" name="Text 0"/>
-          <p:cNvSpPr/>
+          <p:cNvSpPr>
+            <a:spLocks noGrp="1"/>
+          </p:cNvSpPr>
           <p:nvPr>
-            <p:ph idx="100" type="title" hasCustomPrompt="1"/>
+            <p:ph type="title" idx="100" hasCustomPrompt="1"/>
           </p:nvPr>
         </p:nvSpPr>
         <p:spPr>
@@ -5753,7 +5630,7 @@
           <a:bodyPr wrap="square" lIns="0" tIns="0" rIns="0" bIns="0" rtlCol="0" anchor="ctr"/>
           <a:lstStyle/>
           <a:p>
-            <a:pPr algn="l" indent="0" marL="0">
+            <a:pPr marL="0" indent="0" algn="l">
               <a:buNone/>
             </a:pPr>
             <a:r>
@@ -5811,7 +5688,7 @@
           <a:bodyPr wrap="square" lIns="0" tIns="0" rIns="0" bIns="0" rtlCol="0" anchor="ctr"/>
           <a:lstStyle/>
           <a:p>
-            <a:pPr algn="ctr" indent="0" marL="0">
+            <a:pPr marL="0" indent="0" algn="ctr">
               <a:buNone/>
             </a:pPr>
             <a:r>
@@ -5870,14 +5747,14 @@
       </p:sp>
       <p:pic>
         <p:nvPicPr>
-          <p:cNvPr id="7" name="Image 0" descr="Situación">    </p:cNvPr>
+          <p:cNvPr id="7" name="Image 0" descr="Situación"/>
           <p:cNvPicPr>
             <a:picLocks noChangeAspect="1"/>
           </p:cNvPicPr>
           <p:nvPr/>
         </p:nvPicPr>
         <p:blipFill>
-          <a:blip r:embed="rId1"/>
+          <a:blip r:embed="rId3"/>
           <a:stretch>
             <a:fillRect/>
           </a:stretch>
@@ -5913,7 +5790,7 @@
           <a:bodyPr wrap="square" lIns="0" tIns="0" rIns="0" bIns="0" rtlCol="0" anchor="ctr"/>
           <a:lstStyle/>
           <a:p>
-            <a:pPr indent="0" marL="0">
+            <a:pPr marL="0" indent="0">
               <a:buNone/>
             </a:pPr>
             <a:r>
@@ -5969,7 +5846,7 @@
           <a:bodyPr wrap="square" lIns="0" tIns="0" rIns="0" bIns="0" rtlCol="0" anchor="ctr"/>
           <a:lstStyle/>
           <a:p>
-            <a:pPr algn="ctr" indent="0" marL="0">
+            <a:pPr marL="0" indent="0" algn="ctr">
               <a:buNone/>
             </a:pPr>
             <a:r>
@@ -6005,7 +5882,7 @@
           <a:bodyPr wrap="square" lIns="0" tIns="0" rIns="0" bIns="0" rtlCol="0" anchor="ctr"/>
           <a:lstStyle/>
           <a:p>
-            <a:pPr indent="0" marL="0">
+            <a:pPr marL="0" indent="0">
               <a:buNone/>
             </a:pPr>
             <a:r>
@@ -6061,7 +5938,7 @@
           <a:bodyPr wrap="square" lIns="0" tIns="0" rIns="0" bIns="0" rtlCol="0" anchor="ctr"/>
           <a:lstStyle/>
           <a:p>
-            <a:pPr algn="ctr" indent="0" marL="0">
+            <a:pPr marL="0" indent="0" algn="ctr">
               <a:buNone/>
             </a:pPr>
             <a:r>
@@ -6097,7 +5974,7 @@
           <a:bodyPr wrap="square" lIns="0" tIns="0" rIns="0" bIns="0" rtlCol="0" anchor="ctr"/>
           <a:lstStyle/>
           <a:p>
-            <a:pPr indent="0" marL="0">
+            <a:pPr marL="0" indent="0">
               <a:buNone/>
             </a:pPr>
             <a:r>
@@ -6153,7 +6030,7 @@
           <a:bodyPr wrap="square" lIns="0" tIns="0" rIns="0" bIns="0" rtlCol="0" anchor="ctr"/>
           <a:lstStyle/>
           <a:p>
-            <a:pPr algn="ctr" indent="0" marL="0">
+            <a:pPr marL="0" indent="0" algn="ctr">
               <a:buNone/>
             </a:pPr>
             <a:r>
@@ -6189,7 +6066,7 @@
           <a:bodyPr wrap="square" lIns="0" tIns="0" rIns="0" bIns="0" rtlCol="0" anchor="ctr"/>
           <a:lstStyle/>
           <a:p>
-            <a:pPr indent="0" marL="0">
+            <a:pPr marL="0" indent="0">
               <a:buNone/>
             </a:pPr>
             <a:r>
@@ -6224,7 +6101,7 @@
           </a:prstGeom>
           <a:extLst>
             <a:ext uri="{C572A759-6A51-4108-AA02-DFA0A04FC94B}">
-              <ma14:wrappingTextBoxFlag xmlns:ma14="http://schemas.microsoft.com/office/mac/drawingml/2011/main" val="0"/>
+              <ma14:wrappingTextBoxFlag xmlns:ma14="http://schemas.microsoft.com/office/mac/drawingml/2011/main" xmlns="" val="0"/>
             </a:ext>
           </a:extLst>
         </p:spPr>
@@ -6242,7 +6119,7 @@
           <a:p>
             <a:pPr algn="r"/>
             <a:fld id="{F7021451-1387-4CA6-816F-3879F97B5CBC}" type="slidenum">
-              <a:rPr b="0" lang="en-US"/>
+              <a:rPr lang="en-US" b="0"/>
               <a:t>13</a:t>
             </a:fld>
             <a:endParaRPr lang="en-US"/>
@@ -6277,9 +6154,11 @@
       <p:sp>
         <p:nvSpPr>
           <p:cNvPr id="2" name="Text 0"/>
-          <p:cNvSpPr/>
+          <p:cNvSpPr>
+            <a:spLocks noGrp="1"/>
+          </p:cNvSpPr>
           <p:nvPr>
-            <p:ph idx="100" type="title" hasCustomPrompt="1"/>
+            <p:ph type="title" idx="100" hasCustomPrompt="1"/>
           </p:nvPr>
         </p:nvSpPr>
         <p:spPr>
@@ -6297,7 +6176,7 @@
           <a:bodyPr wrap="square" lIns="0" tIns="0" rIns="0" bIns="0" rtlCol="0" anchor="ctr"/>
           <a:lstStyle/>
           <a:p>
-            <a:pPr algn="l" indent="0" marL="0">
+            <a:pPr marL="0" indent="0" algn="l">
               <a:buNone/>
             </a:pPr>
             <a:r>
@@ -6355,7 +6234,7 @@
           <a:bodyPr wrap="square" lIns="0" tIns="0" rIns="0" bIns="0" rtlCol="0" anchor="ctr"/>
           <a:lstStyle/>
           <a:p>
-            <a:pPr algn="ctr" indent="0" marL="0">
+            <a:pPr marL="0" indent="0" algn="ctr">
               <a:buNone/>
             </a:pPr>
             <a:r>
@@ -6413,7 +6292,7 @@
           <a:bodyPr wrap="square" lIns="0" tIns="0" rIns="0" bIns="0" rtlCol="0" anchor="ctr"/>
           <a:lstStyle/>
           <a:p>
-            <a:pPr algn="ctr" indent="0" marL="0">
+            <a:pPr marL="0" indent="0" algn="ctr">
               <a:buNone/>
             </a:pPr>
             <a:r>
@@ -6473,7 +6352,7 @@
           <a:bodyPr wrap="square" lIns="0" tIns="0" rIns="0" bIns="0" rtlCol="0" anchor="ctr"/>
           <a:lstStyle/>
           <a:p>
-            <a:pPr algn="ctr" indent="0" marL="0">
+            <a:pPr marL="0" indent="0" algn="ctr">
               <a:buNone/>
             </a:pPr>
             <a:r>
@@ -6531,7 +6410,7 @@
           <a:bodyPr wrap="square" lIns="0" tIns="0" rIns="0" bIns="0" rtlCol="0" anchor="ctr"/>
           <a:lstStyle/>
           <a:p>
-            <a:pPr algn="ctr" indent="0" marL="0">
+            <a:pPr marL="0" indent="0" algn="ctr">
               <a:buNone/>
             </a:pPr>
             <a:r>
@@ -6591,7 +6470,7 @@
           <a:bodyPr wrap="square" lIns="0" tIns="0" rIns="0" bIns="0" rtlCol="0" anchor="ctr"/>
           <a:lstStyle/>
           <a:p>
-            <a:pPr algn="ctr" indent="0" marL="0">
+            <a:pPr marL="0" indent="0" algn="ctr">
               <a:buNone/>
             </a:pPr>
             <a:r>
@@ -6649,7 +6528,7 @@
           <a:bodyPr wrap="square" lIns="0" tIns="0" rIns="0" bIns="0" rtlCol="0" anchor="ctr"/>
           <a:lstStyle/>
           <a:p>
-            <a:pPr algn="ctr" indent="0" marL="0">
+            <a:pPr marL="0" indent="0" algn="ctr">
               <a:buNone/>
             </a:pPr>
             <a:r>
@@ -6709,7 +6588,7 @@
           <a:bodyPr wrap="square" lIns="0" tIns="0" rIns="0" bIns="0" rtlCol="0" anchor="ctr"/>
           <a:lstStyle/>
           <a:p>
-            <a:pPr algn="ctr" indent="0" marL="0">
+            <a:pPr marL="0" indent="0" algn="ctr">
               <a:buNone/>
             </a:pPr>
             <a:r>
@@ -6767,7 +6646,7 @@
           <a:bodyPr wrap="square" lIns="0" tIns="0" rIns="0" bIns="0" rtlCol="0" anchor="ctr"/>
           <a:lstStyle/>
           <a:p>
-            <a:pPr algn="ctr" indent="0" marL="0">
+            <a:pPr marL="0" indent="0" algn="ctr">
               <a:buNone/>
             </a:pPr>
             <a:r>
@@ -6827,7 +6706,7 @@
           <a:bodyPr wrap="square" lIns="0" tIns="0" rIns="0" bIns="0" rtlCol="0" anchor="ctr"/>
           <a:lstStyle/>
           <a:p>
-            <a:pPr algn="ctr" indent="0" marL="0">
+            <a:pPr marL="0" indent="0" algn="ctr">
               <a:buNone/>
             </a:pPr>
             <a:r>
@@ -6838,9 +6717,6 @@
               </a:rPr>
               <a:t>No: </a:t>
             </a:r>
-            <a:pPr algn="ctr" indent="0" marL="0">
-              <a:buNone/>
-            </a:pPr>
             <a:r>
               <a:rPr lang="en-US" sz="1700" dirty="0">
                 <a:solidFill>
@@ -6897,14 +6773,14 @@
       </p:sp>
       <p:pic>
         <p:nvPicPr>
-          <p:cNvPr id="23" name="Image 0" descr="Competencia digital">    </p:cNvPr>
+          <p:cNvPr id="23" name="Image 0" descr="Competencia digital"/>
           <p:cNvPicPr>
             <a:picLocks noChangeAspect="1"/>
           </p:cNvPicPr>
           <p:nvPr/>
         </p:nvPicPr>
         <p:blipFill>
-          <a:blip r:embed="rId1"/>
+          <a:blip r:embed="rId3"/>
           <a:stretch>
             <a:fillRect/>
           </a:stretch>
@@ -6940,7 +6816,7 @@
           <a:bodyPr wrap="square" lIns="0" tIns="0" rIns="0" bIns="0" rtlCol="0" anchor="ctr"/>
           <a:lstStyle/>
           <a:p>
-            <a:pPr indent="0" marL="0">
+            <a:pPr marL="0" indent="0">
               <a:buNone/>
             </a:pPr>
             <a:r>
@@ -6976,7 +6852,7 @@
           <a:bodyPr wrap="square" lIns="0" tIns="0" rIns="0" bIns="0" rtlCol="0" anchor="ctr"/>
           <a:lstStyle/>
           <a:p>
-            <a:pPr indent="0" marL="0">
+            <a:pPr marL="0" indent="0">
               <a:buNone/>
             </a:pPr>
             <a:r>
@@ -6993,7 +6869,7 @@
       </p:sp>
       <p:sp>
         <p:nvSpPr>
-          <p:cNvPr id="25" name="Slide Number Placeholder 0"/>
+          <p:cNvPr id="26" name="Slide Number Placeholder 0"/>
           <p:cNvSpPr>
             <a:spLocks noGrp="1"/>
           </p:cNvSpPr>
@@ -7011,7 +6887,7 @@
           </a:prstGeom>
           <a:extLst>
             <a:ext uri="{C572A759-6A51-4108-AA02-DFA0A04FC94B}">
-              <ma14:wrappingTextBoxFlag xmlns:ma14="http://schemas.microsoft.com/office/mac/drawingml/2011/main" val="0"/>
+              <ma14:wrappingTextBoxFlag xmlns:ma14="http://schemas.microsoft.com/office/mac/drawingml/2011/main" xmlns="" val="0"/>
             </a:ext>
           </a:extLst>
         </p:spPr>
@@ -7029,7 +6905,7 @@
           <a:p>
             <a:pPr algn="r"/>
             <a:fld id="{F7021451-1387-4CA6-816F-3879F97B5CBC}" type="slidenum">
-              <a:rPr b="0" lang="en-US"/>
+              <a:rPr lang="en-US" b="0"/>
               <a:t>14</a:t>
             </a:fld>
             <a:endParaRPr lang="en-US"/>
@@ -7064,9 +6940,11 @@
       <p:sp>
         <p:nvSpPr>
           <p:cNvPr id="2" name="Text 0"/>
-          <p:cNvSpPr/>
+          <p:cNvSpPr>
+            <a:spLocks noGrp="1"/>
+          </p:cNvSpPr>
           <p:nvPr>
-            <p:ph idx="100" type="title" hasCustomPrompt="1"/>
+            <p:ph type="title" idx="100" hasCustomPrompt="1"/>
           </p:nvPr>
         </p:nvSpPr>
         <p:spPr>
@@ -7084,7 +6962,7 @@
           <a:bodyPr wrap="square" lIns="0" tIns="0" rIns="0" bIns="0" rtlCol="0" anchor="ctr"/>
           <a:lstStyle/>
           <a:p>
-            <a:pPr algn="l" indent="0" marL="0">
+            <a:pPr marL="0" indent="0" algn="l">
               <a:buNone/>
             </a:pPr>
             <a:r>
@@ -7093,7 +6971,47 @@
                   <a:schemeClr val="tx1"/>
                 </a:solidFill>
               </a:rPr>
-              <a:t>¿Para qué sirve un clip?</a:t>
+              <a:t>¿Para </a:t>
+            </a:r>
+            <a:r>
+              <a:rPr lang="en-US" sz="3200" b="1" dirty="0" err="1">
+                <a:solidFill>
+                  <a:schemeClr val="tx1"/>
+                </a:solidFill>
+              </a:rPr>
+              <a:t>qué</a:t>
+            </a:r>
+            <a:r>
+              <a:rPr lang="en-US" sz="3200" b="1" dirty="0">
+                <a:solidFill>
+                  <a:schemeClr val="tx1"/>
+                </a:solidFill>
+              </a:rPr>
+              <a:t> se </a:t>
+            </a:r>
+            <a:r>
+              <a:rPr lang="en-US" sz="3200" b="1" dirty="0" err="1">
+                <a:solidFill>
+                  <a:schemeClr val="tx1"/>
+                </a:solidFill>
+              </a:rPr>
+              <a:t>podría</a:t>
+            </a:r>
+            <a:r>
+              <a:rPr lang="en-US" sz="3200" b="1">
+                <a:solidFill>
+                  <a:schemeClr val="tx1"/>
+                </a:solidFill>
+              </a:rPr>
+              <a:t> usar un </a:t>
+            </a:r>
+            <a:r>
+              <a:rPr lang="en-US" sz="3200" b="1" dirty="0">
+                <a:solidFill>
+                  <a:schemeClr val="tx1"/>
+                </a:solidFill>
+              </a:rPr>
+              <a:t>clip?</a:t>
             </a:r>
             <a:endParaRPr lang="en-US" sz="3200" dirty="0"/>
           </a:p>
@@ -7142,7 +7060,7 @@
           <a:bodyPr wrap="square" lIns="0" tIns="0" rIns="0" bIns="0" rtlCol="0" anchor="ctr"/>
           <a:lstStyle/>
           <a:p>
-            <a:pPr algn="ctr" indent="0" marL="0">
+            <a:pPr marL="0" indent="0" algn="ctr">
               <a:buNone/>
             </a:pPr>
             <a:r>
@@ -7179,131 +7097,7 @@
       </p:sp>
       <p:pic>
         <p:nvPicPr>
-          <p:cNvPr id="6" name="Image 0" descr="Clip">    </p:cNvPr>
-          <p:cNvPicPr>
-            <a:picLocks noChangeAspect="1"/>
-          </p:cNvPicPr>
-          <p:nvPr/>
-        </p:nvPicPr>
-        <p:blipFill>
-          <a:blip r:embed="rId1"/>
-          <a:stretch>
-            <a:fillRect/>
-          </a:stretch>
-        </p:blipFill>
-        <p:spPr>
-          <a:xfrm>
-            <a:off x="1704442" y="2435962"/>
-            <a:ext cx="1711757" cy="1711757"/>
-          </a:xfrm>
-          <a:prstGeom prst="rect">
-            <a:avLst/>
-          </a:prstGeom>
-        </p:spPr>
-      </p:pic>
-      <p:sp>
-        <p:nvSpPr>
-          <p:cNvPr id="7" name="90 segundos"/>
-          <p:cNvSpPr/>
-          <p:nvPr/>
-        </p:nvSpPr>
-        <p:spPr>
-          <a:xfrm>
-            <a:off x="5029200" y="1828800"/>
-            <a:ext cx="777240" cy="777240"/>
-          </a:xfrm>
-          <a:prstGeom prst="ellipse">
-            <a:avLst/>
-          </a:prstGeom>
-          <a:solidFill>
-            <a:schemeClr val="tx2"/>
-          </a:solidFill>
-          <a:ln/>
-        </p:spPr>
-      </p:sp>
-      <p:pic>
-        <p:nvPicPr>
-          <p:cNvPr id="8" name="Image 1" descr="90 segundos">    </p:cNvPr>
-          <p:cNvPicPr>
-            <a:picLocks noChangeAspect="1"/>
-          </p:cNvPicPr>
-          <p:nvPr/>
-        </p:nvPicPr>
-        <p:blipFill>
-          <a:blip r:embed="rId2"/>
-          <a:stretch>
-            <a:fillRect/>
-          </a:stretch>
-        </p:blipFill>
-        <p:spPr>
-          <a:xfrm>
-            <a:off x="5215738" y="2015338"/>
-            <a:ext cx="404165" cy="404165"/>
-          </a:xfrm>
-          <a:prstGeom prst="rect">
-            <a:avLst/>
-          </a:prstGeom>
-        </p:spPr>
-      </p:pic>
-      <p:sp>
-        <p:nvSpPr>
-          <p:cNvPr id="9" name="Text 5"/>
-          <p:cNvSpPr txBox="1"/>
-          <p:nvPr/>
-        </p:nvSpPr>
-        <p:spPr>
-          <a:xfrm>
-            <a:off x="6035040" y="1828800"/>
-            <a:ext cx="5577840" cy="777240"/>
-          </a:xfrm>
-          <a:prstGeom prst="rect">
-            <a:avLst/>
-          </a:prstGeom>
-          <a:noFill/>
-          <a:ln/>
-        </p:spPr>
-        <p:txBody>
-          <a:bodyPr wrap="square" lIns="0" tIns="0" rIns="0" bIns="0" rtlCol="0" anchor="ctr"/>
-          <a:lstStyle/>
-          <a:p>
-            <a:pPr indent="0" marL="0">
-              <a:buNone/>
-            </a:pPr>
-            <a:r>
-              <a:rPr lang="en-US" sz="2400" dirty="0">
-                <a:solidFill>
-                  <a:schemeClr val="tx1"/>
-                </a:solidFill>
-              </a:rPr>
-              <a:t>90 segundos</a:t>
-            </a:r>
-            <a:endParaRPr lang="en-US" sz="2400" dirty="0"/>
-          </a:p>
-        </p:txBody>
-      </p:sp>
-      <p:sp>
-        <p:nvSpPr>
-          <p:cNvPr id="10" name="En silencio"/>
-          <p:cNvSpPr/>
-          <p:nvPr/>
-        </p:nvSpPr>
-        <p:spPr>
-          <a:xfrm>
-            <a:off x="5029200" y="2880360"/>
-            <a:ext cx="777240" cy="777240"/>
-          </a:xfrm>
-          <a:prstGeom prst="ellipse">
-            <a:avLst/>
-          </a:prstGeom>
-          <a:solidFill>
-            <a:schemeClr val="tx2"/>
-          </a:solidFill>
-          <a:ln/>
-        </p:spPr>
-      </p:sp>
-      <p:pic>
-        <p:nvPicPr>
-          <p:cNvPr id="11" name="Image 2" descr="En silencio">    </p:cNvPr>
+          <p:cNvPr id="6" name="Image 0" descr="Clip"/>
           <p:cNvPicPr>
             <a:picLocks noChangeAspect="1"/>
           </p:cNvPicPr>
@@ -7317,8 +7111,8 @@
         </p:blipFill>
         <p:spPr>
           <a:xfrm>
-            <a:off x="5215738" y="3066898"/>
-            <a:ext cx="404165" cy="404165"/>
+            <a:off x="1704442" y="2435962"/>
+            <a:ext cx="1711757" cy="1711757"/>
           </a:xfrm>
           <a:prstGeom prst="rect">
             <a:avLst/>
@@ -7327,49 +7121,13 @@
       </p:pic>
       <p:sp>
         <p:nvSpPr>
-          <p:cNvPr id="12" name="Text 7"/>
-          <p:cNvSpPr txBox="1"/>
-          <p:nvPr/>
-        </p:nvSpPr>
-        <p:spPr>
-          <a:xfrm>
-            <a:off x="6035040" y="2880360"/>
-            <a:ext cx="5577840" cy="777240"/>
-          </a:xfrm>
-          <a:prstGeom prst="rect">
-            <a:avLst/>
-          </a:prstGeom>
-          <a:noFill/>
-          <a:ln/>
-        </p:spPr>
-        <p:txBody>
-          <a:bodyPr wrap="square" lIns="0" tIns="0" rIns="0" bIns="0" rtlCol="0" anchor="ctr"/>
-          <a:lstStyle/>
-          <a:p>
-            <a:pPr indent="0" marL="0">
-              <a:buNone/>
-            </a:pPr>
-            <a:r>
-              <a:rPr lang="en-US" sz="2400" dirty="0">
-                <a:solidFill>
-                  <a:schemeClr val="tx1"/>
-                </a:solidFill>
-              </a:rPr>
-              <a:t>En silencio</a:t>
-            </a:r>
-            <a:endParaRPr lang="en-US" sz="2400" dirty="0"/>
-          </a:p>
-        </p:txBody>
-      </p:sp>
-      <p:sp>
-        <p:nvSpPr>
-          <p:cNvPr id="13" name="Por escrito: todos los usos que se os ocurran"/>
+          <p:cNvPr id="7" name="90 segundos"/>
           <p:cNvSpPr/>
           <p:nvPr/>
         </p:nvSpPr>
         <p:spPr>
           <a:xfrm>
-            <a:off x="5029200" y="3931920"/>
+            <a:off x="5029200" y="1828800"/>
             <a:ext cx="777240" cy="777240"/>
           </a:xfrm>
           <a:prstGeom prst="ellipse">
@@ -7383,7 +7141,7 @@
       </p:sp>
       <p:pic>
         <p:nvPicPr>
-          <p:cNvPr id="14" name="Image 3" descr="Por escrito: todos los usos que se os ocurran">    </p:cNvPr>
+          <p:cNvPr id="8" name="Image 1" descr="90 segundos"/>
           <p:cNvPicPr>
             <a:picLocks noChangeAspect="1"/>
           </p:cNvPicPr>
@@ -7397,6 +7155,190 @@
         </p:blipFill>
         <p:spPr>
           <a:xfrm>
+            <a:off x="5215738" y="2015338"/>
+            <a:ext cx="404165" cy="404165"/>
+          </a:xfrm>
+          <a:prstGeom prst="rect">
+            <a:avLst/>
+          </a:prstGeom>
+        </p:spPr>
+      </p:pic>
+      <p:sp>
+        <p:nvSpPr>
+          <p:cNvPr id="9" name="Text 5"/>
+          <p:cNvSpPr txBox="1"/>
+          <p:nvPr/>
+        </p:nvSpPr>
+        <p:spPr>
+          <a:xfrm>
+            <a:off x="6035040" y="1828800"/>
+            <a:ext cx="5577840" cy="777240"/>
+          </a:xfrm>
+          <a:prstGeom prst="rect">
+            <a:avLst/>
+          </a:prstGeom>
+          <a:noFill/>
+          <a:ln/>
+        </p:spPr>
+        <p:txBody>
+          <a:bodyPr wrap="square" lIns="0" tIns="0" rIns="0" bIns="0" rtlCol="0" anchor="ctr"/>
+          <a:lstStyle/>
+          <a:p>
+            <a:pPr marL="0" indent="0">
+              <a:buNone/>
+            </a:pPr>
+            <a:r>
+              <a:rPr lang="en-US" sz="2400" dirty="0">
+                <a:solidFill>
+                  <a:schemeClr val="tx1"/>
+                </a:solidFill>
+              </a:rPr>
+              <a:t>De 2 a 3 </a:t>
+            </a:r>
+            <a:r>
+              <a:rPr lang="en-US" sz="2400" dirty="0" err="1">
+                <a:solidFill>
+                  <a:schemeClr val="tx1"/>
+                </a:solidFill>
+              </a:rPr>
+              <a:t>minutos</a:t>
+            </a:r>
+            <a:r>
+              <a:rPr lang="en-US" sz="2400" dirty="0">
+                <a:solidFill>
+                  <a:schemeClr val="tx1"/>
+                </a:solidFill>
+              </a:rPr>
+              <a:t> </a:t>
+            </a:r>
+            <a:r>
+              <a:rPr lang="en-US" sz="2400" dirty="0" err="1">
+                <a:solidFill>
+                  <a:schemeClr val="tx1"/>
+                </a:solidFill>
+              </a:rPr>
+              <a:t>minutos</a:t>
+            </a:r>
+            <a:endParaRPr lang="en-US" sz="2400" dirty="0"/>
+          </a:p>
+        </p:txBody>
+      </p:sp>
+      <p:sp>
+        <p:nvSpPr>
+          <p:cNvPr id="10" name="En silencio"/>
+          <p:cNvSpPr/>
+          <p:nvPr/>
+        </p:nvSpPr>
+        <p:spPr>
+          <a:xfrm>
+            <a:off x="5029200" y="2880360"/>
+            <a:ext cx="777240" cy="777240"/>
+          </a:xfrm>
+          <a:prstGeom prst="ellipse">
+            <a:avLst/>
+          </a:prstGeom>
+          <a:solidFill>
+            <a:schemeClr val="tx2"/>
+          </a:solidFill>
+          <a:ln/>
+        </p:spPr>
+      </p:sp>
+      <p:pic>
+        <p:nvPicPr>
+          <p:cNvPr id="11" name="Image 2" descr="En silencio"/>
+          <p:cNvPicPr>
+            <a:picLocks noChangeAspect="1"/>
+          </p:cNvPicPr>
+          <p:nvPr/>
+        </p:nvPicPr>
+        <p:blipFill>
+          <a:blip r:embed="rId5"/>
+          <a:stretch>
+            <a:fillRect/>
+          </a:stretch>
+        </p:blipFill>
+        <p:spPr>
+          <a:xfrm>
+            <a:off x="5215738" y="3066898"/>
+            <a:ext cx="404165" cy="404165"/>
+          </a:xfrm>
+          <a:prstGeom prst="rect">
+            <a:avLst/>
+          </a:prstGeom>
+        </p:spPr>
+      </p:pic>
+      <p:sp>
+        <p:nvSpPr>
+          <p:cNvPr id="12" name="Text 7"/>
+          <p:cNvSpPr txBox="1"/>
+          <p:nvPr/>
+        </p:nvSpPr>
+        <p:spPr>
+          <a:xfrm>
+            <a:off x="6035040" y="2880360"/>
+            <a:ext cx="5577840" cy="777240"/>
+          </a:xfrm>
+          <a:prstGeom prst="rect">
+            <a:avLst/>
+          </a:prstGeom>
+          <a:noFill/>
+          <a:ln/>
+        </p:spPr>
+        <p:txBody>
+          <a:bodyPr wrap="square" lIns="0" tIns="0" rIns="0" bIns="0" rtlCol="0" anchor="ctr"/>
+          <a:lstStyle/>
+          <a:p>
+            <a:pPr marL="0" indent="0">
+              <a:buNone/>
+            </a:pPr>
+            <a:r>
+              <a:rPr lang="en-US" sz="2400" dirty="0">
+                <a:solidFill>
+                  <a:schemeClr val="tx1"/>
+                </a:solidFill>
+              </a:rPr>
+              <a:t>En silencio</a:t>
+            </a:r>
+            <a:endParaRPr lang="en-US" sz="2400" dirty="0"/>
+          </a:p>
+        </p:txBody>
+      </p:sp>
+      <p:sp>
+        <p:nvSpPr>
+          <p:cNvPr id="13" name="Por escrito: todos los usos que se os ocurran"/>
+          <p:cNvSpPr/>
+          <p:nvPr/>
+        </p:nvSpPr>
+        <p:spPr>
+          <a:xfrm>
+            <a:off x="5029200" y="3931920"/>
+            <a:ext cx="777240" cy="777240"/>
+          </a:xfrm>
+          <a:prstGeom prst="ellipse">
+            <a:avLst/>
+          </a:prstGeom>
+          <a:solidFill>
+            <a:schemeClr val="tx2"/>
+          </a:solidFill>
+          <a:ln/>
+        </p:spPr>
+      </p:sp>
+      <p:pic>
+        <p:nvPicPr>
+          <p:cNvPr id="14" name="Image 3" descr="Por escrito: todos los usos que se os ocurran"/>
+          <p:cNvPicPr>
+            <a:picLocks noChangeAspect="1"/>
+          </p:cNvPicPr>
+          <p:nvPr/>
+        </p:nvPicPr>
+        <p:blipFill>
+          <a:blip r:embed="rId6"/>
+          <a:stretch>
+            <a:fillRect/>
+          </a:stretch>
+        </p:blipFill>
+        <p:spPr>
+          <a:xfrm>
             <a:off x="5215738" y="4118458"/>
             <a:ext cx="404165" cy="404165"/>
           </a:xfrm>
@@ -7426,7 +7368,7 @@
           <a:bodyPr wrap="square" lIns="0" tIns="0" rIns="0" bIns="0" rtlCol="0" anchor="ctr"/>
           <a:lstStyle/>
           <a:p>
-            <a:pPr indent="0" marL="0">
+            <a:pPr marL="0" indent="0">
               <a:buNone/>
             </a:pPr>
             <a:r>
@@ -7462,7 +7404,7 @@
           <a:bodyPr wrap="square" lIns="0" tIns="0" rIns="0" bIns="0" rtlCol="0" anchor="ctr"/>
           <a:lstStyle/>
           <a:p>
-            <a:pPr indent="0" marL="0">
+            <a:pPr marL="0" indent="0">
               <a:buNone/>
             </a:pPr>
             <a:r>
@@ -7497,7 +7439,7 @@
           </a:prstGeom>
           <a:extLst>
             <a:ext uri="{C572A759-6A51-4108-AA02-DFA0A04FC94B}">
-              <ma14:wrappingTextBoxFlag xmlns:ma14="http://schemas.microsoft.com/office/mac/drawingml/2011/main" val="0"/>
+              <ma14:wrappingTextBoxFlag xmlns:ma14="http://schemas.microsoft.com/office/mac/drawingml/2011/main" xmlns="" val="0"/>
             </a:ext>
           </a:extLst>
         </p:spPr>
@@ -7515,7 +7457,7 @@
           <a:p>
             <a:pPr algn="r"/>
             <a:fld id="{F7021451-1387-4CA6-816F-3879F97B5CBC}" type="slidenum">
-              <a:rPr b="0" lang="en-US"/>
+              <a:rPr lang="en-US" b="0"/>
               <a:t>15</a:t>
             </a:fld>
             <a:endParaRPr lang="en-US"/>
@@ -7550,9 +7492,11 @@
       <p:sp>
         <p:nvSpPr>
           <p:cNvPr id="2" name="Text 0"/>
-          <p:cNvSpPr/>
+          <p:cNvSpPr>
+            <a:spLocks noGrp="1"/>
+          </p:cNvSpPr>
           <p:nvPr>
-            <p:ph idx="100" type="title" hasCustomPrompt="1"/>
+            <p:ph type="title" idx="100" hasCustomPrompt="1"/>
           </p:nvPr>
         </p:nvSpPr>
         <p:spPr>
@@ -7570,7 +7514,7 @@
           <a:bodyPr wrap="square" lIns="0" tIns="0" rIns="0" bIns="0" rtlCol="0" anchor="ctr"/>
           <a:lstStyle/>
           <a:p>
-            <a:pPr algn="l" indent="0" marL="0">
+            <a:pPr marL="0" indent="0" algn="l">
               <a:buNone/>
             </a:pPr>
             <a:r>
@@ -7628,7 +7572,7 @@
           <a:bodyPr wrap="square" lIns="0" tIns="0" rIns="0" bIns="0" rtlCol="0" anchor="ctr"/>
           <a:lstStyle/>
           <a:p>
-            <a:pPr algn="ctr" indent="0" marL="0">
+            <a:pPr marL="0" indent="0" algn="ctr">
               <a:buNone/>
             </a:pPr>
             <a:r>
@@ -7687,14 +7631,14 @@
       </p:sp>
       <p:pic>
         <p:nvPicPr>
-          <p:cNvPr id="7" name="Image 0" descr="Producto">    </p:cNvPr>
+          <p:cNvPr id="7" name="Image 0" descr="Producto"/>
           <p:cNvPicPr>
             <a:picLocks noChangeAspect="1"/>
           </p:cNvPicPr>
           <p:nvPr/>
         </p:nvPicPr>
         <p:blipFill>
-          <a:blip r:embed="rId1"/>
+          <a:blip r:embed="rId3"/>
           <a:stretch>
             <a:fillRect/>
           </a:stretch>
@@ -7730,7 +7674,7 @@
           <a:bodyPr wrap="square" lIns="0" tIns="0" rIns="0" bIns="0" rtlCol="0" anchor="ctr"/>
           <a:lstStyle/>
           <a:p>
-            <a:pPr indent="0" marL="0">
+            <a:pPr marL="0" indent="0">
               <a:buNone/>
             </a:pPr>
             <a:r>
@@ -7767,14 +7711,14 @@
       </p:sp>
       <p:pic>
         <p:nvPicPr>
-          <p:cNvPr id="10" name="Image 1" descr="Votación">    </p:cNvPr>
+          <p:cNvPr id="10" name="Image 1" descr="Votación"/>
           <p:cNvPicPr>
             <a:picLocks noChangeAspect="1"/>
           </p:cNvPicPr>
           <p:nvPr/>
         </p:nvPicPr>
         <p:blipFill>
-          <a:blip r:embed="rId2"/>
+          <a:blip r:embed="rId4"/>
           <a:stretch>
             <a:fillRect/>
           </a:stretch>
@@ -7810,7 +7754,7 @@
           <a:bodyPr wrap="square" lIns="0" tIns="0" rIns="0" bIns="0" rtlCol="0" anchor="ctr"/>
           <a:lstStyle/>
           <a:p>
-            <a:pPr indent="0" marL="0">
+            <a:pPr marL="0" indent="0">
               <a:buNone/>
             </a:pPr>
             <a:r>
@@ -7845,7 +7789,7 @@
           </a:prstGeom>
           <a:extLst>
             <a:ext uri="{C572A759-6A51-4108-AA02-DFA0A04FC94B}">
-              <ma14:wrappingTextBoxFlag xmlns:ma14="http://schemas.microsoft.com/office/mac/drawingml/2011/main" val="0"/>
+              <ma14:wrappingTextBoxFlag xmlns:ma14="http://schemas.microsoft.com/office/mac/drawingml/2011/main" xmlns="" val="0"/>
             </a:ext>
           </a:extLst>
         </p:spPr>
@@ -7863,7 +7807,7 @@
           <a:p>
             <a:pPr algn="r"/>
             <a:fld id="{F7021451-1387-4CA6-816F-3879F97B5CBC}" type="slidenum">
-              <a:rPr b="0" lang="en-US"/>
+              <a:rPr lang="en-US" b="0"/>
               <a:t>16</a:t>
             </a:fld>
             <a:endParaRPr lang="en-US"/>
@@ -7898,9 +7842,11 @@
       <p:sp>
         <p:nvSpPr>
           <p:cNvPr id="2" name="Text 0"/>
-          <p:cNvSpPr/>
+          <p:cNvSpPr>
+            <a:spLocks noGrp="1"/>
+          </p:cNvSpPr>
           <p:nvPr>
-            <p:ph idx="100" type="title" hasCustomPrompt="1"/>
+            <p:ph type="title" idx="100" hasCustomPrompt="1"/>
           </p:nvPr>
         </p:nvSpPr>
         <p:spPr>
@@ -7918,7 +7864,7 @@
           <a:bodyPr wrap="square" lIns="0" tIns="0" rIns="0" bIns="0" rtlCol="0" anchor="ctr"/>
           <a:lstStyle/>
           <a:p>
-            <a:pPr algn="l" indent="0" marL="0">
+            <a:pPr marL="0" indent="0" algn="l">
               <a:buNone/>
             </a:pPr>
             <a:r>
@@ -7976,7 +7922,7 @@
           <a:bodyPr wrap="square" lIns="0" tIns="0" rIns="0" bIns="0" rtlCol="0" anchor="ctr"/>
           <a:lstStyle/>
           <a:p>
-            <a:pPr algn="ctr" indent="0" marL="0">
+            <a:pPr marL="0" indent="0" algn="ctr">
               <a:buNone/>
             </a:pPr>
             <a:r>
@@ -8012,7 +7958,7 @@
           <a:bodyPr wrap="square" lIns="0" tIns="0" rIns="0" bIns="0" rtlCol="0" anchor="ctr"/>
           <a:lstStyle/>
           <a:p>
-            <a:pPr indent="0" marL="0">
+            <a:pPr marL="0" indent="0">
               <a:buNone/>
             </a:pPr>
             <a:r>
@@ -8070,7 +8016,7 @@
           <a:bodyPr wrap="square" lIns="0" tIns="0" rIns="0" bIns="0" rtlCol="0" anchor="ctr"/>
           <a:lstStyle/>
           <a:p>
-            <a:pPr algn="ctr" indent="0" marL="0">
+            <a:pPr marL="0" indent="0" algn="ctr">
               <a:buNone/>
             </a:pPr>
             <a:r>
@@ -8128,7 +8074,7 @@
           <a:bodyPr wrap="square" lIns="0" tIns="0" rIns="0" bIns="0" rtlCol="0" anchor="ctr"/>
           <a:lstStyle/>
           <a:p>
-            <a:pPr algn="ctr" indent="0" marL="0">
+            <a:pPr marL="0" indent="0" algn="ctr">
               <a:buNone/>
             </a:pPr>
             <a:r>
@@ -8186,7 +8132,7 @@
           <a:bodyPr wrap="square" lIns="0" tIns="0" rIns="0" bIns="0" rtlCol="0" anchor="ctr"/>
           <a:lstStyle/>
           <a:p>
-            <a:pPr algn="ctr" indent="0" marL="0">
+            <a:pPr marL="0" indent="0" algn="ctr">
               <a:buNone/>
             </a:pPr>
             <a:r>
@@ -8245,377 +8191,7 @@
       </p:sp>
       <p:pic>
         <p:nvPicPr>
-          <p:cNvPr id="14" name="Image 0" descr="Organizador de cables">    </p:cNvPr>
-          <p:cNvPicPr>
-            <a:picLocks noChangeAspect="1"/>
-          </p:cNvPicPr>
-          <p:nvPr/>
-        </p:nvPicPr>
-        <p:blipFill>
-          <a:blip r:embed="rId1"/>
-          <a:stretch>
-            <a:fillRect/>
-          </a:stretch>
-        </p:blipFill>
-        <p:spPr>
-          <a:xfrm>
-            <a:off x="930859" y="2412187"/>
-            <a:ext cx="332842" cy="332842"/>
-          </a:xfrm>
-          <a:prstGeom prst="rect">
-            <a:avLst/>
-          </a:prstGeom>
-        </p:spPr>
-      </p:pic>
-      <p:sp>
-        <p:nvSpPr>
-          <p:cNvPr id="15" name="Text 12"/>
-          <p:cNvSpPr txBox="1"/>
-          <p:nvPr/>
-        </p:nvSpPr>
-        <p:spPr>
-          <a:xfrm>
-            <a:off x="1554480" y="2258568"/>
-            <a:ext cx="2326538" cy="640080"/>
-          </a:xfrm>
-          <a:prstGeom prst="rect">
-            <a:avLst/>
-          </a:prstGeom>
-          <a:noFill/>
-          <a:ln/>
-        </p:spPr>
-        <p:txBody>
-          <a:bodyPr wrap="square" lIns="0" tIns="0" rIns="0" bIns="0" rtlCol="0" anchor="ctr"/>
-          <a:lstStyle/>
-          <a:p>
-            <a:pPr indent="0" marL="0">
-              <a:buNone/>
-            </a:pPr>
-            <a:r>
-              <a:rPr lang="en-US" sz="1800" b="1" dirty="0">
-                <a:solidFill>
-                  <a:schemeClr val="tx1"/>
-                </a:solidFill>
-              </a:rPr>
-              <a:t>Organizador de cables</a:t>
-            </a:r>
-            <a:endParaRPr lang="en-US" sz="1800" dirty="0"/>
-          </a:p>
-        </p:txBody>
-      </p:sp>
-      <p:sp>
-        <p:nvSpPr>
-          <p:cNvPr id="16" name="Text 13"/>
-          <p:cNvSpPr txBox="1"/>
-          <p:nvPr/>
-        </p:nvSpPr>
-        <p:spPr>
-          <a:xfrm>
-            <a:off x="777240" y="2971800"/>
-            <a:ext cx="3058058" cy="566928"/>
-          </a:xfrm>
-          <a:prstGeom prst="rect">
-            <a:avLst/>
-          </a:prstGeom>
-          <a:noFill/>
-          <a:ln/>
-        </p:spPr>
-        <p:txBody>
-          <a:bodyPr wrap="square" lIns="0" tIns="0" rIns="0" bIns="0" rtlCol="0" anchor="t"/>
-          <a:lstStyle/>
-          <a:p>
-            <a:pPr indent="0" marL="0">
-              <a:buNone/>
-            </a:pPr>
-            <a:r>
-              <a:rPr lang="en-US" sz="1400" dirty="0">
-                <a:solidFill>
-                  <a:schemeClr val="tx1"/>
-                </a:solidFill>
-              </a:rPr>
-              <a:t>Pieza de silicona que agrupa los cargadores y evita enredos.</a:t>
-            </a:r>
-            <a:endParaRPr lang="en-US" sz="1400" dirty="0"/>
-          </a:p>
-        </p:txBody>
-      </p:sp>
-      <p:sp>
-        <p:nvSpPr>
-          <p:cNvPr id="17" name="Text 14"/>
-          <p:cNvSpPr txBox="1"/>
-          <p:nvPr/>
-        </p:nvSpPr>
-        <p:spPr>
-          <a:xfrm>
-            <a:off x="777240" y="3520440"/>
-            <a:ext cx="3058058" cy="292608"/>
-          </a:xfrm>
-          <a:prstGeom prst="rect">
-            <a:avLst/>
-          </a:prstGeom>
-          <a:noFill/>
-          <a:ln/>
-        </p:spPr>
-        <p:txBody>
-          <a:bodyPr wrap="square" lIns="0" tIns="0" rIns="0" bIns="0" rtlCol="0" anchor="t"/>
-          <a:lstStyle/>
-          <a:p>
-            <a:pPr indent="0" marL="0">
-              <a:buNone/>
-            </a:pPr>
-            <a:r>
-              <a:rPr lang="en-US" sz="1200" b="1" i="1" dirty="0">
-                <a:solidFill>
-                  <a:schemeClr val="tx2"/>
-                </a:solidFill>
-              </a:rPr>
-              <a:t>Para: </a:t>
-            </a:r>
-            <a:pPr indent="0" marL="0">
-              <a:buNone/>
-            </a:pPr>
-            <a:r>
-              <a:rPr lang="en-US" sz="1200" i="1" dirty="0">
-                <a:solidFill>
-                  <a:schemeClr val="tx2"/>
-                </a:solidFill>
-              </a:rPr>
-              <a:t>Teletrabajadores y viajeros</a:t>
-            </a:r>
-            <a:endParaRPr lang="en-US" sz="1200" dirty="0"/>
-          </a:p>
-        </p:txBody>
-      </p:sp>
-      <p:sp>
-        <p:nvSpPr>
-          <p:cNvPr id="18" name="Cierre para alimentos"/>
-          <p:cNvSpPr/>
-          <p:nvPr/>
-        </p:nvSpPr>
-        <p:spPr>
-          <a:xfrm>
-            <a:off x="4338218" y="2057400"/>
-            <a:ext cx="3515258" cy="1828800"/>
-          </a:xfrm>
-          <a:prstGeom prst="roundRect">
-            <a:avLst>
-              <a:gd name="adj" fmla="val 7500"/>
-            </a:avLst>
-          </a:prstGeom>
-          <a:solidFill>
-            <a:schemeClr val="bg2"/>
-          </a:solidFill>
-          <a:ln/>
-        </p:spPr>
-      </p:sp>
-      <p:sp>
-        <p:nvSpPr>
-          <p:cNvPr id="19" name="Cierre para alimentos"/>
-          <p:cNvSpPr/>
-          <p:nvPr/>
-        </p:nvSpPr>
-        <p:spPr>
-          <a:xfrm>
-            <a:off x="4566818" y="2258568"/>
-            <a:ext cx="640080" cy="640080"/>
-          </a:xfrm>
-          <a:prstGeom prst="ellipse">
-            <a:avLst/>
-          </a:prstGeom>
-          <a:solidFill>
-            <a:schemeClr val="accent3"/>
-          </a:solidFill>
-          <a:ln/>
-        </p:spPr>
-      </p:sp>
-      <p:pic>
-        <p:nvPicPr>
-          <p:cNvPr id="20" name="Image 1" descr="Cierre para alimentos">    </p:cNvPr>
-          <p:cNvPicPr>
-            <a:picLocks noChangeAspect="1"/>
-          </p:cNvPicPr>
-          <p:nvPr/>
-        </p:nvPicPr>
-        <p:blipFill>
-          <a:blip r:embed="rId2"/>
-          <a:stretch>
-            <a:fillRect/>
-          </a:stretch>
-        </p:blipFill>
-        <p:spPr>
-          <a:xfrm>
-            <a:off x="4720438" y="2412187"/>
-            <a:ext cx="332842" cy="332842"/>
-          </a:xfrm>
-          <a:prstGeom prst="rect">
-            <a:avLst/>
-          </a:prstGeom>
-        </p:spPr>
-      </p:pic>
-      <p:sp>
-        <p:nvSpPr>
-          <p:cNvPr id="21" name="Text 17"/>
-          <p:cNvSpPr txBox="1"/>
-          <p:nvPr/>
-        </p:nvSpPr>
-        <p:spPr>
-          <a:xfrm>
-            <a:off x="5344058" y="2258568"/>
-            <a:ext cx="2326538" cy="640080"/>
-          </a:xfrm>
-          <a:prstGeom prst="rect">
-            <a:avLst/>
-          </a:prstGeom>
-          <a:noFill/>
-          <a:ln/>
-        </p:spPr>
-        <p:txBody>
-          <a:bodyPr wrap="square" lIns="0" tIns="0" rIns="0" bIns="0" rtlCol="0" anchor="ctr"/>
-          <a:lstStyle/>
-          <a:p>
-            <a:pPr indent="0" marL="0">
-              <a:buNone/>
-            </a:pPr>
-            <a:r>
-              <a:rPr lang="en-US" sz="1800" b="1" dirty="0">
-                <a:solidFill>
-                  <a:schemeClr val="tx1"/>
-                </a:solidFill>
-              </a:rPr>
-              <a:t>Cierre para alimentos</a:t>
-            </a:r>
-            <a:endParaRPr lang="en-US" sz="1800" dirty="0"/>
-          </a:p>
-        </p:txBody>
-      </p:sp>
-      <p:sp>
-        <p:nvSpPr>
-          <p:cNvPr id="22" name="Text 18"/>
-          <p:cNvSpPr txBox="1"/>
-          <p:nvPr/>
-        </p:nvSpPr>
-        <p:spPr>
-          <a:xfrm>
-            <a:off x="4566818" y="2971800"/>
-            <a:ext cx="3058058" cy="566928"/>
-          </a:xfrm>
-          <a:prstGeom prst="rect">
-            <a:avLst/>
-          </a:prstGeom>
-          <a:noFill/>
-          <a:ln/>
-        </p:spPr>
-        <p:txBody>
-          <a:bodyPr wrap="square" lIns="0" tIns="0" rIns="0" bIns="0" rtlCol="0" anchor="t"/>
-          <a:lstStyle/>
-          <a:p>
-            <a:pPr indent="0" marL="0">
-              <a:buNone/>
-            </a:pPr>
-            <a:r>
-              <a:rPr lang="en-US" sz="1400" dirty="0">
-                <a:solidFill>
-                  <a:schemeClr val="tx1"/>
-                </a:solidFill>
-              </a:rPr>
-              <a:t>Pinza grande y reutilizable que mantiene cerrados los envases abiertos.</a:t>
-            </a:r>
-            <a:endParaRPr lang="en-US" sz="1400" dirty="0"/>
-          </a:p>
-        </p:txBody>
-      </p:sp>
-      <p:sp>
-        <p:nvSpPr>
-          <p:cNvPr id="23" name="Text 19"/>
-          <p:cNvSpPr txBox="1"/>
-          <p:nvPr/>
-        </p:nvSpPr>
-        <p:spPr>
-          <a:xfrm>
-            <a:off x="4566818" y="3520440"/>
-            <a:ext cx="3058058" cy="292608"/>
-          </a:xfrm>
-          <a:prstGeom prst="rect">
-            <a:avLst/>
-          </a:prstGeom>
-          <a:noFill/>
-          <a:ln/>
-        </p:spPr>
-        <p:txBody>
-          <a:bodyPr wrap="square" lIns="0" tIns="0" rIns="0" bIns="0" rtlCol="0" anchor="t"/>
-          <a:lstStyle/>
-          <a:p>
-            <a:pPr indent="0" marL="0">
-              <a:buNone/>
-            </a:pPr>
-            <a:r>
-              <a:rPr lang="en-US" sz="1200" b="1" i="1" dirty="0">
-                <a:solidFill>
-                  <a:schemeClr val="tx2"/>
-                </a:solidFill>
-              </a:rPr>
-              <a:t>Para: </a:t>
-            </a:r>
-            <a:pPr indent="0" marL="0">
-              <a:buNone/>
-            </a:pPr>
-            <a:r>
-              <a:rPr lang="en-US" sz="1200" i="1" dirty="0">
-                <a:solidFill>
-                  <a:schemeClr val="tx2"/>
-                </a:solidFill>
-              </a:rPr>
-              <a:t>Familias y tiendas de alimentación</a:t>
-            </a:r>
-            <a:endParaRPr lang="en-US" sz="1200" dirty="0"/>
-          </a:p>
-        </p:txBody>
-      </p:sp>
-      <p:sp>
-        <p:nvSpPr>
-          <p:cNvPr id="24" name="Conectores para muebles"/>
-          <p:cNvSpPr/>
-          <p:nvPr/>
-        </p:nvSpPr>
-        <p:spPr>
-          <a:xfrm>
-            <a:off x="8127797" y="2057400"/>
-            <a:ext cx="3515258" cy="1828800"/>
-          </a:xfrm>
-          <a:prstGeom prst="roundRect">
-            <a:avLst>
-              <a:gd name="adj" fmla="val 7500"/>
-            </a:avLst>
-          </a:prstGeom>
-          <a:solidFill>
-            <a:schemeClr val="bg2"/>
-          </a:solidFill>
-          <a:ln/>
-        </p:spPr>
-      </p:sp>
-      <p:sp>
-        <p:nvSpPr>
-          <p:cNvPr id="25" name="Conectores para muebles"/>
-          <p:cNvSpPr/>
-          <p:nvPr/>
-        </p:nvSpPr>
-        <p:spPr>
-          <a:xfrm>
-            <a:off x="8356397" y="2258568"/>
-            <a:ext cx="640080" cy="640080"/>
-          </a:xfrm>
-          <a:prstGeom prst="ellipse">
-            <a:avLst/>
-          </a:prstGeom>
-          <a:solidFill>
-            <a:schemeClr val="tx2"/>
-          </a:solidFill>
-          <a:ln/>
-        </p:spPr>
-      </p:sp>
-      <p:pic>
-        <p:nvPicPr>
-          <p:cNvPr id="26" name="Image 2" descr="Conectores para muebles">    </p:cNvPr>
+          <p:cNvPr id="14" name="Image 0" descr="Organizador de cables"/>
           <p:cNvPicPr>
             <a:picLocks noChangeAspect="1"/>
           </p:cNvPicPr>
@@ -8629,7 +8205,7 @@
         </p:blipFill>
         <p:spPr>
           <a:xfrm>
-            <a:off x="8510016" y="2412187"/>
+            <a:off x="930859" y="2412187"/>
             <a:ext cx="332842" cy="332842"/>
           </a:xfrm>
           <a:prstGeom prst="rect">
@@ -8639,13 +8215,13 @@
       </p:pic>
       <p:sp>
         <p:nvSpPr>
-          <p:cNvPr id="27" name="Text 22"/>
+          <p:cNvPr id="15" name="Text 12"/>
           <p:cNvSpPr txBox="1"/>
           <p:nvPr/>
         </p:nvSpPr>
         <p:spPr>
           <a:xfrm>
-            <a:off x="9133637" y="2258568"/>
+            <a:off x="1554480" y="2258568"/>
             <a:ext cx="2326538" cy="640080"/>
           </a:xfrm>
           <a:prstGeom prst="rect">
@@ -8658,7 +8234,7 @@
           <a:bodyPr wrap="square" lIns="0" tIns="0" rIns="0" bIns="0" rtlCol="0" anchor="ctr"/>
           <a:lstStyle/>
           <a:p>
-            <a:pPr indent="0" marL="0">
+            <a:pPr marL="0" indent="0">
               <a:buNone/>
             </a:pPr>
             <a:r>
@@ -8667,7 +8243,7 @@
                   <a:schemeClr val="tx1"/>
                 </a:solidFill>
               </a:rPr>
-              <a:t>Conectores para muebles</a:t>
+              <a:t>Organizador de cables</a:t>
             </a:r>
             <a:endParaRPr lang="en-US" sz="1800" dirty="0"/>
           </a:p>
@@ -8675,13 +8251,13 @@
       </p:sp>
       <p:sp>
         <p:nvSpPr>
-          <p:cNvPr id="28" name="Text 23"/>
+          <p:cNvPr id="16" name="Text 13"/>
           <p:cNvSpPr txBox="1"/>
           <p:nvPr/>
         </p:nvSpPr>
         <p:spPr>
           <a:xfrm>
-            <a:off x="8356397" y="2971800"/>
+            <a:off x="777240" y="2971800"/>
             <a:ext cx="3058058" cy="566928"/>
           </a:xfrm>
           <a:prstGeom prst="rect">
@@ -8694,7 +8270,7 @@
           <a:bodyPr wrap="square" lIns="0" tIns="0" rIns="0" bIns="0" rtlCol="0" anchor="t"/>
           <a:lstStyle/>
           <a:p>
-            <a:pPr indent="0" marL="0">
+            <a:pPr marL="0" indent="0">
               <a:buNone/>
             </a:pPr>
             <a:r>
@@ -8703,7 +8279,7 @@
                   <a:schemeClr val="tx1"/>
                 </a:solidFill>
               </a:rPr>
-              <a:t>Piezas de presión para montar y desmontar estructuras sin tornillos.</a:t>
+              <a:t>Pieza de silicona que agrupa los cargadores y evita enredos.</a:t>
             </a:r>
             <a:endParaRPr lang="en-US" sz="1400" dirty="0"/>
           </a:p>
@@ -8711,13 +8287,13 @@
       </p:sp>
       <p:sp>
         <p:nvSpPr>
-          <p:cNvPr id="29" name="Text 24"/>
+          <p:cNvPr id="17" name="Text 14"/>
           <p:cNvSpPr txBox="1"/>
           <p:nvPr/>
         </p:nvSpPr>
         <p:spPr>
           <a:xfrm>
-            <a:off x="8356397" y="3520440"/>
+            <a:off x="777240" y="3520440"/>
             <a:ext cx="3058058" cy="292608"/>
           </a:xfrm>
           <a:prstGeom prst="rect">
@@ -8730,7 +8306,7 @@
           <a:bodyPr wrap="square" lIns="0" tIns="0" rIns="0" bIns="0" rtlCol="0" anchor="t"/>
           <a:lstStyle/>
           <a:p>
-            <a:pPr indent="0" marL="0">
+            <a:pPr marL="0" indent="0">
               <a:buNone/>
             </a:pPr>
             <a:r>
@@ -8741,16 +8317,13 @@
               </a:rPr>
               <a:t>Para: </a:t>
             </a:r>
-            <a:pPr indent="0" marL="0">
-              <a:buNone/>
-            </a:pPr>
             <a:r>
               <a:rPr lang="en-US" sz="1200" i="1" dirty="0">
                 <a:solidFill>
                   <a:schemeClr val="tx2"/>
                 </a:solidFill>
               </a:rPr>
-              <a:t>Feriantes y pequeños comercios</a:t>
+              <a:t>Teletrabajadores y viajeros</a:t>
             </a:r>
             <a:endParaRPr lang="en-US" sz="1200" dirty="0"/>
           </a:p>
@@ -8758,13 +8331,13 @@
       </p:sp>
       <p:sp>
         <p:nvSpPr>
-          <p:cNvPr id="30" name="Sujetaplantas"/>
+          <p:cNvPr id="18" name="Cierre para alimentos"/>
           <p:cNvSpPr/>
           <p:nvPr/>
         </p:nvSpPr>
         <p:spPr>
           <a:xfrm>
-            <a:off x="548640" y="4069080"/>
+            <a:off x="4338218" y="2057400"/>
             <a:ext cx="3515258" cy="1828800"/>
           </a:xfrm>
           <a:prstGeom prst="roundRect">
@@ -8780,13 +8353,13 @@
       </p:sp>
       <p:sp>
         <p:nvSpPr>
-          <p:cNvPr id="31" name="Sujetaplantas"/>
+          <p:cNvPr id="19" name="Cierre para alimentos"/>
           <p:cNvSpPr/>
           <p:nvPr/>
         </p:nvSpPr>
         <p:spPr>
           <a:xfrm>
-            <a:off x="777240" y="4270248"/>
+            <a:off x="4566818" y="2258568"/>
             <a:ext cx="640080" cy="640080"/>
           </a:xfrm>
           <a:prstGeom prst="ellipse">
@@ -8800,7 +8373,7 @@
       </p:sp>
       <p:pic>
         <p:nvPicPr>
-          <p:cNvPr id="32" name="Image 3" descr="Sujetaplantas">    </p:cNvPr>
+          <p:cNvPr id="20" name="Image 1" descr="Cierre para alimentos"/>
           <p:cNvPicPr>
             <a:picLocks noChangeAspect="1"/>
           </p:cNvPicPr>
@@ -8814,7 +8387,7 @@
         </p:blipFill>
         <p:spPr>
           <a:xfrm>
-            <a:off x="930859" y="4423867"/>
+            <a:off x="4720438" y="2412187"/>
             <a:ext cx="332842" cy="332842"/>
           </a:xfrm>
           <a:prstGeom prst="rect">
@@ -8824,13 +8397,13 @@
       </p:pic>
       <p:sp>
         <p:nvSpPr>
-          <p:cNvPr id="33" name="Text 27"/>
+          <p:cNvPr id="21" name="Text 17"/>
           <p:cNvSpPr txBox="1"/>
           <p:nvPr/>
         </p:nvSpPr>
         <p:spPr>
           <a:xfrm>
-            <a:off x="1554480" y="4270248"/>
+            <a:off x="5344058" y="2258568"/>
             <a:ext cx="2326538" cy="640080"/>
           </a:xfrm>
           <a:prstGeom prst="rect">
@@ -8843,7 +8416,7 @@
           <a:bodyPr wrap="square" lIns="0" tIns="0" rIns="0" bIns="0" rtlCol="0" anchor="ctr"/>
           <a:lstStyle/>
           <a:p>
-            <a:pPr indent="0" marL="0">
+            <a:pPr marL="0" indent="0">
               <a:buNone/>
             </a:pPr>
             <a:r>
@@ -8852,7 +8425,7 @@
                   <a:schemeClr val="tx1"/>
                 </a:solidFill>
               </a:rPr>
-              <a:t>Sujetaplantas</a:t>
+              <a:t>Cierre para alimentos</a:t>
             </a:r>
             <a:endParaRPr lang="en-US" sz="1800" dirty="0"/>
           </a:p>
@@ -8860,13 +8433,13 @@
       </p:sp>
       <p:sp>
         <p:nvSpPr>
-          <p:cNvPr id="34" name="Text 28"/>
+          <p:cNvPr id="22" name="Text 18"/>
           <p:cNvSpPr txBox="1"/>
           <p:nvPr/>
         </p:nvSpPr>
         <p:spPr>
           <a:xfrm>
-            <a:off x="777240" y="4983480"/>
+            <a:off x="4566818" y="2971800"/>
             <a:ext cx="3058058" cy="566928"/>
           </a:xfrm>
           <a:prstGeom prst="rect">
@@ -8879,7 +8452,7 @@
           <a:bodyPr wrap="square" lIns="0" tIns="0" rIns="0" bIns="0" rtlCol="0" anchor="t"/>
           <a:lstStyle/>
           <a:p>
-            <a:pPr indent="0" marL="0">
+            <a:pPr marL="0" indent="0">
               <a:buNone/>
             </a:pPr>
             <a:r>
@@ -8888,7 +8461,7 @@
                   <a:schemeClr val="tx1"/>
                 </a:solidFill>
               </a:rPr>
-              <a:t>Abrazadera que guía los tallos sin dañarlos.</a:t>
+              <a:t>Pinza grande y reutilizable que mantiene cerrados los envases abiertos.</a:t>
             </a:r>
             <a:endParaRPr lang="en-US" sz="1400" dirty="0"/>
           </a:p>
@@ -8896,13 +8469,13 @@
       </p:sp>
       <p:sp>
         <p:nvSpPr>
-          <p:cNvPr id="35" name="Text 29"/>
+          <p:cNvPr id="23" name="Text 19"/>
           <p:cNvSpPr txBox="1"/>
           <p:nvPr/>
         </p:nvSpPr>
         <p:spPr>
           <a:xfrm>
-            <a:off x="777240" y="5532120"/>
+            <a:off x="4566818" y="3520440"/>
             <a:ext cx="3058058" cy="292608"/>
           </a:xfrm>
           <a:prstGeom prst="rect">
@@ -8915,7 +8488,7 @@
           <a:bodyPr wrap="square" lIns="0" tIns="0" rIns="0" bIns="0" rtlCol="0" anchor="t"/>
           <a:lstStyle/>
           <a:p>
-            <a:pPr indent="0" marL="0">
+            <a:pPr marL="0" indent="0">
               <a:buNone/>
             </a:pPr>
             <a:r>
@@ -8926,16 +8499,13 @@
               </a:rPr>
               <a:t>Para: </a:t>
             </a:r>
-            <a:pPr indent="0" marL="0">
-              <a:buNone/>
-            </a:pPr>
             <a:r>
               <a:rPr lang="en-US" sz="1200" i="1" dirty="0">
                 <a:solidFill>
                   <a:schemeClr val="tx2"/>
                 </a:solidFill>
               </a:rPr>
-              <a:t>Jardinería y viveros</a:t>
+              <a:t>Familias y tiendas de alimentación</a:t>
             </a:r>
             <a:endParaRPr lang="en-US" sz="1200" dirty="0"/>
           </a:p>
@@ -8943,13 +8513,13 @@
       </p:sp>
       <p:sp>
         <p:nvSpPr>
-          <p:cNvPr id="36" name="Soporte para el móvil"/>
+          <p:cNvPr id="24" name="Conectores para muebles"/>
           <p:cNvSpPr/>
           <p:nvPr/>
         </p:nvSpPr>
         <p:spPr>
           <a:xfrm>
-            <a:off x="4338218" y="4069080"/>
+            <a:off x="8127797" y="2057400"/>
             <a:ext cx="3515258" cy="1828800"/>
           </a:xfrm>
           <a:prstGeom prst="roundRect">
@@ -8965,27 +8535,27 @@
       </p:sp>
       <p:sp>
         <p:nvSpPr>
-          <p:cNvPr id="37" name="Soporte para el móvil"/>
+          <p:cNvPr id="25" name="Conectores para muebles"/>
           <p:cNvSpPr/>
           <p:nvPr/>
         </p:nvSpPr>
         <p:spPr>
           <a:xfrm>
-            <a:off x="4566818" y="4270248"/>
+            <a:off x="8356397" y="2258568"/>
             <a:ext cx="640080" cy="640080"/>
           </a:xfrm>
           <a:prstGeom prst="ellipse">
             <a:avLst/>
           </a:prstGeom>
           <a:solidFill>
-            <a:schemeClr val="accent4"/>
+            <a:schemeClr val="tx2"/>
           </a:solidFill>
           <a:ln/>
         </p:spPr>
       </p:sp>
       <p:pic>
         <p:nvPicPr>
-          <p:cNvPr id="38" name="Image 4" descr="Soporte para el móvil">    </p:cNvPr>
+          <p:cNvPr id="26" name="Image 2" descr="Conectores para muebles"/>
           <p:cNvPicPr>
             <a:picLocks noChangeAspect="1"/>
           </p:cNvPicPr>
@@ -8999,7 +8569,7 @@
         </p:blipFill>
         <p:spPr>
           <a:xfrm>
-            <a:off x="4720438" y="4423867"/>
+            <a:off x="8510016" y="2412187"/>
             <a:ext cx="332842" cy="332842"/>
           </a:xfrm>
           <a:prstGeom prst="rect">
@@ -9009,13 +8579,13 @@
       </p:pic>
       <p:sp>
         <p:nvSpPr>
-          <p:cNvPr id="39" name="Text 32"/>
+          <p:cNvPr id="27" name="Text 22"/>
           <p:cNvSpPr txBox="1"/>
           <p:nvPr/>
         </p:nvSpPr>
         <p:spPr>
           <a:xfrm>
-            <a:off x="5344058" y="4270248"/>
+            <a:off x="9133637" y="2258568"/>
             <a:ext cx="2326538" cy="640080"/>
           </a:xfrm>
           <a:prstGeom prst="rect">
@@ -9028,7 +8598,7 @@
           <a:bodyPr wrap="square" lIns="0" tIns="0" rIns="0" bIns="0" rtlCol="0" anchor="ctr"/>
           <a:lstStyle/>
           <a:p>
-            <a:pPr indent="0" marL="0">
+            <a:pPr marL="0" indent="0">
               <a:buNone/>
             </a:pPr>
             <a:r>
@@ -9037,7 +8607,7 @@
                   <a:schemeClr val="tx1"/>
                 </a:solidFill>
               </a:rPr>
-              <a:t>Soporte para el móvil</a:t>
+              <a:t>Conectores para muebles</a:t>
             </a:r>
             <a:endParaRPr lang="en-US" sz="1800" dirty="0"/>
           </a:p>
@@ -9045,13 +8615,13 @@
       </p:sp>
       <p:sp>
         <p:nvSpPr>
-          <p:cNvPr id="40" name="Text 33"/>
+          <p:cNvPr id="28" name="Text 23"/>
           <p:cNvSpPr txBox="1"/>
           <p:nvPr/>
         </p:nvSpPr>
         <p:spPr>
           <a:xfrm>
-            <a:off x="4566818" y="4983480"/>
+            <a:off x="8356397" y="2971800"/>
             <a:ext cx="3058058" cy="566928"/>
           </a:xfrm>
           <a:prstGeom prst="rect">
@@ -9064,7 +8634,7 @@
           <a:bodyPr wrap="square" lIns="0" tIns="0" rIns="0" bIns="0" rtlCol="0" anchor="t"/>
           <a:lstStyle/>
           <a:p>
-            <a:pPr indent="0" marL="0">
+            <a:pPr marL="0" indent="0">
               <a:buNone/>
             </a:pPr>
             <a:r>
@@ -9073,7 +8643,7 @@
                   <a:schemeClr val="tx1"/>
                 </a:solidFill>
               </a:rPr>
-              <a:t>Alambre flexible recubierto que mantiene el teléfono inclinado.</a:t>
+              <a:t>Piezas de presión para montar y desmontar estructuras sin tornillos.</a:t>
             </a:r>
             <a:endParaRPr lang="en-US" sz="1400" dirty="0"/>
           </a:p>
@@ -9081,13 +8651,13 @@
       </p:sp>
       <p:sp>
         <p:nvSpPr>
-          <p:cNvPr id="41" name="Text 34"/>
+          <p:cNvPr id="29" name="Text 24"/>
           <p:cNvSpPr txBox="1"/>
           <p:nvPr/>
         </p:nvSpPr>
         <p:spPr>
           <a:xfrm>
-            <a:off x="4566818" y="5532120"/>
+            <a:off x="8356397" y="3520440"/>
             <a:ext cx="3058058" cy="292608"/>
           </a:xfrm>
           <a:prstGeom prst="rect">
@@ -9100,7 +8670,7 @@
           <a:bodyPr wrap="square" lIns="0" tIns="0" rIns="0" bIns="0" rtlCol="0" anchor="t"/>
           <a:lstStyle/>
           <a:p>
-            <a:pPr indent="0" marL="0">
+            <a:pPr marL="0" indent="0">
               <a:buNone/>
             </a:pPr>
             <a:r>
@@ -9111,16 +8681,13 @@
               </a:rPr>
               <a:t>Para: </a:t>
             </a:r>
-            <a:pPr indent="0" marL="0">
-              <a:buNone/>
-            </a:pPr>
             <a:r>
               <a:rPr lang="en-US" sz="1200" i="1" dirty="0">
                 <a:solidFill>
                   <a:schemeClr val="tx2"/>
                 </a:solidFill>
               </a:rPr>
-              <a:t>Estudiantes y profesionales</a:t>
+              <a:t>Feriantes y pequeños comercios</a:t>
             </a:r>
             <a:endParaRPr lang="en-US" sz="1200" dirty="0"/>
           </a:p>
@@ -9128,13 +8695,13 @@
       </p:sp>
       <p:sp>
         <p:nvSpPr>
-          <p:cNvPr id="42" name="Carteles sin agujeros"/>
+          <p:cNvPr id="30" name="Sujetaplantas"/>
           <p:cNvSpPr/>
           <p:nvPr/>
         </p:nvSpPr>
         <p:spPr>
           <a:xfrm>
-            <a:off x="8127797" y="4069080"/>
+            <a:off x="548640" y="4069080"/>
             <a:ext cx="3515258" cy="1828800"/>
           </a:xfrm>
           <a:prstGeom prst="roundRect">
@@ -9150,27 +8717,27 @@
       </p:sp>
       <p:sp>
         <p:nvSpPr>
-          <p:cNvPr id="43" name="Carteles sin agujeros"/>
+          <p:cNvPr id="31" name="Sujetaplantas"/>
           <p:cNvSpPr/>
           <p:nvPr/>
         </p:nvSpPr>
         <p:spPr>
           <a:xfrm>
-            <a:off x="8356397" y="4270248"/>
+            <a:off x="777240" y="4270248"/>
             <a:ext cx="640080" cy="640080"/>
           </a:xfrm>
           <a:prstGeom prst="ellipse">
             <a:avLst/>
           </a:prstGeom>
           <a:solidFill>
-            <a:schemeClr val="tx2"/>
+            <a:schemeClr val="accent3"/>
           </a:solidFill>
           <a:ln/>
         </p:spPr>
       </p:sp>
       <p:pic>
         <p:nvPicPr>
-          <p:cNvPr id="44" name="Image 5" descr="Carteles sin agujeros">    </p:cNvPr>
+          <p:cNvPr id="32" name="Image 3" descr="Sujetaplantas"/>
           <p:cNvPicPr>
             <a:picLocks noChangeAspect="1"/>
           </p:cNvPicPr>
@@ -9184,6 +8751,370 @@
         </p:blipFill>
         <p:spPr>
           <a:xfrm>
+            <a:off x="930859" y="4423867"/>
+            <a:ext cx="332842" cy="332842"/>
+          </a:xfrm>
+          <a:prstGeom prst="rect">
+            <a:avLst/>
+          </a:prstGeom>
+        </p:spPr>
+      </p:pic>
+      <p:sp>
+        <p:nvSpPr>
+          <p:cNvPr id="33" name="Text 27"/>
+          <p:cNvSpPr txBox="1"/>
+          <p:nvPr/>
+        </p:nvSpPr>
+        <p:spPr>
+          <a:xfrm>
+            <a:off x="1554480" y="4270248"/>
+            <a:ext cx="2326538" cy="640080"/>
+          </a:xfrm>
+          <a:prstGeom prst="rect">
+            <a:avLst/>
+          </a:prstGeom>
+          <a:noFill/>
+          <a:ln/>
+        </p:spPr>
+        <p:txBody>
+          <a:bodyPr wrap="square" lIns="0" tIns="0" rIns="0" bIns="0" rtlCol="0" anchor="ctr"/>
+          <a:lstStyle/>
+          <a:p>
+            <a:pPr marL="0" indent="0">
+              <a:buNone/>
+            </a:pPr>
+            <a:r>
+              <a:rPr lang="en-US" sz="1800" b="1" dirty="0">
+                <a:solidFill>
+                  <a:schemeClr val="tx1"/>
+                </a:solidFill>
+              </a:rPr>
+              <a:t>Sujetaplantas</a:t>
+            </a:r>
+            <a:endParaRPr lang="en-US" sz="1800" dirty="0"/>
+          </a:p>
+        </p:txBody>
+      </p:sp>
+      <p:sp>
+        <p:nvSpPr>
+          <p:cNvPr id="34" name="Text 28"/>
+          <p:cNvSpPr txBox="1"/>
+          <p:nvPr/>
+        </p:nvSpPr>
+        <p:spPr>
+          <a:xfrm>
+            <a:off x="777240" y="4983480"/>
+            <a:ext cx="3058058" cy="566928"/>
+          </a:xfrm>
+          <a:prstGeom prst="rect">
+            <a:avLst/>
+          </a:prstGeom>
+          <a:noFill/>
+          <a:ln/>
+        </p:spPr>
+        <p:txBody>
+          <a:bodyPr wrap="square" lIns="0" tIns="0" rIns="0" bIns="0" rtlCol="0" anchor="t"/>
+          <a:lstStyle/>
+          <a:p>
+            <a:pPr marL="0" indent="0">
+              <a:buNone/>
+            </a:pPr>
+            <a:r>
+              <a:rPr lang="en-US" sz="1400" dirty="0">
+                <a:solidFill>
+                  <a:schemeClr val="tx1"/>
+                </a:solidFill>
+              </a:rPr>
+              <a:t>Abrazadera que guía los tallos sin dañarlos.</a:t>
+            </a:r>
+            <a:endParaRPr lang="en-US" sz="1400" dirty="0"/>
+          </a:p>
+        </p:txBody>
+      </p:sp>
+      <p:sp>
+        <p:nvSpPr>
+          <p:cNvPr id="35" name="Text 29"/>
+          <p:cNvSpPr txBox="1"/>
+          <p:nvPr/>
+        </p:nvSpPr>
+        <p:spPr>
+          <a:xfrm>
+            <a:off x="777240" y="5532120"/>
+            <a:ext cx="3058058" cy="292608"/>
+          </a:xfrm>
+          <a:prstGeom prst="rect">
+            <a:avLst/>
+          </a:prstGeom>
+          <a:noFill/>
+          <a:ln/>
+        </p:spPr>
+        <p:txBody>
+          <a:bodyPr wrap="square" lIns="0" tIns="0" rIns="0" bIns="0" rtlCol="0" anchor="t"/>
+          <a:lstStyle/>
+          <a:p>
+            <a:pPr marL="0" indent="0">
+              <a:buNone/>
+            </a:pPr>
+            <a:r>
+              <a:rPr lang="en-US" sz="1200" b="1" i="1" dirty="0">
+                <a:solidFill>
+                  <a:schemeClr val="tx2"/>
+                </a:solidFill>
+              </a:rPr>
+              <a:t>Para: </a:t>
+            </a:r>
+            <a:r>
+              <a:rPr lang="en-US" sz="1200" i="1" dirty="0">
+                <a:solidFill>
+                  <a:schemeClr val="tx2"/>
+                </a:solidFill>
+              </a:rPr>
+              <a:t>Jardinería y viveros</a:t>
+            </a:r>
+            <a:endParaRPr lang="en-US" sz="1200" dirty="0"/>
+          </a:p>
+        </p:txBody>
+      </p:sp>
+      <p:sp>
+        <p:nvSpPr>
+          <p:cNvPr id="36" name="Soporte para el móvil"/>
+          <p:cNvSpPr/>
+          <p:nvPr/>
+        </p:nvSpPr>
+        <p:spPr>
+          <a:xfrm>
+            <a:off x="4338218" y="4069080"/>
+            <a:ext cx="3515258" cy="1828800"/>
+          </a:xfrm>
+          <a:prstGeom prst="roundRect">
+            <a:avLst>
+              <a:gd name="adj" fmla="val 7500"/>
+            </a:avLst>
+          </a:prstGeom>
+          <a:solidFill>
+            <a:schemeClr val="bg2"/>
+          </a:solidFill>
+          <a:ln/>
+        </p:spPr>
+      </p:sp>
+      <p:sp>
+        <p:nvSpPr>
+          <p:cNvPr id="37" name="Soporte para el móvil"/>
+          <p:cNvSpPr/>
+          <p:nvPr/>
+        </p:nvSpPr>
+        <p:spPr>
+          <a:xfrm>
+            <a:off x="4566818" y="4270248"/>
+            <a:ext cx="640080" cy="640080"/>
+          </a:xfrm>
+          <a:prstGeom prst="ellipse">
+            <a:avLst/>
+          </a:prstGeom>
+          <a:solidFill>
+            <a:schemeClr val="accent4"/>
+          </a:solidFill>
+          <a:ln/>
+        </p:spPr>
+      </p:sp>
+      <p:pic>
+        <p:nvPicPr>
+          <p:cNvPr id="38" name="Image 4" descr="Soporte para el móvil"/>
+          <p:cNvPicPr>
+            <a:picLocks noChangeAspect="1"/>
+          </p:cNvPicPr>
+          <p:nvPr/>
+        </p:nvPicPr>
+        <p:blipFill>
+          <a:blip r:embed="rId7"/>
+          <a:stretch>
+            <a:fillRect/>
+          </a:stretch>
+        </p:blipFill>
+        <p:spPr>
+          <a:xfrm>
+            <a:off x="4720438" y="4423867"/>
+            <a:ext cx="332842" cy="332842"/>
+          </a:xfrm>
+          <a:prstGeom prst="rect">
+            <a:avLst/>
+          </a:prstGeom>
+        </p:spPr>
+      </p:pic>
+      <p:sp>
+        <p:nvSpPr>
+          <p:cNvPr id="39" name="Text 32"/>
+          <p:cNvSpPr txBox="1"/>
+          <p:nvPr/>
+        </p:nvSpPr>
+        <p:spPr>
+          <a:xfrm>
+            <a:off x="5344058" y="4270248"/>
+            <a:ext cx="2326538" cy="640080"/>
+          </a:xfrm>
+          <a:prstGeom prst="rect">
+            <a:avLst/>
+          </a:prstGeom>
+          <a:noFill/>
+          <a:ln/>
+        </p:spPr>
+        <p:txBody>
+          <a:bodyPr wrap="square" lIns="0" tIns="0" rIns="0" bIns="0" rtlCol="0" anchor="ctr"/>
+          <a:lstStyle/>
+          <a:p>
+            <a:pPr marL="0" indent="0">
+              <a:buNone/>
+            </a:pPr>
+            <a:r>
+              <a:rPr lang="en-US" sz="1800" b="1" dirty="0">
+                <a:solidFill>
+                  <a:schemeClr val="tx1"/>
+                </a:solidFill>
+              </a:rPr>
+              <a:t>Soporte para el móvil</a:t>
+            </a:r>
+            <a:endParaRPr lang="en-US" sz="1800" dirty="0"/>
+          </a:p>
+        </p:txBody>
+      </p:sp>
+      <p:sp>
+        <p:nvSpPr>
+          <p:cNvPr id="40" name="Text 33"/>
+          <p:cNvSpPr txBox="1"/>
+          <p:nvPr/>
+        </p:nvSpPr>
+        <p:spPr>
+          <a:xfrm>
+            <a:off x="4566818" y="4983480"/>
+            <a:ext cx="3058058" cy="566928"/>
+          </a:xfrm>
+          <a:prstGeom prst="rect">
+            <a:avLst/>
+          </a:prstGeom>
+          <a:noFill/>
+          <a:ln/>
+        </p:spPr>
+        <p:txBody>
+          <a:bodyPr wrap="square" lIns="0" tIns="0" rIns="0" bIns="0" rtlCol="0" anchor="t"/>
+          <a:lstStyle/>
+          <a:p>
+            <a:pPr marL="0" indent="0">
+              <a:buNone/>
+            </a:pPr>
+            <a:r>
+              <a:rPr lang="en-US" sz="1400" dirty="0">
+                <a:solidFill>
+                  <a:schemeClr val="tx1"/>
+                </a:solidFill>
+              </a:rPr>
+              <a:t>Alambre flexible recubierto que mantiene el teléfono inclinado.</a:t>
+            </a:r>
+            <a:endParaRPr lang="en-US" sz="1400" dirty="0"/>
+          </a:p>
+        </p:txBody>
+      </p:sp>
+      <p:sp>
+        <p:nvSpPr>
+          <p:cNvPr id="41" name="Text 34"/>
+          <p:cNvSpPr txBox="1"/>
+          <p:nvPr/>
+        </p:nvSpPr>
+        <p:spPr>
+          <a:xfrm>
+            <a:off x="4566818" y="5532120"/>
+            <a:ext cx="3058058" cy="292608"/>
+          </a:xfrm>
+          <a:prstGeom prst="rect">
+            <a:avLst/>
+          </a:prstGeom>
+          <a:noFill/>
+          <a:ln/>
+        </p:spPr>
+        <p:txBody>
+          <a:bodyPr wrap="square" lIns="0" tIns="0" rIns="0" bIns="0" rtlCol="0" anchor="t"/>
+          <a:lstStyle/>
+          <a:p>
+            <a:pPr marL="0" indent="0">
+              <a:buNone/>
+            </a:pPr>
+            <a:r>
+              <a:rPr lang="en-US" sz="1200" b="1" i="1" dirty="0">
+                <a:solidFill>
+                  <a:schemeClr val="tx2"/>
+                </a:solidFill>
+              </a:rPr>
+              <a:t>Para: </a:t>
+            </a:r>
+            <a:r>
+              <a:rPr lang="en-US" sz="1200" i="1" dirty="0">
+                <a:solidFill>
+                  <a:schemeClr val="tx2"/>
+                </a:solidFill>
+              </a:rPr>
+              <a:t>Estudiantes y profesionales</a:t>
+            </a:r>
+            <a:endParaRPr lang="en-US" sz="1200" dirty="0"/>
+          </a:p>
+        </p:txBody>
+      </p:sp>
+      <p:sp>
+        <p:nvSpPr>
+          <p:cNvPr id="42" name="Carteles sin agujeros"/>
+          <p:cNvSpPr/>
+          <p:nvPr/>
+        </p:nvSpPr>
+        <p:spPr>
+          <a:xfrm>
+            <a:off x="8127797" y="4069080"/>
+            <a:ext cx="3515258" cy="1828800"/>
+          </a:xfrm>
+          <a:prstGeom prst="roundRect">
+            <a:avLst>
+              <a:gd name="adj" fmla="val 7500"/>
+            </a:avLst>
+          </a:prstGeom>
+          <a:solidFill>
+            <a:schemeClr val="bg2"/>
+          </a:solidFill>
+          <a:ln/>
+        </p:spPr>
+      </p:sp>
+      <p:sp>
+        <p:nvSpPr>
+          <p:cNvPr id="43" name="Carteles sin agujeros"/>
+          <p:cNvSpPr/>
+          <p:nvPr/>
+        </p:nvSpPr>
+        <p:spPr>
+          <a:xfrm>
+            <a:off x="8356397" y="4270248"/>
+            <a:ext cx="640080" cy="640080"/>
+          </a:xfrm>
+          <a:prstGeom prst="ellipse">
+            <a:avLst/>
+          </a:prstGeom>
+          <a:solidFill>
+            <a:schemeClr val="tx2"/>
+          </a:solidFill>
+          <a:ln/>
+        </p:spPr>
+      </p:sp>
+      <p:pic>
+        <p:nvPicPr>
+          <p:cNvPr id="44" name="Image 5" descr="Carteles sin agujeros"/>
+          <p:cNvPicPr>
+            <a:picLocks noChangeAspect="1"/>
+          </p:cNvPicPr>
+          <p:nvPr/>
+        </p:nvPicPr>
+        <p:blipFill>
+          <a:blip r:embed="rId8"/>
+          <a:stretch>
+            <a:fillRect/>
+          </a:stretch>
+        </p:blipFill>
+        <p:spPr>
+          <a:xfrm>
             <a:off x="8510016" y="4423867"/>
             <a:ext cx="332842" cy="332842"/>
           </a:xfrm>
@@ -9213,7 +9144,7 @@
           <a:bodyPr wrap="square" lIns="0" tIns="0" rIns="0" bIns="0" rtlCol="0" anchor="ctr"/>
           <a:lstStyle/>
           <a:p>
-            <a:pPr indent="0" marL="0">
+            <a:pPr marL="0" indent="0">
               <a:buNone/>
             </a:pPr>
             <a:r>
@@ -9249,7 +9180,7 @@
           <a:bodyPr wrap="square" lIns="0" tIns="0" rIns="0" bIns="0" rtlCol="0" anchor="t"/>
           <a:lstStyle/>
           <a:p>
-            <a:pPr indent="0" marL="0">
+            <a:pPr marL="0" indent="0">
               <a:buNone/>
             </a:pPr>
             <a:r>
@@ -9285,7 +9216,7 @@
           <a:bodyPr wrap="square" lIns="0" tIns="0" rIns="0" bIns="0" rtlCol="0" anchor="t"/>
           <a:lstStyle/>
           <a:p>
-            <a:pPr indent="0" marL="0">
+            <a:pPr marL="0" indent="0">
               <a:buNone/>
             </a:pPr>
             <a:r>
@@ -9296,9 +9227,6 @@
               </a:rPr>
               <a:t>Para: </a:t>
             </a:r>
-            <a:pPr indent="0" marL="0">
-              <a:buNone/>
-            </a:pPr>
             <a:r>
               <a:rPr lang="en-US" sz="1200" i="1" dirty="0">
                 <a:solidFill>
@@ -9332,7 +9260,7 @@
           <a:bodyPr wrap="square" lIns="0" tIns="0" rIns="0" bIns="0" rtlCol="0" anchor="ctr"/>
           <a:lstStyle/>
           <a:p>
-            <a:pPr indent="0" marL="0">
+            <a:pPr marL="0" indent="0">
               <a:buNone/>
             </a:pPr>
             <a:r>
@@ -9349,7 +9277,7 @@
       </p:sp>
       <p:sp>
         <p:nvSpPr>
-          <p:cNvPr id="25" name="Slide Number Placeholder 0"/>
+          <p:cNvPr id="49" name="Slide Number Placeholder 0"/>
           <p:cNvSpPr>
             <a:spLocks noGrp="1"/>
           </p:cNvSpPr>
@@ -9367,7 +9295,7 @@
           </a:prstGeom>
           <a:extLst>
             <a:ext uri="{C572A759-6A51-4108-AA02-DFA0A04FC94B}">
-              <ma14:wrappingTextBoxFlag xmlns:ma14="http://schemas.microsoft.com/office/mac/drawingml/2011/main" val="0"/>
+              <ma14:wrappingTextBoxFlag xmlns:ma14="http://schemas.microsoft.com/office/mac/drawingml/2011/main" xmlns="" val="0"/>
             </a:ext>
           </a:extLst>
         </p:spPr>
@@ -9385,7 +9313,7 @@
           <a:p>
             <a:pPr algn="r"/>
             <a:fld id="{F7021451-1387-4CA6-816F-3879F97B5CBC}" type="slidenum">
-              <a:rPr b="0" lang="en-US"/>
+              <a:rPr lang="en-US" b="0"/>
               <a:t>17</a:t>
             </a:fld>
             <a:endParaRPr lang="en-US"/>
@@ -9420,9 +9348,11 @@
       <p:sp>
         <p:nvSpPr>
           <p:cNvPr id="2" name="Text 0"/>
-          <p:cNvSpPr/>
+          <p:cNvSpPr>
+            <a:spLocks noGrp="1"/>
+          </p:cNvSpPr>
           <p:nvPr>
-            <p:ph idx="100" type="title" hasCustomPrompt="1"/>
+            <p:ph type="title" idx="100" hasCustomPrompt="1"/>
           </p:nvPr>
         </p:nvSpPr>
         <p:spPr>
@@ -9440,7 +9370,7 @@
           <a:bodyPr wrap="square" lIns="0" tIns="0" rIns="0" bIns="0" rtlCol="0" anchor="ctr"/>
           <a:lstStyle/>
           <a:p>
-            <a:pPr algn="l" indent="0" marL="0">
+            <a:pPr marL="0" indent="0" algn="l">
               <a:buNone/>
             </a:pPr>
             <a:r>
@@ -9498,7 +9428,7 @@
           <a:bodyPr wrap="square" lIns="0" tIns="0" rIns="0" bIns="0" rtlCol="0" anchor="ctr"/>
           <a:lstStyle/>
           <a:p>
-            <a:pPr algn="ctr" indent="0" marL="0">
+            <a:pPr marL="0" indent="0" algn="ctr">
               <a:buNone/>
             </a:pPr>
             <a:r>
@@ -10017,14 +9947,14 @@
       </p:sp>
       <p:pic>
         <p:nvPicPr>
-          <p:cNvPr id="28" name="Image 0" descr="Idea elegida">    </p:cNvPr>
+          <p:cNvPr id="28" name="Image 0" descr="Idea elegida"/>
           <p:cNvPicPr>
             <a:picLocks noChangeAspect="1"/>
           </p:cNvPicPr>
           <p:nvPr/>
         </p:nvPicPr>
         <p:blipFill>
-          <a:blip r:embed="rId1"/>
+          <a:blip r:embed="rId3"/>
           <a:stretch>
             <a:fillRect/>
           </a:stretch>
@@ -10060,7 +9990,7 @@
           <a:bodyPr wrap="square" lIns="0" tIns="0" rIns="0" bIns="0" rtlCol="0" anchor="ctr"/>
           <a:lstStyle/>
           <a:p>
-            <a:pPr algn="ctr" indent="0" marL="0">
+            <a:pPr marL="0" indent="0" algn="ctr">
               <a:buNone/>
             </a:pPr>
             <a:r>
@@ -10096,7 +10026,7 @@
           <a:bodyPr wrap="square" lIns="0" tIns="0" rIns="0" bIns="0" rtlCol="0" anchor="t"/>
           <a:lstStyle/>
           <a:p>
-            <a:pPr indent="0" marL="0">
+            <a:pPr marL="0" indent="0">
               <a:buNone/>
             </a:pPr>
             <a:r>
@@ -10110,7 +10040,7 @@
             <a:endParaRPr lang="en-US" sz="1600" dirty="0"/>
           </a:p>
           <a:p>
-            <a:pPr indent="0" marL="0">
+            <a:pPr marL="0" indent="0">
               <a:buNone/>
             </a:pPr>
             <a:r>
@@ -10146,7 +10076,7 @@
           <a:bodyPr wrap="square" lIns="0" tIns="0" rIns="0" bIns="0" rtlCol="0" anchor="t"/>
           <a:lstStyle/>
           <a:p>
-            <a:pPr indent="0" marL="0">
+            <a:pPr marL="0" indent="0">
               <a:buNone/>
             </a:pPr>
             <a:r>
@@ -10160,7 +10090,7 @@
             <a:endParaRPr lang="en-US" sz="1600" dirty="0"/>
           </a:p>
           <a:p>
-            <a:pPr indent="0" marL="0">
+            <a:pPr marL="0" indent="0">
               <a:buNone/>
             </a:pPr>
             <a:r>
@@ -10218,7 +10148,7 @@
           <a:bodyPr wrap="square" lIns="0" tIns="0" rIns="0" bIns="0" rtlCol="0" anchor="t"/>
           <a:lstStyle/>
           <a:p>
-            <a:pPr indent="0" marL="0">
+            <a:pPr marL="0" indent="0">
               <a:spcAft>
                 <a:spcPts val="400"/>
               </a:spcAft>
@@ -10235,7 +10165,7 @@
             <a:endParaRPr lang="en-US" sz="1800" dirty="0"/>
           </a:p>
           <a:p>
-            <a:pPr indent="0" marL="0">
+            <a:pPr marL="0" indent="0">
               <a:spcAft>
                 <a:spcPts val="400"/>
               </a:spcAft>
@@ -10252,7 +10182,7 @@
             <a:endParaRPr lang="en-US" sz="1800" dirty="0"/>
           </a:p>
           <a:p>
-            <a:pPr indent="0" marL="0">
+            <a:pPr marL="0" indent="0">
               <a:spcAft>
                 <a:spcPts val="400"/>
               </a:spcAft>
@@ -10323,7 +10253,7 @@
             <a:endParaRPr lang="en-US" sz="1800" dirty="0"/>
           </a:p>
           <a:p>
-            <a:pPr indent="0" marL="0">
+            <a:pPr marL="0" indent="0">
               <a:spcAft>
                 <a:spcPts val="400"/>
               </a:spcAft>
@@ -10340,7 +10270,7 @@
             <a:endParaRPr lang="en-US" sz="1800" dirty="0"/>
           </a:p>
           <a:p>
-            <a:pPr indent="0" marL="0">
+            <a:pPr marL="0" indent="0">
               <a:spcAft>
                 <a:spcPts val="400"/>
               </a:spcAft>
@@ -10397,7 +10327,7 @@
           <a:bodyPr wrap="square" lIns="0" tIns="0" rIns="0" bIns="0" rtlCol="0" anchor="ctr"/>
           <a:lstStyle/>
           <a:p>
-            <a:pPr indent="0" marL="0">
+            <a:pPr marL="0" indent="0">
               <a:buNone/>
             </a:pPr>
             <a:r>
@@ -10414,7 +10344,7 @@
       </p:sp>
       <p:sp>
         <p:nvSpPr>
-          <p:cNvPr id="25" name="Slide Number Placeholder 0"/>
+          <p:cNvPr id="35" name="Slide Number Placeholder 0"/>
           <p:cNvSpPr>
             <a:spLocks noGrp="1"/>
           </p:cNvSpPr>
@@ -10432,7 +10362,7 @@
           </a:prstGeom>
           <a:extLst>
             <a:ext uri="{C572A759-6A51-4108-AA02-DFA0A04FC94B}">
-              <ma14:wrappingTextBoxFlag xmlns:ma14="http://schemas.microsoft.com/office/mac/drawingml/2011/main" val="0"/>
+              <ma14:wrappingTextBoxFlag xmlns:ma14="http://schemas.microsoft.com/office/mac/drawingml/2011/main" xmlns="" val="0"/>
             </a:ext>
           </a:extLst>
         </p:spPr>
@@ -10450,7 +10380,7 @@
           <a:p>
             <a:pPr algn="r"/>
             <a:fld id="{F7021451-1387-4CA6-816F-3879F97B5CBC}" type="slidenum">
-              <a:rPr b="0" lang="en-US"/>
+              <a:rPr lang="en-US" b="0"/>
               <a:t>18</a:t>
             </a:fld>
             <a:endParaRPr lang="en-US"/>
@@ -10485,9 +10415,11 @@
       <p:sp>
         <p:nvSpPr>
           <p:cNvPr id="2" name="Text 0"/>
-          <p:cNvSpPr/>
+          <p:cNvSpPr>
+            <a:spLocks noGrp="1"/>
+          </p:cNvSpPr>
           <p:nvPr>
-            <p:ph idx="100" type="title" hasCustomPrompt="1"/>
+            <p:ph type="title" idx="100" hasCustomPrompt="1"/>
           </p:nvPr>
         </p:nvSpPr>
         <p:spPr>
@@ -10505,7 +10437,7 @@
           <a:bodyPr wrap="square" lIns="0" tIns="0" rIns="0" bIns="0" rtlCol="0" anchor="ctr"/>
           <a:lstStyle/>
           <a:p>
-            <a:pPr algn="l" indent="0" marL="0">
+            <a:pPr marL="0" indent="0" algn="l">
               <a:buNone/>
             </a:pPr>
             <a:r>
@@ -10563,7 +10495,7 @@
           <a:bodyPr wrap="square" lIns="0" tIns="0" rIns="0" bIns="0" rtlCol="0" anchor="ctr"/>
           <a:lstStyle/>
           <a:p>
-            <a:pPr algn="ctr" indent="0" marL="0">
+            <a:pPr marL="0" indent="0" algn="ctr">
               <a:buNone/>
             </a:pPr>
             <a:r>
@@ -10622,14 +10554,14 @@
       </p:sp>
       <p:pic>
         <p:nvPicPr>
-          <p:cNvPr id="7" name="Image 0" descr="Primero, las personas">    </p:cNvPr>
+          <p:cNvPr id="7" name="Image 0" descr="Primero, las personas"/>
           <p:cNvPicPr>
             <a:picLocks noChangeAspect="1"/>
           </p:cNvPicPr>
           <p:nvPr/>
         </p:nvPicPr>
         <p:blipFill>
-          <a:blip r:embed="rId1"/>
+          <a:blip r:embed="rId3"/>
           <a:stretch>
             <a:fillRect/>
           </a:stretch>
@@ -10665,7 +10597,7 @@
           <a:bodyPr wrap="square" lIns="0" tIns="0" rIns="0" bIns="0" rtlCol="0" anchor="ctr"/>
           <a:lstStyle/>
           <a:p>
-            <a:pPr indent="0" marL="0">
+            <a:pPr marL="0" indent="0">
               <a:buNone/>
             </a:pPr>
             <a:r>
@@ -10679,7 +10611,7 @@
             <a:endParaRPr lang="en-US" sz="2800" dirty="0"/>
           </a:p>
           <a:p>
-            <a:pPr indent="0" marL="0">
+            <a:pPr marL="0" indent="0">
               <a:buNone/>
             </a:pPr>
             <a:r>
@@ -10738,14 +10670,14 @@
       </p:sp>
       <p:pic>
         <p:nvPicPr>
-          <p:cNvPr id="11" name="Image 1" descr="Después, la IA">    </p:cNvPr>
+          <p:cNvPr id="11" name="Image 1" descr="Después, la IA"/>
           <p:cNvPicPr>
             <a:picLocks noChangeAspect="1"/>
           </p:cNvPicPr>
           <p:nvPr/>
         </p:nvPicPr>
         <p:blipFill>
-          <a:blip r:embed="rId2"/>
+          <a:blip r:embed="rId4"/>
           <a:stretch>
             <a:fillRect/>
           </a:stretch>
@@ -10781,7 +10713,7 @@
           <a:bodyPr wrap="square" lIns="0" tIns="0" rIns="0" bIns="0" rtlCol="0" anchor="ctr"/>
           <a:lstStyle/>
           <a:p>
-            <a:pPr indent="0" marL="0">
+            <a:pPr marL="0" indent="0">
               <a:buNone/>
             </a:pPr>
             <a:r>
@@ -10795,7 +10727,7 @@
             <a:endParaRPr lang="en-US" sz="2800" dirty="0"/>
           </a:p>
           <a:p>
-            <a:pPr indent="0" marL="0">
+            <a:pPr marL="0" indent="0">
               <a:buNone/>
             </a:pPr>
             <a:r>
@@ -10856,14 +10788,14 @@
       </p:sp>
       <p:pic>
         <p:nvPicPr>
-          <p:cNvPr id="15" name="Image 2" descr="Razón">    </p:cNvPr>
+          <p:cNvPr id="15" name="Image 2" descr="Razón"/>
           <p:cNvPicPr>
             <a:picLocks noChangeAspect="1"/>
           </p:cNvPicPr>
           <p:nvPr/>
         </p:nvPicPr>
         <p:blipFill>
-          <a:blip r:embed="rId3"/>
+          <a:blip r:embed="rId5"/>
           <a:stretch>
             <a:fillRect/>
           </a:stretch>
@@ -10899,7 +10831,7 @@
           <a:bodyPr wrap="square" lIns="0" tIns="0" rIns="0" bIns="0" rtlCol="0" anchor="ctr"/>
           <a:lstStyle/>
           <a:p>
-            <a:pPr indent="0" marL="0">
+            <a:pPr marL="0" indent="0">
               <a:buNone/>
             </a:pPr>
             <a:r>
@@ -10936,14 +10868,14 @@
       </p:sp>
       <p:pic>
         <p:nvPicPr>
-          <p:cNvPr id="18" name="Image 3" descr="Razón">    </p:cNvPr>
+          <p:cNvPr id="18" name="Image 3" descr="Razón"/>
           <p:cNvPicPr>
             <a:picLocks noChangeAspect="1"/>
           </p:cNvPicPr>
           <p:nvPr/>
         </p:nvPicPr>
         <p:blipFill>
-          <a:blip r:embed="rId4"/>
+          <a:blip r:embed="rId6"/>
           <a:stretch>
             <a:fillRect/>
           </a:stretch>
@@ -10979,7 +10911,7 @@
           <a:bodyPr wrap="square" lIns="0" tIns="0" rIns="0" bIns="0" rtlCol="0" anchor="ctr"/>
           <a:lstStyle/>
           <a:p>
-            <a:pPr indent="0" marL="0">
+            <a:pPr marL="0" indent="0">
               <a:buNone/>
             </a:pPr>
             <a:r>
@@ -11014,7 +10946,7 @@
           </a:prstGeom>
           <a:extLst>
             <a:ext uri="{C572A759-6A51-4108-AA02-DFA0A04FC94B}">
-              <ma14:wrappingTextBoxFlag xmlns:ma14="http://schemas.microsoft.com/office/mac/drawingml/2011/main" val="0"/>
+              <ma14:wrappingTextBoxFlag xmlns:ma14="http://schemas.microsoft.com/office/mac/drawingml/2011/main" xmlns="" val="0"/>
             </a:ext>
           </a:extLst>
         </p:spPr>
@@ -11032,7 +10964,7 @@
           <a:p>
             <a:pPr algn="r"/>
             <a:fld id="{F7021451-1387-4CA6-816F-3879F97B5CBC}" type="slidenum">
-              <a:rPr b="0" lang="en-US"/>
+              <a:rPr lang="en-US" b="0"/>
               <a:t>19</a:t>
             </a:fld>
             <a:endParaRPr lang="en-US"/>
@@ -11085,7 +11017,7 @@
           <a:bodyPr wrap="square" lIns="0" tIns="0" rIns="0" bIns="0" rtlCol="0" anchor="ctr"/>
           <a:lstStyle/>
           <a:p>
-            <a:pPr algn="ctr" indent="0" marL="0">
+            <a:pPr marL="0" indent="0" algn="ctr">
               <a:buNone/>
             </a:pPr>
             <a:r>
@@ -11106,9 +11038,11 @@
       <p:sp>
         <p:nvSpPr>
           <p:cNvPr id="3" name="Text 0"/>
-          <p:cNvSpPr/>
+          <p:cNvSpPr>
+            <a:spLocks noGrp="1"/>
+          </p:cNvSpPr>
           <p:nvPr>
-            <p:ph idx="100" type="title" hasCustomPrompt="1"/>
+            <p:ph type="title" idx="100" hasCustomPrompt="1"/>
           </p:nvPr>
         </p:nvSpPr>
         <p:spPr>
@@ -11126,7 +11060,7 @@
           <a:bodyPr wrap="square" lIns="0" tIns="0" rIns="0" bIns="0" rtlCol="0" anchor="b"/>
           <a:lstStyle/>
           <a:p>
-            <a:pPr algn="l" indent="0" marL="0">
+            <a:pPr marL="0" indent="0" algn="l">
               <a:buNone/>
             </a:pPr>
             <a:r>
@@ -11144,9 +11078,11 @@
       <p:sp>
         <p:nvSpPr>
           <p:cNvPr id="4" name="Text 0"/>
-          <p:cNvSpPr/>
+          <p:cNvSpPr>
+            <a:spLocks noGrp="1"/>
+          </p:cNvSpPr>
           <p:nvPr>
-            <p:ph idx="101" type="body" hasCustomPrompt="1"/>
+            <p:ph type="body" idx="101" hasCustomPrompt="1"/>
           </p:nvPr>
         </p:nvSpPr>
         <p:spPr>
@@ -11164,7 +11100,7 @@
           <a:bodyPr wrap="square" lIns="0" tIns="0" rIns="0" bIns="0" rtlCol="0" anchor="t"/>
           <a:lstStyle/>
           <a:p>
-            <a:pPr indent="0" marL="0">
+            <a:pPr marL="0" indent="0">
               <a:buNone/>
             </a:pPr>
             <a:r>
@@ -11207,9 +11143,11 @@
       <p:sp>
         <p:nvSpPr>
           <p:cNvPr id="2" name="Text 0"/>
-          <p:cNvSpPr/>
+          <p:cNvSpPr>
+            <a:spLocks noGrp="1"/>
+          </p:cNvSpPr>
           <p:nvPr>
-            <p:ph idx="100" type="title" hasCustomPrompt="1"/>
+            <p:ph type="title" idx="100" hasCustomPrompt="1"/>
           </p:nvPr>
         </p:nvSpPr>
         <p:spPr>
@@ -11227,7 +11165,7 @@
           <a:bodyPr wrap="square" lIns="0" tIns="0" rIns="0" bIns="0" rtlCol="0" anchor="ctr"/>
           <a:lstStyle/>
           <a:p>
-            <a:pPr algn="l" indent="0" marL="0">
+            <a:pPr marL="0" indent="0" algn="l">
               <a:buNone/>
             </a:pPr>
             <a:r>
@@ -11285,7 +11223,7 @@
           <a:bodyPr wrap="square" lIns="0" tIns="0" rIns="0" bIns="0" rtlCol="0" anchor="ctr"/>
           <a:lstStyle/>
           <a:p>
-            <a:pPr algn="ctr" indent="0" marL="0">
+            <a:pPr marL="0" indent="0" algn="ctr">
               <a:buNone/>
             </a:pPr>
             <a:r>
@@ -11322,211 +11260,7 @@
       </p:sp>
       <p:pic>
         <p:nvPicPr>
-          <p:cNvPr id="6" name="Image 0" descr="Peluquería">    </p:cNvPr>
-          <p:cNvPicPr>
-            <a:picLocks noChangeAspect="1"/>
-          </p:cNvPicPr>
-          <p:nvPr/>
-        </p:nvPicPr>
-        <p:blipFill>
-          <a:blip r:embed="rId1"/>
-          <a:stretch>
-            <a:fillRect/>
-          </a:stretch>
-        </p:blipFill>
-        <p:spPr>
-          <a:xfrm>
-            <a:off x="811987" y="1817827"/>
-            <a:ext cx="570586" cy="570586"/>
-          </a:xfrm>
-          <a:prstGeom prst="rect">
-            <a:avLst/>
-          </a:prstGeom>
-        </p:spPr>
-      </p:pic>
-      <p:sp>
-        <p:nvSpPr>
-          <p:cNvPr id="7" name="Text 4"/>
-          <p:cNvSpPr txBox="1"/>
-          <p:nvPr/>
-        </p:nvSpPr>
-        <p:spPr>
-          <a:xfrm>
-            <a:off x="1874520" y="1554480"/>
-            <a:ext cx="8229600" cy="1097280"/>
-          </a:xfrm>
-          <a:prstGeom prst="rect">
-            <a:avLst/>
-          </a:prstGeom>
-          <a:noFill/>
-          <a:ln/>
-        </p:spPr>
-        <p:txBody>
-          <a:bodyPr wrap="square" lIns="0" tIns="0" rIns="0" bIns="0" rtlCol="0" anchor="ctr"/>
-          <a:lstStyle/>
-          <a:p>
-            <a:pPr indent="0" marL="0">
-              <a:buNone/>
-            </a:pPr>
-            <a:r>
-              <a:rPr lang="en-US" sz="2600" b="1" dirty="0">
-                <a:solidFill>
-                  <a:schemeClr val="tx1"/>
-                </a:solidFill>
-              </a:rPr>
-              <a:t>Da las citas solo por teléfono</a:t>
-            </a:r>
-            <a:endParaRPr lang="en-US" sz="2600" dirty="0"/>
-          </a:p>
-        </p:txBody>
-      </p:sp>
-      <p:sp>
-        <p:nvSpPr>
-          <p:cNvPr id="8" name="Tarjeta"/>
-          <p:cNvSpPr/>
-          <p:nvPr/>
-        </p:nvSpPr>
-        <p:spPr>
-          <a:xfrm>
-            <a:off x="548640" y="2971800"/>
-            <a:ext cx="3454298" cy="2148840"/>
-          </a:xfrm>
-          <a:prstGeom prst="roundRect">
-            <a:avLst>
-              <a:gd name="adj" fmla="val 6383"/>
-            </a:avLst>
-          </a:prstGeom>
-          <a:solidFill>
-            <a:schemeClr val="bg2"/>
-          </a:solidFill>
-          <a:ln/>
-        </p:spPr>
-      </p:sp>
-      <p:sp>
-        <p:nvSpPr>
-          <p:cNvPr id="9" name="Problema"/>
-          <p:cNvSpPr/>
-          <p:nvPr/>
-        </p:nvSpPr>
-        <p:spPr>
-          <a:xfrm>
-            <a:off x="868680" y="3246120"/>
-            <a:ext cx="822960" cy="822960"/>
-          </a:xfrm>
-          <a:prstGeom prst="ellipse">
-            <a:avLst/>
-          </a:prstGeom>
-          <a:solidFill>
-            <a:schemeClr val="accent3"/>
-          </a:solidFill>
-          <a:ln/>
-        </p:spPr>
-      </p:sp>
-      <p:pic>
-        <p:nvPicPr>
-          <p:cNvPr id="10" name="Image 1" descr="Problema">    </p:cNvPr>
-          <p:cNvPicPr>
-            <a:picLocks noChangeAspect="1"/>
-          </p:cNvPicPr>
-          <p:nvPr/>
-        </p:nvPicPr>
-        <p:blipFill>
-          <a:blip r:embed="rId2"/>
-          <a:stretch>
-            <a:fillRect/>
-          </a:stretch>
-        </p:blipFill>
-        <p:spPr>
-          <a:xfrm>
-            <a:off x="1066190" y="3443630"/>
-            <a:ext cx="427939" cy="427939"/>
-          </a:xfrm>
-          <a:prstGeom prst="rect">
-            <a:avLst/>
-          </a:prstGeom>
-        </p:spPr>
-      </p:pic>
-      <p:sp>
-        <p:nvSpPr>
-          <p:cNvPr id="11" name="Text 7"/>
-          <p:cNvSpPr txBox="1"/>
-          <p:nvPr/>
-        </p:nvSpPr>
-        <p:spPr>
-          <a:xfrm>
-            <a:off x="868680" y="4160520"/>
-            <a:ext cx="2814218" cy="868680"/>
-          </a:xfrm>
-          <a:prstGeom prst="rect">
-            <a:avLst/>
-          </a:prstGeom>
-          <a:noFill/>
-          <a:ln/>
-        </p:spPr>
-        <p:txBody>
-          <a:bodyPr wrap="square" lIns="0" tIns="0" rIns="0" bIns="0" rtlCol="0" anchor="t"/>
-          <a:lstStyle/>
-          <a:p>
-            <a:pPr indent="0" marL="0">
-              <a:buNone/>
-            </a:pPr>
-            <a:r>
-              <a:rPr lang="en-US" sz="1900" dirty="0">
-                <a:solidFill>
-                  <a:schemeClr val="tx1"/>
-                </a:solidFill>
-              </a:rPr>
-              <a:t>El teléfono suena mientras se atiende a los clientes.</a:t>
-            </a:r>
-            <a:endParaRPr lang="en-US" sz="1900" dirty="0"/>
-          </a:p>
-        </p:txBody>
-      </p:sp>
-      <p:sp>
-        <p:nvSpPr>
-          <p:cNvPr id="12" name="Tarjeta"/>
-          <p:cNvSpPr/>
-          <p:nvPr/>
-        </p:nvSpPr>
-        <p:spPr>
-          <a:xfrm>
-            <a:off x="4368698" y="2971800"/>
-            <a:ext cx="3454298" cy="2148840"/>
-          </a:xfrm>
-          <a:prstGeom prst="roundRect">
-            <a:avLst>
-              <a:gd name="adj" fmla="val 6383"/>
-            </a:avLst>
-          </a:prstGeom>
-          <a:solidFill>
-            <a:schemeClr val="bg2"/>
-          </a:solidFill>
-          <a:ln/>
-        </p:spPr>
-      </p:sp>
-      <p:sp>
-        <p:nvSpPr>
-          <p:cNvPr id="13" name="Problema"/>
-          <p:cNvSpPr/>
-          <p:nvPr/>
-        </p:nvSpPr>
-        <p:spPr>
-          <a:xfrm>
-            <a:off x="4688738" y="3246120"/>
-            <a:ext cx="822960" cy="822960"/>
-          </a:xfrm>
-          <a:prstGeom prst="ellipse">
-            <a:avLst/>
-          </a:prstGeom>
-          <a:solidFill>
-            <a:schemeClr val="accent3"/>
-          </a:solidFill>
-          <a:ln/>
-        </p:spPr>
-      </p:sp>
-      <p:pic>
-        <p:nvPicPr>
-          <p:cNvPr id="14" name="Image 2" descr="Problema">    </p:cNvPr>
+          <p:cNvPr id="6" name="Image 0" descr="Peluquería"/>
           <p:cNvPicPr>
             <a:picLocks noChangeAspect="1"/>
           </p:cNvPicPr>
@@ -11540,8 +11274,8 @@
         </p:blipFill>
         <p:spPr>
           <a:xfrm>
-            <a:off x="4886249" y="3443630"/>
-            <a:ext cx="427939" cy="427939"/>
+            <a:off x="811987" y="1817827"/>
+            <a:ext cx="570586" cy="570586"/>
           </a:xfrm>
           <a:prstGeom prst="rect">
             <a:avLst/>
@@ -11550,49 +11284,49 @@
       </p:pic>
       <p:sp>
         <p:nvSpPr>
-          <p:cNvPr id="15" name="Text 10"/>
+          <p:cNvPr id="7" name="Text 4"/>
           <p:cNvSpPr txBox="1"/>
           <p:nvPr/>
         </p:nvSpPr>
         <p:spPr>
           <a:xfrm>
-            <a:off x="4688738" y="4160520"/>
-            <a:ext cx="2814218" cy="868680"/>
-          </a:xfrm>
-          <a:prstGeom prst="rect">
-            <a:avLst/>
-          </a:prstGeom>
-          <a:noFill/>
-          <a:ln/>
-        </p:spPr>
-        <p:txBody>
-          <a:bodyPr wrap="square" lIns="0" tIns="0" rIns="0" bIns="0" rtlCol="0" anchor="t"/>
-          <a:lstStyle/>
-          <a:p>
-            <a:pPr indent="0" marL="0">
-              <a:buNone/>
-            </a:pPr>
-            <a:r>
-              <a:rPr lang="en-US" sz="1900" dirty="0">
+            <a:off x="1874520" y="1554480"/>
+            <a:ext cx="8229600" cy="1097280"/>
+          </a:xfrm>
+          <a:prstGeom prst="rect">
+            <a:avLst/>
+          </a:prstGeom>
+          <a:noFill/>
+          <a:ln/>
+        </p:spPr>
+        <p:txBody>
+          <a:bodyPr wrap="square" lIns="0" tIns="0" rIns="0" bIns="0" rtlCol="0" anchor="ctr"/>
+          <a:lstStyle/>
+          <a:p>
+            <a:pPr marL="0" indent="0">
+              <a:buNone/>
+            </a:pPr>
+            <a:r>
+              <a:rPr lang="en-US" sz="2600" b="1" dirty="0">
                 <a:solidFill>
                   <a:schemeClr val="tx1"/>
                 </a:solidFill>
               </a:rPr>
-              <a:t>Hay clientes que olvidan su cita.</a:t>
-            </a:r>
-            <a:endParaRPr lang="en-US" sz="1900" dirty="0"/>
-          </a:p>
-        </p:txBody>
-      </p:sp>
-      <p:sp>
-        <p:nvSpPr>
-          <p:cNvPr id="16" name="Tarjeta"/>
+              <a:t>Da las citas solo por teléfono</a:t>
+            </a:r>
+            <a:endParaRPr lang="en-US" sz="2600" dirty="0"/>
+          </a:p>
+        </p:txBody>
+      </p:sp>
+      <p:sp>
+        <p:nvSpPr>
+          <p:cNvPr id="8" name="Tarjeta"/>
           <p:cNvSpPr/>
           <p:nvPr/>
         </p:nvSpPr>
         <p:spPr>
           <a:xfrm>
-            <a:off x="8188757" y="2971800"/>
+            <a:off x="548640" y="2971800"/>
             <a:ext cx="3454298" cy="2148840"/>
           </a:xfrm>
           <a:prstGeom prst="roundRect">
@@ -11608,13 +11342,13 @@
       </p:sp>
       <p:sp>
         <p:nvSpPr>
-          <p:cNvPr id="17" name="Problema"/>
+          <p:cNvPr id="9" name="Problema"/>
           <p:cNvSpPr/>
           <p:nvPr/>
         </p:nvSpPr>
         <p:spPr>
           <a:xfrm>
-            <a:off x="8508797" y="3246120"/>
+            <a:off x="868680" y="3246120"/>
             <a:ext cx="822960" cy="822960"/>
           </a:xfrm>
           <a:prstGeom prst="ellipse">
@@ -11628,7 +11362,7 @@
       </p:sp>
       <p:pic>
         <p:nvPicPr>
-          <p:cNvPr id="18" name="Image 3" descr="Problema">    </p:cNvPr>
+          <p:cNvPr id="10" name="Image 1" descr="Problema"/>
           <p:cNvPicPr>
             <a:picLocks noChangeAspect="1"/>
           </p:cNvPicPr>
@@ -11642,6 +11376,210 @@
         </p:blipFill>
         <p:spPr>
           <a:xfrm>
+            <a:off x="1066190" y="3443630"/>
+            <a:ext cx="427939" cy="427939"/>
+          </a:xfrm>
+          <a:prstGeom prst="rect">
+            <a:avLst/>
+          </a:prstGeom>
+        </p:spPr>
+      </p:pic>
+      <p:sp>
+        <p:nvSpPr>
+          <p:cNvPr id="11" name="Text 7"/>
+          <p:cNvSpPr txBox="1"/>
+          <p:nvPr/>
+        </p:nvSpPr>
+        <p:spPr>
+          <a:xfrm>
+            <a:off x="868680" y="4160520"/>
+            <a:ext cx="2814218" cy="868680"/>
+          </a:xfrm>
+          <a:prstGeom prst="rect">
+            <a:avLst/>
+          </a:prstGeom>
+          <a:noFill/>
+          <a:ln/>
+        </p:spPr>
+        <p:txBody>
+          <a:bodyPr wrap="square" lIns="0" tIns="0" rIns="0" bIns="0" rtlCol="0" anchor="t"/>
+          <a:lstStyle/>
+          <a:p>
+            <a:pPr marL="0" indent="0">
+              <a:buNone/>
+            </a:pPr>
+            <a:r>
+              <a:rPr lang="en-US" sz="1900" dirty="0">
+                <a:solidFill>
+                  <a:schemeClr val="tx1"/>
+                </a:solidFill>
+              </a:rPr>
+              <a:t>El teléfono suena mientras se atiende a los clientes.</a:t>
+            </a:r>
+            <a:endParaRPr lang="en-US" sz="1900" dirty="0"/>
+          </a:p>
+        </p:txBody>
+      </p:sp>
+      <p:sp>
+        <p:nvSpPr>
+          <p:cNvPr id="12" name="Tarjeta"/>
+          <p:cNvSpPr/>
+          <p:nvPr/>
+        </p:nvSpPr>
+        <p:spPr>
+          <a:xfrm>
+            <a:off x="4368698" y="2971800"/>
+            <a:ext cx="3454298" cy="2148840"/>
+          </a:xfrm>
+          <a:prstGeom prst="roundRect">
+            <a:avLst>
+              <a:gd name="adj" fmla="val 6383"/>
+            </a:avLst>
+          </a:prstGeom>
+          <a:solidFill>
+            <a:schemeClr val="bg2"/>
+          </a:solidFill>
+          <a:ln/>
+        </p:spPr>
+      </p:sp>
+      <p:sp>
+        <p:nvSpPr>
+          <p:cNvPr id="13" name="Problema"/>
+          <p:cNvSpPr/>
+          <p:nvPr/>
+        </p:nvSpPr>
+        <p:spPr>
+          <a:xfrm>
+            <a:off x="4688738" y="3246120"/>
+            <a:ext cx="822960" cy="822960"/>
+          </a:xfrm>
+          <a:prstGeom prst="ellipse">
+            <a:avLst/>
+          </a:prstGeom>
+          <a:solidFill>
+            <a:schemeClr val="accent3"/>
+          </a:solidFill>
+          <a:ln/>
+        </p:spPr>
+      </p:sp>
+      <p:pic>
+        <p:nvPicPr>
+          <p:cNvPr id="14" name="Image 2" descr="Problema"/>
+          <p:cNvPicPr>
+            <a:picLocks noChangeAspect="1"/>
+          </p:cNvPicPr>
+          <p:nvPr/>
+        </p:nvPicPr>
+        <p:blipFill>
+          <a:blip r:embed="rId5"/>
+          <a:stretch>
+            <a:fillRect/>
+          </a:stretch>
+        </p:blipFill>
+        <p:spPr>
+          <a:xfrm>
+            <a:off x="4886249" y="3443630"/>
+            <a:ext cx="427939" cy="427939"/>
+          </a:xfrm>
+          <a:prstGeom prst="rect">
+            <a:avLst/>
+          </a:prstGeom>
+        </p:spPr>
+      </p:pic>
+      <p:sp>
+        <p:nvSpPr>
+          <p:cNvPr id="15" name="Text 10"/>
+          <p:cNvSpPr txBox="1"/>
+          <p:nvPr/>
+        </p:nvSpPr>
+        <p:spPr>
+          <a:xfrm>
+            <a:off x="4688738" y="4160520"/>
+            <a:ext cx="2814218" cy="868680"/>
+          </a:xfrm>
+          <a:prstGeom prst="rect">
+            <a:avLst/>
+          </a:prstGeom>
+          <a:noFill/>
+          <a:ln/>
+        </p:spPr>
+        <p:txBody>
+          <a:bodyPr wrap="square" lIns="0" tIns="0" rIns="0" bIns="0" rtlCol="0" anchor="t"/>
+          <a:lstStyle/>
+          <a:p>
+            <a:pPr marL="0" indent="0">
+              <a:buNone/>
+            </a:pPr>
+            <a:r>
+              <a:rPr lang="en-US" sz="1900" dirty="0">
+                <a:solidFill>
+                  <a:schemeClr val="tx1"/>
+                </a:solidFill>
+              </a:rPr>
+              <a:t>Hay clientes que olvidan su cita.</a:t>
+            </a:r>
+            <a:endParaRPr lang="en-US" sz="1900" dirty="0"/>
+          </a:p>
+        </p:txBody>
+      </p:sp>
+      <p:sp>
+        <p:nvSpPr>
+          <p:cNvPr id="16" name="Tarjeta"/>
+          <p:cNvSpPr/>
+          <p:nvPr/>
+        </p:nvSpPr>
+        <p:spPr>
+          <a:xfrm>
+            <a:off x="8188757" y="2971800"/>
+            <a:ext cx="3454298" cy="2148840"/>
+          </a:xfrm>
+          <a:prstGeom prst="roundRect">
+            <a:avLst>
+              <a:gd name="adj" fmla="val 6383"/>
+            </a:avLst>
+          </a:prstGeom>
+          <a:solidFill>
+            <a:schemeClr val="bg2"/>
+          </a:solidFill>
+          <a:ln/>
+        </p:spPr>
+      </p:sp>
+      <p:sp>
+        <p:nvSpPr>
+          <p:cNvPr id="17" name="Problema"/>
+          <p:cNvSpPr/>
+          <p:nvPr/>
+        </p:nvSpPr>
+        <p:spPr>
+          <a:xfrm>
+            <a:off x="8508797" y="3246120"/>
+            <a:ext cx="822960" cy="822960"/>
+          </a:xfrm>
+          <a:prstGeom prst="ellipse">
+            <a:avLst/>
+          </a:prstGeom>
+          <a:solidFill>
+            <a:schemeClr val="accent3"/>
+          </a:solidFill>
+          <a:ln/>
+        </p:spPr>
+      </p:sp>
+      <p:pic>
+        <p:nvPicPr>
+          <p:cNvPr id="18" name="Image 3" descr="Problema"/>
+          <p:cNvPicPr>
+            <a:picLocks noChangeAspect="1"/>
+          </p:cNvPicPr>
+          <p:nvPr/>
+        </p:nvPicPr>
+        <p:blipFill>
+          <a:blip r:embed="rId6"/>
+          <a:stretch>
+            <a:fillRect/>
+          </a:stretch>
+        </p:blipFill>
+        <p:spPr>
+          <a:xfrm>
             <a:off x="8706307" y="3443630"/>
             <a:ext cx="427939" cy="427939"/>
           </a:xfrm>
@@ -11671,7 +11609,7 @@
           <a:bodyPr wrap="square" lIns="0" tIns="0" rIns="0" bIns="0" rtlCol="0" anchor="t"/>
           <a:lstStyle/>
           <a:p>
-            <a:pPr indent="0" marL="0">
+            <a:pPr marL="0" indent="0">
               <a:buNone/>
             </a:pPr>
             <a:r>
@@ -11707,7 +11645,7 @@
           <a:bodyPr wrap="square" lIns="0" tIns="0" rIns="0" bIns="0" rtlCol="0" anchor="ctr"/>
           <a:lstStyle/>
           <a:p>
-            <a:pPr indent="0" marL="0">
+            <a:pPr marL="0" indent="0">
               <a:buNone/>
             </a:pPr>
             <a:r>
@@ -11742,7 +11680,7 @@
           </a:prstGeom>
           <a:extLst>
             <a:ext uri="{C572A759-6A51-4108-AA02-DFA0A04FC94B}">
-              <ma14:wrappingTextBoxFlag xmlns:ma14="http://schemas.microsoft.com/office/mac/drawingml/2011/main" val="0"/>
+              <ma14:wrappingTextBoxFlag xmlns:ma14="http://schemas.microsoft.com/office/mac/drawingml/2011/main" xmlns="" val="0"/>
             </a:ext>
           </a:extLst>
         </p:spPr>
@@ -11760,7 +11698,7 @@
           <a:p>
             <a:pPr algn="r"/>
             <a:fld id="{F7021451-1387-4CA6-816F-3879F97B5CBC}" type="slidenum">
-              <a:rPr b="0" lang="en-US"/>
+              <a:rPr lang="en-US" b="0"/>
               <a:t>20</a:t>
             </a:fld>
             <a:endParaRPr lang="en-US"/>
@@ -11795,9 +11733,11 @@
       <p:sp>
         <p:nvSpPr>
           <p:cNvPr id="2" name="Text 0"/>
-          <p:cNvSpPr/>
+          <p:cNvSpPr>
+            <a:spLocks noGrp="1"/>
+          </p:cNvSpPr>
           <p:nvPr>
-            <p:ph idx="100" type="title" hasCustomPrompt="1"/>
+            <p:ph type="title" idx="100" hasCustomPrompt="1"/>
           </p:nvPr>
         </p:nvSpPr>
         <p:spPr>
@@ -11815,7 +11755,7 @@
           <a:bodyPr wrap="square" lIns="0" tIns="0" rIns="0" bIns="0" rtlCol="0" anchor="ctr"/>
           <a:lstStyle/>
           <a:p>
-            <a:pPr algn="l" indent="0" marL="0">
+            <a:pPr marL="0" indent="0" algn="l">
               <a:buNone/>
             </a:pPr>
             <a:r>
@@ -11873,7 +11813,7 @@
           <a:bodyPr wrap="square" lIns="0" tIns="0" rIns="0" bIns="0" rtlCol="0" anchor="ctr"/>
           <a:lstStyle/>
           <a:p>
-            <a:pPr algn="ctr" indent="0" marL="0">
+            <a:pPr marL="0" indent="0" algn="ctr">
               <a:buNone/>
             </a:pPr>
             <a:r>
@@ -11909,7 +11849,7 @@
           <a:bodyPr wrap="square" lIns="0" tIns="0" rIns="0" bIns="0" rtlCol="0" anchor="ctr"/>
           <a:lstStyle/>
           <a:p>
-            <a:pPr indent="0" marL="0">
+            <a:pPr marL="0" indent="0">
               <a:buNone/>
             </a:pPr>
             <a:r>
@@ -11987,7 +11927,7 @@
           <a:bodyPr wrap="square" lIns="0" tIns="0" rIns="0" bIns="0" rtlCol="0" anchor="ctr"/>
           <a:lstStyle/>
           <a:p>
-            <a:pPr algn="ctr" indent="0" marL="0">
+            <a:pPr marL="0" indent="0" algn="ctr">
               <a:buNone/>
             </a:pPr>
             <a:r>
@@ -12023,7 +11963,7 @@
           <a:bodyPr wrap="square" lIns="0" tIns="0" rIns="0" bIns="0" rtlCol="0" anchor="ctr"/>
           <a:lstStyle/>
           <a:p>
-            <a:pPr indent="0" marL="0">
+            <a:pPr marL="0" indent="0">
               <a:buNone/>
             </a:pPr>
             <a:r>
@@ -12101,7 +12041,7 @@
           <a:bodyPr wrap="square" lIns="0" tIns="0" rIns="0" bIns="0" rtlCol="0" anchor="ctr"/>
           <a:lstStyle/>
           <a:p>
-            <a:pPr algn="ctr" indent="0" marL="0">
+            <a:pPr marL="0" indent="0" algn="ctr">
               <a:buNone/>
             </a:pPr>
             <a:r>
@@ -12137,7 +12077,7 @@
           <a:bodyPr wrap="square" lIns="0" tIns="0" rIns="0" bIns="0" rtlCol="0" anchor="ctr"/>
           <a:lstStyle/>
           <a:p>
-            <a:pPr indent="0" marL="0">
+            <a:pPr marL="0" indent="0">
               <a:buNone/>
             </a:pPr>
             <a:r>
@@ -12215,7 +12155,7 @@
           <a:bodyPr wrap="square" lIns="0" tIns="0" rIns="0" bIns="0" rtlCol="0" anchor="ctr"/>
           <a:lstStyle/>
           <a:p>
-            <a:pPr algn="ctr" indent="0" marL="0">
+            <a:pPr marL="0" indent="0" algn="ctr">
               <a:buNone/>
             </a:pPr>
             <a:r>
@@ -12251,7 +12191,7 @@
           <a:bodyPr wrap="square" lIns="0" tIns="0" rIns="0" bIns="0" rtlCol="0" anchor="ctr"/>
           <a:lstStyle/>
           <a:p>
-            <a:pPr indent="0" marL="0">
+            <a:pPr marL="0" indent="0">
               <a:buNone/>
             </a:pPr>
             <a:r>
@@ -12329,7 +12269,7 @@
           <a:bodyPr wrap="square" lIns="0" tIns="0" rIns="0" bIns="0" rtlCol="0" anchor="ctr"/>
           <a:lstStyle/>
           <a:p>
-            <a:pPr algn="ctr" indent="0" marL="0">
+            <a:pPr marL="0" indent="0" algn="ctr">
               <a:buNone/>
             </a:pPr>
             <a:r>
@@ -12365,7 +12305,7 @@
           <a:bodyPr wrap="square" lIns="0" tIns="0" rIns="0" bIns="0" rtlCol="0" anchor="ctr"/>
           <a:lstStyle/>
           <a:p>
-            <a:pPr indent="0" marL="0">
+            <a:pPr marL="0" indent="0">
               <a:buNone/>
             </a:pPr>
             <a:r>
@@ -12400,7 +12340,7 @@
           </a:prstGeom>
           <a:extLst>
             <a:ext uri="{C572A759-6A51-4108-AA02-DFA0A04FC94B}">
-              <ma14:wrappingTextBoxFlag xmlns:ma14="http://schemas.microsoft.com/office/mac/drawingml/2011/main" val="0"/>
+              <ma14:wrappingTextBoxFlag xmlns:ma14="http://schemas.microsoft.com/office/mac/drawingml/2011/main" xmlns="" val="0"/>
             </a:ext>
           </a:extLst>
         </p:spPr>
@@ -12418,7 +12358,7 @@
           <a:p>
             <a:pPr algn="r"/>
             <a:fld id="{F7021451-1387-4CA6-816F-3879F97B5CBC}" type="slidenum">
-              <a:rPr b="0" lang="en-US"/>
+              <a:rPr lang="en-US" b="0"/>
               <a:t>21</a:t>
             </a:fld>
             <a:endParaRPr lang="en-US"/>
@@ -12453,9 +12393,11 @@
       <p:sp>
         <p:nvSpPr>
           <p:cNvPr id="2" name="Text 0"/>
-          <p:cNvSpPr/>
+          <p:cNvSpPr>
+            <a:spLocks noGrp="1"/>
+          </p:cNvSpPr>
           <p:nvPr>
-            <p:ph idx="100" type="title" hasCustomPrompt="1"/>
+            <p:ph type="title" idx="100" hasCustomPrompt="1"/>
           </p:nvPr>
         </p:nvSpPr>
         <p:spPr>
@@ -12473,7 +12415,7 @@
           <a:bodyPr wrap="square" lIns="0" tIns="0" rIns="0" bIns="0" rtlCol="0" anchor="ctr"/>
           <a:lstStyle/>
           <a:p>
-            <a:pPr algn="l" indent="0" marL="0">
+            <a:pPr marL="0" indent="0" algn="l">
               <a:buNone/>
             </a:pPr>
             <a:r>
@@ -12531,7 +12473,7 @@
           <a:bodyPr wrap="square" lIns="0" tIns="0" rIns="0" bIns="0" rtlCol="0" anchor="ctr"/>
           <a:lstStyle/>
           <a:p>
-            <a:pPr algn="ctr" indent="0" marL="0">
+            <a:pPr marL="0" indent="0" algn="ctr">
               <a:buNone/>
             </a:pPr>
             <a:r>
@@ -12567,7 +12509,7 @@
           <a:bodyPr wrap="square" lIns="0" tIns="0" rIns="0" bIns="0" rtlCol="0" anchor="ctr"/>
           <a:lstStyle/>
           <a:p>
-            <a:pPr indent="0" marL="0">
+            <a:pPr marL="0" indent="0">
               <a:buNone/>
             </a:pPr>
             <a:r>
@@ -12625,7 +12567,7 @@
           <a:bodyPr wrap="square" lIns="0" tIns="0" rIns="0" bIns="0" rtlCol="0" anchor="ctr"/>
           <a:lstStyle/>
           <a:p>
-            <a:pPr indent="0" marL="0">
+            <a:pPr marL="0" indent="0">
               <a:buNone/>
             </a:pPr>
             <a:r>
@@ -12683,7 +12625,7 @@
           <a:bodyPr wrap="square" lIns="0" tIns="0" rIns="0" bIns="0" rtlCol="0" anchor="ctr"/>
           <a:lstStyle/>
           <a:p>
-            <a:pPr indent="0" marL="0">
+            <a:pPr marL="0" indent="0">
               <a:buNone/>
             </a:pPr>
             <a:r>
@@ -12741,7 +12683,7 @@
           <a:bodyPr wrap="square" lIns="0" tIns="0" rIns="0" bIns="0" rtlCol="0" anchor="ctr"/>
           <a:lstStyle/>
           <a:p>
-            <a:pPr indent="0" marL="0">
+            <a:pPr marL="0" indent="0">
               <a:buNone/>
             </a:pPr>
             <a:r>
@@ -12799,7 +12741,7 @@
           <a:bodyPr wrap="square" lIns="0" tIns="0" rIns="0" bIns="0" rtlCol="0" anchor="ctr"/>
           <a:lstStyle/>
           <a:p>
-            <a:pPr indent="0" marL="0">
+            <a:pPr marL="0" indent="0">
               <a:buNone/>
             </a:pPr>
             <a:r>
@@ -12857,7 +12799,7 @@
           <a:bodyPr wrap="square" lIns="0" tIns="0" rIns="0" bIns="0" rtlCol="0" anchor="ctr"/>
           <a:lstStyle/>
           <a:p>
-            <a:pPr indent="0" marL="0">
+            <a:pPr marL="0" indent="0">
               <a:buNone/>
             </a:pPr>
             <a:r>
@@ -12915,7 +12857,7 @@
           <a:bodyPr wrap="square" lIns="0" tIns="0" rIns="0" bIns="0" rtlCol="0" anchor="ctr"/>
           <a:lstStyle/>
           <a:p>
-            <a:pPr indent="0" marL="0">
+            <a:pPr marL="0" indent="0">
               <a:buNone/>
             </a:pPr>
             <a:r>
@@ -12929,7 +12871,7 @@
             <a:endParaRPr lang="en-US" sz="2100" dirty="0"/>
           </a:p>
           <a:p>
-            <a:pPr indent="0" marL="0">
+            <a:pPr marL="0" indent="0">
               <a:buNone/>
             </a:pPr>
             <a:r>
@@ -13011,7 +12953,7 @@
           <a:bodyPr wrap="square" lIns="0" tIns="0" rIns="0" bIns="0" rtlCol="0" anchor="ctr"/>
           <a:lstStyle/>
           <a:p>
-            <a:pPr indent="0" marL="0">
+            <a:pPr marL="0" indent="0">
               <a:buNone/>
             </a:pPr>
             <a:r>
@@ -13025,7 +12967,7 @@
             <a:endParaRPr lang="en-US" sz="1800" dirty="0"/>
           </a:p>
           <a:p>
-            <a:pPr indent="0" marL="0">
+            <a:pPr marL="0" indent="0">
               <a:buNone/>
             </a:pPr>
             <a:r>
@@ -13060,7 +13002,7 @@
           </a:prstGeom>
           <a:extLst>
             <a:ext uri="{C572A759-6A51-4108-AA02-DFA0A04FC94B}">
-              <ma14:wrappingTextBoxFlag xmlns:ma14="http://schemas.microsoft.com/office/mac/drawingml/2011/main" val="0"/>
+              <ma14:wrappingTextBoxFlag xmlns:ma14="http://schemas.microsoft.com/office/mac/drawingml/2011/main" xmlns="" val="0"/>
             </a:ext>
           </a:extLst>
         </p:spPr>
@@ -13078,7 +13020,7 @@
           <a:p>
             <a:pPr algn="r"/>
             <a:fld id="{F7021451-1387-4CA6-816F-3879F97B5CBC}" type="slidenum">
-              <a:rPr b="0" lang="en-US"/>
+              <a:rPr lang="en-US" b="0"/>
               <a:t>22</a:t>
             </a:fld>
             <a:endParaRPr lang="en-US"/>
@@ -13113,9 +13055,11 @@
       <p:sp>
         <p:nvSpPr>
           <p:cNvPr id="2" name="Text 0"/>
-          <p:cNvSpPr/>
+          <p:cNvSpPr>
+            <a:spLocks noGrp="1"/>
+          </p:cNvSpPr>
           <p:nvPr>
-            <p:ph idx="100" type="title" hasCustomPrompt="1"/>
+            <p:ph type="title" idx="100" hasCustomPrompt="1"/>
           </p:nvPr>
         </p:nvSpPr>
         <p:spPr>
@@ -13133,7 +13077,7 @@
           <a:bodyPr wrap="square" lIns="0" tIns="0" rIns="0" bIns="0" rtlCol="0" anchor="ctr"/>
           <a:lstStyle/>
           <a:p>
-            <a:pPr algn="l" indent="0" marL="0">
+            <a:pPr marL="0" indent="0" algn="l">
               <a:buNone/>
             </a:pPr>
             <a:r>
@@ -13191,7 +13135,7 @@
           <a:bodyPr wrap="square" lIns="0" tIns="0" rIns="0" bIns="0" rtlCol="0" anchor="ctr"/>
           <a:lstStyle/>
           <a:p>
-            <a:pPr algn="ctr" indent="0" marL="0">
+            <a:pPr marL="0" indent="0" algn="ctr">
               <a:buNone/>
             </a:pPr>
             <a:r>
@@ -13249,7 +13193,7 @@
           <a:bodyPr wrap="square" lIns="0" tIns="0" rIns="0" bIns="0" rtlCol="0" anchor="ctr"/>
           <a:lstStyle/>
           <a:p>
-            <a:pPr indent="0" marL="0">
+            <a:pPr marL="0" indent="0">
               <a:buNone/>
             </a:pPr>
             <a:r>
@@ -13263,7 +13207,7 @@
             <a:endParaRPr lang="en-US" sz="2300" dirty="0"/>
           </a:p>
           <a:p>
-            <a:pPr indent="0" marL="0">
+            <a:pPr marL="0" indent="0">
               <a:buNone/>
             </a:pPr>
             <a:r>
@@ -13300,167 +13244,7 @@
       </p:sp>
       <p:pic>
         <p:nvPicPr>
-          <p:cNvPr id="8" name="Image 0" descr="Instrucción">    </p:cNvPr>
-          <p:cNvPicPr>
-            <a:picLocks noChangeAspect="1"/>
-          </p:cNvPicPr>
-          <p:nvPr/>
-        </p:nvPicPr>
-        <p:blipFill>
-          <a:blip r:embed="rId1"/>
-          <a:stretch>
-            <a:fillRect/>
-          </a:stretch>
-        </p:blipFill>
-        <p:spPr>
-          <a:xfrm>
-            <a:off x="713232" y="3593592"/>
-            <a:ext cx="356616" cy="356616"/>
-          </a:xfrm>
-          <a:prstGeom prst="rect">
-            <a:avLst/>
-          </a:prstGeom>
-        </p:spPr>
-      </p:pic>
-      <p:sp>
-        <p:nvSpPr>
-          <p:cNvPr id="9" name="Text 6"/>
-          <p:cNvSpPr txBox="1"/>
-          <p:nvPr/>
-        </p:nvSpPr>
-        <p:spPr>
-          <a:xfrm>
-            <a:off x="1463040" y="3429000"/>
-            <a:ext cx="10058400" cy="685800"/>
-          </a:xfrm>
-          <a:prstGeom prst="rect">
-            <a:avLst/>
-          </a:prstGeom>
-          <a:noFill/>
-          <a:ln/>
-        </p:spPr>
-        <p:txBody>
-          <a:bodyPr wrap="square" lIns="0" tIns="0" rIns="0" bIns="0" rtlCol="0" anchor="ctr"/>
-          <a:lstStyle/>
-          <a:p>
-            <a:pPr indent="0" marL="0">
-              <a:buNone/>
-            </a:pPr>
-            <a:r>
-              <a:rPr lang="en-US" sz="2000" dirty="0">
-                <a:solidFill>
-                  <a:schemeClr val="tx1"/>
-                </a:solidFill>
-              </a:rPr>
-              <a:t>Turno en rueda: habla todo el mundo. Si no tienes idea, di «paso».</a:t>
-            </a:r>
-            <a:endParaRPr lang="en-US" sz="2000" dirty="0"/>
-          </a:p>
-        </p:txBody>
-      </p:sp>
-      <p:sp>
-        <p:nvSpPr>
-          <p:cNvPr id="10" name="Instrucción"/>
-          <p:cNvSpPr/>
-          <p:nvPr/>
-        </p:nvSpPr>
-        <p:spPr>
-          <a:xfrm>
-            <a:off x="548640" y="4297680"/>
-            <a:ext cx="685800" cy="685800"/>
-          </a:xfrm>
-          <a:prstGeom prst="ellipse">
-            <a:avLst/>
-          </a:prstGeom>
-          <a:solidFill>
-            <a:schemeClr val="accent1"/>
-          </a:solidFill>
-          <a:ln/>
-        </p:spPr>
-      </p:sp>
-      <p:pic>
-        <p:nvPicPr>
-          <p:cNvPr id="11" name="Image 1" descr="Instrucción">    </p:cNvPr>
-          <p:cNvPicPr>
-            <a:picLocks noChangeAspect="1"/>
-          </p:cNvPicPr>
-          <p:nvPr/>
-        </p:nvPicPr>
-        <p:blipFill>
-          <a:blip r:embed="rId2"/>
-          <a:stretch>
-            <a:fillRect/>
-          </a:stretch>
-        </p:blipFill>
-        <p:spPr>
-          <a:xfrm>
-            <a:off x="713232" y="4462272"/>
-            <a:ext cx="356616" cy="356616"/>
-          </a:xfrm>
-          <a:prstGeom prst="rect">
-            <a:avLst/>
-          </a:prstGeom>
-        </p:spPr>
-      </p:pic>
-      <p:sp>
-        <p:nvSpPr>
-          <p:cNvPr id="12" name="Text 8"/>
-          <p:cNvSpPr txBox="1"/>
-          <p:nvPr/>
-        </p:nvSpPr>
-        <p:spPr>
-          <a:xfrm>
-            <a:off x="1463040" y="4297680"/>
-            <a:ext cx="10058400" cy="685800"/>
-          </a:xfrm>
-          <a:prstGeom prst="rect">
-            <a:avLst/>
-          </a:prstGeom>
-          <a:noFill/>
-          <a:ln/>
-        </p:spPr>
-        <p:txBody>
-          <a:bodyPr wrap="square" lIns="0" tIns="0" rIns="0" bIns="0" rtlCol="0" anchor="ctr"/>
-          <a:lstStyle/>
-          <a:p>
-            <a:pPr indent="0" marL="0">
-              <a:buNone/>
-            </a:pPr>
-            <a:r>
-              <a:rPr lang="en-US" sz="2000" dirty="0">
-                <a:solidFill>
-                  <a:schemeClr val="tx1"/>
-                </a:solidFill>
-              </a:rPr>
-              <a:t>Se apuntan todas las ideas, numeradas y sin comentarlas.</a:t>
-            </a:r>
-            <a:endParaRPr lang="en-US" sz="2000" dirty="0"/>
-          </a:p>
-        </p:txBody>
-      </p:sp>
-      <p:sp>
-        <p:nvSpPr>
-          <p:cNvPr id="13" name="Instrucción"/>
-          <p:cNvSpPr/>
-          <p:nvPr/>
-        </p:nvSpPr>
-        <p:spPr>
-          <a:xfrm>
-            <a:off x="548640" y="5166360"/>
-            <a:ext cx="685800" cy="685800"/>
-          </a:xfrm>
-          <a:prstGeom prst="ellipse">
-            <a:avLst/>
-          </a:prstGeom>
-          <a:solidFill>
-            <a:schemeClr val="accent1"/>
-          </a:solidFill>
-          <a:ln/>
-        </p:spPr>
-      </p:sp>
-      <p:pic>
-        <p:nvPicPr>
-          <p:cNvPr id="14" name="Image 2" descr="Instrucción">    </p:cNvPr>
+          <p:cNvPr id="8" name="Image 0" descr="Instrucción"/>
           <p:cNvPicPr>
             <a:picLocks noChangeAspect="1"/>
           </p:cNvPicPr>
@@ -13474,6 +13258,166 @@
         </p:blipFill>
         <p:spPr>
           <a:xfrm>
+            <a:off x="713232" y="3593592"/>
+            <a:ext cx="356616" cy="356616"/>
+          </a:xfrm>
+          <a:prstGeom prst="rect">
+            <a:avLst/>
+          </a:prstGeom>
+        </p:spPr>
+      </p:pic>
+      <p:sp>
+        <p:nvSpPr>
+          <p:cNvPr id="9" name="Text 6"/>
+          <p:cNvSpPr txBox="1"/>
+          <p:nvPr/>
+        </p:nvSpPr>
+        <p:spPr>
+          <a:xfrm>
+            <a:off x="1463040" y="3429000"/>
+            <a:ext cx="10058400" cy="685800"/>
+          </a:xfrm>
+          <a:prstGeom prst="rect">
+            <a:avLst/>
+          </a:prstGeom>
+          <a:noFill/>
+          <a:ln/>
+        </p:spPr>
+        <p:txBody>
+          <a:bodyPr wrap="square" lIns="0" tIns="0" rIns="0" bIns="0" rtlCol="0" anchor="ctr"/>
+          <a:lstStyle/>
+          <a:p>
+            <a:pPr marL="0" indent="0">
+              <a:buNone/>
+            </a:pPr>
+            <a:r>
+              <a:rPr lang="en-US" sz="2000" dirty="0">
+                <a:solidFill>
+                  <a:schemeClr val="tx1"/>
+                </a:solidFill>
+              </a:rPr>
+              <a:t>Turno en rueda: habla todo el mundo. Si no tienes idea, di «paso».</a:t>
+            </a:r>
+            <a:endParaRPr lang="en-US" sz="2000" dirty="0"/>
+          </a:p>
+        </p:txBody>
+      </p:sp>
+      <p:sp>
+        <p:nvSpPr>
+          <p:cNvPr id="10" name="Instrucción"/>
+          <p:cNvSpPr/>
+          <p:nvPr/>
+        </p:nvSpPr>
+        <p:spPr>
+          <a:xfrm>
+            <a:off x="548640" y="4297680"/>
+            <a:ext cx="685800" cy="685800"/>
+          </a:xfrm>
+          <a:prstGeom prst="ellipse">
+            <a:avLst/>
+          </a:prstGeom>
+          <a:solidFill>
+            <a:schemeClr val="accent1"/>
+          </a:solidFill>
+          <a:ln/>
+        </p:spPr>
+      </p:sp>
+      <p:pic>
+        <p:nvPicPr>
+          <p:cNvPr id="11" name="Image 1" descr="Instrucción"/>
+          <p:cNvPicPr>
+            <a:picLocks noChangeAspect="1"/>
+          </p:cNvPicPr>
+          <p:nvPr/>
+        </p:nvPicPr>
+        <p:blipFill>
+          <a:blip r:embed="rId4"/>
+          <a:stretch>
+            <a:fillRect/>
+          </a:stretch>
+        </p:blipFill>
+        <p:spPr>
+          <a:xfrm>
+            <a:off x="713232" y="4462272"/>
+            <a:ext cx="356616" cy="356616"/>
+          </a:xfrm>
+          <a:prstGeom prst="rect">
+            <a:avLst/>
+          </a:prstGeom>
+        </p:spPr>
+      </p:pic>
+      <p:sp>
+        <p:nvSpPr>
+          <p:cNvPr id="12" name="Text 8"/>
+          <p:cNvSpPr txBox="1"/>
+          <p:nvPr/>
+        </p:nvSpPr>
+        <p:spPr>
+          <a:xfrm>
+            <a:off x="1463040" y="4297680"/>
+            <a:ext cx="10058400" cy="685800"/>
+          </a:xfrm>
+          <a:prstGeom prst="rect">
+            <a:avLst/>
+          </a:prstGeom>
+          <a:noFill/>
+          <a:ln/>
+        </p:spPr>
+        <p:txBody>
+          <a:bodyPr wrap="square" lIns="0" tIns="0" rIns="0" bIns="0" rtlCol="0" anchor="ctr"/>
+          <a:lstStyle/>
+          <a:p>
+            <a:pPr marL="0" indent="0">
+              <a:buNone/>
+            </a:pPr>
+            <a:r>
+              <a:rPr lang="en-US" sz="2000" dirty="0">
+                <a:solidFill>
+                  <a:schemeClr val="tx1"/>
+                </a:solidFill>
+              </a:rPr>
+              <a:t>Se apuntan todas las ideas, numeradas y sin comentarlas.</a:t>
+            </a:r>
+            <a:endParaRPr lang="en-US" sz="2000" dirty="0"/>
+          </a:p>
+        </p:txBody>
+      </p:sp>
+      <p:sp>
+        <p:nvSpPr>
+          <p:cNvPr id="13" name="Instrucción"/>
+          <p:cNvSpPr/>
+          <p:nvPr/>
+        </p:nvSpPr>
+        <p:spPr>
+          <a:xfrm>
+            <a:off x="548640" y="5166360"/>
+            <a:ext cx="685800" cy="685800"/>
+          </a:xfrm>
+          <a:prstGeom prst="ellipse">
+            <a:avLst/>
+          </a:prstGeom>
+          <a:solidFill>
+            <a:schemeClr val="accent1"/>
+          </a:solidFill>
+          <a:ln/>
+        </p:spPr>
+      </p:sp>
+      <p:pic>
+        <p:nvPicPr>
+          <p:cNvPr id="14" name="Image 2" descr="Instrucción"/>
+          <p:cNvPicPr>
+            <a:picLocks noChangeAspect="1"/>
+          </p:cNvPicPr>
+          <p:nvPr/>
+        </p:nvPicPr>
+        <p:blipFill>
+          <a:blip r:embed="rId5"/>
+          <a:stretch>
+            <a:fillRect/>
+          </a:stretch>
+        </p:blipFill>
+        <p:spPr>
+          <a:xfrm>
             <a:off x="713232" y="5330952"/>
             <a:ext cx="356616" cy="356616"/>
           </a:xfrm>
@@ -13503,7 +13447,7 @@
           <a:bodyPr wrap="square" lIns="0" tIns="0" rIns="0" bIns="0" rtlCol="0" anchor="ctr"/>
           <a:lstStyle/>
           <a:p>
-            <a:pPr indent="0" marL="0">
+            <a:pPr marL="0" indent="0">
               <a:buNone/>
             </a:pPr>
             <a:r>
@@ -13538,7 +13482,7 @@
           </a:prstGeom>
           <a:extLst>
             <a:ext uri="{C572A759-6A51-4108-AA02-DFA0A04FC94B}">
-              <ma14:wrappingTextBoxFlag xmlns:ma14="http://schemas.microsoft.com/office/mac/drawingml/2011/main" val="0"/>
+              <ma14:wrappingTextBoxFlag xmlns:ma14="http://schemas.microsoft.com/office/mac/drawingml/2011/main" xmlns="" val="0"/>
             </a:ext>
           </a:extLst>
         </p:spPr>
@@ -13556,7 +13500,7 @@
           <a:p>
             <a:pPr algn="r"/>
             <a:fld id="{F7021451-1387-4CA6-816F-3879F97B5CBC}" type="slidenum">
-              <a:rPr b="0" lang="en-US"/>
+              <a:rPr lang="en-US" b="0"/>
               <a:t>23</a:t>
             </a:fld>
             <a:endParaRPr lang="en-US"/>
@@ -13591,9 +13535,11 @@
       <p:sp>
         <p:nvSpPr>
           <p:cNvPr id="2" name="Text 0"/>
-          <p:cNvSpPr/>
+          <p:cNvSpPr>
+            <a:spLocks noGrp="1"/>
+          </p:cNvSpPr>
           <p:nvPr>
-            <p:ph idx="100" type="title" hasCustomPrompt="1"/>
+            <p:ph type="title" idx="100" hasCustomPrompt="1"/>
           </p:nvPr>
         </p:nvSpPr>
         <p:spPr>
@@ -13611,7 +13557,7 @@
           <a:bodyPr wrap="square" lIns="0" tIns="0" rIns="0" bIns="0" rtlCol="0" anchor="ctr"/>
           <a:lstStyle/>
           <a:p>
-            <a:pPr algn="l" indent="0" marL="0">
+            <a:pPr marL="0" indent="0" algn="l">
               <a:buNone/>
             </a:pPr>
             <a:r>
@@ -13669,7 +13615,7 @@
           <a:bodyPr wrap="square" lIns="0" tIns="0" rIns="0" bIns="0" rtlCol="0" anchor="ctr"/>
           <a:lstStyle/>
           <a:p>
-            <a:pPr algn="ctr" indent="0" marL="0">
+            <a:pPr marL="0" indent="0" algn="ctr">
               <a:buNone/>
             </a:pPr>
             <a:r>
@@ -13727,7 +13673,7 @@
           <a:bodyPr wrap="square" lIns="0" tIns="0" rIns="0" bIns="0" rtlCol="0" anchor="t"/>
           <a:lstStyle/>
           <a:p>
-            <a:pPr indent="0" marL="0">
+            <a:pPr marL="0" indent="0">
               <a:lnSpc>
                 <a:spcPct val="95000"/>
               </a:lnSpc>
@@ -13747,7 +13693,7 @@
             <a:endParaRPr lang="en-US" sz="1400" dirty="0"/>
           </a:p>
           <a:p>
-            <a:pPr indent="0" marL="0">
+            <a:pPr marL="0" indent="0">
               <a:lnSpc>
                 <a:spcPct val="95000"/>
               </a:lnSpc>
@@ -13767,7 +13713,7 @@
             <a:endParaRPr lang="en-US" sz="1400" dirty="0"/>
           </a:p>
           <a:p>
-            <a:pPr indent="0" marL="0">
+            <a:pPr marL="0" indent="0">
               <a:lnSpc>
                 <a:spcPct val="95000"/>
               </a:lnSpc>
@@ -13787,7 +13733,7 @@
             <a:endParaRPr lang="en-US" sz="1400" dirty="0"/>
           </a:p>
           <a:p>
-            <a:pPr indent="0" marL="0">
+            <a:pPr marL="0" indent="0">
               <a:lnSpc>
                 <a:spcPct val="95000"/>
               </a:lnSpc>
@@ -13807,7 +13753,7 @@
             <a:endParaRPr lang="en-US" sz="1400" dirty="0"/>
           </a:p>
           <a:p>
-            <a:pPr indent="0" marL="0">
+            <a:pPr marL="0" indent="0">
               <a:lnSpc>
                 <a:spcPct val="95000"/>
               </a:lnSpc>
@@ -13827,7 +13773,7 @@
             <a:endParaRPr lang="en-US" sz="1400" dirty="0"/>
           </a:p>
           <a:p>
-            <a:pPr indent="0" marL="0">
+            <a:pPr marL="0" indent="0">
               <a:lnSpc>
                 <a:spcPct val="95000"/>
               </a:lnSpc>
@@ -13847,7 +13793,7 @@
             <a:endParaRPr lang="en-US" sz="1400" dirty="0"/>
           </a:p>
           <a:p>
-            <a:pPr indent="0" marL="0">
+            <a:pPr marL="0" indent="0">
               <a:lnSpc>
                 <a:spcPct val="95000"/>
               </a:lnSpc>
@@ -13867,7 +13813,7 @@
             <a:endParaRPr lang="en-US" sz="1400" dirty="0"/>
           </a:p>
           <a:p>
-            <a:pPr indent="0" marL="0">
+            <a:pPr marL="0" indent="0">
               <a:lnSpc>
                 <a:spcPct val="95000"/>
               </a:lnSpc>
@@ -13887,7 +13833,7 @@
             <a:endParaRPr lang="en-US" sz="1400" dirty="0"/>
           </a:p>
           <a:p>
-            <a:pPr indent="0" marL="0">
+            <a:pPr marL="0" indent="0">
               <a:lnSpc>
                 <a:spcPct val="95000"/>
               </a:lnSpc>
@@ -13907,7 +13853,7 @@
             <a:endParaRPr lang="en-US" sz="1400" dirty="0"/>
           </a:p>
           <a:p>
-            <a:pPr indent="0" marL="0">
+            <a:pPr marL="0" indent="0">
               <a:lnSpc>
                 <a:spcPct val="95000"/>
               </a:lnSpc>
@@ -13927,7 +13873,7 @@
             <a:endParaRPr lang="en-US" sz="1400" dirty="0"/>
           </a:p>
           <a:p>
-            <a:pPr indent="0" marL="0">
+            <a:pPr marL="0" indent="0">
               <a:lnSpc>
                 <a:spcPct val="95000"/>
               </a:lnSpc>
@@ -13947,7 +13893,7 @@
             <a:endParaRPr lang="en-US" sz="1400" dirty="0"/>
           </a:p>
           <a:p>
-            <a:pPr indent="0" marL="0">
+            <a:pPr marL="0" indent="0">
               <a:lnSpc>
                 <a:spcPct val="95000"/>
               </a:lnSpc>
@@ -13967,7 +13913,7 @@
             <a:endParaRPr lang="en-US" sz="1400" dirty="0"/>
           </a:p>
           <a:p>
-            <a:pPr indent="0" marL="0">
+            <a:pPr marL="0" indent="0">
               <a:lnSpc>
                 <a:spcPct val="95000"/>
               </a:lnSpc>
@@ -13987,7 +13933,7 @@
             <a:endParaRPr lang="en-US" sz="1400" dirty="0"/>
           </a:p>
           <a:p>
-            <a:pPr indent="0" marL="0">
+            <a:pPr marL="0" indent="0">
               <a:lnSpc>
                 <a:spcPct val="95000"/>
               </a:lnSpc>
@@ -14007,7 +13953,7 @@
             <a:endParaRPr lang="en-US" sz="1400" dirty="0"/>
           </a:p>
           <a:p>
-            <a:pPr indent="0" marL="0">
+            <a:pPr marL="0" indent="0">
               <a:lnSpc>
                 <a:spcPct val="95000"/>
               </a:lnSpc>
@@ -14027,7 +13973,7 @@
             <a:endParaRPr lang="en-US" sz="1400" dirty="0"/>
           </a:p>
           <a:p>
-            <a:pPr indent="0" marL="0">
+            <a:pPr marL="0" indent="0">
               <a:lnSpc>
                 <a:spcPct val="95000"/>
               </a:lnSpc>
@@ -14047,7 +13993,7 @@
             <a:endParaRPr lang="en-US" sz="1400" dirty="0"/>
           </a:p>
           <a:p>
-            <a:pPr indent="0" marL="0">
+            <a:pPr marL="0" indent="0">
               <a:lnSpc>
                 <a:spcPct val="95000"/>
               </a:lnSpc>
@@ -14067,7 +14013,7 @@
             <a:endParaRPr lang="en-US" sz="1400" dirty="0"/>
           </a:p>
           <a:p>
-            <a:pPr indent="0" marL="0">
+            <a:pPr marL="0" indent="0">
               <a:lnSpc>
                 <a:spcPct val="95000"/>
               </a:lnSpc>
@@ -14087,7 +14033,7 @@
             <a:endParaRPr lang="en-US" sz="1400" dirty="0"/>
           </a:p>
           <a:p>
-            <a:pPr indent="0" marL="0">
+            <a:pPr marL="0" indent="0">
               <a:lnSpc>
                 <a:spcPct val="95000"/>
               </a:lnSpc>
@@ -14107,7 +14053,7 @@
             <a:endParaRPr lang="en-US" sz="1400" dirty="0"/>
           </a:p>
           <a:p>
-            <a:pPr indent="0" marL="0">
+            <a:pPr marL="0" indent="0">
               <a:lnSpc>
                 <a:spcPct val="95000"/>
               </a:lnSpc>
@@ -14127,7 +14073,7 @@
             <a:endParaRPr lang="en-US" sz="1400" dirty="0"/>
           </a:p>
           <a:p>
-            <a:pPr indent="0" marL="0">
+            <a:pPr marL="0" indent="0">
               <a:lnSpc>
                 <a:spcPct val="95000"/>
               </a:lnSpc>
@@ -14169,7 +14115,7 @@
           <a:bodyPr wrap="square" lIns="0" tIns="0" rIns="0" bIns="0" rtlCol="0" anchor="ctr"/>
           <a:lstStyle/>
           <a:p>
-            <a:pPr indent="0" marL="0">
+            <a:pPr marL="0" indent="0">
               <a:buNone/>
             </a:pPr>
             <a:r>
@@ -14225,7 +14171,7 @@
           <a:bodyPr wrap="square" lIns="0" tIns="0" rIns="0" bIns="0" rtlCol="0" anchor="ctr"/>
           <a:lstStyle/>
           <a:p>
-            <a:pPr algn="ctr" indent="0" marL="0">
+            <a:pPr marL="0" indent="0" algn="ctr">
               <a:buNone/>
             </a:pPr>
             <a:r>
@@ -14261,7 +14207,7 @@
           <a:bodyPr wrap="square" lIns="0" tIns="0" rIns="0" bIns="0" rtlCol="0" anchor="t"/>
           <a:lstStyle/>
           <a:p>
-            <a:pPr indent="0" marL="0">
+            <a:pPr marL="0" indent="0">
               <a:buNone/>
             </a:pPr>
             <a:r>
@@ -14317,7 +14263,7 @@
           <a:bodyPr wrap="square" lIns="0" tIns="0" rIns="0" bIns="0" rtlCol="0" anchor="ctr"/>
           <a:lstStyle/>
           <a:p>
-            <a:pPr algn="ctr" indent="0" marL="0">
+            <a:pPr marL="0" indent="0" algn="ctr">
               <a:buNone/>
             </a:pPr>
             <a:r>
@@ -14353,7 +14299,7 @@
           <a:bodyPr wrap="square" lIns="0" tIns="0" rIns="0" bIns="0" rtlCol="0" anchor="t"/>
           <a:lstStyle/>
           <a:p>
-            <a:pPr indent="0" marL="0">
+            <a:pPr marL="0" indent="0">
               <a:buNone/>
             </a:pPr>
             <a:r>
@@ -14409,7 +14355,7 @@
           <a:bodyPr wrap="square" lIns="0" tIns="0" rIns="0" bIns="0" rtlCol="0" anchor="ctr"/>
           <a:lstStyle/>
           <a:p>
-            <a:pPr algn="ctr" indent="0" marL="0">
+            <a:pPr marL="0" indent="0" algn="ctr">
               <a:buNone/>
             </a:pPr>
             <a:r>
@@ -14445,7 +14391,7 @@
           <a:bodyPr wrap="square" lIns="0" tIns="0" rIns="0" bIns="0" rtlCol="0" anchor="t"/>
           <a:lstStyle/>
           <a:p>
-            <a:pPr indent="0" marL="0">
+            <a:pPr marL="0" indent="0">
               <a:buNone/>
             </a:pPr>
             <a:r>
@@ -14501,7 +14447,7 @@
           <a:bodyPr wrap="square" lIns="0" tIns="0" rIns="0" bIns="0" rtlCol="0" anchor="ctr"/>
           <a:lstStyle/>
           <a:p>
-            <a:pPr algn="ctr" indent="0" marL="0">
+            <a:pPr marL="0" indent="0" algn="ctr">
               <a:buNone/>
             </a:pPr>
             <a:r>
@@ -14537,7 +14483,7 @@
           <a:bodyPr wrap="square" lIns="0" tIns="0" rIns="0" bIns="0" rtlCol="0" anchor="t"/>
           <a:lstStyle/>
           <a:p>
-            <a:pPr indent="0" marL="0">
+            <a:pPr marL="0" indent="0">
               <a:buNone/>
             </a:pPr>
             <a:r>
@@ -14572,7 +14518,7 @@
           </a:prstGeom>
           <a:extLst>
             <a:ext uri="{C572A759-6A51-4108-AA02-DFA0A04FC94B}">
-              <ma14:wrappingTextBoxFlag xmlns:ma14="http://schemas.microsoft.com/office/mac/drawingml/2011/main" val="0"/>
+              <ma14:wrappingTextBoxFlag xmlns:ma14="http://schemas.microsoft.com/office/mac/drawingml/2011/main" xmlns="" val="0"/>
             </a:ext>
           </a:extLst>
         </p:spPr>
@@ -14590,7 +14536,7 @@
           <a:p>
             <a:pPr algn="r"/>
             <a:fld id="{F7021451-1387-4CA6-816F-3879F97B5CBC}" type="slidenum">
-              <a:rPr b="0" lang="en-US"/>
+              <a:rPr lang="en-US" b="0"/>
               <a:t>24</a:t>
             </a:fld>
             <a:endParaRPr lang="en-US"/>
@@ -14625,9 +14571,11 @@
       <p:sp>
         <p:nvSpPr>
           <p:cNvPr id="2" name="Text 0"/>
-          <p:cNvSpPr/>
+          <p:cNvSpPr>
+            <a:spLocks noGrp="1"/>
+          </p:cNvSpPr>
           <p:nvPr>
-            <p:ph idx="100" type="title" hasCustomPrompt="1"/>
+            <p:ph type="title" idx="100" hasCustomPrompt="1"/>
           </p:nvPr>
         </p:nvSpPr>
         <p:spPr>
@@ -14645,7 +14593,7 @@
           <a:bodyPr wrap="square" lIns="0" tIns="0" rIns="0" bIns="0" rtlCol="0" anchor="ctr"/>
           <a:lstStyle/>
           <a:p>
-            <a:pPr algn="l" indent="0" marL="0">
+            <a:pPr marL="0" indent="0" algn="l">
               <a:buNone/>
             </a:pPr>
             <a:r>
@@ -14703,7 +14651,7 @@
           <a:bodyPr wrap="square" lIns="0" tIns="0" rIns="0" bIns="0" rtlCol="0" anchor="ctr"/>
           <a:lstStyle/>
           <a:p>
-            <a:pPr algn="ctr" indent="0" marL="0">
+            <a:pPr marL="0" indent="0" algn="ctr">
               <a:buNone/>
             </a:pPr>
             <a:r>
@@ -14740,167 +14688,7 @@
       </p:sp>
       <p:pic>
         <p:nvPicPr>
-          <p:cNvPr id="6" name="Image 0" descr="Nuestras ideas">    </p:cNvPr>
-          <p:cNvPicPr>
-            <a:picLocks noChangeAspect="1"/>
-          </p:cNvPicPr>
-          <p:nvPr/>
-        </p:nvPicPr>
-        <p:blipFill>
-          <a:blip r:embed="rId1"/>
-          <a:stretch>
-            <a:fillRect/>
-          </a:stretch>
-        </p:blipFill>
-        <p:spPr>
-          <a:xfrm>
-            <a:off x="2296973" y="1702613"/>
-            <a:ext cx="618134" cy="618134"/>
-          </a:xfrm>
-          <a:prstGeom prst="rect">
-            <a:avLst/>
-          </a:prstGeom>
-        </p:spPr>
-      </p:pic>
-      <p:sp>
-        <p:nvSpPr>
-          <p:cNvPr id="7" name="Text 4"/>
-          <p:cNvSpPr txBox="1"/>
-          <p:nvPr/>
-        </p:nvSpPr>
-        <p:spPr>
-          <a:xfrm>
-            <a:off x="1463040" y="2697480"/>
-            <a:ext cx="2286000" cy="411480"/>
-          </a:xfrm>
-          <a:prstGeom prst="rect">
-            <a:avLst/>
-          </a:prstGeom>
-          <a:noFill/>
-          <a:ln/>
-        </p:spPr>
-        <p:txBody>
-          <a:bodyPr wrap="square" lIns="0" tIns="0" rIns="0" bIns="0" rtlCol="0" anchor="ctr"/>
-          <a:lstStyle/>
-          <a:p>
-            <a:pPr algn="ctr" indent="0" marL="0">
-              <a:buNone/>
-            </a:pPr>
-            <a:r>
-              <a:rPr lang="en-US" sz="1700" b="1" dirty="0">
-                <a:solidFill>
-                  <a:schemeClr val="tx1"/>
-                </a:solidFill>
-              </a:rPr>
-              <a:t>Nuestras ideas</a:t>
-            </a:r>
-            <a:endParaRPr lang="en-US" sz="1700" dirty="0"/>
-          </a:p>
-        </p:txBody>
-      </p:sp>
-      <p:sp>
-        <p:nvSpPr>
-          <p:cNvPr id="8" name="Ideas de la IA"/>
-          <p:cNvSpPr/>
-          <p:nvPr/>
-        </p:nvSpPr>
-        <p:spPr>
-          <a:xfrm>
-            <a:off x="5394960" y="1417320"/>
-            <a:ext cx="1188720" cy="1188720"/>
-          </a:xfrm>
-          <a:prstGeom prst="ellipse">
-            <a:avLst/>
-          </a:prstGeom>
-          <a:solidFill>
-            <a:schemeClr val="accent2"/>
-          </a:solidFill>
-          <a:ln/>
-        </p:spPr>
-      </p:sp>
-      <p:pic>
-        <p:nvPicPr>
-          <p:cNvPr id="9" name="Image 1" descr="Ideas de la IA">    </p:cNvPr>
-          <p:cNvPicPr>
-            <a:picLocks noChangeAspect="1"/>
-          </p:cNvPicPr>
-          <p:nvPr/>
-        </p:nvPicPr>
-        <p:blipFill>
-          <a:blip r:embed="rId2"/>
-          <a:stretch>
-            <a:fillRect/>
-          </a:stretch>
-        </p:blipFill>
-        <p:spPr>
-          <a:xfrm>
-            <a:off x="5680253" y="1702613"/>
-            <a:ext cx="618134" cy="618134"/>
-          </a:xfrm>
-          <a:prstGeom prst="rect">
-            <a:avLst/>
-          </a:prstGeom>
-        </p:spPr>
-      </p:pic>
-      <p:sp>
-        <p:nvSpPr>
-          <p:cNvPr id="10" name="Text 6"/>
-          <p:cNvSpPr txBox="1"/>
-          <p:nvPr/>
-        </p:nvSpPr>
-        <p:spPr>
-          <a:xfrm>
-            <a:off x="4846320" y="2697480"/>
-            <a:ext cx="2286000" cy="411480"/>
-          </a:xfrm>
-          <a:prstGeom prst="rect">
-            <a:avLst/>
-          </a:prstGeom>
-          <a:noFill/>
-          <a:ln/>
-        </p:spPr>
-        <p:txBody>
-          <a:bodyPr wrap="square" lIns="0" tIns="0" rIns="0" bIns="0" rtlCol="0" anchor="ctr"/>
-          <a:lstStyle/>
-          <a:p>
-            <a:pPr algn="ctr" indent="0" marL="0">
-              <a:buNone/>
-            </a:pPr>
-            <a:r>
-              <a:rPr lang="en-US" sz="1700" b="1" dirty="0">
-                <a:solidFill>
-                  <a:schemeClr val="tx1"/>
-                </a:solidFill>
-              </a:rPr>
-              <a:t>Ideas de la IA</a:t>
-            </a:r>
-            <a:endParaRPr lang="en-US" sz="1700" dirty="0"/>
-          </a:p>
-        </p:txBody>
-      </p:sp>
-      <p:sp>
-        <p:nvSpPr>
-          <p:cNvPr id="11" name="Ideas mejores"/>
-          <p:cNvSpPr/>
-          <p:nvPr/>
-        </p:nvSpPr>
-        <p:spPr>
-          <a:xfrm>
-            <a:off x="8778240" y="1417320"/>
-            <a:ext cx="1188720" cy="1188720"/>
-          </a:xfrm>
-          <a:prstGeom prst="ellipse">
-            <a:avLst/>
-          </a:prstGeom>
-          <a:solidFill>
-            <a:schemeClr val="accent3"/>
-          </a:solidFill>
-          <a:ln/>
-        </p:spPr>
-      </p:sp>
-      <p:pic>
-        <p:nvPicPr>
-          <p:cNvPr id="12" name="Image 2" descr="Ideas mejores">    </p:cNvPr>
+          <p:cNvPr id="6" name="Image 0" descr="Nuestras ideas"/>
           <p:cNvPicPr>
             <a:picLocks noChangeAspect="1"/>
           </p:cNvPicPr>
@@ -14914,6 +14702,166 @@
         </p:blipFill>
         <p:spPr>
           <a:xfrm>
+            <a:off x="2296973" y="1702613"/>
+            <a:ext cx="618134" cy="618134"/>
+          </a:xfrm>
+          <a:prstGeom prst="rect">
+            <a:avLst/>
+          </a:prstGeom>
+        </p:spPr>
+      </p:pic>
+      <p:sp>
+        <p:nvSpPr>
+          <p:cNvPr id="7" name="Text 4"/>
+          <p:cNvSpPr txBox="1"/>
+          <p:nvPr/>
+        </p:nvSpPr>
+        <p:spPr>
+          <a:xfrm>
+            <a:off x="1463040" y="2697480"/>
+            <a:ext cx="2286000" cy="411480"/>
+          </a:xfrm>
+          <a:prstGeom prst="rect">
+            <a:avLst/>
+          </a:prstGeom>
+          <a:noFill/>
+          <a:ln/>
+        </p:spPr>
+        <p:txBody>
+          <a:bodyPr wrap="square" lIns="0" tIns="0" rIns="0" bIns="0" rtlCol="0" anchor="ctr"/>
+          <a:lstStyle/>
+          <a:p>
+            <a:pPr marL="0" indent="0" algn="ctr">
+              <a:buNone/>
+            </a:pPr>
+            <a:r>
+              <a:rPr lang="en-US" sz="1700" b="1" dirty="0">
+                <a:solidFill>
+                  <a:schemeClr val="tx1"/>
+                </a:solidFill>
+              </a:rPr>
+              <a:t>Nuestras ideas</a:t>
+            </a:r>
+            <a:endParaRPr lang="en-US" sz="1700" dirty="0"/>
+          </a:p>
+        </p:txBody>
+      </p:sp>
+      <p:sp>
+        <p:nvSpPr>
+          <p:cNvPr id="8" name="Ideas de la IA"/>
+          <p:cNvSpPr/>
+          <p:nvPr/>
+        </p:nvSpPr>
+        <p:spPr>
+          <a:xfrm>
+            <a:off x="5394960" y="1417320"/>
+            <a:ext cx="1188720" cy="1188720"/>
+          </a:xfrm>
+          <a:prstGeom prst="ellipse">
+            <a:avLst/>
+          </a:prstGeom>
+          <a:solidFill>
+            <a:schemeClr val="accent2"/>
+          </a:solidFill>
+          <a:ln/>
+        </p:spPr>
+      </p:sp>
+      <p:pic>
+        <p:nvPicPr>
+          <p:cNvPr id="9" name="Image 1" descr="Ideas de la IA"/>
+          <p:cNvPicPr>
+            <a:picLocks noChangeAspect="1"/>
+          </p:cNvPicPr>
+          <p:nvPr/>
+        </p:nvPicPr>
+        <p:blipFill>
+          <a:blip r:embed="rId4"/>
+          <a:stretch>
+            <a:fillRect/>
+          </a:stretch>
+        </p:blipFill>
+        <p:spPr>
+          <a:xfrm>
+            <a:off x="5680253" y="1702613"/>
+            <a:ext cx="618134" cy="618134"/>
+          </a:xfrm>
+          <a:prstGeom prst="rect">
+            <a:avLst/>
+          </a:prstGeom>
+        </p:spPr>
+      </p:pic>
+      <p:sp>
+        <p:nvSpPr>
+          <p:cNvPr id="10" name="Text 6"/>
+          <p:cNvSpPr txBox="1"/>
+          <p:nvPr/>
+        </p:nvSpPr>
+        <p:spPr>
+          <a:xfrm>
+            <a:off x="4846320" y="2697480"/>
+            <a:ext cx="2286000" cy="411480"/>
+          </a:xfrm>
+          <a:prstGeom prst="rect">
+            <a:avLst/>
+          </a:prstGeom>
+          <a:noFill/>
+          <a:ln/>
+        </p:spPr>
+        <p:txBody>
+          <a:bodyPr wrap="square" lIns="0" tIns="0" rIns="0" bIns="0" rtlCol="0" anchor="ctr"/>
+          <a:lstStyle/>
+          <a:p>
+            <a:pPr marL="0" indent="0" algn="ctr">
+              <a:buNone/>
+            </a:pPr>
+            <a:r>
+              <a:rPr lang="en-US" sz="1700" b="1" dirty="0">
+                <a:solidFill>
+                  <a:schemeClr val="tx1"/>
+                </a:solidFill>
+              </a:rPr>
+              <a:t>Ideas de la IA</a:t>
+            </a:r>
+            <a:endParaRPr lang="en-US" sz="1700" dirty="0"/>
+          </a:p>
+        </p:txBody>
+      </p:sp>
+      <p:sp>
+        <p:nvSpPr>
+          <p:cNvPr id="11" name="Ideas mejores"/>
+          <p:cNvSpPr/>
+          <p:nvPr/>
+        </p:nvSpPr>
+        <p:spPr>
+          <a:xfrm>
+            <a:off x="8778240" y="1417320"/>
+            <a:ext cx="1188720" cy="1188720"/>
+          </a:xfrm>
+          <a:prstGeom prst="ellipse">
+            <a:avLst/>
+          </a:prstGeom>
+          <a:solidFill>
+            <a:schemeClr val="accent3"/>
+          </a:solidFill>
+          <a:ln/>
+        </p:spPr>
+      </p:sp>
+      <p:pic>
+        <p:nvPicPr>
+          <p:cNvPr id="12" name="Image 2" descr="Ideas mejores"/>
+          <p:cNvPicPr>
+            <a:picLocks noChangeAspect="1"/>
+          </p:cNvPicPr>
+          <p:nvPr/>
+        </p:nvPicPr>
+        <p:blipFill>
+          <a:blip r:embed="rId5"/>
+          <a:stretch>
+            <a:fillRect/>
+          </a:stretch>
+        </p:blipFill>
+        <p:spPr>
+          <a:xfrm>
             <a:off x="9063533" y="1702613"/>
             <a:ext cx="618134" cy="618134"/>
           </a:xfrm>
@@ -14943,7 +14891,7 @@
           <a:bodyPr wrap="square" lIns="0" tIns="0" rIns="0" bIns="0" rtlCol="0" anchor="ctr"/>
           <a:lstStyle/>
           <a:p>
-            <a:pPr algn="ctr" indent="0" marL="0">
+            <a:pPr marL="0" indent="0" algn="ctr">
               <a:buNone/>
             </a:pPr>
             <a:r>
@@ -14979,7 +14927,7 @@
           <a:bodyPr wrap="square" lIns="0" tIns="0" rIns="0" bIns="0" rtlCol="0" anchor="ctr"/>
           <a:lstStyle/>
           <a:p>
-            <a:pPr algn="ctr" indent="0" marL="0">
+            <a:pPr marL="0" indent="0" algn="ctr">
               <a:buNone/>
             </a:pPr>
             <a:r>
@@ -15015,7 +14963,7 @@
           <a:bodyPr wrap="square" lIns="0" tIns="0" rIns="0" bIns="0" rtlCol="0" anchor="ctr"/>
           <a:lstStyle/>
           <a:p>
-            <a:pPr algn="ctr" indent="0" marL="0">
+            <a:pPr marL="0" indent="0" algn="ctr">
               <a:buNone/>
             </a:pPr>
             <a:r>
@@ -15073,7 +15021,7 @@
           <a:bodyPr wrap="square" lIns="0" tIns="0" rIns="0" bIns="0" rtlCol="0" anchor="t"/>
           <a:lstStyle/>
           <a:p>
-            <a:pPr indent="0" marL="0">
+            <a:pPr marL="0" indent="0">
               <a:lnSpc>
                 <a:spcPct val="95000"/>
               </a:lnSpc>
@@ -15093,7 +15041,7 @@
             <a:endParaRPr lang="en-US" sz="1800" dirty="0"/>
           </a:p>
           <a:p>
-            <a:pPr indent="0" marL="0">
+            <a:pPr marL="0" indent="0">
               <a:lnSpc>
                 <a:spcPct val="95000"/>
               </a:lnSpc>
@@ -15113,7 +15061,7 @@
             <a:endParaRPr lang="en-US" sz="1800" dirty="0"/>
           </a:p>
           <a:p>
-            <a:pPr indent="0" marL="0">
+            <a:pPr marL="0" indent="0">
               <a:lnSpc>
                 <a:spcPct val="95000"/>
               </a:lnSpc>
@@ -15155,7 +15103,7 @@
           <a:bodyPr wrap="square" lIns="0" tIns="0" rIns="0" bIns="0" rtlCol="0" anchor="ctr"/>
           <a:lstStyle/>
           <a:p>
-            <a:pPr indent="0" marL="0">
+            <a:pPr marL="0" indent="0">
               <a:buNone/>
             </a:pPr>
             <a:r>
@@ -15190,7 +15138,7 @@
           </a:prstGeom>
           <a:extLst>
             <a:ext uri="{C572A759-6A51-4108-AA02-DFA0A04FC94B}">
-              <ma14:wrappingTextBoxFlag xmlns:ma14="http://schemas.microsoft.com/office/mac/drawingml/2011/main" val="0"/>
+              <ma14:wrappingTextBoxFlag xmlns:ma14="http://schemas.microsoft.com/office/mac/drawingml/2011/main" xmlns="" val="0"/>
             </a:ext>
           </a:extLst>
         </p:spPr>
@@ -15208,7 +15156,7 @@
           <a:p>
             <a:pPr algn="r"/>
             <a:fld id="{F7021451-1387-4CA6-816F-3879F97B5CBC}" type="slidenum">
-              <a:rPr b="0" lang="en-US"/>
+              <a:rPr lang="en-US" b="0"/>
               <a:t>25</a:t>
             </a:fld>
             <a:endParaRPr lang="en-US"/>
@@ -15243,9 +15191,11 @@
       <p:sp>
         <p:nvSpPr>
           <p:cNvPr id="2" name="Text 0"/>
-          <p:cNvSpPr/>
+          <p:cNvSpPr>
+            <a:spLocks noGrp="1"/>
+          </p:cNvSpPr>
           <p:nvPr>
-            <p:ph idx="100" type="title" hasCustomPrompt="1"/>
+            <p:ph type="title" idx="100" hasCustomPrompt="1"/>
           </p:nvPr>
         </p:nvSpPr>
         <p:spPr>
@@ -15263,7 +15213,7 @@
           <a:bodyPr wrap="square" lIns="0" tIns="0" rIns="0" bIns="0" rtlCol="0" anchor="ctr"/>
           <a:lstStyle/>
           <a:p>
-            <a:pPr algn="l" indent="0" marL="0">
+            <a:pPr marL="0" indent="0" algn="l">
               <a:buNone/>
             </a:pPr>
             <a:r>
@@ -15321,7 +15271,7 @@
           <a:bodyPr wrap="square" lIns="0" tIns="0" rIns="0" bIns="0" rtlCol="0" anchor="ctr"/>
           <a:lstStyle/>
           <a:p>
-            <a:pPr algn="ctr" indent="0" marL="0">
+            <a:pPr marL="0" indent="0" algn="ctr">
               <a:buNone/>
             </a:pPr>
             <a:r>
@@ -15358,14 +15308,14 @@
       </p:sp>
       <p:pic>
         <p:nvPicPr>
-          <p:cNvPr id="6" name="Image 0" descr="Instrucción">    </p:cNvPr>
+          <p:cNvPr id="6" name="Image 0" descr="Instrucción"/>
           <p:cNvPicPr>
             <a:picLocks noChangeAspect="1"/>
           </p:cNvPicPr>
           <p:nvPr/>
         </p:nvPicPr>
         <p:blipFill>
-          <a:blip r:embed="rId1"/>
+          <a:blip r:embed="rId3"/>
           <a:stretch>
             <a:fillRect/>
           </a:stretch>
@@ -15401,7 +15351,7 @@
           <a:bodyPr wrap="square" lIns="0" tIns="0" rIns="0" bIns="0" rtlCol="0" anchor="ctr"/>
           <a:lstStyle/>
           <a:p>
-            <a:pPr indent="0" marL="0">
+            <a:pPr marL="0" indent="0">
               <a:buNone/>
             </a:pPr>
             <a:r>
@@ -15438,14 +15388,14 @@
       </p:sp>
       <p:pic>
         <p:nvPicPr>
-          <p:cNvPr id="9" name="Image 1" descr="Instrucción">    </p:cNvPr>
+          <p:cNvPr id="9" name="Image 1" descr="Instrucción"/>
           <p:cNvPicPr>
             <a:picLocks noChangeAspect="1"/>
           </p:cNvPicPr>
           <p:nvPr/>
         </p:nvPicPr>
         <p:blipFill>
-          <a:blip r:embed="rId2"/>
+          <a:blip r:embed="rId4"/>
           <a:stretch>
             <a:fillRect/>
           </a:stretch>
@@ -15481,7 +15431,7 @@
           <a:bodyPr wrap="square" lIns="0" tIns="0" rIns="0" bIns="0" rtlCol="0" anchor="ctr"/>
           <a:lstStyle/>
           <a:p>
-            <a:pPr indent="0" marL="0">
+            <a:pPr marL="0" indent="0">
               <a:buNone/>
             </a:pPr>
             <a:r>
@@ -15519,9 +15469,27 @@
             <a:tbl>
               <a:tblPr/>
               <a:tblGrid>
-                <a:gridCol w="2587752"/>
-                <a:gridCol w="1463040"/>
-                <a:gridCol w="1463040"/>
+                <a:gridCol w="2587752">
+                  <a:extLst>
+                    <a:ext uri="{9D8B030D-6E8A-4147-A177-3AD203B41FA5}">
+                      <a16:colId xmlns:a16="http://schemas.microsoft.com/office/drawing/2014/main" val="20000"/>
+                    </a:ext>
+                  </a:extLst>
+                </a:gridCol>
+                <a:gridCol w="1463040">
+                  <a:extLst>
+                    <a:ext uri="{9D8B030D-6E8A-4147-A177-3AD203B41FA5}">
+                      <a16:colId xmlns:a16="http://schemas.microsoft.com/office/drawing/2014/main" val="20001"/>
+                    </a:ext>
+                  </a:extLst>
+                </a:gridCol>
+                <a:gridCol w="1463040">
+                  <a:extLst>
+                    <a:ext uri="{9D8B030D-6E8A-4147-A177-3AD203B41FA5}">
+                      <a16:colId xmlns:a16="http://schemas.microsoft.com/office/drawing/2014/main" val="20002"/>
+                    </a:ext>
+                  </a:extLst>
+                </a:gridCol>
               </a:tblGrid>
               <a:tr h="731520">
                 <a:tc>
@@ -15529,13 +15497,13 @@
                     <a:bodyPr/>
                     <a:lstStyle/>
                     <a:p>
-                      <a:pPr algn="ctr" indent="0" marL="0">
+                      <a:pPr marL="0" indent="0" algn="ctr">
                         <a:buNone/>
                       </a:pPr>
                       <a:endParaRPr lang="en-US" sz="1800" dirty="0"/>
                     </a:p>
                   </a:txBody>
-                  <a:tcPr marL="91440" marR="91440" marT="91440" marB="91440" anchor="ctr">
+                  <a:tcPr marT="91440" marB="91440" anchor="ctr">
                     <a:lnL w="12700" cap="flat" cmpd="sng" algn="ctr">
                       <a:solidFill>
                         <a:srgbClr val="8A94A6"/>
@@ -15582,7 +15550,7 @@
                     <a:bodyPr/>
                     <a:lstStyle/>
                     <a:p>
-                      <a:pPr algn="ctr" indent="0" marL="0">
+                      <a:pPr marL="0" indent="0" algn="ctr">
                         <a:buNone/>
                       </a:pPr>
                       <a:r>
@@ -15596,7 +15564,7 @@
                       <a:endParaRPr lang="en-US" sz="1800" dirty="0"/>
                     </a:p>
                   </a:txBody>
-                  <a:tcPr marL="91440" marR="91440" marT="91440" marB="91440" anchor="ctr">
+                  <a:tcPr marT="91440" marB="91440" anchor="ctr">
                     <a:lnL w="12700" cap="flat" cmpd="sng" algn="ctr">
                       <a:solidFill>
                         <a:srgbClr val="8A94A6"/>
@@ -15643,7 +15611,7 @@
                     <a:bodyPr/>
                     <a:lstStyle/>
                     <a:p>
-                      <a:pPr algn="ctr" indent="0" marL="0">
+                      <a:pPr marL="0" indent="0" algn="ctr">
                         <a:buNone/>
                       </a:pPr>
                       <a:r>
@@ -15657,7 +15625,7 @@
                       <a:endParaRPr lang="en-US" sz="1800" dirty="0"/>
                     </a:p>
                   </a:txBody>
-                  <a:tcPr marL="91440" marR="91440" marT="91440" marB="91440" anchor="ctr">
+                  <a:tcPr marT="91440" marB="91440" anchor="ctr">
                     <a:lnL w="12700" cap="flat" cmpd="sng" algn="ctr">
                       <a:solidFill>
                         <a:srgbClr val="8A94A6"/>
@@ -15699,6 +15667,11 @@
                     </a:solidFill>
                   </a:tcPr>
                 </a:tc>
+                <a:extLst>
+                  <a:ext uri="{0D108BD9-81ED-4DB2-BD59-A6C34878D82A}">
+                    <a16:rowId xmlns:a16="http://schemas.microsoft.com/office/drawing/2014/main" val="10000"/>
+                  </a:ext>
+                </a:extLst>
               </a:tr>
               <a:tr h="1188720">
                 <a:tc>
@@ -15706,7 +15679,7 @@
                     <a:bodyPr/>
                     <a:lstStyle/>
                     <a:p>
-                      <a:pPr indent="0" marL="0">
+                      <a:pPr marL="0" indent="0">
                         <a:buNone/>
                       </a:pPr>
                       <a:r>
@@ -15720,7 +15693,7 @@
                       <a:endParaRPr lang="en-US" sz="1800" dirty="0"/>
                     </a:p>
                   </a:txBody>
-                  <a:tcPr marL="91440" marR="91440" marT="91440" marB="91440" anchor="ctr">
+                  <a:tcPr marT="91440" marB="91440" anchor="ctr">
                     <a:lnL w="12700" cap="flat" cmpd="sng" algn="ctr">
                       <a:solidFill>
                         <a:srgbClr val="8A94A6"/>
@@ -15764,13 +15737,13 @@
                     <a:bodyPr/>
                     <a:lstStyle/>
                     <a:p>
-                      <a:pPr indent="0" marL="0">
+                      <a:pPr marL="0" indent="0">
                         <a:buNone/>
                       </a:pPr>
                       <a:endParaRPr lang="en-US" sz="1800" dirty="0"/>
                     </a:p>
                   </a:txBody>
-                  <a:tcPr marL="91440" marR="91440" marT="91440" marB="91440" anchor="ctr">
+                  <a:tcPr marT="91440" marB="91440" anchor="ctr">
                     <a:lnL w="12700" cap="flat" cmpd="sng" algn="ctr">
                       <a:solidFill>
                         <a:srgbClr val="8A94A6"/>
@@ -15814,13 +15787,13 @@
                     <a:bodyPr/>
                     <a:lstStyle/>
                     <a:p>
-                      <a:pPr indent="0" marL="0">
+                      <a:pPr marL="0" indent="0">
                         <a:buNone/>
                       </a:pPr>
                       <a:endParaRPr lang="en-US" sz="1800" dirty="0"/>
                     </a:p>
                   </a:txBody>
-                  <a:tcPr marL="91440" marR="91440" marT="91440" marB="91440" anchor="ctr">
+                  <a:tcPr marT="91440" marB="91440" anchor="ctr">
                     <a:lnL w="12700" cap="flat" cmpd="sng" algn="ctr">
                       <a:solidFill>
                         <a:srgbClr val="8A94A6"/>
@@ -15859,6 +15832,11 @@
                     </a:lnB>
                   </a:tcPr>
                 </a:tc>
+                <a:extLst>
+                  <a:ext uri="{0D108BD9-81ED-4DB2-BD59-A6C34878D82A}">
+                    <a16:rowId xmlns:a16="http://schemas.microsoft.com/office/drawing/2014/main" val="10001"/>
+                  </a:ext>
+                </a:extLst>
               </a:tr>
               <a:tr h="1188720">
                 <a:tc>
@@ -15866,7 +15844,7 @@
                     <a:bodyPr/>
                     <a:lstStyle/>
                     <a:p>
-                      <a:pPr indent="0" marL="0">
+                      <a:pPr marL="0" indent="0">
                         <a:buNone/>
                       </a:pPr>
                       <a:r>
@@ -15880,7 +15858,7 @@
                       <a:endParaRPr lang="en-US" sz="1800" dirty="0"/>
                     </a:p>
                   </a:txBody>
-                  <a:tcPr marL="91440" marR="91440" marT="91440" marB="91440" anchor="ctr">
+                  <a:tcPr marT="91440" marB="91440" anchor="ctr">
                     <a:lnL w="12700" cap="flat" cmpd="sng" algn="ctr">
                       <a:solidFill>
                         <a:srgbClr val="8A94A6"/>
@@ -15924,13 +15902,13 @@
                     <a:bodyPr/>
                     <a:lstStyle/>
                     <a:p>
-                      <a:pPr indent="0" marL="0">
+                      <a:pPr marL="0" indent="0">
                         <a:buNone/>
                       </a:pPr>
                       <a:endParaRPr lang="en-US" sz="1800" dirty="0"/>
                     </a:p>
                   </a:txBody>
-                  <a:tcPr marL="91440" marR="91440" marT="91440" marB="91440" anchor="ctr">
+                  <a:tcPr marT="91440" marB="91440" anchor="ctr">
                     <a:lnL w="12700" cap="flat" cmpd="sng" algn="ctr">
                       <a:solidFill>
                         <a:srgbClr val="8A94A6"/>
@@ -15974,13 +15952,13 @@
                     <a:bodyPr/>
                     <a:lstStyle/>
                     <a:p>
-                      <a:pPr indent="0" marL="0">
+                      <a:pPr marL="0" indent="0">
                         <a:buNone/>
                       </a:pPr>
                       <a:endParaRPr lang="en-US" sz="1800" dirty="0"/>
                     </a:p>
                   </a:txBody>
-                  <a:tcPr marL="91440" marR="91440" marT="91440" marB="91440" anchor="ctr">
+                  <a:tcPr marT="91440" marB="91440" anchor="ctr">
                     <a:lnL w="12700" cap="flat" cmpd="sng" algn="ctr">
                       <a:solidFill>
                         <a:srgbClr val="8A94A6"/>
@@ -16019,6 +15997,11 @@
                     </a:lnB>
                   </a:tcPr>
                 </a:tc>
+                <a:extLst>
+                  <a:ext uri="{0D108BD9-81ED-4DB2-BD59-A6C34878D82A}">
+                    <a16:rowId xmlns:a16="http://schemas.microsoft.com/office/drawing/2014/main" val="10002"/>
+                  </a:ext>
+                </a:extLst>
               </a:tr>
             </a:tbl>
           </a:graphicData>
@@ -16045,7 +16028,7 @@
           <a:bodyPr wrap="square" lIns="0" tIns="0" rIns="0" bIns="0" rtlCol="0" anchor="ctr"/>
           <a:lstStyle/>
           <a:p>
-            <a:pPr indent="0" marL="0">
+            <a:pPr marL="0" indent="0">
               <a:buNone/>
             </a:pPr>
             <a:r>
@@ -16080,7 +16063,7 @@
           </a:prstGeom>
           <a:extLst>
             <a:ext uri="{C572A759-6A51-4108-AA02-DFA0A04FC94B}">
-              <ma14:wrappingTextBoxFlag xmlns:ma14="http://schemas.microsoft.com/office/mac/drawingml/2011/main" val="0"/>
+              <ma14:wrappingTextBoxFlag xmlns:ma14="http://schemas.microsoft.com/office/mac/drawingml/2011/main" xmlns="" val="0"/>
             </a:ext>
           </a:extLst>
         </p:spPr>
@@ -16098,7 +16081,7 @@
           <a:p>
             <a:pPr algn="r"/>
             <a:fld id="{F7021451-1387-4CA6-816F-3879F97B5CBC}" type="slidenum">
-              <a:rPr b="0" lang="en-US"/>
+              <a:rPr lang="en-US" b="0"/>
               <a:t>26</a:t>
             </a:fld>
             <a:endParaRPr lang="en-US"/>
@@ -16133,9 +16116,11 @@
       <p:sp>
         <p:nvSpPr>
           <p:cNvPr id="2" name="Text 0"/>
-          <p:cNvSpPr/>
+          <p:cNvSpPr>
+            <a:spLocks noGrp="1"/>
+          </p:cNvSpPr>
           <p:nvPr>
-            <p:ph idx="100" type="title" hasCustomPrompt="1"/>
+            <p:ph type="title" idx="100" hasCustomPrompt="1"/>
           </p:nvPr>
         </p:nvSpPr>
         <p:spPr>
@@ -16153,7 +16138,7 @@
           <a:bodyPr wrap="square" lIns="0" tIns="0" rIns="0" bIns="0" rtlCol="0" anchor="ctr"/>
           <a:lstStyle/>
           <a:p>
-            <a:pPr algn="l" indent="0" marL="0">
+            <a:pPr marL="0" indent="0" algn="l">
               <a:buNone/>
             </a:pPr>
             <a:r>
@@ -16211,7 +16196,7 @@
           <a:bodyPr wrap="square" lIns="0" tIns="0" rIns="0" bIns="0" rtlCol="0" anchor="ctr"/>
           <a:lstStyle/>
           <a:p>
-            <a:pPr algn="ctr" indent="0" marL="0">
+            <a:pPr marL="0" indent="0" algn="ctr">
               <a:buNone/>
             </a:pPr>
             <a:r>
@@ -16270,211 +16255,7 @@
       </p:sp>
       <p:pic>
         <p:nvPicPr>
-          <p:cNvPr id="7" name="Image 0" descr="Pregunta">    </p:cNvPr>
-          <p:cNvPicPr>
-            <a:picLocks noChangeAspect="1"/>
-          </p:cNvPicPr>
-          <p:nvPr/>
-        </p:nvPicPr>
-        <p:blipFill>
-          <a:blip r:embed="rId1"/>
-          <a:stretch>
-            <a:fillRect/>
-          </a:stretch>
-        </p:blipFill>
-        <p:spPr>
-          <a:xfrm>
-            <a:off x="1966722" y="2251253"/>
-            <a:ext cx="618134" cy="618134"/>
-          </a:xfrm>
-          <a:prstGeom prst="rect">
-            <a:avLst/>
-          </a:prstGeom>
-        </p:spPr>
-      </p:pic>
-      <p:sp>
-        <p:nvSpPr>
-          <p:cNvPr id="8" name="Text 5"/>
-          <p:cNvSpPr txBox="1"/>
-          <p:nvPr/>
-        </p:nvSpPr>
-        <p:spPr>
-          <a:xfrm>
-            <a:off x="868680" y="3429000"/>
-            <a:ext cx="2814218" cy="1554480"/>
-          </a:xfrm>
-          <a:prstGeom prst="rect">
-            <a:avLst/>
-          </a:prstGeom>
-          <a:noFill/>
-          <a:ln/>
-        </p:spPr>
-        <p:txBody>
-          <a:bodyPr wrap="square" lIns="0" tIns="0" rIns="0" bIns="0" rtlCol="0" anchor="t"/>
-          <a:lstStyle/>
-          <a:p>
-            <a:pPr algn="ctr" indent="0" marL="0">
-              <a:buNone/>
-            </a:pPr>
-            <a:r>
-              <a:rPr lang="en-US" sz="2400" dirty="0">
-                <a:solidFill>
-                  <a:schemeClr val="tx1"/>
-                </a:solidFill>
-              </a:rPr>
-              <a:t>¿La IA ha dado ideas mejores o solo más ideas?</a:t>
-            </a:r>
-            <a:endParaRPr lang="en-US" sz="2400" dirty="0"/>
-          </a:p>
-        </p:txBody>
-      </p:sp>
-      <p:sp>
-        <p:nvSpPr>
-          <p:cNvPr id="9" name="Tarjeta"/>
-          <p:cNvSpPr/>
-          <p:nvPr/>
-        </p:nvSpPr>
-        <p:spPr>
-          <a:xfrm>
-            <a:off x="4368698" y="1600200"/>
-            <a:ext cx="3454298" cy="3566160"/>
-          </a:xfrm>
-          <a:prstGeom prst="roundRect">
-            <a:avLst>
-              <a:gd name="adj" fmla="val 3971"/>
-            </a:avLst>
-          </a:prstGeom>
-          <a:solidFill>
-            <a:schemeClr val="bg2"/>
-          </a:solidFill>
-          <a:ln/>
-        </p:spPr>
-      </p:sp>
-      <p:sp>
-        <p:nvSpPr>
-          <p:cNvPr id="10" name="Pregunta"/>
-          <p:cNvSpPr/>
-          <p:nvPr/>
-        </p:nvSpPr>
-        <p:spPr>
-          <a:xfrm>
-            <a:off x="5501488" y="1965960"/>
-            <a:ext cx="1188720" cy="1188720"/>
-          </a:xfrm>
-          <a:prstGeom prst="ellipse">
-            <a:avLst/>
-          </a:prstGeom>
-          <a:solidFill>
-            <a:schemeClr val="tx2"/>
-          </a:solidFill>
-          <a:ln/>
-        </p:spPr>
-      </p:sp>
-      <p:pic>
-        <p:nvPicPr>
-          <p:cNvPr id="11" name="Image 1" descr="Pregunta">    </p:cNvPr>
-          <p:cNvPicPr>
-            <a:picLocks noChangeAspect="1"/>
-          </p:cNvPicPr>
-          <p:nvPr/>
-        </p:nvPicPr>
-        <p:blipFill>
-          <a:blip r:embed="rId2"/>
-          <a:stretch>
-            <a:fillRect/>
-          </a:stretch>
-        </p:blipFill>
-        <p:spPr>
-          <a:xfrm>
-            <a:off x="5786780" y="2251253"/>
-            <a:ext cx="618134" cy="618134"/>
-          </a:xfrm>
-          <a:prstGeom prst="rect">
-            <a:avLst/>
-          </a:prstGeom>
-        </p:spPr>
-      </p:pic>
-      <p:sp>
-        <p:nvSpPr>
-          <p:cNvPr id="12" name="Text 8"/>
-          <p:cNvSpPr txBox="1"/>
-          <p:nvPr/>
-        </p:nvSpPr>
-        <p:spPr>
-          <a:xfrm>
-            <a:off x="4688738" y="3429000"/>
-            <a:ext cx="2814218" cy="1554480"/>
-          </a:xfrm>
-          <a:prstGeom prst="rect">
-            <a:avLst/>
-          </a:prstGeom>
-          <a:noFill/>
-          <a:ln/>
-        </p:spPr>
-        <p:txBody>
-          <a:bodyPr wrap="square" lIns="0" tIns="0" rIns="0" bIns="0" rtlCol="0" anchor="t"/>
-          <a:lstStyle/>
-          <a:p>
-            <a:pPr algn="ctr" indent="0" marL="0">
-              <a:buNone/>
-            </a:pPr>
-            <a:r>
-              <a:rPr lang="en-US" sz="2400" dirty="0">
-                <a:solidFill>
-                  <a:schemeClr val="tx1"/>
-                </a:solidFill>
-              </a:rPr>
-              <a:t>¿Las combinaciones han mejorado las ideas de partida?</a:t>
-            </a:r>
-            <a:endParaRPr lang="en-US" sz="2400" dirty="0"/>
-          </a:p>
-        </p:txBody>
-      </p:sp>
-      <p:sp>
-        <p:nvSpPr>
-          <p:cNvPr id="13" name="Tarjeta"/>
-          <p:cNvSpPr/>
-          <p:nvPr/>
-        </p:nvSpPr>
-        <p:spPr>
-          <a:xfrm>
-            <a:off x="8188757" y="1600200"/>
-            <a:ext cx="3454298" cy="3566160"/>
-          </a:xfrm>
-          <a:prstGeom prst="roundRect">
-            <a:avLst>
-              <a:gd name="adj" fmla="val 3971"/>
-            </a:avLst>
-          </a:prstGeom>
-          <a:solidFill>
-            <a:schemeClr val="bg2"/>
-          </a:solidFill>
-          <a:ln/>
-        </p:spPr>
-      </p:sp>
-      <p:sp>
-        <p:nvSpPr>
-          <p:cNvPr id="14" name="Pregunta"/>
-          <p:cNvSpPr/>
-          <p:nvPr/>
-        </p:nvSpPr>
-        <p:spPr>
-          <a:xfrm>
-            <a:off x="9321546" y="1965960"/>
-            <a:ext cx="1188720" cy="1188720"/>
-          </a:xfrm>
-          <a:prstGeom prst="ellipse">
-            <a:avLst/>
-          </a:prstGeom>
-          <a:solidFill>
-            <a:schemeClr val="tx2"/>
-          </a:solidFill>
-          <a:ln/>
-        </p:spPr>
-      </p:sp>
-      <p:pic>
-        <p:nvPicPr>
-          <p:cNvPr id="15" name="Image 2" descr="Pregunta">    </p:cNvPr>
+          <p:cNvPr id="7" name="Image 0" descr="Pregunta"/>
           <p:cNvPicPr>
             <a:picLocks noChangeAspect="1"/>
           </p:cNvPicPr>
@@ -16488,6 +16269,210 @@
         </p:blipFill>
         <p:spPr>
           <a:xfrm>
+            <a:off x="1966722" y="2251253"/>
+            <a:ext cx="618134" cy="618134"/>
+          </a:xfrm>
+          <a:prstGeom prst="rect">
+            <a:avLst/>
+          </a:prstGeom>
+        </p:spPr>
+      </p:pic>
+      <p:sp>
+        <p:nvSpPr>
+          <p:cNvPr id="8" name="Text 5"/>
+          <p:cNvSpPr txBox="1"/>
+          <p:nvPr/>
+        </p:nvSpPr>
+        <p:spPr>
+          <a:xfrm>
+            <a:off x="868680" y="3429000"/>
+            <a:ext cx="2814218" cy="1554480"/>
+          </a:xfrm>
+          <a:prstGeom prst="rect">
+            <a:avLst/>
+          </a:prstGeom>
+          <a:noFill/>
+          <a:ln/>
+        </p:spPr>
+        <p:txBody>
+          <a:bodyPr wrap="square" lIns="0" tIns="0" rIns="0" bIns="0" rtlCol="0" anchor="t"/>
+          <a:lstStyle/>
+          <a:p>
+            <a:pPr marL="0" indent="0" algn="ctr">
+              <a:buNone/>
+            </a:pPr>
+            <a:r>
+              <a:rPr lang="en-US" sz="2400" dirty="0">
+                <a:solidFill>
+                  <a:schemeClr val="tx1"/>
+                </a:solidFill>
+              </a:rPr>
+              <a:t>¿La IA ha dado ideas mejores o solo más ideas?</a:t>
+            </a:r>
+            <a:endParaRPr lang="en-US" sz="2400" dirty="0"/>
+          </a:p>
+        </p:txBody>
+      </p:sp>
+      <p:sp>
+        <p:nvSpPr>
+          <p:cNvPr id="9" name="Tarjeta"/>
+          <p:cNvSpPr/>
+          <p:nvPr/>
+        </p:nvSpPr>
+        <p:spPr>
+          <a:xfrm>
+            <a:off x="4368698" y="1600200"/>
+            <a:ext cx="3454298" cy="3566160"/>
+          </a:xfrm>
+          <a:prstGeom prst="roundRect">
+            <a:avLst>
+              <a:gd name="adj" fmla="val 3971"/>
+            </a:avLst>
+          </a:prstGeom>
+          <a:solidFill>
+            <a:schemeClr val="bg2"/>
+          </a:solidFill>
+          <a:ln/>
+        </p:spPr>
+      </p:sp>
+      <p:sp>
+        <p:nvSpPr>
+          <p:cNvPr id="10" name="Pregunta"/>
+          <p:cNvSpPr/>
+          <p:nvPr/>
+        </p:nvSpPr>
+        <p:spPr>
+          <a:xfrm>
+            <a:off x="5501488" y="1965960"/>
+            <a:ext cx="1188720" cy="1188720"/>
+          </a:xfrm>
+          <a:prstGeom prst="ellipse">
+            <a:avLst/>
+          </a:prstGeom>
+          <a:solidFill>
+            <a:schemeClr val="tx2"/>
+          </a:solidFill>
+          <a:ln/>
+        </p:spPr>
+      </p:sp>
+      <p:pic>
+        <p:nvPicPr>
+          <p:cNvPr id="11" name="Image 1" descr="Pregunta"/>
+          <p:cNvPicPr>
+            <a:picLocks noChangeAspect="1"/>
+          </p:cNvPicPr>
+          <p:nvPr/>
+        </p:nvPicPr>
+        <p:blipFill>
+          <a:blip r:embed="rId4"/>
+          <a:stretch>
+            <a:fillRect/>
+          </a:stretch>
+        </p:blipFill>
+        <p:spPr>
+          <a:xfrm>
+            <a:off x="5786780" y="2251253"/>
+            <a:ext cx="618134" cy="618134"/>
+          </a:xfrm>
+          <a:prstGeom prst="rect">
+            <a:avLst/>
+          </a:prstGeom>
+        </p:spPr>
+      </p:pic>
+      <p:sp>
+        <p:nvSpPr>
+          <p:cNvPr id="12" name="Text 8"/>
+          <p:cNvSpPr txBox="1"/>
+          <p:nvPr/>
+        </p:nvSpPr>
+        <p:spPr>
+          <a:xfrm>
+            <a:off x="4688738" y="3429000"/>
+            <a:ext cx="2814218" cy="1554480"/>
+          </a:xfrm>
+          <a:prstGeom prst="rect">
+            <a:avLst/>
+          </a:prstGeom>
+          <a:noFill/>
+          <a:ln/>
+        </p:spPr>
+        <p:txBody>
+          <a:bodyPr wrap="square" lIns="0" tIns="0" rIns="0" bIns="0" rtlCol="0" anchor="t"/>
+          <a:lstStyle/>
+          <a:p>
+            <a:pPr marL="0" indent="0" algn="ctr">
+              <a:buNone/>
+            </a:pPr>
+            <a:r>
+              <a:rPr lang="en-US" sz="2400" dirty="0">
+                <a:solidFill>
+                  <a:schemeClr val="tx1"/>
+                </a:solidFill>
+              </a:rPr>
+              <a:t>¿Las combinaciones han mejorado las ideas de partida?</a:t>
+            </a:r>
+            <a:endParaRPr lang="en-US" sz="2400" dirty="0"/>
+          </a:p>
+        </p:txBody>
+      </p:sp>
+      <p:sp>
+        <p:nvSpPr>
+          <p:cNvPr id="13" name="Tarjeta"/>
+          <p:cNvSpPr/>
+          <p:nvPr/>
+        </p:nvSpPr>
+        <p:spPr>
+          <a:xfrm>
+            <a:off x="8188757" y="1600200"/>
+            <a:ext cx="3454298" cy="3566160"/>
+          </a:xfrm>
+          <a:prstGeom prst="roundRect">
+            <a:avLst>
+              <a:gd name="adj" fmla="val 3971"/>
+            </a:avLst>
+          </a:prstGeom>
+          <a:solidFill>
+            <a:schemeClr val="bg2"/>
+          </a:solidFill>
+          <a:ln/>
+        </p:spPr>
+      </p:sp>
+      <p:sp>
+        <p:nvSpPr>
+          <p:cNvPr id="14" name="Pregunta"/>
+          <p:cNvSpPr/>
+          <p:nvPr/>
+        </p:nvSpPr>
+        <p:spPr>
+          <a:xfrm>
+            <a:off x="9321546" y="1965960"/>
+            <a:ext cx="1188720" cy="1188720"/>
+          </a:xfrm>
+          <a:prstGeom prst="ellipse">
+            <a:avLst/>
+          </a:prstGeom>
+          <a:solidFill>
+            <a:schemeClr val="tx2"/>
+          </a:solidFill>
+          <a:ln/>
+        </p:spPr>
+      </p:sp>
+      <p:pic>
+        <p:nvPicPr>
+          <p:cNvPr id="15" name="Image 2" descr="Pregunta"/>
+          <p:cNvPicPr>
+            <a:picLocks noChangeAspect="1"/>
+          </p:cNvPicPr>
+          <p:nvPr/>
+        </p:nvPicPr>
+        <p:blipFill>
+          <a:blip r:embed="rId5"/>
+          <a:stretch>
+            <a:fillRect/>
+          </a:stretch>
+        </p:blipFill>
+        <p:spPr>
+          <a:xfrm>
             <a:off x="9606839" y="2251253"/>
             <a:ext cx="618134" cy="618134"/>
           </a:xfrm>
@@ -16517,7 +16502,7 @@
           <a:bodyPr wrap="square" lIns="0" tIns="0" rIns="0" bIns="0" rtlCol="0" anchor="t"/>
           <a:lstStyle/>
           <a:p>
-            <a:pPr algn="ctr" indent="0" marL="0">
+            <a:pPr marL="0" indent="0" algn="ctr">
               <a:buNone/>
             </a:pPr>
             <a:r>
@@ -16552,7 +16537,7 @@
           </a:prstGeom>
           <a:extLst>
             <a:ext uri="{C572A759-6A51-4108-AA02-DFA0A04FC94B}">
-              <ma14:wrappingTextBoxFlag xmlns:ma14="http://schemas.microsoft.com/office/mac/drawingml/2011/main" val="0"/>
+              <ma14:wrappingTextBoxFlag xmlns:ma14="http://schemas.microsoft.com/office/mac/drawingml/2011/main" xmlns="" val="0"/>
             </a:ext>
           </a:extLst>
         </p:spPr>
@@ -16570,7 +16555,7 @@
           <a:p>
             <a:pPr algn="r"/>
             <a:fld id="{F7021451-1387-4CA6-816F-3879F97B5CBC}" type="slidenum">
-              <a:rPr b="0" lang="en-US"/>
+              <a:rPr lang="en-US" b="0"/>
               <a:t>27</a:t>
             </a:fld>
             <a:endParaRPr lang="en-US"/>
@@ -16623,7 +16608,7 @@
           <a:bodyPr wrap="square" lIns="0" tIns="0" rIns="0" bIns="0" rtlCol="0" anchor="ctr"/>
           <a:lstStyle/>
           <a:p>
-            <a:pPr indent="0" marL="0">
+            <a:pPr marL="0" indent="0">
               <a:buNone/>
             </a:pPr>
             <a:r>
@@ -16641,9 +16626,11 @@
       <p:sp>
         <p:nvSpPr>
           <p:cNvPr id="3" name="Text 0"/>
-          <p:cNvSpPr/>
+          <p:cNvSpPr>
+            <a:spLocks noGrp="1"/>
+          </p:cNvSpPr>
           <p:nvPr>
-            <p:ph idx="100" type="body" hasCustomPrompt="1"/>
+            <p:ph type="body" idx="100" hasCustomPrompt="1"/>
           </p:nvPr>
         </p:nvSpPr>
         <p:spPr>
@@ -16661,7 +16648,7 @@
           <a:bodyPr wrap="square" lIns="0" tIns="0" rIns="0" bIns="0" rtlCol="0" anchor="ctr"/>
           <a:lstStyle/>
           <a:p>
-            <a:pPr indent="0" marL="0">
+            <a:pPr marL="0" indent="0">
               <a:buNone/>
             </a:pPr>
             <a:r>
@@ -16675,7 +16662,7 @@
             <a:endParaRPr lang="en-US" sz="3400" dirty="0"/>
           </a:p>
           <a:p>
-            <a:pPr indent="0" marL="0">
+            <a:pPr marL="0" indent="0">
               <a:buNone/>
             </a:pPr>
             <a:r>
@@ -16710,7 +16697,7 @@
           </a:prstGeom>
           <a:extLst>
             <a:ext uri="{C572A759-6A51-4108-AA02-DFA0A04FC94B}">
-              <ma14:wrappingTextBoxFlag xmlns:ma14="http://schemas.microsoft.com/office/mac/drawingml/2011/main" val="0"/>
+              <ma14:wrappingTextBoxFlag xmlns:ma14="http://schemas.microsoft.com/office/mac/drawingml/2011/main" xmlns="" val="0"/>
             </a:ext>
           </a:extLst>
         </p:spPr>
@@ -16728,7 +16715,7 @@
           <a:p>
             <a:pPr algn="r"/>
             <a:fld id="{F7021451-1387-4CA6-816F-3879F97B5CBC}" type="slidenum">
-              <a:rPr b="0" lang="en-US"/>
+              <a:rPr lang="en-US" b="0"/>
               <a:t>28</a:t>
             </a:fld>
             <a:endParaRPr lang="en-US"/>
@@ -16763,9 +16750,11 @@
       <p:sp>
         <p:nvSpPr>
           <p:cNvPr id="2" name="Text 0"/>
-          <p:cNvSpPr/>
+          <p:cNvSpPr>
+            <a:spLocks noGrp="1"/>
+          </p:cNvSpPr>
           <p:nvPr>
-            <p:ph idx="100" type="title" hasCustomPrompt="1"/>
+            <p:ph type="title" idx="100" hasCustomPrompt="1"/>
           </p:nvPr>
         </p:nvSpPr>
         <p:spPr>
@@ -16783,7 +16772,7 @@
           <a:bodyPr wrap="square" lIns="0" tIns="0" rIns="0" bIns="0" rtlCol="0" anchor="ctr"/>
           <a:lstStyle/>
           <a:p>
-            <a:pPr algn="l" indent="0" marL="0">
+            <a:pPr marL="0" indent="0" algn="l">
               <a:buNone/>
             </a:pPr>
             <a:r>
@@ -16862,7 +16851,7 @@
           <a:bodyPr wrap="square" lIns="0" tIns="0" rIns="0" bIns="0" rtlCol="0" anchor="ctr"/>
           <a:lstStyle/>
           <a:p>
-            <a:pPr algn="ctr" indent="0" marL="0">
+            <a:pPr marL="0" indent="0" algn="ctr">
               <a:buNone/>
             </a:pPr>
             <a:r>
@@ -16898,7 +16887,7 @@
           <a:bodyPr wrap="square" lIns="0" tIns="0" rIns="0" bIns="0" rtlCol="0" anchor="t"/>
           <a:lstStyle/>
           <a:p>
-            <a:pPr algn="ctr" indent="0" marL="0">
+            <a:pPr marL="0" indent="0" algn="ctr">
               <a:buNone/>
             </a:pPr>
             <a:r>
@@ -16954,7 +16943,7 @@
           <a:bodyPr wrap="square" lIns="0" tIns="0" rIns="0" bIns="0" rtlCol="0" anchor="ctr"/>
           <a:lstStyle/>
           <a:p>
-            <a:pPr algn="ctr" indent="0" marL="0">
+            <a:pPr marL="0" indent="0" algn="ctr">
               <a:buNone/>
             </a:pPr>
             <a:r>
@@ -16990,7 +16979,7 @@
           <a:bodyPr wrap="square" lIns="0" tIns="0" rIns="0" bIns="0" rtlCol="0" anchor="t"/>
           <a:lstStyle/>
           <a:p>
-            <a:pPr algn="ctr" indent="0" marL="0">
+            <a:pPr marL="0" indent="0" algn="ctr">
               <a:buNone/>
             </a:pPr>
             <a:r>
@@ -17046,7 +17035,7 @@
           <a:bodyPr wrap="square" lIns="0" tIns="0" rIns="0" bIns="0" rtlCol="0" anchor="ctr"/>
           <a:lstStyle/>
           <a:p>
-            <a:pPr algn="ctr" indent="0" marL="0">
+            <a:pPr marL="0" indent="0" algn="ctr">
               <a:buNone/>
             </a:pPr>
             <a:r>
@@ -17082,7 +17071,7 @@
           <a:bodyPr wrap="square" lIns="0" tIns="0" rIns="0" bIns="0" rtlCol="0" anchor="t"/>
           <a:lstStyle/>
           <a:p>
-            <a:pPr algn="ctr" indent="0" marL="0">
+            <a:pPr marL="0" indent="0" algn="ctr">
               <a:buNone/>
             </a:pPr>
             <a:r>
@@ -17138,7 +17127,7 @@
           <a:bodyPr wrap="square" lIns="0" tIns="0" rIns="0" bIns="0" rtlCol="0" anchor="ctr"/>
           <a:lstStyle/>
           <a:p>
-            <a:pPr algn="ctr" indent="0" marL="0">
+            <a:pPr marL="0" indent="0" algn="ctr">
               <a:buNone/>
             </a:pPr>
             <a:r>
@@ -17174,7 +17163,7 @@
           <a:bodyPr wrap="square" lIns="0" tIns="0" rIns="0" bIns="0" rtlCol="0" anchor="t"/>
           <a:lstStyle/>
           <a:p>
-            <a:pPr algn="ctr" indent="0" marL="0">
+            <a:pPr marL="0" indent="0" algn="ctr">
               <a:buNone/>
             </a:pPr>
             <a:r>
@@ -17230,7 +17219,7 @@
           <a:bodyPr wrap="square" lIns="0" tIns="0" rIns="0" bIns="0" rtlCol="0" anchor="ctr"/>
           <a:lstStyle/>
           <a:p>
-            <a:pPr algn="ctr" indent="0" marL="0">
+            <a:pPr marL="0" indent="0" algn="ctr">
               <a:buNone/>
             </a:pPr>
             <a:r>
@@ -17266,7 +17255,7 @@
           <a:bodyPr wrap="square" lIns="0" tIns="0" rIns="0" bIns="0" rtlCol="0" anchor="t"/>
           <a:lstStyle/>
           <a:p>
-            <a:pPr algn="ctr" indent="0" marL="0">
+            <a:pPr marL="0" indent="0" algn="ctr">
               <a:buNone/>
             </a:pPr>
             <a:r>
@@ -17322,7 +17311,7 @@
           <a:bodyPr wrap="square" lIns="0" tIns="0" rIns="0" bIns="0" rtlCol="0" anchor="ctr"/>
           <a:lstStyle/>
           <a:p>
-            <a:pPr algn="ctr" indent="0" marL="0">
+            <a:pPr marL="0" indent="0" algn="ctr">
               <a:buNone/>
             </a:pPr>
             <a:r>
@@ -17358,7 +17347,7 @@
           <a:bodyPr wrap="square" lIns="0" tIns="0" rIns="0" bIns="0" rtlCol="0" anchor="t"/>
           <a:lstStyle/>
           <a:p>
-            <a:pPr algn="ctr" indent="0" marL="0">
+            <a:pPr marL="0" indent="0" algn="ctr">
               <a:buNone/>
             </a:pPr>
             <a:r>
@@ -17395,14 +17384,14 @@
       </p:sp>
       <p:pic>
         <p:nvPicPr>
-          <p:cNvPr id="23" name="Image 0" descr="Personas">    </p:cNvPr>
+          <p:cNvPr id="23" name="Image 0" descr="Personas"/>
           <p:cNvPicPr>
             <a:picLocks noChangeAspect="1"/>
           </p:cNvPicPr>
           <p:nvPr/>
         </p:nvPicPr>
         <p:blipFill>
-          <a:blip r:embed="rId1"/>
+          <a:blip r:embed="rId3"/>
           <a:stretch>
             <a:fillRect/>
           </a:stretch>
@@ -17438,7 +17427,7 @@
           <a:bodyPr wrap="square" lIns="0" tIns="0" rIns="0" bIns="0" rtlCol="0" anchor="ctr"/>
           <a:lstStyle/>
           <a:p>
-            <a:pPr indent="0" marL="0">
+            <a:pPr marL="0" indent="0">
               <a:buNone/>
             </a:pPr>
             <a:r>
@@ -17475,14 +17464,14 @@
       </p:sp>
       <p:pic>
         <p:nvPicPr>
-          <p:cNvPr id="26" name="Image 1" descr="IA">    </p:cNvPr>
+          <p:cNvPr id="26" name="Image 1" descr="IA"/>
           <p:cNvPicPr>
             <a:picLocks noChangeAspect="1"/>
           </p:cNvPicPr>
           <p:nvPr/>
         </p:nvPicPr>
         <p:blipFill>
-          <a:blip r:embed="rId2"/>
+          <a:blip r:embed="rId4"/>
           <a:stretch>
             <a:fillRect/>
           </a:stretch>
@@ -17518,7 +17507,7 @@
           <a:bodyPr wrap="square" lIns="0" tIns="0" rIns="0" bIns="0" rtlCol="0" anchor="ctr"/>
           <a:lstStyle/>
           <a:p>
-            <a:pPr indent="0" marL="0">
+            <a:pPr marL="0" indent="0">
               <a:buNone/>
             </a:pPr>
             <a:r>
@@ -17535,7 +17524,7 @@
       </p:sp>
       <p:sp>
         <p:nvSpPr>
-          <p:cNvPr id="25" name="Slide Number Placeholder 0"/>
+          <p:cNvPr id="28" name="Slide Number Placeholder 0"/>
           <p:cNvSpPr>
             <a:spLocks noGrp="1"/>
           </p:cNvSpPr>
@@ -17553,7 +17542,7 @@
           </a:prstGeom>
           <a:extLst>
             <a:ext uri="{C572A759-6A51-4108-AA02-DFA0A04FC94B}">
-              <ma14:wrappingTextBoxFlag xmlns:ma14="http://schemas.microsoft.com/office/mac/drawingml/2011/main" val="0"/>
+              <ma14:wrappingTextBoxFlag xmlns:ma14="http://schemas.microsoft.com/office/mac/drawingml/2011/main" xmlns="" val="0"/>
             </a:ext>
           </a:extLst>
         </p:spPr>
@@ -17571,7 +17560,7 @@
           <a:p>
             <a:pPr algn="r"/>
             <a:fld id="{F7021451-1387-4CA6-816F-3879F97B5CBC}" type="slidenum">
-              <a:rPr b="0" lang="en-US"/>
+              <a:rPr lang="en-US" b="0"/>
               <a:t>3</a:t>
             </a:fld>
             <a:endParaRPr lang="en-US"/>
@@ -17606,9 +17595,11 @@
       <p:sp>
         <p:nvSpPr>
           <p:cNvPr id="2" name="Text 0"/>
-          <p:cNvSpPr/>
+          <p:cNvSpPr>
+            <a:spLocks noGrp="1"/>
+          </p:cNvSpPr>
           <p:nvPr>
-            <p:ph idx="100" type="body" hasCustomPrompt="1"/>
+            <p:ph type="body" idx="100" hasCustomPrompt="1"/>
           </p:nvPr>
         </p:nvSpPr>
         <p:spPr>
@@ -17626,7 +17617,7 @@
           <a:bodyPr wrap="square" lIns="0" tIns="0" rIns="0" bIns="0" rtlCol="0" anchor="ctr"/>
           <a:lstStyle/>
           <a:p>
-            <a:pPr indent="0" marL="0">
+            <a:pPr marL="0" indent="0">
               <a:buNone/>
             </a:pPr>
             <a:r>
@@ -17640,7 +17631,7 @@
             <a:endParaRPr lang="en-US" sz="3400" dirty="0"/>
           </a:p>
           <a:p>
-            <a:pPr indent="0" marL="0">
+            <a:pPr marL="0" indent="0">
               <a:buNone/>
             </a:pPr>
             <a:r>
@@ -17698,7 +17689,7 @@
           <a:bodyPr wrap="square" lIns="0" tIns="0" rIns="0" bIns="0" rtlCol="0" anchor="ctr"/>
           <a:lstStyle/>
           <a:p>
-            <a:pPr algn="ctr" indent="0" marL="0">
+            <a:pPr marL="0" indent="0" algn="ctr">
               <a:buNone/>
             </a:pPr>
             <a:r>
@@ -17734,7 +17725,7 @@
           <a:bodyPr wrap="square" lIns="0" tIns="0" rIns="0" bIns="0" rtlCol="0" anchor="ctr"/>
           <a:lstStyle/>
           <a:p>
-            <a:pPr indent="0" marL="0">
+            <a:pPr marL="0" indent="0">
               <a:buNone/>
             </a:pPr>
             <a:r>
@@ -17793,14 +17784,14 @@
       </p:sp>
       <p:pic>
         <p:nvPicPr>
-          <p:cNvPr id="8" name="Image 0" descr="Lo repito tal cual">    </p:cNvPr>
+          <p:cNvPr id="8" name="Image 0" descr="Lo repito tal cual"/>
           <p:cNvPicPr>
             <a:picLocks noChangeAspect="1"/>
           </p:cNvPicPr>
           <p:nvPr/>
         </p:nvPicPr>
         <p:blipFill>
-          <a:blip r:embed="rId1"/>
+          <a:blip r:embed="rId3"/>
           <a:stretch>
             <a:fillRect/>
           </a:stretch>
@@ -17836,7 +17827,7 @@
           <a:bodyPr wrap="square" lIns="0" tIns="0" rIns="0" bIns="0" rtlCol="0" anchor="ctr"/>
           <a:lstStyle/>
           <a:p>
-            <a:pPr indent="0" marL="0">
+            <a:pPr marL="0" indent="0">
               <a:buNone/>
             </a:pPr>
             <a:r>
@@ -17895,14 +17886,14 @@
       </p:sp>
       <p:pic>
         <p:nvPicPr>
-          <p:cNvPr id="12" name="Image 1" descr="Busco una manera mejor">    </p:cNvPr>
+          <p:cNvPr id="12" name="Image 1" descr="Busco una manera mejor"/>
           <p:cNvPicPr>
             <a:picLocks noChangeAspect="1"/>
           </p:cNvPicPr>
           <p:nvPr/>
         </p:nvPicPr>
         <p:blipFill>
-          <a:blip r:embed="rId2"/>
+          <a:blip r:embed="rId4"/>
           <a:stretch>
             <a:fillRect/>
           </a:stretch>
@@ -17938,7 +17929,7 @@
           <a:bodyPr wrap="square" lIns="0" tIns="0" rIns="0" bIns="0" rtlCol="0" anchor="ctr"/>
           <a:lstStyle/>
           <a:p>
-            <a:pPr indent="0" marL="0">
+            <a:pPr marL="0" indent="0">
               <a:buNone/>
             </a:pPr>
             <a:r>
@@ -17973,7 +17964,7 @@
           </a:prstGeom>
           <a:extLst>
             <a:ext uri="{C572A759-6A51-4108-AA02-DFA0A04FC94B}">
-              <ma14:wrappingTextBoxFlag xmlns:ma14="http://schemas.microsoft.com/office/mac/drawingml/2011/main" val="0"/>
+              <ma14:wrappingTextBoxFlag xmlns:ma14="http://schemas.microsoft.com/office/mac/drawingml/2011/main" xmlns="" val="0"/>
             </a:ext>
           </a:extLst>
         </p:spPr>
@@ -17991,7 +17982,7 @@
           <a:p>
             <a:pPr algn="r"/>
             <a:fld id="{F7021451-1387-4CA6-816F-3879F97B5CBC}" type="slidenum">
-              <a:rPr b="0" lang="en-US"/>
+              <a:rPr lang="en-US" b="0"/>
               <a:t>4</a:t>
             </a:fld>
             <a:endParaRPr lang="en-US"/>
@@ -18026,9 +18017,11 @@
       <p:sp>
         <p:nvSpPr>
           <p:cNvPr id="2" name="Text 0"/>
-          <p:cNvSpPr/>
+          <p:cNvSpPr>
+            <a:spLocks noGrp="1"/>
+          </p:cNvSpPr>
           <p:nvPr>
-            <p:ph idx="100" type="title" hasCustomPrompt="1"/>
+            <p:ph type="title" idx="100" hasCustomPrompt="1"/>
           </p:nvPr>
         </p:nvSpPr>
         <p:spPr>
@@ -18046,7 +18039,7 @@
           <a:bodyPr wrap="square" lIns="0" tIns="0" rIns="0" bIns="0" rtlCol="0" anchor="ctr"/>
           <a:lstStyle/>
           <a:p>
-            <a:pPr algn="l" indent="0" marL="0">
+            <a:pPr marL="0" indent="0" algn="l">
               <a:buNone/>
             </a:pPr>
             <a:r>
@@ -18104,7 +18097,7 @@
           <a:bodyPr wrap="square" lIns="0" tIns="0" rIns="0" bIns="0" rtlCol="0" anchor="ctr"/>
           <a:lstStyle/>
           <a:p>
-            <a:pPr algn="ctr" indent="0" marL="0">
+            <a:pPr marL="0" indent="0" algn="ctr">
               <a:buNone/>
             </a:pPr>
             <a:r>
@@ -18141,14 +18134,14 @@
       </p:sp>
       <p:pic>
         <p:nvPicPr>
-          <p:cNvPr id="6" name="Image 0" descr="Voluntarios">    </p:cNvPr>
+          <p:cNvPr id="6" name="Image 0" descr="Voluntarios"/>
           <p:cNvPicPr>
             <a:picLocks noChangeAspect="1"/>
           </p:cNvPicPr>
           <p:nvPr/>
         </p:nvPicPr>
         <p:blipFill>
-          <a:blip r:embed="rId1"/>
+          <a:blip r:embed="rId3"/>
           <a:stretch>
             <a:fillRect/>
           </a:stretch>
@@ -18206,7 +18199,7 @@
           <a:bodyPr wrap="square" lIns="0" tIns="0" rIns="0" bIns="0" rtlCol="0" anchor="ctr"/>
           <a:lstStyle/>
           <a:p>
-            <a:pPr indent="0" marL="0">
+            <a:pPr marL="0" indent="0">
               <a:buNone/>
             </a:pPr>
             <a:r>
@@ -18220,7 +18213,7 @@
             <a:endParaRPr lang="en-US" sz="3600" dirty="0"/>
           </a:p>
           <a:p>
-            <a:pPr indent="0" marL="0">
+            <a:pPr marL="0" indent="0">
               <a:buNone/>
             </a:pPr>
             <a:r>
@@ -18256,7 +18249,7 @@
           <a:bodyPr wrap="square" lIns="0" tIns="0" rIns="0" bIns="0" rtlCol="0" anchor="ctr"/>
           <a:lstStyle/>
           <a:p>
-            <a:pPr indent="0" marL="0">
+            <a:pPr marL="0" indent="0">
               <a:buNone/>
             </a:pPr>
             <a:r>
@@ -18291,7 +18284,7 @@
           </a:prstGeom>
           <a:extLst>
             <a:ext uri="{C572A759-6A51-4108-AA02-DFA0A04FC94B}">
-              <ma14:wrappingTextBoxFlag xmlns:ma14="http://schemas.microsoft.com/office/mac/drawingml/2011/main" val="0"/>
+              <ma14:wrappingTextBoxFlag xmlns:ma14="http://schemas.microsoft.com/office/mac/drawingml/2011/main" xmlns="" val="0"/>
             </a:ext>
           </a:extLst>
         </p:spPr>
@@ -18309,7 +18302,7 @@
           <a:p>
             <a:pPr algn="r"/>
             <a:fld id="{F7021451-1387-4CA6-816F-3879F97B5CBC}" type="slidenum">
-              <a:rPr b="0" lang="en-US"/>
+              <a:rPr lang="en-US" b="0"/>
               <a:t>5</a:t>
             </a:fld>
             <a:endParaRPr lang="en-US"/>
@@ -18344,9 +18337,11 @@
       <p:sp>
         <p:nvSpPr>
           <p:cNvPr id="2" name="Text 0"/>
-          <p:cNvSpPr/>
+          <p:cNvSpPr>
+            <a:spLocks noGrp="1"/>
+          </p:cNvSpPr>
           <p:nvPr>
-            <p:ph idx="100" type="title" hasCustomPrompt="1"/>
+            <p:ph type="title" idx="100" hasCustomPrompt="1"/>
           </p:nvPr>
         </p:nvSpPr>
         <p:spPr>
@@ -18364,7 +18359,7 @@
           <a:bodyPr wrap="square" lIns="0" tIns="0" rIns="0" bIns="0" rtlCol="0" anchor="ctr"/>
           <a:lstStyle/>
           <a:p>
-            <a:pPr algn="l" indent="0" marL="0">
+            <a:pPr marL="0" indent="0" algn="l">
               <a:buNone/>
             </a:pPr>
             <a:r>
@@ -18422,7 +18417,7 @@
           <a:bodyPr wrap="square" lIns="0" tIns="0" rIns="0" bIns="0" rtlCol="0" anchor="ctr"/>
           <a:lstStyle/>
           <a:p>
-            <a:pPr algn="ctr" indent="0" marL="0">
+            <a:pPr marL="0" indent="0" algn="ctr">
               <a:buNone/>
             </a:pPr>
             <a:r>
@@ -18481,377 +18476,7 @@
       </p:sp>
       <p:pic>
         <p:nvPicPr>
-          <p:cNvPr id="7" name="Image 0" descr="Creatividad">    </p:cNvPr>
-          <p:cNvPicPr>
-            <a:picLocks noChangeAspect="1"/>
-          </p:cNvPicPr>
-          <p:nvPr/>
-        </p:nvPicPr>
-        <p:blipFill>
-          <a:blip r:embed="rId1"/>
-          <a:stretch>
-            <a:fillRect/>
-          </a:stretch>
-        </p:blipFill>
-        <p:spPr>
-          <a:xfrm>
-            <a:off x="1088136" y="2002536"/>
-            <a:ext cx="475488" cy="475488"/>
-          </a:xfrm>
-          <a:prstGeom prst="rect">
-            <a:avLst/>
-          </a:prstGeom>
-        </p:spPr>
-      </p:pic>
-      <p:sp>
-        <p:nvSpPr>
-          <p:cNvPr id="8" name="Text 5"/>
-          <p:cNvSpPr txBox="1"/>
-          <p:nvPr/>
-        </p:nvSpPr>
-        <p:spPr>
-          <a:xfrm>
-            <a:off x="868680" y="2834640"/>
-            <a:ext cx="2814218" cy="502920"/>
-          </a:xfrm>
-          <a:prstGeom prst="rect">
-            <a:avLst/>
-          </a:prstGeom>
-          <a:noFill/>
-          <a:ln/>
-        </p:spPr>
-        <p:txBody>
-          <a:bodyPr wrap="square" lIns="0" tIns="0" rIns="0" bIns="0" rtlCol="0" anchor="ctr"/>
-          <a:lstStyle/>
-          <a:p>
-            <a:pPr indent="0" marL="0">
-              <a:buNone/>
-            </a:pPr>
-            <a:r>
-              <a:rPr lang="en-US" sz="2400" b="1" dirty="0">
-                <a:solidFill>
-                  <a:schemeClr val="tx1"/>
-                </a:solidFill>
-              </a:rPr>
-              <a:t>Creatividad</a:t>
-            </a:r>
-            <a:endParaRPr lang="en-US" sz="2400" dirty="0"/>
-          </a:p>
-        </p:txBody>
-      </p:sp>
-      <p:sp>
-        <p:nvSpPr>
-          <p:cNvPr id="9" name="Text 6"/>
-          <p:cNvSpPr txBox="1"/>
-          <p:nvPr/>
-        </p:nvSpPr>
-        <p:spPr>
-          <a:xfrm>
-            <a:off x="868680" y="3383280"/>
-            <a:ext cx="2814218" cy="822960"/>
-          </a:xfrm>
-          <a:prstGeom prst="rect">
-            <a:avLst/>
-          </a:prstGeom>
-          <a:noFill/>
-          <a:ln/>
-        </p:spPr>
-        <p:txBody>
-          <a:bodyPr wrap="square" lIns="0" tIns="0" rIns="0" bIns="0" rtlCol="0" anchor="t"/>
-          <a:lstStyle/>
-          <a:p>
-            <a:pPr indent="0" marL="0">
-              <a:buNone/>
-            </a:pPr>
-            <a:r>
-              <a:rPr lang="en-US" sz="1800" dirty="0">
-                <a:solidFill>
-                  <a:schemeClr val="tx1"/>
-                </a:solidFill>
-              </a:rPr>
-              <a:t>Producir ideas nuevas y útiles.</a:t>
-            </a:r>
-            <a:endParaRPr lang="en-US" sz="1800" dirty="0"/>
-          </a:p>
-        </p:txBody>
-      </p:sp>
-      <p:sp>
-        <p:nvSpPr>
-          <p:cNvPr id="10" name="Text 7"/>
-          <p:cNvSpPr txBox="1"/>
-          <p:nvPr/>
-        </p:nvSpPr>
-        <p:spPr>
-          <a:xfrm>
-            <a:off x="868680" y="4251960"/>
-            <a:ext cx="2814218" cy="822960"/>
-          </a:xfrm>
-          <a:prstGeom prst="rect">
-            <a:avLst/>
-          </a:prstGeom>
-          <a:noFill/>
-          <a:ln/>
-        </p:spPr>
-        <p:txBody>
-          <a:bodyPr wrap="square" lIns="0" tIns="0" rIns="0" bIns="0" rtlCol="0" anchor="t"/>
-          <a:lstStyle/>
-          <a:p>
-            <a:pPr indent="0" marL="0">
-              <a:buNone/>
-            </a:pPr>
-            <a:r>
-              <a:rPr lang="en-US" sz="1500" b="1" i="1" dirty="0">
-                <a:solidFill>
-                  <a:schemeClr val="tx2"/>
-                </a:solidFill>
-              </a:rPr>
-              <a:t>Ejemplo: </a:t>
-            </a:r>
-            <a:pPr indent="0" marL="0">
-              <a:buNone/>
-            </a:pPr>
-            <a:r>
-              <a:rPr lang="en-US" sz="1500" i="1" dirty="0">
-                <a:solidFill>
-                  <a:schemeClr val="tx2"/>
-                </a:solidFill>
-              </a:rPr>
-              <a:t>Imaginar nuevas formas de atender a los clientes.</a:t>
-            </a:r>
-            <a:endParaRPr lang="en-US" sz="1500" dirty="0"/>
-          </a:p>
-        </p:txBody>
-      </p:sp>
-      <p:sp>
-        <p:nvSpPr>
-          <p:cNvPr id="11" name="Tarjeta"/>
-          <p:cNvSpPr/>
-          <p:nvPr/>
-        </p:nvSpPr>
-        <p:spPr>
-          <a:xfrm>
-            <a:off x="4368698" y="1508760"/>
-            <a:ext cx="3454298" cy="3749040"/>
-          </a:xfrm>
-          <a:prstGeom prst="roundRect">
-            <a:avLst>
-              <a:gd name="adj" fmla="val 3971"/>
-            </a:avLst>
-          </a:prstGeom>
-          <a:solidFill>
-            <a:schemeClr val="bg2"/>
-          </a:solidFill>
-          <a:ln/>
-        </p:spPr>
-      </p:sp>
-      <p:sp>
-        <p:nvSpPr>
-          <p:cNvPr id="12" name="Innovación"/>
-          <p:cNvSpPr/>
-          <p:nvPr/>
-        </p:nvSpPr>
-        <p:spPr>
-          <a:xfrm>
-            <a:off x="4688738" y="1783080"/>
-            <a:ext cx="914400" cy="914400"/>
-          </a:xfrm>
-          <a:prstGeom prst="ellipse">
-            <a:avLst/>
-          </a:prstGeom>
-          <a:solidFill>
-            <a:schemeClr val="accent3"/>
-          </a:solidFill>
-          <a:ln/>
-        </p:spPr>
-      </p:sp>
-      <p:pic>
-        <p:nvPicPr>
-          <p:cNvPr id="13" name="Image 1" descr="Innovación">    </p:cNvPr>
-          <p:cNvPicPr>
-            <a:picLocks noChangeAspect="1"/>
-          </p:cNvPicPr>
-          <p:nvPr/>
-        </p:nvPicPr>
-        <p:blipFill>
-          <a:blip r:embed="rId2"/>
-          <a:stretch>
-            <a:fillRect/>
-          </a:stretch>
-        </p:blipFill>
-        <p:spPr>
-          <a:xfrm>
-            <a:off x="4908194" y="2002536"/>
-            <a:ext cx="475488" cy="475488"/>
-          </a:xfrm>
-          <a:prstGeom prst="rect">
-            <a:avLst/>
-          </a:prstGeom>
-        </p:spPr>
-      </p:pic>
-      <p:sp>
-        <p:nvSpPr>
-          <p:cNvPr id="14" name="Text 10"/>
-          <p:cNvSpPr txBox="1"/>
-          <p:nvPr/>
-        </p:nvSpPr>
-        <p:spPr>
-          <a:xfrm>
-            <a:off x="4688738" y="2834640"/>
-            <a:ext cx="2814218" cy="502920"/>
-          </a:xfrm>
-          <a:prstGeom prst="rect">
-            <a:avLst/>
-          </a:prstGeom>
-          <a:noFill/>
-          <a:ln/>
-        </p:spPr>
-        <p:txBody>
-          <a:bodyPr wrap="square" lIns="0" tIns="0" rIns="0" bIns="0" rtlCol="0" anchor="ctr"/>
-          <a:lstStyle/>
-          <a:p>
-            <a:pPr indent="0" marL="0">
-              <a:buNone/>
-            </a:pPr>
-            <a:r>
-              <a:rPr lang="en-US" sz="2400" b="1" dirty="0">
-                <a:solidFill>
-                  <a:schemeClr val="tx1"/>
-                </a:solidFill>
-              </a:rPr>
-              <a:t>Innovación</a:t>
-            </a:r>
-            <a:endParaRPr lang="en-US" sz="2400" dirty="0"/>
-          </a:p>
-        </p:txBody>
-      </p:sp>
-      <p:sp>
-        <p:nvSpPr>
-          <p:cNvPr id="15" name="Text 11"/>
-          <p:cNvSpPr txBox="1"/>
-          <p:nvPr/>
-        </p:nvSpPr>
-        <p:spPr>
-          <a:xfrm>
-            <a:off x="4688738" y="3383280"/>
-            <a:ext cx="2814218" cy="822960"/>
-          </a:xfrm>
-          <a:prstGeom prst="rect">
-            <a:avLst/>
-          </a:prstGeom>
-          <a:noFill/>
-          <a:ln/>
-        </p:spPr>
-        <p:txBody>
-          <a:bodyPr wrap="square" lIns="0" tIns="0" rIns="0" bIns="0" rtlCol="0" anchor="t"/>
-          <a:lstStyle/>
-          <a:p>
-            <a:pPr indent="0" marL="0">
-              <a:buNone/>
-            </a:pPr>
-            <a:r>
-              <a:rPr lang="en-US" sz="1800" dirty="0">
-                <a:solidFill>
-                  <a:schemeClr val="tx1"/>
-                </a:solidFill>
-              </a:rPr>
-              <a:t>Poner en práctica una mejora que aporta valor.</a:t>
-            </a:r>
-            <a:endParaRPr lang="en-US" sz="1800" dirty="0"/>
-          </a:p>
-        </p:txBody>
-      </p:sp>
-      <p:sp>
-        <p:nvSpPr>
-          <p:cNvPr id="16" name="Text 12"/>
-          <p:cNvSpPr txBox="1"/>
-          <p:nvPr/>
-        </p:nvSpPr>
-        <p:spPr>
-          <a:xfrm>
-            <a:off x="4688738" y="4251960"/>
-            <a:ext cx="2814218" cy="822960"/>
-          </a:xfrm>
-          <a:prstGeom prst="rect">
-            <a:avLst/>
-          </a:prstGeom>
-          <a:noFill/>
-          <a:ln/>
-        </p:spPr>
-        <p:txBody>
-          <a:bodyPr wrap="square" lIns="0" tIns="0" rIns="0" bIns="0" rtlCol="0" anchor="t"/>
-          <a:lstStyle/>
-          <a:p>
-            <a:pPr indent="0" marL="0">
-              <a:buNone/>
-            </a:pPr>
-            <a:r>
-              <a:rPr lang="en-US" sz="1500" b="1" i="1" dirty="0">
-                <a:solidFill>
-                  <a:schemeClr val="tx2"/>
-                </a:solidFill>
-              </a:rPr>
-              <a:t>Ejemplo: </a:t>
-            </a:r>
-            <a:pPr indent="0" marL="0">
-              <a:buNone/>
-            </a:pPr>
-            <a:r>
-              <a:rPr lang="en-US" sz="1500" i="1" dirty="0">
-                <a:solidFill>
-                  <a:schemeClr val="tx2"/>
-                </a:solidFill>
-              </a:rPr>
-              <a:t>Implantar la cita previa para reducir esperas.</a:t>
-            </a:r>
-            <a:endParaRPr lang="en-US" sz="1500" dirty="0"/>
-          </a:p>
-        </p:txBody>
-      </p:sp>
-      <p:sp>
-        <p:nvSpPr>
-          <p:cNvPr id="17" name="Tarjeta"/>
-          <p:cNvSpPr/>
-          <p:nvPr/>
-        </p:nvSpPr>
-        <p:spPr>
-          <a:xfrm>
-            <a:off x="8188757" y="1508760"/>
-            <a:ext cx="3454298" cy="3749040"/>
-          </a:xfrm>
-          <a:prstGeom prst="roundRect">
-            <a:avLst>
-              <a:gd name="adj" fmla="val 3971"/>
-            </a:avLst>
-          </a:prstGeom>
-          <a:solidFill>
-            <a:schemeClr val="bg2"/>
-          </a:solidFill>
-          <a:ln/>
-        </p:spPr>
-      </p:sp>
-      <p:sp>
-        <p:nvSpPr>
-          <p:cNvPr id="18" name="Competencia digital"/>
-          <p:cNvSpPr/>
-          <p:nvPr/>
-        </p:nvSpPr>
-        <p:spPr>
-          <a:xfrm>
-            <a:off x="8508797" y="1783080"/>
-            <a:ext cx="914400" cy="914400"/>
-          </a:xfrm>
-          <a:prstGeom prst="ellipse">
-            <a:avLst/>
-          </a:prstGeom>
-          <a:solidFill>
-            <a:schemeClr val="accent4"/>
-          </a:solidFill>
-          <a:ln/>
-        </p:spPr>
-      </p:sp>
-      <p:pic>
-        <p:nvPicPr>
-          <p:cNvPr id="19" name="Image 2" descr="Competencia digital">    </p:cNvPr>
+          <p:cNvPr id="7" name="Image 0" descr="Creatividad"/>
           <p:cNvPicPr>
             <a:picLocks noChangeAspect="1"/>
           </p:cNvPicPr>
@@ -18865,6 +18490,370 @@
         </p:blipFill>
         <p:spPr>
           <a:xfrm>
+            <a:off x="1088136" y="2002536"/>
+            <a:ext cx="475488" cy="475488"/>
+          </a:xfrm>
+          <a:prstGeom prst="rect">
+            <a:avLst/>
+          </a:prstGeom>
+        </p:spPr>
+      </p:pic>
+      <p:sp>
+        <p:nvSpPr>
+          <p:cNvPr id="8" name="Text 5"/>
+          <p:cNvSpPr txBox="1"/>
+          <p:nvPr/>
+        </p:nvSpPr>
+        <p:spPr>
+          <a:xfrm>
+            <a:off x="868680" y="2834640"/>
+            <a:ext cx="2814218" cy="502920"/>
+          </a:xfrm>
+          <a:prstGeom prst="rect">
+            <a:avLst/>
+          </a:prstGeom>
+          <a:noFill/>
+          <a:ln/>
+        </p:spPr>
+        <p:txBody>
+          <a:bodyPr wrap="square" lIns="0" tIns="0" rIns="0" bIns="0" rtlCol="0" anchor="ctr"/>
+          <a:lstStyle/>
+          <a:p>
+            <a:pPr marL="0" indent="0">
+              <a:buNone/>
+            </a:pPr>
+            <a:r>
+              <a:rPr lang="en-US" sz="2400" b="1" dirty="0">
+                <a:solidFill>
+                  <a:schemeClr val="tx1"/>
+                </a:solidFill>
+              </a:rPr>
+              <a:t>Creatividad</a:t>
+            </a:r>
+            <a:endParaRPr lang="en-US" sz="2400" dirty="0"/>
+          </a:p>
+        </p:txBody>
+      </p:sp>
+      <p:sp>
+        <p:nvSpPr>
+          <p:cNvPr id="9" name="Text 6"/>
+          <p:cNvSpPr txBox="1"/>
+          <p:nvPr/>
+        </p:nvSpPr>
+        <p:spPr>
+          <a:xfrm>
+            <a:off x="868680" y="3383280"/>
+            <a:ext cx="2814218" cy="822960"/>
+          </a:xfrm>
+          <a:prstGeom prst="rect">
+            <a:avLst/>
+          </a:prstGeom>
+          <a:noFill/>
+          <a:ln/>
+        </p:spPr>
+        <p:txBody>
+          <a:bodyPr wrap="square" lIns="0" tIns="0" rIns="0" bIns="0" rtlCol="0" anchor="t"/>
+          <a:lstStyle/>
+          <a:p>
+            <a:pPr marL="0" indent="0">
+              <a:buNone/>
+            </a:pPr>
+            <a:r>
+              <a:rPr lang="en-US" sz="1800" dirty="0">
+                <a:solidFill>
+                  <a:schemeClr val="tx1"/>
+                </a:solidFill>
+              </a:rPr>
+              <a:t>Producir ideas nuevas y útiles.</a:t>
+            </a:r>
+            <a:endParaRPr lang="en-US" sz="1800" dirty="0"/>
+          </a:p>
+        </p:txBody>
+      </p:sp>
+      <p:sp>
+        <p:nvSpPr>
+          <p:cNvPr id="10" name="Text 7"/>
+          <p:cNvSpPr txBox="1"/>
+          <p:nvPr/>
+        </p:nvSpPr>
+        <p:spPr>
+          <a:xfrm>
+            <a:off x="868680" y="4251960"/>
+            <a:ext cx="2814218" cy="822960"/>
+          </a:xfrm>
+          <a:prstGeom prst="rect">
+            <a:avLst/>
+          </a:prstGeom>
+          <a:noFill/>
+          <a:ln/>
+        </p:spPr>
+        <p:txBody>
+          <a:bodyPr wrap="square" lIns="0" tIns="0" rIns="0" bIns="0" rtlCol="0" anchor="t"/>
+          <a:lstStyle/>
+          <a:p>
+            <a:pPr marL="0" indent="0">
+              <a:buNone/>
+            </a:pPr>
+            <a:r>
+              <a:rPr lang="en-US" sz="1500" b="1" i="1" dirty="0">
+                <a:solidFill>
+                  <a:schemeClr val="tx2"/>
+                </a:solidFill>
+              </a:rPr>
+              <a:t>Ejemplo: </a:t>
+            </a:r>
+            <a:r>
+              <a:rPr lang="en-US" sz="1500" i="1" dirty="0">
+                <a:solidFill>
+                  <a:schemeClr val="tx2"/>
+                </a:solidFill>
+              </a:rPr>
+              <a:t>Imaginar nuevas formas de atender a los clientes.</a:t>
+            </a:r>
+            <a:endParaRPr lang="en-US" sz="1500" dirty="0"/>
+          </a:p>
+        </p:txBody>
+      </p:sp>
+      <p:sp>
+        <p:nvSpPr>
+          <p:cNvPr id="11" name="Tarjeta"/>
+          <p:cNvSpPr/>
+          <p:nvPr/>
+        </p:nvSpPr>
+        <p:spPr>
+          <a:xfrm>
+            <a:off x="4368698" y="1508760"/>
+            <a:ext cx="3454298" cy="3749040"/>
+          </a:xfrm>
+          <a:prstGeom prst="roundRect">
+            <a:avLst>
+              <a:gd name="adj" fmla="val 3971"/>
+            </a:avLst>
+          </a:prstGeom>
+          <a:solidFill>
+            <a:schemeClr val="bg2"/>
+          </a:solidFill>
+          <a:ln/>
+        </p:spPr>
+      </p:sp>
+      <p:sp>
+        <p:nvSpPr>
+          <p:cNvPr id="12" name="Innovación"/>
+          <p:cNvSpPr/>
+          <p:nvPr/>
+        </p:nvSpPr>
+        <p:spPr>
+          <a:xfrm>
+            <a:off x="4688738" y="1783080"/>
+            <a:ext cx="914400" cy="914400"/>
+          </a:xfrm>
+          <a:prstGeom prst="ellipse">
+            <a:avLst/>
+          </a:prstGeom>
+          <a:solidFill>
+            <a:schemeClr val="accent3"/>
+          </a:solidFill>
+          <a:ln/>
+        </p:spPr>
+      </p:sp>
+      <p:pic>
+        <p:nvPicPr>
+          <p:cNvPr id="13" name="Image 1" descr="Innovación"/>
+          <p:cNvPicPr>
+            <a:picLocks noChangeAspect="1"/>
+          </p:cNvPicPr>
+          <p:nvPr/>
+        </p:nvPicPr>
+        <p:blipFill>
+          <a:blip r:embed="rId4"/>
+          <a:stretch>
+            <a:fillRect/>
+          </a:stretch>
+        </p:blipFill>
+        <p:spPr>
+          <a:xfrm>
+            <a:off x="4908194" y="2002536"/>
+            <a:ext cx="475488" cy="475488"/>
+          </a:xfrm>
+          <a:prstGeom prst="rect">
+            <a:avLst/>
+          </a:prstGeom>
+        </p:spPr>
+      </p:pic>
+      <p:sp>
+        <p:nvSpPr>
+          <p:cNvPr id="14" name="Text 10"/>
+          <p:cNvSpPr txBox="1"/>
+          <p:nvPr/>
+        </p:nvSpPr>
+        <p:spPr>
+          <a:xfrm>
+            <a:off x="4688738" y="2834640"/>
+            <a:ext cx="2814218" cy="502920"/>
+          </a:xfrm>
+          <a:prstGeom prst="rect">
+            <a:avLst/>
+          </a:prstGeom>
+          <a:noFill/>
+          <a:ln/>
+        </p:spPr>
+        <p:txBody>
+          <a:bodyPr wrap="square" lIns="0" tIns="0" rIns="0" bIns="0" rtlCol="0" anchor="ctr"/>
+          <a:lstStyle/>
+          <a:p>
+            <a:pPr marL="0" indent="0">
+              <a:buNone/>
+            </a:pPr>
+            <a:r>
+              <a:rPr lang="en-US" sz="2400" b="1" dirty="0">
+                <a:solidFill>
+                  <a:schemeClr val="tx1"/>
+                </a:solidFill>
+              </a:rPr>
+              <a:t>Innovación</a:t>
+            </a:r>
+            <a:endParaRPr lang="en-US" sz="2400" dirty="0"/>
+          </a:p>
+        </p:txBody>
+      </p:sp>
+      <p:sp>
+        <p:nvSpPr>
+          <p:cNvPr id="15" name="Text 11"/>
+          <p:cNvSpPr txBox="1"/>
+          <p:nvPr/>
+        </p:nvSpPr>
+        <p:spPr>
+          <a:xfrm>
+            <a:off x="4688738" y="3383280"/>
+            <a:ext cx="2814218" cy="822960"/>
+          </a:xfrm>
+          <a:prstGeom prst="rect">
+            <a:avLst/>
+          </a:prstGeom>
+          <a:noFill/>
+          <a:ln/>
+        </p:spPr>
+        <p:txBody>
+          <a:bodyPr wrap="square" lIns="0" tIns="0" rIns="0" bIns="0" rtlCol="0" anchor="t"/>
+          <a:lstStyle/>
+          <a:p>
+            <a:pPr marL="0" indent="0">
+              <a:buNone/>
+            </a:pPr>
+            <a:r>
+              <a:rPr lang="en-US" sz="1800" dirty="0">
+                <a:solidFill>
+                  <a:schemeClr val="tx1"/>
+                </a:solidFill>
+              </a:rPr>
+              <a:t>Poner en práctica una mejora que aporta valor.</a:t>
+            </a:r>
+            <a:endParaRPr lang="en-US" sz="1800" dirty="0"/>
+          </a:p>
+        </p:txBody>
+      </p:sp>
+      <p:sp>
+        <p:nvSpPr>
+          <p:cNvPr id="16" name="Text 12"/>
+          <p:cNvSpPr txBox="1"/>
+          <p:nvPr/>
+        </p:nvSpPr>
+        <p:spPr>
+          <a:xfrm>
+            <a:off x="4688738" y="4251960"/>
+            <a:ext cx="2814218" cy="822960"/>
+          </a:xfrm>
+          <a:prstGeom prst="rect">
+            <a:avLst/>
+          </a:prstGeom>
+          <a:noFill/>
+          <a:ln/>
+        </p:spPr>
+        <p:txBody>
+          <a:bodyPr wrap="square" lIns="0" tIns="0" rIns="0" bIns="0" rtlCol="0" anchor="t"/>
+          <a:lstStyle/>
+          <a:p>
+            <a:pPr marL="0" indent="0">
+              <a:buNone/>
+            </a:pPr>
+            <a:r>
+              <a:rPr lang="en-US" sz="1500" b="1" i="1" dirty="0">
+                <a:solidFill>
+                  <a:schemeClr val="tx2"/>
+                </a:solidFill>
+              </a:rPr>
+              <a:t>Ejemplo: </a:t>
+            </a:r>
+            <a:r>
+              <a:rPr lang="en-US" sz="1500" i="1" dirty="0">
+                <a:solidFill>
+                  <a:schemeClr val="tx2"/>
+                </a:solidFill>
+              </a:rPr>
+              <a:t>Implantar la cita previa para reducir esperas.</a:t>
+            </a:r>
+            <a:endParaRPr lang="en-US" sz="1500" dirty="0"/>
+          </a:p>
+        </p:txBody>
+      </p:sp>
+      <p:sp>
+        <p:nvSpPr>
+          <p:cNvPr id="17" name="Tarjeta"/>
+          <p:cNvSpPr/>
+          <p:nvPr/>
+        </p:nvSpPr>
+        <p:spPr>
+          <a:xfrm>
+            <a:off x="8188757" y="1508760"/>
+            <a:ext cx="3454298" cy="3749040"/>
+          </a:xfrm>
+          <a:prstGeom prst="roundRect">
+            <a:avLst>
+              <a:gd name="adj" fmla="val 3971"/>
+            </a:avLst>
+          </a:prstGeom>
+          <a:solidFill>
+            <a:schemeClr val="bg2"/>
+          </a:solidFill>
+          <a:ln/>
+        </p:spPr>
+      </p:sp>
+      <p:sp>
+        <p:nvSpPr>
+          <p:cNvPr id="18" name="Competencia digital"/>
+          <p:cNvSpPr/>
+          <p:nvPr/>
+        </p:nvSpPr>
+        <p:spPr>
+          <a:xfrm>
+            <a:off x="8508797" y="1783080"/>
+            <a:ext cx="914400" cy="914400"/>
+          </a:xfrm>
+          <a:prstGeom prst="ellipse">
+            <a:avLst/>
+          </a:prstGeom>
+          <a:solidFill>
+            <a:schemeClr val="accent4"/>
+          </a:solidFill>
+          <a:ln/>
+        </p:spPr>
+      </p:sp>
+      <p:pic>
+        <p:nvPicPr>
+          <p:cNvPr id="19" name="Image 2" descr="Competencia digital"/>
+          <p:cNvPicPr>
+            <a:picLocks noChangeAspect="1"/>
+          </p:cNvPicPr>
+          <p:nvPr/>
+        </p:nvPicPr>
+        <p:blipFill>
+          <a:blip r:embed="rId5"/>
+          <a:stretch>
+            <a:fillRect/>
+          </a:stretch>
+        </p:blipFill>
+        <p:spPr>
+          <a:xfrm>
             <a:off x="8728253" y="2002536"/>
             <a:ext cx="475488" cy="475488"/>
           </a:xfrm>
@@ -18894,7 +18883,7 @@
           <a:bodyPr wrap="square" lIns="0" tIns="0" rIns="0" bIns="0" rtlCol="0" anchor="ctr"/>
           <a:lstStyle/>
           <a:p>
-            <a:pPr indent="0" marL="0">
+            <a:pPr marL="0" indent="0">
               <a:buNone/>
             </a:pPr>
             <a:r>
@@ -18930,7 +18919,7 @@
           <a:bodyPr wrap="square" lIns="0" tIns="0" rIns="0" bIns="0" rtlCol="0" anchor="t"/>
           <a:lstStyle/>
           <a:p>
-            <a:pPr indent="0" marL="0">
+            <a:pPr marL="0" indent="0">
               <a:buNone/>
             </a:pPr>
             <a:r>
@@ -18966,7 +18955,7 @@
           <a:bodyPr wrap="square" lIns="0" tIns="0" rIns="0" bIns="0" rtlCol="0" anchor="t"/>
           <a:lstStyle/>
           <a:p>
-            <a:pPr indent="0" marL="0">
+            <a:pPr marL="0" indent="0">
               <a:buNone/>
             </a:pPr>
             <a:r>
@@ -18977,9 +18966,6 @@
               </a:rPr>
               <a:t>Ejemplo: </a:t>
             </a:r>
-            <a:pPr indent="0" marL="0">
-              <a:buNone/>
-            </a:pPr>
             <a:r>
               <a:rPr lang="en-US" sz="1500" i="1" dirty="0">
                 <a:solidFill>
@@ -19013,7 +18999,7 @@
           <a:bodyPr wrap="square" lIns="0" tIns="0" rIns="0" bIns="0" rtlCol="0" anchor="ctr"/>
           <a:lstStyle/>
           <a:p>
-            <a:pPr indent="0" marL="0">
+            <a:pPr marL="0" indent="0">
               <a:buNone/>
             </a:pPr>
             <a:r>
@@ -19048,7 +19034,7 @@
           </a:prstGeom>
           <a:extLst>
             <a:ext uri="{C572A759-6A51-4108-AA02-DFA0A04FC94B}">
-              <ma14:wrappingTextBoxFlag xmlns:ma14="http://schemas.microsoft.com/office/mac/drawingml/2011/main" val="0"/>
+              <ma14:wrappingTextBoxFlag xmlns:ma14="http://schemas.microsoft.com/office/mac/drawingml/2011/main" xmlns="" val="0"/>
             </a:ext>
           </a:extLst>
         </p:spPr>
@@ -19066,7 +19052,7 @@
           <a:p>
             <a:pPr algn="r"/>
             <a:fld id="{F7021451-1387-4CA6-816F-3879F97B5CBC}" type="slidenum">
-              <a:rPr b="0" lang="en-US"/>
+              <a:rPr lang="en-US" b="0"/>
               <a:t>6</a:t>
             </a:fld>
             <a:endParaRPr lang="en-US"/>
@@ -19101,9 +19087,11 @@
       <p:sp>
         <p:nvSpPr>
           <p:cNvPr id="2" name="Text 0"/>
-          <p:cNvSpPr/>
+          <p:cNvSpPr>
+            <a:spLocks noGrp="1"/>
+          </p:cNvSpPr>
           <p:nvPr>
-            <p:ph idx="100" type="title" hasCustomPrompt="1"/>
+            <p:ph type="title" idx="100" hasCustomPrompt="1"/>
           </p:nvPr>
         </p:nvSpPr>
         <p:spPr>
@@ -19121,7 +19109,7 @@
           <a:bodyPr wrap="square" lIns="0" tIns="0" rIns="0" bIns="0" rtlCol="0" anchor="ctr"/>
           <a:lstStyle/>
           <a:p>
-            <a:pPr algn="l" indent="0" marL="0">
+            <a:pPr marL="0" indent="0" algn="l">
               <a:buNone/>
             </a:pPr>
             <a:r>
@@ -19179,7 +19167,7 @@
           <a:bodyPr wrap="square" lIns="0" tIns="0" rIns="0" bIns="0" rtlCol="0" anchor="ctr"/>
           <a:lstStyle/>
           <a:p>
-            <a:pPr algn="ctr" indent="0" marL="0">
+            <a:pPr marL="0" indent="0" algn="ctr">
               <a:buNone/>
             </a:pPr>
             <a:r>
@@ -19215,7 +19203,7 @@
           <a:bodyPr wrap="square" lIns="0" tIns="0" rIns="0" bIns="0" rtlCol="0" anchor="ctr"/>
           <a:lstStyle/>
           <a:p>
-            <a:pPr indent="0" marL="0">
+            <a:pPr marL="0" indent="0">
               <a:buNone/>
             </a:pPr>
             <a:r>
@@ -19293,7 +19281,7 @@
           <a:bodyPr wrap="square" lIns="0" tIns="0" rIns="0" bIns="0" rtlCol="0" anchor="ctr"/>
           <a:lstStyle/>
           <a:p>
-            <a:pPr algn="ctr" indent="0" marL="0">
+            <a:pPr marL="0" indent="0" algn="ctr">
               <a:buNone/>
             </a:pPr>
             <a:r>
@@ -19329,7 +19317,7 @@
           <a:bodyPr wrap="square" lIns="0" tIns="0" rIns="0" bIns="0" rtlCol="0" anchor="ctr"/>
           <a:lstStyle/>
           <a:p>
-            <a:pPr algn="ctr" indent="0" marL="0">
+            <a:pPr marL="0" indent="0" algn="ctr">
               <a:buNone/>
             </a:pPr>
             <a:r>
@@ -19407,7 +19395,7 @@
           <a:bodyPr wrap="square" lIns="0" tIns="0" rIns="0" bIns="0" rtlCol="0" anchor="ctr"/>
           <a:lstStyle/>
           <a:p>
-            <a:pPr algn="ctr" indent="0" marL="0">
+            <a:pPr marL="0" indent="0" algn="ctr">
               <a:buNone/>
             </a:pPr>
             <a:r>
@@ -19443,7 +19431,7 @@
           <a:bodyPr wrap="square" lIns="0" tIns="0" rIns="0" bIns="0" rtlCol="0" anchor="ctr"/>
           <a:lstStyle/>
           <a:p>
-            <a:pPr algn="ctr" indent="0" marL="0">
+            <a:pPr marL="0" indent="0" algn="ctr">
               <a:buNone/>
             </a:pPr>
             <a:r>
@@ -19521,7 +19509,7 @@
           <a:bodyPr wrap="square" lIns="0" tIns="0" rIns="0" bIns="0" rtlCol="0" anchor="ctr"/>
           <a:lstStyle/>
           <a:p>
-            <a:pPr algn="ctr" indent="0" marL="0">
+            <a:pPr marL="0" indent="0" algn="ctr">
               <a:buNone/>
             </a:pPr>
             <a:r>
@@ -19557,7 +19545,7 @@
           <a:bodyPr wrap="square" lIns="0" tIns="0" rIns="0" bIns="0" rtlCol="0" anchor="ctr"/>
           <a:lstStyle/>
           <a:p>
-            <a:pPr algn="ctr" indent="0" marL="0">
+            <a:pPr marL="0" indent="0" algn="ctr">
               <a:buNone/>
             </a:pPr>
             <a:r>
@@ -19594,14 +19582,14 @@
       </p:sp>
       <p:pic>
         <p:nvPicPr>
-          <p:cNvPr id="19" name="Image 0" descr="Votación">    </p:cNvPr>
+          <p:cNvPr id="19" name="Image 0" descr="Votación"/>
           <p:cNvPicPr>
             <a:picLocks noChangeAspect="1"/>
           </p:cNvPicPr>
           <p:nvPr/>
         </p:nvPicPr>
         <p:blipFill>
-          <a:blip r:embed="rId1"/>
+          <a:blip r:embed="rId3"/>
           <a:stretch>
             <a:fillRect/>
           </a:stretch>
@@ -19637,7 +19625,7 @@
           <a:bodyPr wrap="square" lIns="0" tIns="0" rIns="0" bIns="0" rtlCol="0" anchor="ctr"/>
           <a:lstStyle/>
           <a:p>
-            <a:pPr indent="0" marL="0">
+            <a:pPr marL="0" indent="0">
               <a:buNone/>
             </a:pPr>
             <a:r>
@@ -19672,7 +19660,7 @@
           </a:prstGeom>
           <a:extLst>
             <a:ext uri="{C572A759-6A51-4108-AA02-DFA0A04FC94B}">
-              <ma14:wrappingTextBoxFlag xmlns:ma14="http://schemas.microsoft.com/office/mac/drawingml/2011/main" val="0"/>
+              <ma14:wrappingTextBoxFlag xmlns:ma14="http://schemas.microsoft.com/office/mac/drawingml/2011/main" xmlns="" val="0"/>
             </a:ext>
           </a:extLst>
         </p:spPr>
@@ -19690,7 +19678,7 @@
           <a:p>
             <a:pPr algn="r"/>
             <a:fld id="{F7021451-1387-4CA6-816F-3879F97B5CBC}" type="slidenum">
-              <a:rPr b="0" lang="en-US"/>
+              <a:rPr lang="en-US" b="0"/>
               <a:t>7</a:t>
             </a:fld>
             <a:endParaRPr lang="en-US"/>
@@ -19725,9 +19713,11 @@
       <p:sp>
         <p:nvSpPr>
           <p:cNvPr id="2" name="Text 0"/>
-          <p:cNvSpPr/>
+          <p:cNvSpPr>
+            <a:spLocks noGrp="1"/>
+          </p:cNvSpPr>
           <p:nvPr>
-            <p:ph idx="100" type="title" hasCustomPrompt="1"/>
+            <p:ph type="title" idx="100" hasCustomPrompt="1"/>
           </p:nvPr>
         </p:nvSpPr>
         <p:spPr>
@@ -19745,7 +19735,7 @@
           <a:bodyPr wrap="square" lIns="0" tIns="0" rIns="0" bIns="0" rtlCol="0" anchor="ctr"/>
           <a:lstStyle/>
           <a:p>
-            <a:pPr algn="l" indent="0" marL="0">
+            <a:pPr marL="0" indent="0" algn="l">
               <a:buNone/>
             </a:pPr>
             <a:r>
@@ -19803,7 +19793,7 @@
           <a:bodyPr wrap="square" lIns="0" tIns="0" rIns="0" bIns="0" rtlCol="0" anchor="ctr"/>
           <a:lstStyle/>
           <a:p>
-            <a:pPr algn="ctr" indent="0" marL="0">
+            <a:pPr marL="0" indent="0" algn="ctr">
               <a:buNone/>
             </a:pPr>
             <a:r>
@@ -19862,14 +19852,14 @@
       </p:sp>
       <p:pic>
         <p:nvPicPr>
-          <p:cNvPr id="7" name="Image 0" descr="Situación">    </p:cNvPr>
+          <p:cNvPr id="7" name="Image 0" descr="Situación"/>
           <p:cNvPicPr>
             <a:picLocks noChangeAspect="1"/>
           </p:cNvPicPr>
           <p:nvPr/>
         </p:nvPicPr>
         <p:blipFill>
-          <a:blip r:embed="rId1"/>
+          <a:blip r:embed="rId3"/>
           <a:stretch>
             <a:fillRect/>
           </a:stretch>
@@ -19905,7 +19895,7 @@
           <a:bodyPr wrap="square" lIns="0" tIns="0" rIns="0" bIns="0" rtlCol="0" anchor="ctr"/>
           <a:lstStyle/>
           <a:p>
-            <a:pPr indent="0" marL="0">
+            <a:pPr marL="0" indent="0">
               <a:buNone/>
             </a:pPr>
             <a:r>
@@ -19961,7 +19951,7 @@
           <a:bodyPr wrap="square" lIns="0" tIns="0" rIns="0" bIns="0" rtlCol="0" anchor="ctr"/>
           <a:lstStyle/>
           <a:p>
-            <a:pPr algn="ctr" indent="0" marL="0">
+            <a:pPr marL="0" indent="0" algn="ctr">
               <a:buNone/>
             </a:pPr>
             <a:r>
@@ -19997,7 +19987,7 @@
           <a:bodyPr wrap="square" lIns="0" tIns="0" rIns="0" bIns="0" rtlCol="0" anchor="ctr"/>
           <a:lstStyle/>
           <a:p>
-            <a:pPr indent="0" marL="0">
+            <a:pPr marL="0" indent="0">
               <a:buNone/>
             </a:pPr>
             <a:r>
@@ -20053,7 +20043,7 @@
           <a:bodyPr wrap="square" lIns="0" tIns="0" rIns="0" bIns="0" rtlCol="0" anchor="ctr"/>
           <a:lstStyle/>
           <a:p>
-            <a:pPr algn="ctr" indent="0" marL="0">
+            <a:pPr marL="0" indent="0" algn="ctr">
               <a:buNone/>
             </a:pPr>
             <a:r>
@@ -20089,7 +20079,7 @@
           <a:bodyPr wrap="square" lIns="0" tIns="0" rIns="0" bIns="0" rtlCol="0" anchor="ctr"/>
           <a:lstStyle/>
           <a:p>
-            <a:pPr indent="0" marL="0">
+            <a:pPr marL="0" indent="0">
               <a:buNone/>
             </a:pPr>
             <a:r>
@@ -20145,7 +20135,7 @@
           <a:bodyPr wrap="square" lIns="0" tIns="0" rIns="0" bIns="0" rtlCol="0" anchor="ctr"/>
           <a:lstStyle/>
           <a:p>
-            <a:pPr algn="ctr" indent="0" marL="0">
+            <a:pPr marL="0" indent="0" algn="ctr">
               <a:buNone/>
             </a:pPr>
             <a:r>
@@ -20181,7 +20171,7 @@
           <a:bodyPr wrap="square" lIns="0" tIns="0" rIns="0" bIns="0" rtlCol="0" anchor="ctr"/>
           <a:lstStyle/>
           <a:p>
-            <a:pPr indent="0" marL="0">
+            <a:pPr marL="0" indent="0">
               <a:buNone/>
             </a:pPr>
             <a:r>
@@ -20216,7 +20206,7 @@
           </a:prstGeom>
           <a:extLst>
             <a:ext uri="{C572A759-6A51-4108-AA02-DFA0A04FC94B}">
-              <ma14:wrappingTextBoxFlag xmlns:ma14="http://schemas.microsoft.com/office/mac/drawingml/2011/main" val="0"/>
+              <ma14:wrappingTextBoxFlag xmlns:ma14="http://schemas.microsoft.com/office/mac/drawingml/2011/main" xmlns="" val="0"/>
             </a:ext>
           </a:extLst>
         </p:spPr>
@@ -20234,7 +20224,7 @@
           <a:p>
             <a:pPr algn="r"/>
             <a:fld id="{F7021451-1387-4CA6-816F-3879F97B5CBC}" type="slidenum">
-              <a:rPr b="0" lang="en-US"/>
+              <a:rPr lang="en-US" b="0"/>
               <a:t>8</a:t>
             </a:fld>
             <a:endParaRPr lang="en-US"/>
@@ -20269,9 +20259,11 @@
       <p:sp>
         <p:nvSpPr>
           <p:cNvPr id="2" name="Text 0"/>
-          <p:cNvSpPr/>
+          <p:cNvSpPr>
+            <a:spLocks noGrp="1"/>
+          </p:cNvSpPr>
           <p:nvPr>
-            <p:ph idx="100" type="title" hasCustomPrompt="1"/>
+            <p:ph type="title" idx="100" hasCustomPrompt="1"/>
           </p:nvPr>
         </p:nvSpPr>
         <p:spPr>
@@ -20289,7 +20281,7 @@
           <a:bodyPr wrap="square" lIns="0" tIns="0" rIns="0" bIns="0" rtlCol="0" anchor="ctr"/>
           <a:lstStyle/>
           <a:p>
-            <a:pPr algn="l" indent="0" marL="0">
+            <a:pPr marL="0" indent="0" algn="l">
               <a:buNone/>
             </a:pPr>
             <a:r>
@@ -20347,7 +20339,7 @@
           <a:bodyPr wrap="square" lIns="0" tIns="0" rIns="0" bIns="0" rtlCol="0" anchor="ctr"/>
           <a:lstStyle/>
           <a:p>
-            <a:pPr algn="ctr" indent="0" marL="0">
+            <a:pPr marL="0" indent="0" algn="ctr">
               <a:buNone/>
             </a:pPr>
             <a:r>
@@ -20406,14 +20398,14 @@
       </p:sp>
       <p:pic>
         <p:nvPicPr>
-          <p:cNvPr id="7" name="Image 0" descr="Situación">    </p:cNvPr>
+          <p:cNvPr id="7" name="Image 0" descr="Situación"/>
           <p:cNvPicPr>
             <a:picLocks noChangeAspect="1"/>
           </p:cNvPicPr>
           <p:nvPr/>
         </p:nvPicPr>
         <p:blipFill>
-          <a:blip r:embed="rId1"/>
+          <a:blip r:embed="rId3"/>
           <a:stretch>
             <a:fillRect/>
           </a:stretch>
@@ -20449,7 +20441,7 @@
           <a:bodyPr wrap="square" lIns="0" tIns="0" rIns="0" bIns="0" rtlCol="0" anchor="ctr"/>
           <a:lstStyle/>
           <a:p>
-            <a:pPr indent="0" marL="0">
+            <a:pPr marL="0" indent="0">
               <a:buNone/>
             </a:pPr>
             <a:r>
@@ -20505,7 +20497,7 @@
           <a:bodyPr wrap="square" lIns="0" tIns="0" rIns="0" bIns="0" rtlCol="0" anchor="ctr"/>
           <a:lstStyle/>
           <a:p>
-            <a:pPr algn="ctr" indent="0" marL="0">
+            <a:pPr marL="0" indent="0" algn="ctr">
               <a:buNone/>
             </a:pPr>
             <a:r>
@@ -20541,7 +20533,7 @@
           <a:bodyPr wrap="square" lIns="0" tIns="0" rIns="0" bIns="0" rtlCol="0" anchor="ctr"/>
           <a:lstStyle/>
           <a:p>
-            <a:pPr indent="0" marL="0">
+            <a:pPr marL="0" indent="0">
               <a:buNone/>
             </a:pPr>
             <a:r>
@@ -20597,7 +20589,7 @@
           <a:bodyPr wrap="square" lIns="0" tIns="0" rIns="0" bIns="0" rtlCol="0" anchor="ctr"/>
           <a:lstStyle/>
           <a:p>
-            <a:pPr algn="ctr" indent="0" marL="0">
+            <a:pPr marL="0" indent="0" algn="ctr">
               <a:buNone/>
             </a:pPr>
             <a:r>
@@ -20633,7 +20625,7 @@
           <a:bodyPr wrap="square" lIns="0" tIns="0" rIns="0" bIns="0" rtlCol="0" anchor="ctr"/>
           <a:lstStyle/>
           <a:p>
-            <a:pPr indent="0" marL="0">
+            <a:pPr marL="0" indent="0">
               <a:buNone/>
             </a:pPr>
             <a:r>
@@ -20689,7 +20681,7 @@
           <a:bodyPr wrap="square" lIns="0" tIns="0" rIns="0" bIns="0" rtlCol="0" anchor="ctr"/>
           <a:lstStyle/>
           <a:p>
-            <a:pPr algn="ctr" indent="0" marL="0">
+            <a:pPr marL="0" indent="0" algn="ctr">
               <a:buNone/>
             </a:pPr>
             <a:r>
@@ -20725,7 +20717,7 @@
           <a:bodyPr wrap="square" lIns="0" tIns="0" rIns="0" bIns="0" rtlCol="0" anchor="ctr"/>
           <a:lstStyle/>
           <a:p>
-            <a:pPr indent="0" marL="0">
+            <a:pPr marL="0" indent="0">
               <a:buNone/>
             </a:pPr>
             <a:r>
@@ -20760,7 +20752,7 @@
           </a:prstGeom>
           <a:extLst>
             <a:ext uri="{C572A759-6A51-4108-AA02-DFA0A04FC94B}">
-              <ma14:wrappingTextBoxFlag xmlns:ma14="http://schemas.microsoft.com/office/mac/drawingml/2011/main" val="0"/>
+              <ma14:wrappingTextBoxFlag xmlns:ma14="http://schemas.microsoft.com/office/mac/drawingml/2011/main" xmlns="" val="0"/>
             </a:ext>
           </a:extLst>
         </p:spPr>
@@ -20778,7 +20770,7 @@
           <a:p>
             <a:pPr algn="r"/>
             <a:fld id="{F7021451-1387-4CA6-816F-3879F97B5CBC}" type="slidenum">
-              <a:rPr b="0" lang="en-US"/>
+              <a:rPr lang="en-US" b="0"/>
               <a:t>9</a:t>
             </a:fld>
             <a:endParaRPr lang="en-US"/>
@@ -21086,4 +21078,299 @@
     </a:ext>
   </a:extLst>
 </a:theme>
+</file>
+
+<file path=ppt/theme/theme2.xml><?xml version="1.0" encoding="utf-8"?>
+<a:theme xmlns:a="http://schemas.openxmlformats.org/drawingml/2006/main" name="Tema de Office">
+  <a:themeElements>
+    <a:clrScheme name="Office">
+      <a:dk1>
+        <a:sysClr val="windowText" lastClr="000000"/>
+      </a:dk1>
+      <a:lt1>
+        <a:sysClr val="window" lastClr="FFFFFF"/>
+      </a:lt1>
+      <a:dk2>
+        <a:srgbClr val="44546A"/>
+      </a:dk2>
+      <a:lt2>
+        <a:srgbClr val="E7E6E6"/>
+      </a:lt2>
+      <a:accent1>
+        <a:srgbClr val="4472C4"/>
+      </a:accent1>
+      <a:accent2>
+        <a:srgbClr val="ED7D31"/>
+      </a:accent2>
+      <a:accent3>
+        <a:srgbClr val="A5A5A5"/>
+      </a:accent3>
+      <a:accent4>
+        <a:srgbClr val="FFC000"/>
+      </a:accent4>
+      <a:accent5>
+        <a:srgbClr val="5B9BD5"/>
+      </a:accent5>
+      <a:accent6>
+        <a:srgbClr val="70AD47"/>
+      </a:accent6>
+      <a:hlink>
+        <a:srgbClr val="0563C1"/>
+      </a:hlink>
+      <a:folHlink>
+        <a:srgbClr val="954F72"/>
+      </a:folHlink>
+    </a:clrScheme>
+    <a:fontScheme name="Office">
+      <a:majorFont>
+        <a:latin typeface="Calibri Light" panose="020F0302020204030204"/>
+        <a:ea typeface=""/>
+        <a:cs typeface=""/>
+        <a:font script="Jpan" typeface="游ゴシック Light"/>
+        <a:font script="Hang" typeface="맑은 고딕"/>
+        <a:font script="Hans" typeface="等线 Light"/>
+        <a:font script="Hant" typeface="新細明體"/>
+        <a:font script="Arab" typeface="Times New Roman"/>
+        <a:font script="Hebr" typeface="Times New Roman"/>
+        <a:font script="Thai" typeface="Angsana New"/>
+        <a:font script="Ethi" typeface="Nyala"/>
+        <a:font script="Beng" typeface="Vrinda"/>
+        <a:font script="Gujr" typeface="Shruti"/>
+        <a:font script="Khmr" typeface="MoolBoran"/>
+        <a:font script="Knda" typeface="Tunga"/>
+        <a:font script="Guru" typeface="Raavi"/>
+        <a:font script="Cans" typeface="Euphemia"/>
+        <a:font script="Cher" typeface="Plantagenet Cherokee"/>
+        <a:font script="Yiii" typeface="Microsoft Yi Baiti"/>
+        <a:font script="Tibt" typeface="Microsoft Himalaya"/>
+        <a:font script="Thaa" typeface="MV Boli"/>
+        <a:font script="Deva" typeface="Mangal"/>
+        <a:font script="Telu" typeface="Gautami"/>
+        <a:font script="Taml" typeface="Latha"/>
+        <a:font script="Syrc" typeface="Estrangelo Edessa"/>
+        <a:font script="Orya" typeface="Kalinga"/>
+        <a:font script="Mlym" typeface="Kartika"/>
+        <a:font script="Laoo" typeface="DokChampa"/>
+        <a:font script="Sinh" typeface="Iskoola Pota"/>
+        <a:font script="Mong" typeface="Mongolian Baiti"/>
+        <a:font script="Viet" typeface="Times New Roman"/>
+        <a:font script="Uigh" typeface="Microsoft Uighur"/>
+        <a:font script="Geor" typeface="Sylfaen"/>
+        <a:font script="Armn" typeface="Arial"/>
+        <a:font script="Bugi" typeface="Leelawadee UI"/>
+        <a:font script="Bopo" typeface="Microsoft JhengHei"/>
+        <a:font script="Java" typeface="Javanese Text"/>
+        <a:font script="Lisu" typeface="Segoe UI"/>
+        <a:font script="Mymr" typeface="Myanmar Text"/>
+        <a:font script="Nkoo" typeface="Ebrima"/>
+        <a:font script="Olck" typeface="Nirmala UI"/>
+        <a:font script="Osma" typeface="Ebrima"/>
+        <a:font script="Phag" typeface="Phagspa"/>
+        <a:font script="Syrn" typeface="Estrangelo Edessa"/>
+        <a:font script="Syrj" typeface="Estrangelo Edessa"/>
+        <a:font script="Syre" typeface="Estrangelo Edessa"/>
+        <a:font script="Sora" typeface="Nirmala UI"/>
+        <a:font script="Tale" typeface="Microsoft Tai Le"/>
+        <a:font script="Talu" typeface="Microsoft New Tai Lue"/>
+        <a:font script="Tfng" typeface="Ebrima"/>
+      </a:majorFont>
+      <a:minorFont>
+        <a:latin typeface="Calibri" panose="020F0502020204030204"/>
+        <a:ea typeface=""/>
+        <a:cs typeface=""/>
+        <a:font script="Jpan" typeface="游ゴシック"/>
+        <a:font script="Hang" typeface="맑은 고딕"/>
+        <a:font script="Hans" typeface="等线"/>
+        <a:font script="Hant" typeface="新細明體"/>
+        <a:font script="Arab" typeface="Arial"/>
+        <a:font script="Hebr" typeface="Arial"/>
+        <a:font script="Thai" typeface="Cordia New"/>
+        <a:font script="Ethi" typeface="Nyala"/>
+        <a:font script="Beng" typeface="Vrinda"/>
+        <a:font script="Gujr" typeface="Shruti"/>
+        <a:font script="Khmr" typeface="DaunPenh"/>
+        <a:font script="Knda" typeface="Tunga"/>
+        <a:font script="Guru" typeface="Raavi"/>
+        <a:font script="Cans" typeface="Euphemia"/>
+        <a:font script="Cher" typeface="Plantagenet Cherokee"/>
+        <a:font script="Yiii" typeface="Microsoft Yi Baiti"/>
+        <a:font script="Tibt" typeface="Microsoft Himalaya"/>
+        <a:font script="Thaa" typeface="MV Boli"/>
+        <a:font script="Deva" typeface="Mangal"/>
+        <a:font script="Telu" typeface="Gautami"/>
+        <a:font script="Taml" typeface="Latha"/>
+        <a:font script="Syrc" typeface="Estrangelo Edessa"/>
+        <a:font script="Orya" typeface="Kalinga"/>
+        <a:font script="Mlym" typeface="Kartika"/>
+        <a:font script="Laoo" typeface="DokChampa"/>
+        <a:font script="Sinh" typeface="Iskoola Pota"/>
+        <a:font script="Mong" typeface="Mongolian Baiti"/>
+        <a:font script="Viet" typeface="Arial"/>
+        <a:font script="Uigh" typeface="Microsoft Uighur"/>
+        <a:font script="Geor" typeface="Sylfaen"/>
+        <a:font script="Armn" typeface="Arial"/>
+        <a:font script="Bugi" typeface="Leelawadee UI"/>
+        <a:font script="Bopo" typeface="Microsoft JhengHei"/>
+        <a:font script="Java" typeface="Javanese Text"/>
+        <a:font script="Lisu" typeface="Segoe UI"/>
+        <a:font script="Mymr" typeface="Myanmar Text"/>
+        <a:font script="Nkoo" typeface="Ebrima"/>
+        <a:font script="Olck" typeface="Nirmala UI"/>
+        <a:font script="Osma" typeface="Ebrima"/>
+        <a:font script="Phag" typeface="Phagspa"/>
+        <a:font script="Syrn" typeface="Estrangelo Edessa"/>
+        <a:font script="Syrj" typeface="Estrangelo Edessa"/>
+        <a:font script="Syre" typeface="Estrangelo Edessa"/>
+        <a:font script="Sora" typeface="Nirmala UI"/>
+        <a:font script="Tale" typeface="Microsoft Tai Le"/>
+        <a:font script="Talu" typeface="Microsoft New Tai Lue"/>
+        <a:font script="Tfng" typeface="Ebrima"/>
+      </a:minorFont>
+    </a:fontScheme>
+    <a:fmtScheme name="Office">
+      <a:fillStyleLst>
+        <a:solidFill>
+          <a:schemeClr val="phClr"/>
+        </a:solidFill>
+        <a:gradFill rotWithShape="1">
+          <a:gsLst>
+            <a:gs pos="0">
+              <a:schemeClr val="phClr">
+                <a:lumMod val="110000"/>
+                <a:satMod val="105000"/>
+                <a:tint val="67000"/>
+              </a:schemeClr>
+            </a:gs>
+            <a:gs pos="50000">
+              <a:schemeClr val="phClr">
+                <a:lumMod val="105000"/>
+                <a:satMod val="103000"/>
+                <a:tint val="73000"/>
+              </a:schemeClr>
+            </a:gs>
+            <a:gs pos="100000">
+              <a:schemeClr val="phClr">
+                <a:lumMod val="105000"/>
+                <a:satMod val="109000"/>
+                <a:tint val="81000"/>
+              </a:schemeClr>
+            </a:gs>
+          </a:gsLst>
+          <a:lin ang="5400000" scaled="0"/>
+        </a:gradFill>
+        <a:gradFill rotWithShape="1">
+          <a:gsLst>
+            <a:gs pos="0">
+              <a:schemeClr val="phClr">
+                <a:satMod val="103000"/>
+                <a:lumMod val="102000"/>
+                <a:tint val="94000"/>
+              </a:schemeClr>
+            </a:gs>
+            <a:gs pos="50000">
+              <a:schemeClr val="phClr">
+                <a:satMod val="110000"/>
+                <a:lumMod val="100000"/>
+                <a:shade val="100000"/>
+              </a:schemeClr>
+            </a:gs>
+            <a:gs pos="100000">
+              <a:schemeClr val="phClr">
+                <a:lumMod val="99000"/>
+                <a:satMod val="120000"/>
+                <a:shade val="78000"/>
+              </a:schemeClr>
+            </a:gs>
+          </a:gsLst>
+          <a:lin ang="5400000" scaled="0"/>
+        </a:gradFill>
+      </a:fillStyleLst>
+      <a:lnStyleLst>
+        <a:ln w="6350" cap="flat" cmpd="sng" algn="ctr">
+          <a:solidFill>
+            <a:schemeClr val="phClr"/>
+          </a:solidFill>
+          <a:prstDash val="solid"/>
+          <a:miter lim="800000"/>
+        </a:ln>
+        <a:ln w="12700" cap="flat" cmpd="sng" algn="ctr">
+          <a:solidFill>
+            <a:schemeClr val="phClr"/>
+          </a:solidFill>
+          <a:prstDash val="solid"/>
+          <a:miter lim="800000"/>
+        </a:ln>
+        <a:ln w="19050" cap="flat" cmpd="sng" algn="ctr">
+          <a:solidFill>
+            <a:schemeClr val="phClr"/>
+          </a:solidFill>
+          <a:prstDash val="solid"/>
+          <a:miter lim="800000"/>
+        </a:ln>
+      </a:lnStyleLst>
+      <a:effectStyleLst>
+        <a:effectStyle>
+          <a:effectLst/>
+        </a:effectStyle>
+        <a:effectStyle>
+          <a:effectLst/>
+        </a:effectStyle>
+        <a:effectStyle>
+          <a:effectLst>
+            <a:outerShdw blurRad="57150" dist="19050" dir="5400000" algn="ctr" rotWithShape="0">
+              <a:srgbClr val="000000">
+                <a:alpha val="63000"/>
+              </a:srgbClr>
+            </a:outerShdw>
+          </a:effectLst>
+        </a:effectStyle>
+      </a:effectStyleLst>
+      <a:bgFillStyleLst>
+        <a:solidFill>
+          <a:schemeClr val="phClr"/>
+        </a:solidFill>
+        <a:solidFill>
+          <a:schemeClr val="phClr">
+            <a:tint val="95000"/>
+            <a:satMod val="170000"/>
+          </a:schemeClr>
+        </a:solidFill>
+        <a:gradFill rotWithShape="1">
+          <a:gsLst>
+            <a:gs pos="0">
+              <a:schemeClr val="phClr">
+                <a:tint val="93000"/>
+                <a:satMod val="150000"/>
+                <a:shade val="98000"/>
+                <a:lumMod val="102000"/>
+              </a:schemeClr>
+            </a:gs>
+            <a:gs pos="50000">
+              <a:schemeClr val="phClr">
+                <a:tint val="98000"/>
+                <a:satMod val="130000"/>
+                <a:shade val="90000"/>
+                <a:lumMod val="103000"/>
+              </a:schemeClr>
+            </a:gs>
+            <a:gs pos="100000">
+              <a:schemeClr val="phClr">
+                <a:shade val="63000"/>
+                <a:satMod val="120000"/>
+              </a:schemeClr>
+            </a:gs>
+          </a:gsLst>
+          <a:lin ang="5400000" scaled="0"/>
+        </a:gradFill>
+      </a:bgFillStyleLst>
+    </a:fmtScheme>
+  </a:themeElements>
+  <a:objectDefaults/>
+  <a:extraClrSchemeLst/>
+  <a:extLst>
+    <a:ext uri="{05A4C25C-085E-4340-85A3-A5531E510DB2}">
+      <thm15:themeFamily xmlns:thm15="http://schemas.microsoft.com/office/thememl/2012/main" name="Office Theme" id="{62F939B6-93AF-4DB8-9C6B-D6C7DFDC589F}" vid="{4A3C46E8-61CC-4603-A589-7422A47A8E4A}"/>
+    </a:ext>
+  </a:extLst>
+</a:theme>
 </file>
--- a/diapositivas/bloque1.pptx
+++ b/diapositivas/bloque1.pptx
@@ -27,6 +27,7 @@
     <p:sldId id="272" r:id="rId18"/>
     <p:sldId id="273" r:id="rId19"/>
     <p:sldId id="274" r:id="rId20"/>
+    <p:sldId id="284" r:id="rId35"/>
     <p:sldId id="275" r:id="rId21"/>
     <p:sldId id="276" r:id="rId22"/>
     <p:sldId id="277" r:id="rId23"/>
@@ -171,6 +172,7 @@
         <p14:section name="Brainstorming" id="{B1D90EA5-E9A1-1FA3-6157-4003D122319B}">
           <p14:sldIdLst>
             <p14:sldId id="274"/>
+            <p14:sldId id="284"/>
             <p14:sldId id="275"/>
             <p14:sldId id="276"/>
             <p14:sldId id="277"/>
@@ -2150,6 +2152,88 @@
         <p14:creationId xmlns:p14="http://schemas.microsoft.com/office/powerpoint/2010/main" val="1024086991"/>
       </p:ext>
     </p:extLst>
+  </p:cSld>
+  <p:clrMapOvr>
+    <a:masterClrMapping/>
+  </p:clrMapOvr>
+</p:notes>
+</file>
+
+<file path=ppt/notesSlides/notesSlide29.xml><?xml version="1.0" encoding="utf-8"?>
+<p:notes xmlns:a="http://schemas.openxmlformats.org/drawingml/2006/main" xmlns:p="http://schemas.openxmlformats.org/presentationml/2006/main" xmlns:r="http://schemas.openxmlformats.org/officeDocument/2006/relationships">
+  <p:cSld>
+    <p:spTree>
+      <p:nvGrpSpPr>
+        <p:cNvPr id="1" name=""/>
+        <p:cNvGrpSpPr/>
+        <p:nvPr/>
+      </p:nvGrpSpPr>
+      <p:grpSpPr>
+        <a:xfrm>
+          <a:off x="0" y="0"/>
+          <a:ext cx="0" cy="0"/>
+          <a:chOff x="0" y="0"/>
+          <a:chExt cx="0" cy="0"/>
+        </a:xfrm>
+      </p:grpSpPr>
+      <p:sp>
+        <p:nvSpPr>
+          <p:cNvPr id="3" name="Notes Placeholder 2"/>
+          <p:cNvSpPr>
+            <a:spLocks noGrp="1"/>
+          </p:cNvSpPr>
+          <p:nvPr>
+            <p:ph type="body" idx="1"/>
+          </p:nvPr>
+        </p:nvSpPr>
+        <p:spPr/>
+        <p:txBody>
+          <a:bodyPr/>
+          <a:lstStyle/>
+          <a:p>
+            <a:r>
+              <a:t>Minutos 15–20, justo después de la regla «primero las personas, después la IA». Contarlo como historia, en un minuto:</a:t>
+            </a:r>
+          </a:p>
+          <a:p/>
+          <a:p>
+            <a:r>
+              <a:t>Hay un programa para crear videojuegos, Unreal Engine 5, que lo hace casi todo solo: la luz, las sombras, los reflejos, el detalle de cada objeto. Con él, una persona desde su casa puede hacer un juego que parece de un gran estudio.</a:t>
+            </a:r>
+          </a:p>
+          <a:p/>
+          <a:p>
+            <a:r>
+              <a:t>Muchísima gente lo usó y dejó que el programa decidiera la luz y el aspecto del juego. Y pasó algo curioso: muchos juegos empezaron a parecerse entre sí. Técnicamente eran impecables, pero tenían todos el mismo aire. Los que llamaban la atención eran los que tenían un estilo propio, y ese estilo no lo pone la herramienta: lo pone la persona.</a:t>
+            </a:r>
+          </a:p>
+          <a:p/>
+          <a:p>
+            <a:r>
+              <a:t>Con la IA pasa lo mismo. Da ideas, resume y redacta muy bien. Pero si todos le preguntamos lo mismo, todos recibimos respuestas parecidas. Ya pasa con las cartas de presentación: las empresas reciben cientos que suenan iguales porque las ha escrito la misma IA.</a:t>
+            </a:r>
+          </a:p>
+          <a:p/>
+          <a:p>
+            <a:r>
+              <a:t>Las personas fallamos más y tenemos días malos. Pero la idea rara, la que nadie más tendría, es la que marca la diferencia, y esa suele salir de nosotros. Por eso: primero pensamos las personas y después usamos la IA para ampliar lo nuestro, no para sustituirlo.</a:t>
+            </a:r>
+          </a:p>
+          <a:p/>
+          <a:p>
+            <a:r>
+              <a:t>Cuidado: no afirmar que la IA es peor que las personas. El argumento es que, si todos usamos la misma herramienta, todos acabamos haciendo lo mismo. Así no se adelanta la conclusión de la comparación del Ejercicio 1.</a:t>
+            </a:r>
+          </a:p>
+          <a:p/>
+          <a:p>
+            <a:r>
+              <a:t>Respaldo (comprobar la referencia antes de citarla): un estudio publicado en 2024 en Science Advances encontró que la IA hacía algo más creativos los textos de cada persona, pero que los textos se parecían mucho más entre sí.</a:t>
+            </a:r>
+          </a:p>
+        </p:txBody>
+      </p:sp>
+    </p:spTree>
   </p:cSld>
   <p:clrMapOvr>
     <a:masterClrMapping/>
@@ -16719,6 +16803,847 @@
               <a:t>28</a:t>
             </a:fld>
             <a:endParaRPr lang="en-US"/>
+          </a:p>
+        </p:txBody>
+      </p:sp>
+    </p:spTree>
+  </p:cSld>
+  <p:clrMapOvr>
+    <a:masterClrMapping/>
+  </p:clrMapOvr>
+</p:sld>
+</file>
+
+<file path=ppt/slides/slide29.xml><?xml version="1.0" encoding="utf-8"?>
+<p:sld xmlns:a="http://schemas.openxmlformats.org/drawingml/2006/main" xmlns:p="http://schemas.openxmlformats.org/presentationml/2006/main" xmlns:r="http://schemas.openxmlformats.org/officeDocument/2006/relationships">
+  <p:cSld>
+    <p:spTree>
+      <p:nvGrpSpPr>
+        <p:cNvPr id="1" name=""/>
+        <p:cNvGrpSpPr/>
+        <p:nvPr/>
+      </p:nvGrpSpPr>
+      <p:grpSpPr/>
+      <p:sp>
+        <p:nvSpPr>
+          <p:cNvPr id="2" name="Text 0"/>
+          <p:cNvSpPr>
+            <a:spLocks noGrp="1"/>
+          </p:cNvSpPr>
+          <p:nvPr>
+            <p:ph type="title" idx="100" hasCustomPrompt="1"/>
+          </p:nvPr>
+        </p:nvSpPr>
+        <p:spPr>
+          <a:xfrm>
+            <a:off x="548640" y="411480"/>
+            <a:ext cx="11094415" cy="777240"/>
+          </a:xfrm>
+          <a:prstGeom prst="rect">
+            <a:avLst/>
+          </a:prstGeom>
+          <a:noFill/>
+          <a:ln/>
+        </p:spPr>
+        <p:txBody>
+          <a:bodyPr wrap="square" lIns="0" tIns="0" rIns="0" bIns="0" rtlCol="0" anchor="ctr"/>
+          <a:lstStyle/>
+          <a:p>
+            <a:pPr marL="0" indent="0" algn="l">
+              <a:buNone/>
+            </a:pPr>
+            <a:r>
+              <a:rPr lang="en-US" sz="3200" b="1" dirty="0">
+                <a:solidFill>
+                  <a:schemeClr val="tx1"/>
+                </a:solidFill>
+              </a:rPr>
+              <a:t>Misma herramienta, mismo resultado</a:t>
+            </a:r>
+            <a:endParaRPr lang="en-US" sz="3200" dirty="0"/>
+          </a:p>
+        </p:txBody>
+      </p:sp>
+      <p:sp>
+        <p:nvSpPr>
+          <p:cNvPr id="3" name="Etiqueta de tiempo"/>
+          <p:cNvSpPr/>
+          <p:nvPr/>
+        </p:nvSpPr>
+        <p:spPr>
+          <a:xfrm>
+            <a:off x="10134295" y="548640"/>
+            <a:ext cx="1508760" cy="457200"/>
+          </a:xfrm>
+          <a:prstGeom prst="roundRect">
+            <a:avLst>
+              <a:gd name="adj" fmla="val 50000"/>
+            </a:avLst>
+          </a:prstGeom>
+          <a:solidFill>
+            <a:schemeClr val="bg2"/>
+          </a:solidFill>
+          <a:ln/>
+        </p:spPr>
+      </p:sp>
+      <p:sp>
+        <p:nvSpPr>
+          <p:cNvPr id="4" name="Text 2"/>
+          <p:cNvSpPr txBox="1"/>
+          <p:nvPr/>
+        </p:nvSpPr>
+        <p:spPr>
+          <a:xfrm>
+            <a:off x="10134295" y="548640"/>
+            <a:ext cx="1508760" cy="457200"/>
+          </a:xfrm>
+          <a:prstGeom prst="rect">
+            <a:avLst/>
+          </a:prstGeom>
+          <a:noFill/>
+          <a:ln/>
+        </p:spPr>
+        <p:txBody>
+          <a:bodyPr wrap="square" lIns="0" tIns="0" rIns="0" bIns="0" rtlCol="0" anchor="ctr"/>
+          <a:lstStyle/>
+          <a:p>
+            <a:pPr marL="0" indent="0" algn="ctr">
+              <a:buNone/>
+            </a:pPr>
+            <a:r>
+              <a:rPr lang="en-US" sz="1400" b="1" dirty="0">
+                <a:solidFill>
+                  <a:schemeClr val="tx1"/>
+                </a:solidFill>
+              </a:rPr>
+              <a:t>Min. 15–20</a:t>
+            </a:r>
+            <a:endParaRPr lang="en-US" sz="1400" dirty="0"/>
+          </a:p>
+        </p:txBody>
+      </p:sp>
+      <p:sp>
+        <p:nvSpPr>
+          <p:cNvPr id="25" name="Slide Number Placeholder 0"/>
+          <p:cNvSpPr>
+            <a:spLocks noGrp="1"/>
+          </p:cNvSpPr>
+          <p:nvPr>
+            <p:ph type="sldNum" sz="quarter" idx="4294967295"/>
+          </p:nvPr>
+        </p:nvSpPr>
+        <p:spPr>
+          <a:xfrm>
+            <a:off x="11091672" y="6355080"/>
+            <a:ext cx="548640" cy="320040"/>
+          </a:xfrm>
+          <a:prstGeom prst="rect">
+            <a:avLst/>
+          </a:prstGeom>
+          <a:extLst>
+            <a:ext uri="{C572A759-6A51-4108-AA02-DFA0A04FC94B}">
+              <ma14:wrappingTextBoxFlag xmlns:ma14="http://schemas.microsoft.com/office/mac/drawingml/2011/main" xmlns="" val="0"/>
+            </a:ext>
+          </a:extLst>
+        </p:spPr>
+        <p:txBody>
+          <a:bodyPr/>
+          <a:lstStyle>
+            <a:lvl1pPr>
+              <a:defRPr sz="1100">
+                <a:solidFill>
+                  <a:srgbClr val="8A94A6"/>
+                </a:solidFill>
+              </a:defRPr>
+            </a:lvl1pPr>
+          </a:lstStyle>
+          <a:p>
+            <a:pPr algn="r"/>
+            <a:fld id="{F7021451-1387-4CA6-816F-3879F97B5CBC}" type="slidenum">
+              <a:rPr lang="en-US" b="0"/>
+              <a:t>19</a:t>
+            </a:fld>
+            <a:endParaRPr lang="en-US"/>
+          </a:p>
+        </p:txBody>
+      </p:sp>
+      <p:sp>
+        <p:nvSpPr>
+          <p:cNvPr id="26" name="Tarjeta Unreal Engine 5"/>
+          <p:cNvSpPr/>
+          <p:nvPr/>
+        </p:nvSpPr>
+        <p:spPr>
+          <a:xfrm>
+            <a:off x="548640" y="1463040"/>
+            <a:ext cx="11094415" cy="1463040"/>
+          </a:xfrm>
+          <a:prstGeom prst="roundRect">
+            <a:avLst>
+              <a:gd name="adj" fmla="val 9374"/>
+            </a:avLst>
+          </a:prstGeom>
+          <a:solidFill>
+            <a:schemeClr val="bg2"/>
+          </a:solidFill>
+          <a:ln>
+            <a:noFill/>
+          </a:ln>
+          <a:effectLst/>
+        </p:spPr>
+        <p:style>
+          <a:lnRef idx="1">
+            <a:schemeClr val="accent1"/>
+          </a:lnRef>
+          <a:fillRef idx="3">
+            <a:schemeClr val="accent1"/>
+          </a:fillRef>
+          <a:effectRef idx="2">
+            <a:schemeClr val="accent1"/>
+          </a:effectRef>
+          <a:fontRef idx="minor">
+            <a:schemeClr val="lt1"/>
+          </a:fontRef>
+        </p:style>
+        <p:txBody>
+          <a:bodyPr rtlCol="0" anchor="ctr"/>
+          <a:lstStyle/>
+          <a:p>
+            <a:pPr algn="ctr"/>
+          </a:p>
+        </p:txBody>
+      </p:sp>
+      <p:sp>
+        <p:nvSpPr>
+          <p:cNvPr id="27" name="Unreal Engine 5"/>
+          <p:cNvSpPr/>
+          <p:nvPr/>
+        </p:nvSpPr>
+        <p:spPr>
+          <a:xfrm>
+            <a:off x="822959" y="1737360"/>
+            <a:ext cx="914400" cy="914400"/>
+          </a:xfrm>
+          <a:prstGeom prst="ellipse">
+            <a:avLst/>
+          </a:prstGeom>
+          <a:solidFill>
+            <a:schemeClr val="tx1"/>
+          </a:solidFill>
+          <a:ln>
+            <a:noFill/>
+          </a:ln>
+          <a:effectLst/>
+        </p:spPr>
+        <p:style>
+          <a:lnRef idx="1">
+            <a:schemeClr val="accent1"/>
+          </a:lnRef>
+          <a:fillRef idx="3">
+            <a:schemeClr val="accent1"/>
+          </a:fillRef>
+          <a:effectRef idx="2">
+            <a:schemeClr val="accent1"/>
+          </a:effectRef>
+          <a:fontRef idx="minor">
+            <a:schemeClr val="lt1"/>
+          </a:fontRef>
+        </p:style>
+        <p:txBody>
+          <a:bodyPr rtlCol="0" anchor="ctr"/>
+          <a:lstStyle/>
+          <a:p>
+            <a:pPr algn="ctr"/>
+          </a:p>
+        </p:txBody>
+      </p:sp>
+      <p:pic>
+        <p:nvPicPr>
+          <p:cNvPr id="28" name="Unreal Engine 5" descr="FaGamepad-FFFFFF.png"/>
+          <p:cNvPicPr>
+            <a:picLocks noChangeAspect="1"/>
+          </p:cNvPicPr>
+          <p:nvPr/>
+        </p:nvPicPr>
+        <p:blipFill>
+          <a:blip r:embed="rId2"/>
+          <a:stretch>
+            <a:fillRect/>
+          </a:stretch>
+        </p:blipFill>
+        <p:spPr>
+          <a:xfrm>
+            <a:off x="1042415" y="1956816"/>
+            <a:ext cx="475488" cy="475488"/>
+          </a:xfrm>
+          <a:prstGeom prst="rect">
+            <a:avLst/>
+          </a:prstGeom>
+        </p:spPr>
+      </p:pic>
+      <p:sp>
+        <p:nvSpPr>
+          <p:cNvPr id="29" name="Texto Unreal Engine 5"/>
+          <p:cNvSpPr txBox="1"/>
+          <p:nvPr/>
+        </p:nvSpPr>
+        <p:spPr>
+          <a:xfrm>
+            <a:off x="2011680" y="1463040"/>
+            <a:ext cx="5760720" cy="1463040"/>
+          </a:xfrm>
+          <a:prstGeom prst="rect">
+            <a:avLst/>
+          </a:prstGeom>
+          <a:noFill/>
+        </p:spPr>
+        <p:txBody>
+          <a:bodyPr wrap="square" anchor="ctr" lIns="0" rIns="0" tIns="0" bIns="0">
+            <a:spAutoFit/>
+          </a:bodyPr>
+          <a:lstStyle/>
+          <a:p>
+            <a:r>
+              <a:rPr sz="2000" b="1">
+                <a:solidFill>
+                  <a:schemeClr val="tx1"/>
+                </a:solidFill>
+              </a:rPr>
+              <a:t>Unreal Engine 5</a:t>
+            </a:r>
+          </a:p>
+          <a:p>
+            <a:pPr>
+              <a:spcBef>
+                <a:spcPts val="400"/>
+              </a:spcBef>
+            </a:pPr>
+            <a:r>
+              <a:rPr sz="1700" b="0">
+                <a:solidFill>
+                  <a:schemeClr val="tx1"/>
+                </a:solidFill>
+              </a:rPr>
+              <a:t>Cualquiera podía hacer un juego de aspecto profesional… y muchos juegos acabaron pareciéndose.</a:t>
+            </a:r>
+          </a:p>
+        </p:txBody>
+      </p:sp>
+      <p:pic>
+        <p:nvPicPr>
+          <p:cNvPr id="30" name="Resultado igual" descr="FaGamepad-8A94A6.png"/>
+          <p:cNvPicPr>
+            <a:picLocks noChangeAspect="1"/>
+          </p:cNvPicPr>
+          <p:nvPr/>
+        </p:nvPicPr>
+        <p:blipFill>
+          <a:blip r:embed="rId3"/>
+          <a:stretch>
+            <a:fillRect/>
+          </a:stretch>
+        </p:blipFill>
+        <p:spPr>
+          <a:xfrm>
+            <a:off x="8001000" y="1947672"/>
+            <a:ext cx="502920" cy="502920"/>
+          </a:xfrm>
+          <a:prstGeom prst="rect">
+            <a:avLst/>
+          </a:prstGeom>
+        </p:spPr>
+      </p:pic>
+      <p:pic>
+        <p:nvPicPr>
+          <p:cNvPr id="31" name="Resultado igual" descr="FaGamepad-8A94A6.png"/>
+          <p:cNvPicPr>
+            <a:picLocks noChangeAspect="1"/>
+          </p:cNvPicPr>
+          <p:nvPr/>
+        </p:nvPicPr>
+        <p:blipFill>
+          <a:blip r:embed="rId3"/>
+          <a:stretch>
+            <a:fillRect/>
+          </a:stretch>
+        </p:blipFill>
+        <p:spPr>
+          <a:xfrm>
+            <a:off x="8714232" y="1947672"/>
+            <a:ext cx="502920" cy="502920"/>
+          </a:xfrm>
+          <a:prstGeom prst="rect">
+            <a:avLst/>
+          </a:prstGeom>
+        </p:spPr>
+      </p:pic>
+      <p:pic>
+        <p:nvPicPr>
+          <p:cNvPr id="32" name="Resultado igual" descr="FaGamepad-8A94A6.png"/>
+          <p:cNvPicPr>
+            <a:picLocks noChangeAspect="1"/>
+          </p:cNvPicPr>
+          <p:nvPr/>
+        </p:nvPicPr>
+        <p:blipFill>
+          <a:blip r:embed="rId3"/>
+          <a:stretch>
+            <a:fillRect/>
+          </a:stretch>
+        </p:blipFill>
+        <p:spPr>
+          <a:xfrm>
+            <a:off x="9427464" y="1947672"/>
+            <a:ext cx="502920" cy="502920"/>
+          </a:xfrm>
+          <a:prstGeom prst="rect">
+            <a:avLst/>
+          </a:prstGeom>
+        </p:spPr>
+      </p:pic>
+      <p:pic>
+        <p:nvPicPr>
+          <p:cNvPr id="33" name="Resultado igual" descr="FaGamepad-8A94A6.png"/>
+          <p:cNvPicPr>
+            <a:picLocks noChangeAspect="1"/>
+          </p:cNvPicPr>
+          <p:nvPr/>
+        </p:nvPicPr>
+        <p:blipFill>
+          <a:blip r:embed="rId3"/>
+          <a:stretch>
+            <a:fillRect/>
+          </a:stretch>
+        </p:blipFill>
+        <p:spPr>
+          <a:xfrm>
+            <a:off x="10140696" y="1947672"/>
+            <a:ext cx="502920" cy="502920"/>
+          </a:xfrm>
+          <a:prstGeom prst="rect">
+            <a:avLst/>
+          </a:prstGeom>
+        </p:spPr>
+      </p:pic>
+      <p:pic>
+        <p:nvPicPr>
+          <p:cNvPr id="34" name="Resultado igual" descr="FaGamepad-8A94A6.png"/>
+          <p:cNvPicPr>
+            <a:picLocks noChangeAspect="1"/>
+          </p:cNvPicPr>
+          <p:nvPr/>
+        </p:nvPicPr>
+        <p:blipFill>
+          <a:blip r:embed="rId3"/>
+          <a:stretch>
+            <a:fillRect/>
+          </a:stretch>
+        </p:blipFill>
+        <p:spPr>
+          <a:xfrm>
+            <a:off x="10853928" y="1947672"/>
+            <a:ext cx="502920" cy="502920"/>
+          </a:xfrm>
+          <a:prstGeom prst="rect">
+            <a:avLst/>
+          </a:prstGeom>
+        </p:spPr>
+      </p:pic>
+      <p:sp>
+        <p:nvSpPr>
+          <p:cNvPr id="35" name="Tarjeta La IA"/>
+          <p:cNvSpPr/>
+          <p:nvPr/>
+        </p:nvSpPr>
+        <p:spPr>
+          <a:xfrm>
+            <a:off x="548640" y="3108960"/>
+            <a:ext cx="11094415" cy="1463040"/>
+          </a:xfrm>
+          <a:prstGeom prst="roundRect">
+            <a:avLst>
+              <a:gd name="adj" fmla="val 9374"/>
+            </a:avLst>
+          </a:prstGeom>
+          <a:solidFill>
+            <a:schemeClr val="bg2"/>
+          </a:solidFill>
+          <a:ln>
+            <a:noFill/>
+          </a:ln>
+          <a:effectLst/>
+        </p:spPr>
+        <p:style>
+          <a:lnRef idx="1">
+            <a:schemeClr val="accent1"/>
+          </a:lnRef>
+          <a:fillRef idx="3">
+            <a:schemeClr val="accent1"/>
+          </a:fillRef>
+          <a:effectRef idx="2">
+            <a:schemeClr val="accent1"/>
+          </a:effectRef>
+          <a:fontRef idx="minor">
+            <a:schemeClr val="lt1"/>
+          </a:fontRef>
+        </p:style>
+        <p:txBody>
+          <a:bodyPr rtlCol="0" anchor="ctr"/>
+          <a:lstStyle/>
+          <a:p>
+            <a:pPr algn="ctr"/>
+          </a:p>
+        </p:txBody>
+      </p:sp>
+      <p:sp>
+        <p:nvSpPr>
+          <p:cNvPr id="36" name="La IA"/>
+          <p:cNvSpPr/>
+          <p:nvPr/>
+        </p:nvSpPr>
+        <p:spPr>
+          <a:xfrm>
+            <a:off x="822959" y="3383279"/>
+            <a:ext cx="914400" cy="914400"/>
+          </a:xfrm>
+          <a:prstGeom prst="ellipse">
+            <a:avLst/>
+          </a:prstGeom>
+          <a:solidFill>
+            <a:schemeClr val="accent2"/>
+          </a:solidFill>
+          <a:ln>
+            <a:noFill/>
+          </a:ln>
+          <a:effectLst/>
+        </p:spPr>
+        <p:style>
+          <a:lnRef idx="1">
+            <a:schemeClr val="accent1"/>
+          </a:lnRef>
+          <a:fillRef idx="3">
+            <a:schemeClr val="accent1"/>
+          </a:fillRef>
+          <a:effectRef idx="2">
+            <a:schemeClr val="accent1"/>
+          </a:effectRef>
+          <a:fontRef idx="minor">
+            <a:schemeClr val="lt1"/>
+          </a:fontRef>
+        </p:style>
+        <p:txBody>
+          <a:bodyPr rtlCol="0" anchor="ctr"/>
+          <a:lstStyle/>
+          <a:p>
+            <a:pPr algn="ctr"/>
+          </a:p>
+        </p:txBody>
+      </p:sp>
+      <p:pic>
+        <p:nvPicPr>
+          <p:cNvPr id="37" name="La IA" descr="image.png"/>
+          <p:cNvPicPr>
+            <a:picLocks noChangeAspect="1"/>
+          </p:cNvPicPr>
+          <p:nvPr/>
+        </p:nvPicPr>
+        <p:blipFill>
+          <a:blip r:embed="rId4"/>
+          <a:stretch>
+            <a:fillRect/>
+          </a:stretch>
+        </p:blipFill>
+        <p:spPr>
+          <a:xfrm>
+            <a:off x="1042415" y="3602735"/>
+            <a:ext cx="475488" cy="475488"/>
+          </a:xfrm>
+          <a:prstGeom prst="rect">
+            <a:avLst/>
+          </a:prstGeom>
+        </p:spPr>
+      </p:pic>
+      <p:sp>
+        <p:nvSpPr>
+          <p:cNvPr id="38" name="Texto La IA"/>
+          <p:cNvSpPr txBox="1"/>
+          <p:nvPr/>
+        </p:nvSpPr>
+        <p:spPr>
+          <a:xfrm>
+            <a:off x="2011680" y="3108960"/>
+            <a:ext cx="5760720" cy="1463040"/>
+          </a:xfrm>
+          <a:prstGeom prst="rect">
+            <a:avLst/>
+          </a:prstGeom>
+          <a:noFill/>
+        </p:spPr>
+        <p:txBody>
+          <a:bodyPr wrap="square" anchor="ctr" lIns="0" rIns="0" tIns="0" bIns="0">
+            <a:spAutoFit/>
+          </a:bodyPr>
+          <a:lstStyle/>
+          <a:p>
+            <a:r>
+              <a:rPr sz="2000" b="1">
+                <a:solidFill>
+                  <a:schemeClr val="tx1"/>
+                </a:solidFill>
+              </a:rPr>
+              <a:t>La IA</a:t>
+            </a:r>
+          </a:p>
+          <a:p>
+            <a:pPr>
+              <a:spcBef>
+                <a:spcPts val="400"/>
+              </a:spcBef>
+            </a:pPr>
+            <a:r>
+              <a:rPr sz="1700" b="0">
+                <a:solidFill>
+                  <a:schemeClr val="tx1"/>
+                </a:solidFill>
+              </a:rPr>
+              <a:t>Si todos le pedimos lo mismo, todos recibimos lo mismo: cientos de cartas de presentación que suenan iguales.</a:t>
+            </a:r>
+          </a:p>
+        </p:txBody>
+      </p:sp>
+      <p:pic>
+        <p:nvPicPr>
+          <p:cNvPr id="39" name="Resultado igual" descr="FaFileAlt-8A94A6.png"/>
+          <p:cNvPicPr>
+            <a:picLocks noChangeAspect="1"/>
+          </p:cNvPicPr>
+          <p:nvPr/>
+        </p:nvPicPr>
+        <p:blipFill>
+          <a:blip r:embed="rId5"/>
+          <a:stretch>
+            <a:fillRect/>
+          </a:stretch>
+        </p:blipFill>
+        <p:spPr>
+          <a:xfrm>
+            <a:off x="8001000" y="3593591"/>
+            <a:ext cx="502920" cy="502920"/>
+          </a:xfrm>
+          <a:prstGeom prst="rect">
+            <a:avLst/>
+          </a:prstGeom>
+        </p:spPr>
+      </p:pic>
+      <p:pic>
+        <p:nvPicPr>
+          <p:cNvPr id="40" name="Resultado igual" descr="FaFileAlt-8A94A6.png"/>
+          <p:cNvPicPr>
+            <a:picLocks noChangeAspect="1"/>
+          </p:cNvPicPr>
+          <p:nvPr/>
+        </p:nvPicPr>
+        <p:blipFill>
+          <a:blip r:embed="rId5"/>
+          <a:stretch>
+            <a:fillRect/>
+          </a:stretch>
+        </p:blipFill>
+        <p:spPr>
+          <a:xfrm>
+            <a:off x="8714232" y="3593591"/>
+            <a:ext cx="502920" cy="502920"/>
+          </a:xfrm>
+          <a:prstGeom prst="rect">
+            <a:avLst/>
+          </a:prstGeom>
+        </p:spPr>
+      </p:pic>
+      <p:pic>
+        <p:nvPicPr>
+          <p:cNvPr id="41" name="Resultado igual" descr="FaFileAlt-8A94A6.png"/>
+          <p:cNvPicPr>
+            <a:picLocks noChangeAspect="1"/>
+          </p:cNvPicPr>
+          <p:nvPr/>
+        </p:nvPicPr>
+        <p:blipFill>
+          <a:blip r:embed="rId5"/>
+          <a:stretch>
+            <a:fillRect/>
+          </a:stretch>
+        </p:blipFill>
+        <p:spPr>
+          <a:xfrm>
+            <a:off x="9427464" y="3593591"/>
+            <a:ext cx="502920" cy="502920"/>
+          </a:xfrm>
+          <a:prstGeom prst="rect">
+            <a:avLst/>
+          </a:prstGeom>
+        </p:spPr>
+      </p:pic>
+      <p:pic>
+        <p:nvPicPr>
+          <p:cNvPr id="42" name="Resultado igual" descr="FaFileAlt-8A94A6.png"/>
+          <p:cNvPicPr>
+            <a:picLocks noChangeAspect="1"/>
+          </p:cNvPicPr>
+          <p:nvPr/>
+        </p:nvPicPr>
+        <p:blipFill>
+          <a:blip r:embed="rId5"/>
+          <a:stretch>
+            <a:fillRect/>
+          </a:stretch>
+        </p:blipFill>
+        <p:spPr>
+          <a:xfrm>
+            <a:off x="10140696" y="3593591"/>
+            <a:ext cx="502920" cy="502920"/>
+          </a:xfrm>
+          <a:prstGeom prst="rect">
+            <a:avLst/>
+          </a:prstGeom>
+        </p:spPr>
+      </p:pic>
+      <p:pic>
+        <p:nvPicPr>
+          <p:cNvPr id="43" name="Resultado igual" descr="FaFileAlt-8A94A6.png"/>
+          <p:cNvPicPr>
+            <a:picLocks noChangeAspect="1"/>
+          </p:cNvPicPr>
+          <p:nvPr/>
+        </p:nvPicPr>
+        <p:blipFill>
+          <a:blip r:embed="rId5"/>
+          <a:stretch>
+            <a:fillRect/>
+          </a:stretch>
+        </p:blipFill>
+        <p:spPr>
+          <a:xfrm>
+            <a:off x="10853928" y="3593591"/>
+            <a:ext cx="502920" cy="502920"/>
+          </a:xfrm>
+          <a:prstGeom prst="rect">
+            <a:avLst/>
+          </a:prstGeom>
+        </p:spPr>
+      </p:pic>
+      <p:sp>
+        <p:nvSpPr>
+          <p:cNvPr id="44" name="Personas"/>
+          <p:cNvSpPr/>
+          <p:nvPr/>
+        </p:nvSpPr>
+        <p:spPr>
+          <a:xfrm>
+            <a:off x="548640" y="4983480"/>
+            <a:ext cx="822960" cy="822960"/>
+          </a:xfrm>
+          <a:prstGeom prst="ellipse">
+            <a:avLst/>
+          </a:prstGeom>
+          <a:solidFill>
+            <a:schemeClr val="accent1"/>
+          </a:solidFill>
+          <a:ln>
+            <a:noFill/>
+          </a:ln>
+          <a:effectLst/>
+        </p:spPr>
+        <p:style>
+          <a:lnRef idx="1">
+            <a:schemeClr val="accent1"/>
+          </a:lnRef>
+          <a:fillRef idx="3">
+            <a:schemeClr val="accent1"/>
+          </a:fillRef>
+          <a:effectRef idx="2">
+            <a:schemeClr val="accent1"/>
+          </a:effectRef>
+          <a:fontRef idx="minor">
+            <a:schemeClr val="lt1"/>
+          </a:fontRef>
+        </p:style>
+        <p:txBody>
+          <a:bodyPr rtlCol="0" anchor="ctr"/>
+          <a:lstStyle/>
+          <a:p>
+            <a:pPr algn="ctr"/>
+          </a:p>
+        </p:txBody>
+      </p:sp>
+      <p:pic>
+        <p:nvPicPr>
+          <p:cNvPr id="45" name="Personas" descr="image.png"/>
+          <p:cNvPicPr>
+            <a:picLocks noChangeAspect="1"/>
+          </p:cNvPicPr>
+          <p:nvPr/>
+        </p:nvPicPr>
+        <p:blipFill>
+          <a:blip r:embed="rId6"/>
+          <a:stretch>
+            <a:fillRect/>
+          </a:stretch>
+        </p:blipFill>
+        <p:spPr>
+          <a:xfrm>
+            <a:off x="746150" y="5180990"/>
+            <a:ext cx="427939" cy="427939"/>
+          </a:xfrm>
+          <a:prstGeom prst="rect">
+            <a:avLst/>
+          </a:prstGeom>
+        </p:spPr>
+      </p:pic>
+      <p:sp>
+        <p:nvSpPr>
+          <p:cNvPr id="46" name="Conclusión"/>
+          <p:cNvSpPr txBox="1"/>
+          <p:nvPr/>
+        </p:nvSpPr>
+        <p:spPr>
+          <a:xfrm>
+            <a:off x="1600200" y="4846320"/>
+            <a:ext cx="10042855" cy="1097280"/>
+          </a:xfrm>
+          <a:prstGeom prst="rect">
+            <a:avLst/>
+          </a:prstGeom>
+          <a:noFill/>
+        </p:spPr>
+        <p:txBody>
+          <a:bodyPr wrap="square" anchor="ctr" lIns="0" rIns="0" tIns="0" bIns="0">
+            <a:spAutoFit/>
+          </a:bodyPr>
+          <a:lstStyle/>
+          <a:p>
+            <a:r>
+              <a:rPr sz="2000" b="1">
+                <a:solidFill>
+                  <a:schemeClr val="tx1"/>
+                </a:solidFill>
+              </a:rPr>
+              <a:t>La idea que nadie más tendría suele salir de las personas.</a:t>
+            </a:r>
+          </a:p>
+          <a:p>
+            <a:pPr>
+              <a:spcBef>
+                <a:spcPts val="400"/>
+              </a:spcBef>
+            </a:pPr>
+            <a:r>
+              <a:rPr sz="1800" b="0">
+                <a:solidFill>
+                  <a:schemeClr val="tx1"/>
+                </a:solidFill>
+              </a:rPr>
+              <a:t>Primero pensamos nosotros; después, la IA amplía lo nuestro.</a:t>
+            </a:r>
           </a:p>
         </p:txBody>
       </p:sp>

--- a/diapositivas/bloque1.pptx
+++ b/diapositivas/bloque1.pptx
@@ -5,7 +5,7 @@
     <p:sldMasterId id="2147483648" r:id="rId1"/>
   </p:sldMasterIdLst>
   <p:notesMasterIdLst>
-    <p:notesMasterId r:id="rId30"/>
+    <p:notesMasterId r:id="rId31"/>
   </p:notesMasterIdLst>
   <p:sldIdLst>
     <p:sldId id="256" r:id="rId2"/>
@@ -27,16 +27,16 @@
     <p:sldId id="272" r:id="rId18"/>
     <p:sldId id="273" r:id="rId19"/>
     <p:sldId id="274" r:id="rId20"/>
-    <p:sldId id="284" r:id="rId35"/>
-    <p:sldId id="275" r:id="rId21"/>
-    <p:sldId id="276" r:id="rId22"/>
-    <p:sldId id="277" r:id="rId23"/>
-    <p:sldId id="278" r:id="rId24"/>
-    <p:sldId id="279" r:id="rId25"/>
-    <p:sldId id="280" r:id="rId26"/>
-    <p:sldId id="281" r:id="rId27"/>
-    <p:sldId id="282" r:id="rId28"/>
-    <p:sldId id="283" r:id="rId29"/>
+    <p:sldId id="284" r:id="rId21"/>
+    <p:sldId id="275" r:id="rId22"/>
+    <p:sldId id="276" r:id="rId23"/>
+    <p:sldId id="277" r:id="rId24"/>
+    <p:sldId id="278" r:id="rId25"/>
+    <p:sldId id="279" r:id="rId26"/>
+    <p:sldId id="280" r:id="rId27"/>
+    <p:sldId id="281" r:id="rId28"/>
+    <p:sldId id="282" r:id="rId29"/>
+    <p:sldId id="283" r:id="rId30"/>
   </p:sldIdLst>
   <p:sldSz cx="12192000" cy="6858000"/>
   <p:notesSz cx="6858000" cy="12192000"/>
@@ -1395,18 +1395,6 @@
       </p:grpSpPr>
       <p:sp>
         <p:nvSpPr>
-          <p:cNvPr id="2" name="Slide Image Placeholder 1"/>
-          <p:cNvSpPr>
-            <a:spLocks noGrp="1" noRot="1" noChangeAspect="1"/>
-          </p:cNvSpPr>
-          <p:nvPr>
-            <p:ph type="sldImg"/>
-          </p:nvPr>
-        </p:nvSpPr>
-        <p:spPr/>
-      </p:sp>
-      <p:sp>
-        <p:nvSpPr>
           <p:cNvPr id="3" name="Notes Placeholder 2"/>
           <p:cNvSpPr>
             <a:spLocks noGrp="1"/>
@@ -1421,41 +1409,60 @@
           <a:lstStyle/>
           <a:p>
             <a:r>
-              <a:rPr lang="en-US" dirty="0"/>
-              <a:t>Ejemplo que acompaña a las tres técnicas del curso. Es ajeno a los ejercicios: usar siempre el mismo ejemplo deja ver qué tipo de ideas produce cada técnica.</a:t>
-            </a:r>
-          </a:p>
-        </p:txBody>
-      </p:sp>
-      <p:sp>
-        <p:nvSpPr>
-          <p:cNvPr id="4" name="Slide Number Placeholder 3"/>
-          <p:cNvSpPr>
-            <a:spLocks noGrp="1"/>
-          </p:cNvSpPr>
-          <p:nvPr>
-            <p:ph type="sldNum" sz="quarter" idx="10"/>
-          </p:nvPr>
-        </p:nvSpPr>
-        <p:spPr/>
-        <p:txBody>
-          <a:bodyPr/>
-          <a:lstStyle/>
-          <a:p>
-            <a:fld id="{F7021451-1387-4CA6-816F-3879F97B5CBC}" type="slidenum">
-              <a:rPr lang="en-US"/>
-              <a:t>20</a:t>
-            </a:fld>
-            <a:endParaRPr lang="en-US"/>
+              <a:t>Minutos 15–20, justo después de la regla «primero las personas, después la IA». Contarlo como historia, en un minuto:</a:t>
+            </a:r>
+          </a:p>
+          <a:p>
+            <a:endParaRPr/>
+          </a:p>
+          <a:p>
+            <a:r>
+              <a:t>Hay un programa para crear videojuegos, Unreal Engine 5, que lo hace casi todo solo: la luz, las sombras, los reflejos, el detalle de cada objeto. Con él, una persona desde su casa puede hacer un juego que parece de un gran estudio.</a:t>
+            </a:r>
+          </a:p>
+          <a:p>
+            <a:endParaRPr/>
+          </a:p>
+          <a:p>
+            <a:r>
+              <a:t>Muchísima gente lo usó y dejó que el programa decidiera la luz y el aspecto del juego. Y pasó algo curioso: muchos juegos empezaron a parecerse entre sí. Técnicamente eran impecables, pero tenían todos el mismo aire. Los que llamaban la atención eran los que tenían un estilo propio, y ese estilo no lo pone la herramienta: lo pone la persona.</a:t>
+            </a:r>
+          </a:p>
+          <a:p>
+            <a:endParaRPr/>
+          </a:p>
+          <a:p>
+            <a:r>
+              <a:t>Con la IA pasa lo mismo. Da ideas, resume y redacta muy bien. Pero si todos le preguntamos lo mismo, todos recibimos respuestas parecidas. Ya pasa con las cartas de presentación: las empresas reciben cientos que suenan iguales porque las ha escrito la misma IA.</a:t>
+            </a:r>
+          </a:p>
+          <a:p>
+            <a:endParaRPr/>
+          </a:p>
+          <a:p>
+            <a:r>
+              <a:t>Las personas fallamos más y tenemos días malos. Pero la idea rara, la que nadie más tendría, es la que marca la diferencia, y esa suele salir de nosotros. Por eso: primero pensamos las personas y después usamos la IA para ampliar lo nuestro, no para sustituirlo.</a:t>
+            </a:r>
+          </a:p>
+          <a:p>
+            <a:endParaRPr/>
+          </a:p>
+          <a:p>
+            <a:r>
+              <a:t>Cuidado: no afirmar que la IA es peor que las personas. El argumento es que, si todos usamos la misma herramienta, todos acabamos haciendo lo mismo. Así no se adelanta la conclusión de la comparación del Ejercicio 1.</a:t>
+            </a:r>
+          </a:p>
+          <a:p>
+            <a:endParaRPr/>
+          </a:p>
+          <a:p>
+            <a:r>
+              <a:t>Respaldo (comprobar la referencia antes de citarla): un estudio publicado en 2024 en Science Advances encontró que la IA hacía algo más creativos los textos de cada persona, pero que los textos se parecían mucho más entre sí.</a:t>
+            </a:r>
           </a:p>
         </p:txBody>
       </p:sp>
     </p:spTree>
-    <p:extLst>
-      <p:ext uri="{BB962C8B-B14F-4D97-AF65-F5344CB8AC3E}">
-        <p14:creationId xmlns:p14="http://schemas.microsoft.com/office/powerpoint/2010/main" val="1024086991"/>
-      </p:ext>
-    </p:extLst>
   </p:cSld>
   <p:clrMapOvr>
     <a:masterClrMapping/>
@@ -1509,7 +1516,7 @@
           <a:p>
             <a:r>
               <a:rPr lang="en-US" dirty="0"/>
-              <a:t>Minutos 15–20. Qué es el brainstorming y sus cuatro reglas. La regla 3 (construir sobre la idea de otra persona) se aplicará después también a la combinación de ideas del grupo y de la IA.</a:t>
+              <a:t>Ejemplo que acompaña a las tres técnicas del curso. Es ajeno a los ejercicios: usar siempre el mismo ejemplo deja ver qué tipo de ideas produce cada técnica.</a:t>
             </a:r>
           </a:p>
         </p:txBody>
@@ -1596,7 +1603,7 @@
           <a:p>
             <a:r>
               <a:rPr lang="en-US" dirty="0"/>
-              <a:t>Lanzar las ideas a buen ritmo para mostrar cómo funciona. Terminar con la idea disparatada y mostrar que, construyendo sobre ella, se llega a una idea sensata: por eso las ideas disparatadas son bienvenidas.</a:t>
+              <a:t>Minutos 15–20. Qué es el brainstorming y sus cuatro reglas. La regla 3 (construir sobre la idea de otra persona) se aplicará después también a la combinación de ideas del grupo y de la IA.</a:t>
             </a:r>
           </a:p>
         </p:txBody>
@@ -1683,7 +1690,7 @@
           <a:p>
             <a:r>
               <a:rPr lang="en-US" dirty="0"/>
-              <a:t>Minutos 20–30. Entre todo el grupo, sin IA. Dar el turno en rueda para que participen todas las personas y no solo las más extrovertidas; quien no tenga idea dice «paso» y se continúa. Apuntar todas las ideas numeradas en la pizarra o en un documento compartido, sin comentarlas. Al final, contar el total: se usará en la comparación.</a:t>
+              <a:t>Lanzar las ideas a buen ritmo para mostrar cómo funciona. Terminar con la idea disparatada y mostrar que, construyendo sobre ella, se llega a una idea sensata: por eso las ideas disparatadas son bienvenidas.</a:t>
             </a:r>
           </a:p>
         </p:txBody>
@@ -1770,7 +1777,7 @@
           <a:p>
             <a:r>
               <a:rPr lang="en-US" dirty="0"/>
-              <a:t>Minutos 30–38. Proyectar la IA y pegar la lista de ideas del grupo en el lugar indicado. Leer en voz alta las propuestas de la IA y comentar cuáles sorprenden y cuáles son genéricas o repiten lo ya dicho con otras palabras. El texto del prompt para copiar está en el guion docente.</a:t>
+              <a:t>Minutos 20–30. Entre todo el grupo, sin IA. Dar el turno en rueda para que participen todas las personas y no solo las más extrovertidas; quien no tenga idea dice «paso» y se continúa. Apuntar todas las ideas numeradas en la pizarra o en un documento compartido, sin comentarlas. Al final, contar el total: se usará en la comparación.</a:t>
             </a:r>
           </a:p>
         </p:txBody>
@@ -1857,7 +1864,7 @@
           <a:p>
             <a:r>
               <a:rPr lang="en-US" dirty="0"/>
-              <a:t>Minutos 30–38. Lanzar este segundo prompt en la misma conversación con la IA, a continuación del primero.</a:t>
+              <a:t>Minutos 30–38. Proyectar la IA y pegar la lista de ideas del grupo en el lugar indicado. Leer en voz alta las propuestas de la IA y comentar cuáles sorprenden y cuáles son genéricas o repiten lo ya dicho con otras palabras. El texto del prompt para copiar está en el guion docente.</a:t>
             </a:r>
           </a:p>
         </p:txBody>
@@ -1944,7 +1951,7 @@
           <a:p>
             <a:r>
               <a:rPr lang="en-US" dirty="0"/>
-              <a:t>Minutos 38–45. Cada persona marca las tres ideas que le parecen más originales, sin fijarse en si vienen del grupo o de la IA. Después, contar y rellenar la tabla: cuántas ideas salieron sin IA y con IA, y cuántas de las más votadas son de cada origen.</a:t>
+              <a:t>Minutos 30–38. Lanzar este segundo prompt en la misma conversación con la IA, a continuación del primero.</a:t>
             </a:r>
           </a:p>
         </p:txBody>
@@ -2031,7 +2038,7 @@
           <a:p>
             <a:r>
               <a:rPr lang="en-US" dirty="0"/>
-              <a:t>No adelantar la conclusión: puede salir que la IA aporta más cantidad pero menos originalidad, o lo contrario. Lo importante es que el grupo lo compruebe con sus propios datos de la tabla.</a:t>
+              <a:t>Minutos 38–45. Cada persona marca las tres ideas que le parecen más originales, sin fijarse en si vienen del grupo o de la IA. Después, contar y rellenar la tabla: cuántas ideas salieron sin IA y con IA, y cuántas de las más votadas son de cada origen.</a:t>
             </a:r>
           </a:p>
         </p:txBody>
@@ -2118,7 +2125,7 @@
           <a:p>
             <a:r>
               <a:rPr lang="en-US" dirty="0"/>
-              <a:t>Conclusión del bloque. Enlazar con el bloque 2: ahora se aplicarán dos técnicas más estructuradas, SCAMPER y la provocación, por parejas.</a:t>
+              <a:t>No adelantar la conclusión: puede salir que la IA aporta más cantidad pero menos originalidad, o lo contrario. Lo importante es que el grupo lo compruebe con sus propios datos de la tabla.</a:t>
             </a:r>
           </a:p>
         </p:txBody>
@@ -2160,7 +2167,7 @@
 </file>
 
 <file path=ppt/notesSlides/notesSlide29.xml><?xml version="1.0" encoding="utf-8"?>
-<p:notes xmlns:a="http://schemas.openxmlformats.org/drawingml/2006/main" xmlns:p="http://schemas.openxmlformats.org/presentationml/2006/main" xmlns:r="http://schemas.openxmlformats.org/officeDocument/2006/relationships">
+<p:notes xmlns:a="http://schemas.openxmlformats.org/drawingml/2006/main" xmlns:r="http://schemas.openxmlformats.org/officeDocument/2006/relationships" xmlns:p="http://schemas.openxmlformats.org/presentationml/2006/main">
   <p:cSld>
     <p:spTree>
       <p:nvGrpSpPr>
@@ -2178,6 +2185,18 @@
       </p:grpSpPr>
       <p:sp>
         <p:nvSpPr>
+          <p:cNvPr id="2" name="Slide Image Placeholder 1"/>
+          <p:cNvSpPr>
+            <a:spLocks noGrp="1" noRot="1" noChangeAspect="1"/>
+          </p:cNvSpPr>
+          <p:nvPr>
+            <p:ph type="sldImg"/>
+          </p:nvPr>
+        </p:nvSpPr>
+        <p:spPr/>
+      </p:sp>
+      <p:sp>
+        <p:nvSpPr>
           <p:cNvPr id="3" name="Notes Placeholder 2"/>
           <p:cNvSpPr>
             <a:spLocks noGrp="1"/>
@@ -2192,48 +2211,41 @@
           <a:lstStyle/>
           <a:p>
             <a:r>
-              <a:t>Minutos 15–20, justo después de la regla «primero las personas, después la IA». Contarlo como historia, en un minuto:</a:t>
-            </a:r>
-          </a:p>
-          <a:p/>
-          <a:p>
-            <a:r>
-              <a:t>Hay un programa para crear videojuegos, Unreal Engine 5, que lo hace casi todo solo: la luz, las sombras, los reflejos, el detalle de cada objeto. Con él, una persona desde su casa puede hacer un juego que parece de un gran estudio.</a:t>
-            </a:r>
-          </a:p>
-          <a:p/>
-          <a:p>
-            <a:r>
-              <a:t>Muchísima gente lo usó y dejó que el programa decidiera la luz y el aspecto del juego. Y pasó algo curioso: muchos juegos empezaron a parecerse entre sí. Técnicamente eran impecables, pero tenían todos el mismo aire. Los que llamaban la atención eran los que tenían un estilo propio, y ese estilo no lo pone la herramienta: lo pone la persona.</a:t>
-            </a:r>
-          </a:p>
-          <a:p/>
-          <a:p>
-            <a:r>
-              <a:t>Con la IA pasa lo mismo. Da ideas, resume y redacta muy bien. Pero si todos le preguntamos lo mismo, todos recibimos respuestas parecidas. Ya pasa con las cartas de presentación: las empresas reciben cientos que suenan iguales porque las ha escrito la misma IA.</a:t>
-            </a:r>
-          </a:p>
-          <a:p/>
-          <a:p>
-            <a:r>
-              <a:t>Las personas fallamos más y tenemos días malos. Pero la idea rara, la que nadie más tendría, es la que marca la diferencia, y esa suele salir de nosotros. Por eso: primero pensamos las personas y después usamos la IA para ampliar lo nuestro, no para sustituirlo.</a:t>
-            </a:r>
-          </a:p>
-          <a:p/>
-          <a:p>
-            <a:r>
-              <a:t>Cuidado: no afirmar que la IA es peor que las personas. El argumento es que, si todos usamos la misma herramienta, todos acabamos haciendo lo mismo. Así no se adelanta la conclusión de la comparación del Ejercicio 1.</a:t>
-            </a:r>
-          </a:p>
-          <a:p/>
-          <a:p>
-            <a:r>
-              <a:t>Respaldo (comprobar la referencia antes de citarla): un estudio publicado en 2024 en Science Advances encontró que la IA hacía algo más creativos los textos de cada persona, pero que los textos se parecían mucho más entre sí.</a:t>
-            </a:r>
+              <a:rPr lang="en-US" dirty="0"/>
+              <a:t>Conclusión del bloque. Enlazar con el bloque 2: ahora se aplicarán dos técnicas más estructuradas, SCAMPER y la provocación, por parejas.</a:t>
+            </a:r>
+          </a:p>
+        </p:txBody>
+      </p:sp>
+      <p:sp>
+        <p:nvSpPr>
+          <p:cNvPr id="4" name="Slide Number Placeholder 3"/>
+          <p:cNvSpPr>
+            <a:spLocks noGrp="1"/>
+          </p:cNvSpPr>
+          <p:nvPr>
+            <p:ph type="sldNum" sz="quarter" idx="10"/>
+          </p:nvPr>
+        </p:nvSpPr>
+        <p:spPr/>
+        <p:txBody>
+          <a:bodyPr/>
+          <a:lstStyle/>
+          <a:p>
+            <a:fld id="{F7021451-1387-4CA6-816F-3879F97B5CBC}" type="slidenum">
+              <a:rPr lang="en-US"/>
+              <a:t>29</a:t>
+            </a:fld>
+            <a:endParaRPr lang="en-US"/>
           </a:p>
         </p:txBody>
       </p:sp>
     </p:spTree>
+    <p:extLst>
+      <p:ext uri="{BB962C8B-B14F-4D97-AF65-F5344CB8AC3E}">
+        <p14:creationId xmlns:p14="http://schemas.microsoft.com/office/powerpoint/2010/main" val="1024086991"/>
+      </p:ext>
+    </p:extLst>
   </p:cSld>
   <p:clrMapOvr>
     <a:masterClrMapping/>
@@ -11209,6 +11221,244 @@
 
 <file path=ppt/slides/slide20.xml><?xml version="1.0" encoding="utf-8"?>
 <p:sld xmlns:a="http://schemas.openxmlformats.org/drawingml/2006/main" xmlns:r="http://schemas.openxmlformats.org/officeDocument/2006/relationships" xmlns:p="http://schemas.openxmlformats.org/presentationml/2006/main">
+  <p:cSld>
+    <p:spTree>
+      <p:nvGrpSpPr>
+        <p:cNvPr id="1" name=""/>
+        <p:cNvGrpSpPr/>
+        <p:nvPr/>
+      </p:nvGrpSpPr>
+      <p:grpSpPr>
+        <a:xfrm>
+          <a:off x="0" y="0"/>
+          <a:ext cx="0" cy="0"/>
+          <a:chOff x="0" y="0"/>
+          <a:chExt cx="0" cy="0"/>
+        </a:xfrm>
+      </p:grpSpPr>
+      <p:sp>
+        <p:nvSpPr>
+          <p:cNvPr id="2" name="Text 0"/>
+          <p:cNvSpPr>
+            <a:spLocks noGrp="1"/>
+          </p:cNvSpPr>
+          <p:nvPr>
+            <p:ph type="title" idx="100" hasCustomPrompt="1"/>
+          </p:nvPr>
+        </p:nvSpPr>
+        <p:spPr>
+          <a:xfrm>
+            <a:off x="548640" y="411480"/>
+            <a:ext cx="11094415" cy="777240"/>
+          </a:xfrm>
+          <a:prstGeom prst="rect">
+            <a:avLst/>
+          </a:prstGeom>
+          <a:noFill/>
+          <a:ln/>
+        </p:spPr>
+        <p:txBody>
+          <a:bodyPr wrap="square" lIns="0" tIns="0" rIns="0" bIns="0" rtlCol="0" anchor="ctr"/>
+          <a:lstStyle/>
+          <a:p>
+            <a:pPr marL="0" indent="0" algn="l">
+              <a:buNone/>
+            </a:pPr>
+            <a:r>
+              <a:rPr lang="en-US" sz="3200" b="1" dirty="0">
+                <a:solidFill>
+                  <a:schemeClr val="tx1"/>
+                </a:solidFill>
+              </a:rPr>
+              <a:t>Misma herramienta, mismo resultado</a:t>
+            </a:r>
+            <a:endParaRPr lang="en-US" sz="3200" dirty="0"/>
+          </a:p>
+        </p:txBody>
+      </p:sp>
+      <p:sp>
+        <p:nvSpPr>
+          <p:cNvPr id="3" name="Etiqueta de tiempo"/>
+          <p:cNvSpPr/>
+          <p:nvPr/>
+        </p:nvSpPr>
+        <p:spPr>
+          <a:xfrm>
+            <a:off x="10134295" y="548640"/>
+            <a:ext cx="1508760" cy="457200"/>
+          </a:xfrm>
+          <a:prstGeom prst="roundRect">
+            <a:avLst>
+              <a:gd name="adj" fmla="val 50000"/>
+            </a:avLst>
+          </a:prstGeom>
+          <a:solidFill>
+            <a:schemeClr val="bg2"/>
+          </a:solidFill>
+          <a:ln/>
+        </p:spPr>
+      </p:sp>
+      <p:sp>
+        <p:nvSpPr>
+          <p:cNvPr id="4" name="Text 2"/>
+          <p:cNvSpPr txBox="1"/>
+          <p:nvPr/>
+        </p:nvSpPr>
+        <p:spPr>
+          <a:xfrm>
+            <a:off x="10134295" y="548640"/>
+            <a:ext cx="1508760" cy="457200"/>
+          </a:xfrm>
+          <a:prstGeom prst="rect">
+            <a:avLst/>
+          </a:prstGeom>
+          <a:noFill/>
+          <a:ln/>
+        </p:spPr>
+        <p:txBody>
+          <a:bodyPr wrap="square" lIns="0" tIns="0" rIns="0" bIns="0" rtlCol="0" anchor="ctr"/>
+          <a:lstStyle/>
+          <a:p>
+            <a:pPr marL="0" indent="0" algn="ctr">
+              <a:buNone/>
+            </a:pPr>
+            <a:r>
+              <a:rPr lang="en-US" sz="1400" b="1" dirty="0">
+                <a:solidFill>
+                  <a:schemeClr val="tx1"/>
+                </a:solidFill>
+              </a:rPr>
+              <a:t>Min. 15–20</a:t>
+            </a:r>
+            <a:endParaRPr lang="en-US" sz="1400" dirty="0"/>
+          </a:p>
+        </p:txBody>
+      </p:sp>
+      <p:sp>
+        <p:nvSpPr>
+          <p:cNvPr id="25" name="Slide Number Placeholder 0"/>
+          <p:cNvSpPr>
+            <a:spLocks noGrp="1"/>
+          </p:cNvSpPr>
+          <p:nvPr>
+            <p:ph type="sldNum" sz="quarter" idx="4294967295"/>
+          </p:nvPr>
+        </p:nvSpPr>
+        <p:spPr>
+          <a:xfrm>
+            <a:off x="11091672" y="6355080"/>
+            <a:ext cx="548640" cy="320040"/>
+          </a:xfrm>
+          <a:prstGeom prst="rect">
+            <a:avLst/>
+          </a:prstGeom>
+          <a:extLst>
+            <a:ext uri="{C572A759-6A51-4108-AA02-DFA0A04FC94B}">
+              <ma14:wrappingTextBoxFlag xmlns:ma14="http://schemas.microsoft.com/office/mac/drawingml/2011/main" xmlns="" val="0"/>
+            </a:ext>
+          </a:extLst>
+        </p:spPr>
+        <p:txBody>
+          <a:bodyPr/>
+          <a:lstStyle>
+            <a:lvl1pPr>
+              <a:defRPr sz="1100">
+                <a:solidFill>
+                  <a:srgbClr val="8A94A6"/>
+                </a:solidFill>
+              </a:defRPr>
+            </a:lvl1pPr>
+          </a:lstStyle>
+          <a:p>
+            <a:pPr algn="r"/>
+            <a:fld id="{F7021451-1387-4CA6-816F-3879F97B5CBC}" type="slidenum">
+              <a:rPr lang="en-US" b="0"/>
+              <a:t>20</a:t>
+            </a:fld>
+            <a:endParaRPr lang="en-US"/>
+          </a:p>
+        </p:txBody>
+      </p:sp>
+      <p:sp>
+        <p:nvSpPr>
+          <p:cNvPr id="6" name="Text 0">
+            <a:extLst>
+              <a:ext uri="{FF2B5EF4-FFF2-40B4-BE49-F238E27FC236}">
+                <a16:creationId xmlns:a16="http://schemas.microsoft.com/office/drawing/2014/main" id="{A283B16A-A781-DFDA-EEC3-BD382FEE5646}"/>
+              </a:ext>
+            </a:extLst>
+          </p:cNvPr>
+          <p:cNvSpPr txBox="1">
+            <a:spLocks/>
+          </p:cNvSpPr>
+          <p:nvPr/>
+        </p:nvSpPr>
+        <p:spPr>
+          <a:xfrm>
+            <a:off x="868309" y="2994660"/>
+            <a:ext cx="11094415" cy="777240"/>
+          </a:xfrm>
+          <a:prstGeom prst="rect">
+            <a:avLst/>
+          </a:prstGeom>
+          <a:noFill/>
+          <a:ln/>
+        </p:spPr>
+        <p:txBody>
+          <a:bodyPr wrap="square" lIns="0" tIns="0" rIns="0" bIns="0" rtlCol="0" anchor="ctr"/>
+          <a:lstStyle>
+            <a:lvl1pPr marL="0" indent="0" algn="l" defTabSz="914400" rtl="0" eaLnBrk="1" latinLnBrk="0" hangingPunct="1">
+              <a:spcBef>
+                <a:spcPct val="0"/>
+              </a:spcBef>
+              <a:buNone/>
+              <a:defRPr lang="en-US" sz="3200" b="1" kern="1200" dirty="0">
+                <a:solidFill>
+                  <a:schemeClr val="tx1"/>
+                </a:solidFill>
+                <a:latin typeface="+mj-lt"/>
+                <a:ea typeface="+mj-ea"/>
+                <a:cs typeface="+mj-cs"/>
+              </a:defRPr>
+            </a:lvl1pPr>
+          </a:lstStyle>
+          <a:p>
+            <a:r>
+              <a:rPr lang="es-ES" dirty="0"/>
+              <a:t>Ver casos:</a:t>
+            </a:r>
+            <a:br>
+              <a:rPr lang="es-ES" dirty="0"/>
+            </a:br>
+            <a:r>
+              <a:rPr lang="es-ES" dirty="0" err="1"/>
+              <a:t>Unreal</a:t>
+            </a:r>
+            <a:r>
+              <a:rPr lang="es-ES" dirty="0"/>
+              <a:t> </a:t>
+            </a:r>
+            <a:r>
+              <a:rPr lang="es-ES" dirty="0" err="1"/>
+              <a:t>Engine</a:t>
+            </a:r>
+            <a:r>
+              <a:rPr lang="es-ES" dirty="0"/>
+              <a:t> 5 y Relatos cortos</a:t>
+            </a:r>
+          </a:p>
+        </p:txBody>
+      </p:sp>
+    </p:spTree>
+  </p:cSld>
+  <p:clrMapOvr>
+    <a:masterClrMapping/>
+  </p:clrMapOvr>
+</p:sld>
+</file>
+
+<file path=ppt/slides/slide21.xml><?xml version="1.0" encoding="utf-8"?>
+<p:sld xmlns:a="http://schemas.openxmlformats.org/drawingml/2006/main" xmlns:r="http://schemas.openxmlformats.org/officeDocument/2006/relationships" xmlns:p="http://schemas.openxmlformats.org/presentationml/2006/main">
   <p:cSld name="Slide 20">
     <p:spTree>
       <p:nvGrpSpPr>
@@ -11783,7 +12033,7 @@
             <a:pPr algn="r"/>
             <a:fld id="{F7021451-1387-4CA6-816F-3879F97B5CBC}" type="slidenum">
               <a:rPr lang="en-US" b="0"/>
-              <a:t>20</a:t>
+              <a:t>21</a:t>
             </a:fld>
             <a:endParaRPr lang="en-US"/>
           </a:p>
@@ -11797,7 +12047,7 @@
 </p:sld>
 </file>
 
-<file path=ppt/slides/slide21.xml><?xml version="1.0" encoding="utf-8"?>
+<file path=ppt/slides/slide22.xml><?xml version="1.0" encoding="utf-8"?>
 <p:sld xmlns:a="http://schemas.openxmlformats.org/drawingml/2006/main" xmlns:r="http://schemas.openxmlformats.org/officeDocument/2006/relationships" xmlns:p="http://schemas.openxmlformats.org/presentationml/2006/main">
   <p:cSld name="Slide 21">
     <p:spTree>
@@ -12443,7 +12693,7 @@
             <a:pPr algn="r"/>
             <a:fld id="{F7021451-1387-4CA6-816F-3879F97B5CBC}" type="slidenum">
               <a:rPr lang="en-US" b="0"/>
-              <a:t>21</a:t>
+              <a:t>22</a:t>
             </a:fld>
             <a:endParaRPr lang="en-US"/>
           </a:p>
@@ -12457,7 +12707,7 @@
 </p:sld>
 </file>
 
-<file path=ppt/slides/slide22.xml><?xml version="1.0" encoding="utf-8"?>
+<file path=ppt/slides/slide23.xml><?xml version="1.0" encoding="utf-8"?>
 <p:sld xmlns:a="http://schemas.openxmlformats.org/drawingml/2006/main" xmlns:r="http://schemas.openxmlformats.org/officeDocument/2006/relationships" xmlns:p="http://schemas.openxmlformats.org/presentationml/2006/main">
   <p:cSld name="Slide 22">
     <p:spTree>
@@ -12776,7 +13026,7 @@
                   <a:schemeClr val="tx1"/>
                 </a:solidFill>
               </a:rPr>
-              <a:t>Cortes gratis a estudiantes de peluquería, que practican supervisados.</a:t>
+              <a:t>Cortes gratis de estudiantes de peluquería, que practican supervisados.</a:t>
             </a:r>
             <a:endParaRPr lang="en-US" sz="1600" dirty="0"/>
           </a:p>
@@ -13105,7 +13355,7 @@
             <a:pPr algn="r"/>
             <a:fld id="{F7021451-1387-4CA6-816F-3879F97B5CBC}" type="slidenum">
               <a:rPr lang="en-US" b="0"/>
-              <a:t>22</a:t>
+              <a:t>23</a:t>
             </a:fld>
             <a:endParaRPr lang="en-US"/>
           </a:p>
@@ -13119,7 +13369,7 @@
 </p:sld>
 </file>
 
-<file path=ppt/slides/slide23.xml><?xml version="1.0" encoding="utf-8"?>
+<file path=ppt/slides/slide24.xml><?xml version="1.0" encoding="utf-8"?>
 <p:sld xmlns:a="http://schemas.openxmlformats.org/drawingml/2006/main" xmlns:r="http://schemas.openxmlformats.org/officeDocument/2006/relationships" xmlns:p="http://schemas.openxmlformats.org/presentationml/2006/main">
   <p:cSld name="Slide 23">
     <p:spTree>
@@ -13585,7 +13835,7 @@
             <a:pPr algn="r"/>
             <a:fld id="{F7021451-1387-4CA6-816F-3879F97B5CBC}" type="slidenum">
               <a:rPr lang="en-US" b="0"/>
-              <a:t>23</a:t>
+              <a:t>24</a:t>
             </a:fld>
             <a:endParaRPr lang="en-US"/>
           </a:p>
@@ -13599,7 +13849,7 @@
 </p:sld>
 </file>
 
-<file path=ppt/slides/slide24.xml><?xml version="1.0" encoding="utf-8"?>
+<file path=ppt/slides/slide25.xml><?xml version="1.0" encoding="utf-8"?>
 <p:sld xmlns:a="http://schemas.openxmlformats.org/drawingml/2006/main" xmlns:r="http://schemas.openxmlformats.org/officeDocument/2006/relationships" xmlns:p="http://schemas.openxmlformats.org/presentationml/2006/main">
   <p:cSld name="Slide 24">
     <p:spTree>
@@ -14621,7 +14871,7 @@
             <a:pPr algn="r"/>
             <a:fld id="{F7021451-1387-4CA6-816F-3879F97B5CBC}" type="slidenum">
               <a:rPr lang="en-US" b="0"/>
-              <a:t>24</a:t>
+              <a:t>25</a:t>
             </a:fld>
             <a:endParaRPr lang="en-US"/>
           </a:p>
@@ -14635,7 +14885,7 @@
 </p:sld>
 </file>
 
-<file path=ppt/slides/slide25.xml><?xml version="1.0" encoding="utf-8"?>
+<file path=ppt/slides/slide26.xml><?xml version="1.0" encoding="utf-8"?>
 <p:sld xmlns:a="http://schemas.openxmlformats.org/drawingml/2006/main" xmlns:r="http://schemas.openxmlformats.org/officeDocument/2006/relationships" xmlns:p="http://schemas.openxmlformats.org/presentationml/2006/main">
   <p:cSld name="Slide 25">
     <p:spTree>
@@ -15241,7 +15491,7 @@
             <a:pPr algn="r"/>
             <a:fld id="{F7021451-1387-4CA6-816F-3879F97B5CBC}" type="slidenum">
               <a:rPr lang="en-US" b="0"/>
-              <a:t>25</a:t>
+              <a:t>26</a:t>
             </a:fld>
             <a:endParaRPr lang="en-US"/>
           </a:p>
@@ -15255,7 +15505,7 @@
 </p:sld>
 </file>
 
-<file path=ppt/slides/slide26.xml><?xml version="1.0" encoding="utf-8"?>
+<file path=ppt/slides/slide27.xml><?xml version="1.0" encoding="utf-8"?>
 <p:sld xmlns:a="http://schemas.openxmlformats.org/drawingml/2006/main" xmlns:r="http://schemas.openxmlformats.org/officeDocument/2006/relationships" xmlns:p="http://schemas.openxmlformats.org/presentationml/2006/main">
   <p:cSld name="Slide 26">
     <p:spTree>
@@ -15546,7 +15796,7 @@
         </p:nvGraphicFramePr>
         <p:xfrm>
           <a:off x="5943600" y="1737360"/>
-          <a:ext cx="5699455" cy="914400"/>
+          <a:ext cx="5513832" cy="3108960"/>
         </p:xfrm>
         <a:graphic>
           <a:graphicData uri="http://schemas.openxmlformats.org/drawingml/2006/table">
@@ -16166,7 +16416,7 @@
             <a:pPr algn="r"/>
             <a:fld id="{F7021451-1387-4CA6-816F-3879F97B5CBC}" type="slidenum">
               <a:rPr lang="en-US" b="0"/>
-              <a:t>26</a:t>
+              <a:t>27</a:t>
             </a:fld>
             <a:endParaRPr lang="en-US"/>
           </a:p>
@@ -16180,7 +16430,7 @@
 </p:sld>
 </file>
 
-<file path=ppt/slides/slide27.xml><?xml version="1.0" encoding="utf-8"?>
+<file path=ppt/slides/slide28.xml><?xml version="1.0" encoding="utf-8"?>
 <p:sld xmlns:a="http://schemas.openxmlformats.org/drawingml/2006/main" xmlns:r="http://schemas.openxmlformats.org/officeDocument/2006/relationships" xmlns:p="http://schemas.openxmlformats.org/presentationml/2006/main">
   <p:cSld name="Slide 27">
     <p:spTree>
@@ -16640,7 +16890,7 @@
             <a:pPr algn="r"/>
             <a:fld id="{F7021451-1387-4CA6-816F-3879F97B5CBC}" type="slidenum">
               <a:rPr lang="en-US" b="0"/>
-              <a:t>27</a:t>
+              <a:t>28</a:t>
             </a:fld>
             <a:endParaRPr lang="en-US"/>
           </a:p>
@@ -16654,7 +16904,7 @@
 </p:sld>
 </file>
 
-<file path=ppt/slides/slide28.xml><?xml version="1.0" encoding="utf-8"?>
+<file path=ppt/slides/slide29.xml><?xml version="1.0" encoding="utf-8"?>
 <p:sld xmlns:a="http://schemas.openxmlformats.org/drawingml/2006/main" xmlns:r="http://schemas.openxmlformats.org/officeDocument/2006/relationships" xmlns:p="http://schemas.openxmlformats.org/presentationml/2006/main">
   <p:cSld name="Slide 28">
     <p:spTree>
@@ -16800,850 +17050,9 @@
             <a:pPr algn="r"/>
             <a:fld id="{F7021451-1387-4CA6-816F-3879F97B5CBC}" type="slidenum">
               <a:rPr lang="en-US" b="0"/>
-              <a:t>28</a:t>
+              <a:t>29</a:t>
             </a:fld>
             <a:endParaRPr lang="en-US"/>
-          </a:p>
-        </p:txBody>
-      </p:sp>
-    </p:spTree>
-  </p:cSld>
-  <p:clrMapOvr>
-    <a:masterClrMapping/>
-  </p:clrMapOvr>
-</p:sld>
-</file>
-
-<file path=ppt/slides/slide29.xml><?xml version="1.0" encoding="utf-8"?>
-<p:sld xmlns:a="http://schemas.openxmlformats.org/drawingml/2006/main" xmlns:p="http://schemas.openxmlformats.org/presentationml/2006/main" xmlns:r="http://schemas.openxmlformats.org/officeDocument/2006/relationships">
-  <p:cSld>
-    <p:spTree>
-      <p:nvGrpSpPr>
-        <p:cNvPr id="1" name=""/>
-        <p:cNvGrpSpPr/>
-        <p:nvPr/>
-      </p:nvGrpSpPr>
-      <p:grpSpPr/>
-      <p:sp>
-        <p:nvSpPr>
-          <p:cNvPr id="2" name="Text 0"/>
-          <p:cNvSpPr>
-            <a:spLocks noGrp="1"/>
-          </p:cNvSpPr>
-          <p:nvPr>
-            <p:ph type="title" idx="100" hasCustomPrompt="1"/>
-          </p:nvPr>
-        </p:nvSpPr>
-        <p:spPr>
-          <a:xfrm>
-            <a:off x="548640" y="411480"/>
-            <a:ext cx="11094415" cy="777240"/>
-          </a:xfrm>
-          <a:prstGeom prst="rect">
-            <a:avLst/>
-          </a:prstGeom>
-          <a:noFill/>
-          <a:ln/>
-        </p:spPr>
-        <p:txBody>
-          <a:bodyPr wrap="square" lIns="0" tIns="0" rIns="0" bIns="0" rtlCol="0" anchor="ctr"/>
-          <a:lstStyle/>
-          <a:p>
-            <a:pPr marL="0" indent="0" algn="l">
-              <a:buNone/>
-            </a:pPr>
-            <a:r>
-              <a:rPr lang="en-US" sz="3200" b="1" dirty="0">
-                <a:solidFill>
-                  <a:schemeClr val="tx1"/>
-                </a:solidFill>
-              </a:rPr>
-              <a:t>Misma herramienta, mismo resultado</a:t>
-            </a:r>
-            <a:endParaRPr lang="en-US" sz="3200" dirty="0"/>
-          </a:p>
-        </p:txBody>
-      </p:sp>
-      <p:sp>
-        <p:nvSpPr>
-          <p:cNvPr id="3" name="Etiqueta de tiempo"/>
-          <p:cNvSpPr/>
-          <p:nvPr/>
-        </p:nvSpPr>
-        <p:spPr>
-          <a:xfrm>
-            <a:off x="10134295" y="548640"/>
-            <a:ext cx="1508760" cy="457200"/>
-          </a:xfrm>
-          <a:prstGeom prst="roundRect">
-            <a:avLst>
-              <a:gd name="adj" fmla="val 50000"/>
-            </a:avLst>
-          </a:prstGeom>
-          <a:solidFill>
-            <a:schemeClr val="bg2"/>
-          </a:solidFill>
-          <a:ln/>
-        </p:spPr>
-      </p:sp>
-      <p:sp>
-        <p:nvSpPr>
-          <p:cNvPr id="4" name="Text 2"/>
-          <p:cNvSpPr txBox="1"/>
-          <p:nvPr/>
-        </p:nvSpPr>
-        <p:spPr>
-          <a:xfrm>
-            <a:off x="10134295" y="548640"/>
-            <a:ext cx="1508760" cy="457200"/>
-          </a:xfrm>
-          <a:prstGeom prst="rect">
-            <a:avLst/>
-          </a:prstGeom>
-          <a:noFill/>
-          <a:ln/>
-        </p:spPr>
-        <p:txBody>
-          <a:bodyPr wrap="square" lIns="0" tIns="0" rIns="0" bIns="0" rtlCol="0" anchor="ctr"/>
-          <a:lstStyle/>
-          <a:p>
-            <a:pPr marL="0" indent="0" algn="ctr">
-              <a:buNone/>
-            </a:pPr>
-            <a:r>
-              <a:rPr lang="en-US" sz="1400" b="1" dirty="0">
-                <a:solidFill>
-                  <a:schemeClr val="tx1"/>
-                </a:solidFill>
-              </a:rPr>
-              <a:t>Min. 15–20</a:t>
-            </a:r>
-            <a:endParaRPr lang="en-US" sz="1400" dirty="0"/>
-          </a:p>
-        </p:txBody>
-      </p:sp>
-      <p:sp>
-        <p:nvSpPr>
-          <p:cNvPr id="25" name="Slide Number Placeholder 0"/>
-          <p:cNvSpPr>
-            <a:spLocks noGrp="1"/>
-          </p:cNvSpPr>
-          <p:nvPr>
-            <p:ph type="sldNum" sz="quarter" idx="4294967295"/>
-          </p:nvPr>
-        </p:nvSpPr>
-        <p:spPr>
-          <a:xfrm>
-            <a:off x="11091672" y="6355080"/>
-            <a:ext cx="548640" cy="320040"/>
-          </a:xfrm>
-          <a:prstGeom prst="rect">
-            <a:avLst/>
-          </a:prstGeom>
-          <a:extLst>
-            <a:ext uri="{C572A759-6A51-4108-AA02-DFA0A04FC94B}">
-              <ma14:wrappingTextBoxFlag xmlns:ma14="http://schemas.microsoft.com/office/mac/drawingml/2011/main" xmlns="" val="0"/>
-            </a:ext>
-          </a:extLst>
-        </p:spPr>
-        <p:txBody>
-          <a:bodyPr/>
-          <a:lstStyle>
-            <a:lvl1pPr>
-              <a:defRPr sz="1100">
-                <a:solidFill>
-                  <a:srgbClr val="8A94A6"/>
-                </a:solidFill>
-              </a:defRPr>
-            </a:lvl1pPr>
-          </a:lstStyle>
-          <a:p>
-            <a:pPr algn="r"/>
-            <a:fld id="{F7021451-1387-4CA6-816F-3879F97B5CBC}" type="slidenum">
-              <a:rPr lang="en-US" b="0"/>
-              <a:t>19</a:t>
-            </a:fld>
-            <a:endParaRPr lang="en-US"/>
-          </a:p>
-        </p:txBody>
-      </p:sp>
-      <p:sp>
-        <p:nvSpPr>
-          <p:cNvPr id="26" name="Tarjeta Unreal Engine 5"/>
-          <p:cNvSpPr/>
-          <p:nvPr/>
-        </p:nvSpPr>
-        <p:spPr>
-          <a:xfrm>
-            <a:off x="548640" y="1463040"/>
-            <a:ext cx="11094415" cy="1463040"/>
-          </a:xfrm>
-          <a:prstGeom prst="roundRect">
-            <a:avLst>
-              <a:gd name="adj" fmla="val 9374"/>
-            </a:avLst>
-          </a:prstGeom>
-          <a:solidFill>
-            <a:schemeClr val="bg2"/>
-          </a:solidFill>
-          <a:ln>
-            <a:noFill/>
-          </a:ln>
-          <a:effectLst/>
-        </p:spPr>
-        <p:style>
-          <a:lnRef idx="1">
-            <a:schemeClr val="accent1"/>
-          </a:lnRef>
-          <a:fillRef idx="3">
-            <a:schemeClr val="accent1"/>
-          </a:fillRef>
-          <a:effectRef idx="2">
-            <a:schemeClr val="accent1"/>
-          </a:effectRef>
-          <a:fontRef idx="minor">
-            <a:schemeClr val="lt1"/>
-          </a:fontRef>
-        </p:style>
-        <p:txBody>
-          <a:bodyPr rtlCol="0" anchor="ctr"/>
-          <a:lstStyle/>
-          <a:p>
-            <a:pPr algn="ctr"/>
-          </a:p>
-        </p:txBody>
-      </p:sp>
-      <p:sp>
-        <p:nvSpPr>
-          <p:cNvPr id="27" name="Unreal Engine 5"/>
-          <p:cNvSpPr/>
-          <p:nvPr/>
-        </p:nvSpPr>
-        <p:spPr>
-          <a:xfrm>
-            <a:off x="822959" y="1737360"/>
-            <a:ext cx="914400" cy="914400"/>
-          </a:xfrm>
-          <a:prstGeom prst="ellipse">
-            <a:avLst/>
-          </a:prstGeom>
-          <a:solidFill>
-            <a:schemeClr val="tx1"/>
-          </a:solidFill>
-          <a:ln>
-            <a:noFill/>
-          </a:ln>
-          <a:effectLst/>
-        </p:spPr>
-        <p:style>
-          <a:lnRef idx="1">
-            <a:schemeClr val="accent1"/>
-          </a:lnRef>
-          <a:fillRef idx="3">
-            <a:schemeClr val="accent1"/>
-          </a:fillRef>
-          <a:effectRef idx="2">
-            <a:schemeClr val="accent1"/>
-          </a:effectRef>
-          <a:fontRef idx="minor">
-            <a:schemeClr val="lt1"/>
-          </a:fontRef>
-        </p:style>
-        <p:txBody>
-          <a:bodyPr rtlCol="0" anchor="ctr"/>
-          <a:lstStyle/>
-          <a:p>
-            <a:pPr algn="ctr"/>
-          </a:p>
-        </p:txBody>
-      </p:sp>
-      <p:pic>
-        <p:nvPicPr>
-          <p:cNvPr id="28" name="Unreal Engine 5" descr="FaGamepad-FFFFFF.png"/>
-          <p:cNvPicPr>
-            <a:picLocks noChangeAspect="1"/>
-          </p:cNvPicPr>
-          <p:nvPr/>
-        </p:nvPicPr>
-        <p:blipFill>
-          <a:blip r:embed="rId2"/>
-          <a:stretch>
-            <a:fillRect/>
-          </a:stretch>
-        </p:blipFill>
-        <p:spPr>
-          <a:xfrm>
-            <a:off x="1042415" y="1956816"/>
-            <a:ext cx="475488" cy="475488"/>
-          </a:xfrm>
-          <a:prstGeom prst="rect">
-            <a:avLst/>
-          </a:prstGeom>
-        </p:spPr>
-      </p:pic>
-      <p:sp>
-        <p:nvSpPr>
-          <p:cNvPr id="29" name="Texto Unreal Engine 5"/>
-          <p:cNvSpPr txBox="1"/>
-          <p:nvPr/>
-        </p:nvSpPr>
-        <p:spPr>
-          <a:xfrm>
-            <a:off x="2011680" y="1463040"/>
-            <a:ext cx="5760720" cy="1463040"/>
-          </a:xfrm>
-          <a:prstGeom prst="rect">
-            <a:avLst/>
-          </a:prstGeom>
-          <a:noFill/>
-        </p:spPr>
-        <p:txBody>
-          <a:bodyPr wrap="square" anchor="ctr" lIns="0" rIns="0" tIns="0" bIns="0">
-            <a:spAutoFit/>
-          </a:bodyPr>
-          <a:lstStyle/>
-          <a:p>
-            <a:r>
-              <a:rPr sz="2000" b="1">
-                <a:solidFill>
-                  <a:schemeClr val="tx1"/>
-                </a:solidFill>
-              </a:rPr>
-              <a:t>Unreal Engine 5</a:t>
-            </a:r>
-          </a:p>
-          <a:p>
-            <a:pPr>
-              <a:spcBef>
-                <a:spcPts val="400"/>
-              </a:spcBef>
-            </a:pPr>
-            <a:r>
-              <a:rPr sz="1700" b="0">
-                <a:solidFill>
-                  <a:schemeClr val="tx1"/>
-                </a:solidFill>
-              </a:rPr>
-              <a:t>Cualquiera podía hacer un juego de aspecto profesional… y muchos juegos acabaron pareciéndose.</a:t>
-            </a:r>
-          </a:p>
-        </p:txBody>
-      </p:sp>
-      <p:pic>
-        <p:nvPicPr>
-          <p:cNvPr id="30" name="Resultado igual" descr="FaGamepad-8A94A6.png"/>
-          <p:cNvPicPr>
-            <a:picLocks noChangeAspect="1"/>
-          </p:cNvPicPr>
-          <p:nvPr/>
-        </p:nvPicPr>
-        <p:blipFill>
-          <a:blip r:embed="rId3"/>
-          <a:stretch>
-            <a:fillRect/>
-          </a:stretch>
-        </p:blipFill>
-        <p:spPr>
-          <a:xfrm>
-            <a:off x="8001000" y="1947672"/>
-            <a:ext cx="502920" cy="502920"/>
-          </a:xfrm>
-          <a:prstGeom prst="rect">
-            <a:avLst/>
-          </a:prstGeom>
-        </p:spPr>
-      </p:pic>
-      <p:pic>
-        <p:nvPicPr>
-          <p:cNvPr id="31" name="Resultado igual" descr="FaGamepad-8A94A6.png"/>
-          <p:cNvPicPr>
-            <a:picLocks noChangeAspect="1"/>
-          </p:cNvPicPr>
-          <p:nvPr/>
-        </p:nvPicPr>
-        <p:blipFill>
-          <a:blip r:embed="rId3"/>
-          <a:stretch>
-            <a:fillRect/>
-          </a:stretch>
-        </p:blipFill>
-        <p:spPr>
-          <a:xfrm>
-            <a:off x="8714232" y="1947672"/>
-            <a:ext cx="502920" cy="502920"/>
-          </a:xfrm>
-          <a:prstGeom prst="rect">
-            <a:avLst/>
-          </a:prstGeom>
-        </p:spPr>
-      </p:pic>
-      <p:pic>
-        <p:nvPicPr>
-          <p:cNvPr id="32" name="Resultado igual" descr="FaGamepad-8A94A6.png"/>
-          <p:cNvPicPr>
-            <a:picLocks noChangeAspect="1"/>
-          </p:cNvPicPr>
-          <p:nvPr/>
-        </p:nvPicPr>
-        <p:blipFill>
-          <a:blip r:embed="rId3"/>
-          <a:stretch>
-            <a:fillRect/>
-          </a:stretch>
-        </p:blipFill>
-        <p:spPr>
-          <a:xfrm>
-            <a:off x="9427464" y="1947672"/>
-            <a:ext cx="502920" cy="502920"/>
-          </a:xfrm>
-          <a:prstGeom prst="rect">
-            <a:avLst/>
-          </a:prstGeom>
-        </p:spPr>
-      </p:pic>
-      <p:pic>
-        <p:nvPicPr>
-          <p:cNvPr id="33" name="Resultado igual" descr="FaGamepad-8A94A6.png"/>
-          <p:cNvPicPr>
-            <a:picLocks noChangeAspect="1"/>
-          </p:cNvPicPr>
-          <p:nvPr/>
-        </p:nvPicPr>
-        <p:blipFill>
-          <a:blip r:embed="rId3"/>
-          <a:stretch>
-            <a:fillRect/>
-          </a:stretch>
-        </p:blipFill>
-        <p:spPr>
-          <a:xfrm>
-            <a:off x="10140696" y="1947672"/>
-            <a:ext cx="502920" cy="502920"/>
-          </a:xfrm>
-          <a:prstGeom prst="rect">
-            <a:avLst/>
-          </a:prstGeom>
-        </p:spPr>
-      </p:pic>
-      <p:pic>
-        <p:nvPicPr>
-          <p:cNvPr id="34" name="Resultado igual" descr="FaGamepad-8A94A6.png"/>
-          <p:cNvPicPr>
-            <a:picLocks noChangeAspect="1"/>
-          </p:cNvPicPr>
-          <p:nvPr/>
-        </p:nvPicPr>
-        <p:blipFill>
-          <a:blip r:embed="rId3"/>
-          <a:stretch>
-            <a:fillRect/>
-          </a:stretch>
-        </p:blipFill>
-        <p:spPr>
-          <a:xfrm>
-            <a:off x="10853928" y="1947672"/>
-            <a:ext cx="502920" cy="502920"/>
-          </a:xfrm>
-          <a:prstGeom prst="rect">
-            <a:avLst/>
-          </a:prstGeom>
-        </p:spPr>
-      </p:pic>
-      <p:sp>
-        <p:nvSpPr>
-          <p:cNvPr id="35" name="Tarjeta La IA"/>
-          <p:cNvSpPr/>
-          <p:nvPr/>
-        </p:nvSpPr>
-        <p:spPr>
-          <a:xfrm>
-            <a:off x="548640" y="3108960"/>
-            <a:ext cx="11094415" cy="1463040"/>
-          </a:xfrm>
-          <a:prstGeom prst="roundRect">
-            <a:avLst>
-              <a:gd name="adj" fmla="val 9374"/>
-            </a:avLst>
-          </a:prstGeom>
-          <a:solidFill>
-            <a:schemeClr val="bg2"/>
-          </a:solidFill>
-          <a:ln>
-            <a:noFill/>
-          </a:ln>
-          <a:effectLst/>
-        </p:spPr>
-        <p:style>
-          <a:lnRef idx="1">
-            <a:schemeClr val="accent1"/>
-          </a:lnRef>
-          <a:fillRef idx="3">
-            <a:schemeClr val="accent1"/>
-          </a:fillRef>
-          <a:effectRef idx="2">
-            <a:schemeClr val="accent1"/>
-          </a:effectRef>
-          <a:fontRef idx="minor">
-            <a:schemeClr val="lt1"/>
-          </a:fontRef>
-        </p:style>
-        <p:txBody>
-          <a:bodyPr rtlCol="0" anchor="ctr"/>
-          <a:lstStyle/>
-          <a:p>
-            <a:pPr algn="ctr"/>
-          </a:p>
-        </p:txBody>
-      </p:sp>
-      <p:sp>
-        <p:nvSpPr>
-          <p:cNvPr id="36" name="La IA"/>
-          <p:cNvSpPr/>
-          <p:nvPr/>
-        </p:nvSpPr>
-        <p:spPr>
-          <a:xfrm>
-            <a:off x="822959" y="3383279"/>
-            <a:ext cx="914400" cy="914400"/>
-          </a:xfrm>
-          <a:prstGeom prst="ellipse">
-            <a:avLst/>
-          </a:prstGeom>
-          <a:solidFill>
-            <a:schemeClr val="accent2"/>
-          </a:solidFill>
-          <a:ln>
-            <a:noFill/>
-          </a:ln>
-          <a:effectLst/>
-        </p:spPr>
-        <p:style>
-          <a:lnRef idx="1">
-            <a:schemeClr val="accent1"/>
-          </a:lnRef>
-          <a:fillRef idx="3">
-            <a:schemeClr val="accent1"/>
-          </a:fillRef>
-          <a:effectRef idx="2">
-            <a:schemeClr val="accent1"/>
-          </a:effectRef>
-          <a:fontRef idx="minor">
-            <a:schemeClr val="lt1"/>
-          </a:fontRef>
-        </p:style>
-        <p:txBody>
-          <a:bodyPr rtlCol="0" anchor="ctr"/>
-          <a:lstStyle/>
-          <a:p>
-            <a:pPr algn="ctr"/>
-          </a:p>
-        </p:txBody>
-      </p:sp>
-      <p:pic>
-        <p:nvPicPr>
-          <p:cNvPr id="37" name="La IA" descr="image.png"/>
-          <p:cNvPicPr>
-            <a:picLocks noChangeAspect="1"/>
-          </p:cNvPicPr>
-          <p:nvPr/>
-        </p:nvPicPr>
-        <p:blipFill>
-          <a:blip r:embed="rId4"/>
-          <a:stretch>
-            <a:fillRect/>
-          </a:stretch>
-        </p:blipFill>
-        <p:spPr>
-          <a:xfrm>
-            <a:off x="1042415" y="3602735"/>
-            <a:ext cx="475488" cy="475488"/>
-          </a:xfrm>
-          <a:prstGeom prst="rect">
-            <a:avLst/>
-          </a:prstGeom>
-        </p:spPr>
-      </p:pic>
-      <p:sp>
-        <p:nvSpPr>
-          <p:cNvPr id="38" name="Texto La IA"/>
-          <p:cNvSpPr txBox="1"/>
-          <p:nvPr/>
-        </p:nvSpPr>
-        <p:spPr>
-          <a:xfrm>
-            <a:off x="2011680" y="3108960"/>
-            <a:ext cx="5760720" cy="1463040"/>
-          </a:xfrm>
-          <a:prstGeom prst="rect">
-            <a:avLst/>
-          </a:prstGeom>
-          <a:noFill/>
-        </p:spPr>
-        <p:txBody>
-          <a:bodyPr wrap="square" anchor="ctr" lIns="0" rIns="0" tIns="0" bIns="0">
-            <a:spAutoFit/>
-          </a:bodyPr>
-          <a:lstStyle/>
-          <a:p>
-            <a:r>
-              <a:rPr sz="2000" b="1">
-                <a:solidFill>
-                  <a:schemeClr val="tx1"/>
-                </a:solidFill>
-              </a:rPr>
-              <a:t>La IA</a:t>
-            </a:r>
-          </a:p>
-          <a:p>
-            <a:pPr>
-              <a:spcBef>
-                <a:spcPts val="400"/>
-              </a:spcBef>
-            </a:pPr>
-            <a:r>
-              <a:rPr sz="1700" b="0">
-                <a:solidFill>
-                  <a:schemeClr val="tx1"/>
-                </a:solidFill>
-              </a:rPr>
-              <a:t>Si todos le pedimos lo mismo, todos recibimos lo mismo: cientos de cartas de presentación que suenan iguales.</a:t>
-            </a:r>
-          </a:p>
-        </p:txBody>
-      </p:sp>
-      <p:pic>
-        <p:nvPicPr>
-          <p:cNvPr id="39" name="Resultado igual" descr="FaFileAlt-8A94A6.png"/>
-          <p:cNvPicPr>
-            <a:picLocks noChangeAspect="1"/>
-          </p:cNvPicPr>
-          <p:nvPr/>
-        </p:nvPicPr>
-        <p:blipFill>
-          <a:blip r:embed="rId5"/>
-          <a:stretch>
-            <a:fillRect/>
-          </a:stretch>
-        </p:blipFill>
-        <p:spPr>
-          <a:xfrm>
-            <a:off x="8001000" y="3593591"/>
-            <a:ext cx="502920" cy="502920"/>
-          </a:xfrm>
-          <a:prstGeom prst="rect">
-            <a:avLst/>
-          </a:prstGeom>
-        </p:spPr>
-      </p:pic>
-      <p:pic>
-        <p:nvPicPr>
-          <p:cNvPr id="40" name="Resultado igual" descr="FaFileAlt-8A94A6.png"/>
-          <p:cNvPicPr>
-            <a:picLocks noChangeAspect="1"/>
-          </p:cNvPicPr>
-          <p:nvPr/>
-        </p:nvPicPr>
-        <p:blipFill>
-          <a:blip r:embed="rId5"/>
-          <a:stretch>
-            <a:fillRect/>
-          </a:stretch>
-        </p:blipFill>
-        <p:spPr>
-          <a:xfrm>
-            <a:off x="8714232" y="3593591"/>
-            <a:ext cx="502920" cy="502920"/>
-          </a:xfrm>
-          <a:prstGeom prst="rect">
-            <a:avLst/>
-          </a:prstGeom>
-        </p:spPr>
-      </p:pic>
-      <p:pic>
-        <p:nvPicPr>
-          <p:cNvPr id="41" name="Resultado igual" descr="FaFileAlt-8A94A6.png"/>
-          <p:cNvPicPr>
-            <a:picLocks noChangeAspect="1"/>
-          </p:cNvPicPr>
-          <p:nvPr/>
-        </p:nvPicPr>
-        <p:blipFill>
-          <a:blip r:embed="rId5"/>
-          <a:stretch>
-            <a:fillRect/>
-          </a:stretch>
-        </p:blipFill>
-        <p:spPr>
-          <a:xfrm>
-            <a:off x="9427464" y="3593591"/>
-            <a:ext cx="502920" cy="502920"/>
-          </a:xfrm>
-          <a:prstGeom prst="rect">
-            <a:avLst/>
-          </a:prstGeom>
-        </p:spPr>
-      </p:pic>
-      <p:pic>
-        <p:nvPicPr>
-          <p:cNvPr id="42" name="Resultado igual" descr="FaFileAlt-8A94A6.png"/>
-          <p:cNvPicPr>
-            <a:picLocks noChangeAspect="1"/>
-          </p:cNvPicPr>
-          <p:nvPr/>
-        </p:nvPicPr>
-        <p:blipFill>
-          <a:blip r:embed="rId5"/>
-          <a:stretch>
-            <a:fillRect/>
-          </a:stretch>
-        </p:blipFill>
-        <p:spPr>
-          <a:xfrm>
-            <a:off x="10140696" y="3593591"/>
-            <a:ext cx="502920" cy="502920"/>
-          </a:xfrm>
-          <a:prstGeom prst="rect">
-            <a:avLst/>
-          </a:prstGeom>
-        </p:spPr>
-      </p:pic>
-      <p:pic>
-        <p:nvPicPr>
-          <p:cNvPr id="43" name="Resultado igual" descr="FaFileAlt-8A94A6.png"/>
-          <p:cNvPicPr>
-            <a:picLocks noChangeAspect="1"/>
-          </p:cNvPicPr>
-          <p:nvPr/>
-        </p:nvPicPr>
-        <p:blipFill>
-          <a:blip r:embed="rId5"/>
-          <a:stretch>
-            <a:fillRect/>
-          </a:stretch>
-        </p:blipFill>
-        <p:spPr>
-          <a:xfrm>
-            <a:off x="10853928" y="3593591"/>
-            <a:ext cx="502920" cy="502920"/>
-          </a:xfrm>
-          <a:prstGeom prst="rect">
-            <a:avLst/>
-          </a:prstGeom>
-        </p:spPr>
-      </p:pic>
-      <p:sp>
-        <p:nvSpPr>
-          <p:cNvPr id="44" name="Personas"/>
-          <p:cNvSpPr/>
-          <p:nvPr/>
-        </p:nvSpPr>
-        <p:spPr>
-          <a:xfrm>
-            <a:off x="548640" y="4983480"/>
-            <a:ext cx="822960" cy="822960"/>
-          </a:xfrm>
-          <a:prstGeom prst="ellipse">
-            <a:avLst/>
-          </a:prstGeom>
-          <a:solidFill>
-            <a:schemeClr val="accent1"/>
-          </a:solidFill>
-          <a:ln>
-            <a:noFill/>
-          </a:ln>
-          <a:effectLst/>
-        </p:spPr>
-        <p:style>
-          <a:lnRef idx="1">
-            <a:schemeClr val="accent1"/>
-          </a:lnRef>
-          <a:fillRef idx="3">
-            <a:schemeClr val="accent1"/>
-          </a:fillRef>
-          <a:effectRef idx="2">
-            <a:schemeClr val="accent1"/>
-          </a:effectRef>
-          <a:fontRef idx="minor">
-            <a:schemeClr val="lt1"/>
-          </a:fontRef>
-        </p:style>
-        <p:txBody>
-          <a:bodyPr rtlCol="0" anchor="ctr"/>
-          <a:lstStyle/>
-          <a:p>
-            <a:pPr algn="ctr"/>
-          </a:p>
-        </p:txBody>
-      </p:sp>
-      <p:pic>
-        <p:nvPicPr>
-          <p:cNvPr id="45" name="Personas" descr="image.png"/>
-          <p:cNvPicPr>
-            <a:picLocks noChangeAspect="1"/>
-          </p:cNvPicPr>
-          <p:nvPr/>
-        </p:nvPicPr>
-        <p:blipFill>
-          <a:blip r:embed="rId6"/>
-          <a:stretch>
-            <a:fillRect/>
-          </a:stretch>
-        </p:blipFill>
-        <p:spPr>
-          <a:xfrm>
-            <a:off x="746150" y="5180990"/>
-            <a:ext cx="427939" cy="427939"/>
-          </a:xfrm>
-          <a:prstGeom prst="rect">
-            <a:avLst/>
-          </a:prstGeom>
-        </p:spPr>
-      </p:pic>
-      <p:sp>
-        <p:nvSpPr>
-          <p:cNvPr id="46" name="Conclusión"/>
-          <p:cNvSpPr txBox="1"/>
-          <p:nvPr/>
-        </p:nvSpPr>
-        <p:spPr>
-          <a:xfrm>
-            <a:off x="1600200" y="4846320"/>
-            <a:ext cx="10042855" cy="1097280"/>
-          </a:xfrm>
-          <a:prstGeom prst="rect">
-            <a:avLst/>
-          </a:prstGeom>
-          <a:noFill/>
-        </p:spPr>
-        <p:txBody>
-          <a:bodyPr wrap="square" anchor="ctr" lIns="0" rIns="0" tIns="0" bIns="0">
-            <a:spAutoFit/>
-          </a:bodyPr>
-          <a:lstStyle/>
-          <a:p>
-            <a:r>
-              <a:rPr sz="2000" b="1">
-                <a:solidFill>
-                  <a:schemeClr val="tx1"/>
-                </a:solidFill>
-              </a:rPr>
-              <a:t>La idea que nadie más tendría suele salir de las personas.</a:t>
-            </a:r>
-          </a:p>
-          <a:p>
-            <a:pPr>
-              <a:spcBef>
-                <a:spcPts val="400"/>
-              </a:spcBef>
-            </a:pPr>
-            <a:r>
-              <a:rPr sz="1800" b="0">
-                <a:solidFill>
-                  <a:schemeClr val="tx1"/>
-                </a:solidFill>
-              </a:rPr>
-              <a:t>Primero pensamos nosotros; después, la IA amplía lo nuestro.</a:t>
-            </a:r>
           </a:p>
         </p:txBody>
       </p:sp>

--- a/diapositivas/bloque1.pptx
+++ b/diapositivas/bloque1.pptx
@@ -16,11 +16,17 @@
     <p:sldId id="261" r:id="rId7"/>
     <p:sldId id="262" r:id="rId8"/>
     <p:sldId id="263" r:id="rId9"/>
+    <p:sldId id="285" r:id="rId36"/>
     <p:sldId id="264" r:id="rId10"/>
+    <p:sldId id="286" r:id="rId37"/>
     <p:sldId id="265" r:id="rId11"/>
+    <p:sldId id="287" r:id="rId38"/>
     <p:sldId id="266" r:id="rId12"/>
+    <p:sldId id="288" r:id="rId39"/>
     <p:sldId id="267" r:id="rId13"/>
+    <p:sldId id="289" r:id="rId40"/>
     <p:sldId id="268" r:id="rId14"/>
+    <p:sldId id="290" r:id="rId41"/>
     <p:sldId id="269" r:id="rId15"/>
     <p:sldId id="270" r:id="rId16"/>
     <p:sldId id="271" r:id="rId17"/>
@@ -153,11 +159,17 @@
             <p14:sldId id="261"/>
             <p14:sldId id="262"/>
             <p14:sldId id="263"/>
+            <p14:sldId id="285"/>
             <p14:sldId id="264"/>
+            <p14:sldId id="286"/>
             <p14:sldId id="265"/>
+            <p14:sldId id="287"/>
             <p14:sldId id="266"/>
+            <p14:sldId id="288"/>
             <p14:sldId id="267"/>
+            <p14:sldId id="289"/>
             <p14:sldId id="268"/>
+            <p14:sldId id="290"/>
             <p14:sldId id="269"/>
           </p14:sldIdLst>
         </p14:section>
@@ -2333,6 +2345,318 @@
         <p14:creationId xmlns:p14="http://schemas.microsoft.com/office/powerpoint/2010/main" val="1024086991"/>
       </p:ext>
     </p:extLst>
+  </p:cSld>
+  <p:clrMapOvr>
+    <a:masterClrMapping/>
+  </p:clrMapOvr>
+</p:notes>
+</file>
+
+<file path=ppt/notesSlides/notesSlide30.xml><?xml version="1.0" encoding="utf-8"?>
+<p:notes xmlns:a="http://schemas.openxmlformats.org/drawingml/2006/main" xmlns:p="http://schemas.openxmlformats.org/presentationml/2006/main" xmlns:r="http://schemas.openxmlformats.org/officeDocument/2006/relationships">
+  <p:cSld>
+    <p:spTree>
+      <p:nvGrpSpPr>
+        <p:cNvPr id="1" name=""/>
+        <p:cNvGrpSpPr/>
+        <p:nvPr/>
+      </p:nvGrpSpPr>
+      <p:grpSpPr>
+        <a:xfrm>
+          <a:off x="0" y="0"/>
+          <a:ext cx="0" cy="0"/>
+          <a:chOff x="0" y="0"/>
+          <a:chExt cx="0" cy="0"/>
+        </a:xfrm>
+      </p:grpSpPr>
+      <p:sp>
+        <p:nvSpPr>
+          <p:cNvPr id="3" name="Notes Placeholder 2"/>
+          <p:cNvSpPr>
+            <a:spLocks noGrp="1"/>
+          </p:cNvSpPr>
+          <p:nvPr>
+            <p:ph type="body" idx="1"/>
+          </p:nvPr>
+        </p:nvSpPr>
+        <p:spPr/>
+        <p:txBody>
+          <a:bodyPr/>
+          <a:lstStyle/>
+          <a:p>
+            <a:r>
+              <a:t>Respuesta a la situación 1: creatividad. Es una idea nueva y útil, pero todavía no se ha puesto en práctica.</a:t>
+            </a:r>
+          </a:p>
+          <a:p/>
+          <a:p>
+            <a:r>
+              <a:t>Criterio para resolver las dudas: ¿es solo una idea o ya se ha puesto en práctica? ¿Aporta valor?</a:t>
+            </a:r>
+          </a:p>
+        </p:txBody>
+      </p:sp>
+    </p:spTree>
+  </p:cSld>
+  <p:clrMapOvr>
+    <a:masterClrMapping/>
+  </p:clrMapOvr>
+</p:notes>
+</file>
+
+<file path=ppt/notesSlides/notesSlide31.xml><?xml version="1.0" encoding="utf-8"?>
+<p:notes xmlns:a="http://schemas.openxmlformats.org/drawingml/2006/main" xmlns:p="http://schemas.openxmlformats.org/presentationml/2006/main" xmlns:r="http://schemas.openxmlformats.org/officeDocument/2006/relationships">
+  <p:cSld>
+    <p:spTree>
+      <p:nvGrpSpPr>
+        <p:cNvPr id="1" name=""/>
+        <p:cNvGrpSpPr/>
+        <p:nvPr/>
+      </p:nvGrpSpPr>
+      <p:grpSpPr>
+        <a:xfrm>
+          <a:off x="0" y="0"/>
+          <a:ext cx="0" cy="0"/>
+          <a:chOff x="0" y="0"/>
+          <a:chExt cx="0" cy="0"/>
+        </a:xfrm>
+      </p:grpSpPr>
+      <p:sp>
+        <p:nvSpPr>
+          <p:cNvPr id="3" name="Notes Placeholder 2"/>
+          <p:cNvSpPr>
+            <a:spLocks noGrp="1"/>
+          </p:cNvSpPr>
+          <p:nvPr>
+            <p:ph type="body" idx="1"/>
+          </p:nvPr>
+        </p:nvSpPr>
+        <p:spPr/>
+        <p:txBody>
+          <a:bodyPr/>
+          <a:lstStyle/>
+          <a:p>
+            <a:r>
+              <a:t>Respuesta a la situación 2: innovación. La idea se ha puesto en práctica y aporta valor: las esperas se reducen.</a:t>
+            </a:r>
+          </a:p>
+          <a:p/>
+          <a:p>
+            <a:r>
+              <a:t>Criterio para resolver las dudas: ¿es solo una idea o ya se ha puesto en práctica? ¿Aporta valor?</a:t>
+            </a:r>
+          </a:p>
+        </p:txBody>
+      </p:sp>
+    </p:spTree>
+  </p:cSld>
+  <p:clrMapOvr>
+    <a:masterClrMapping/>
+  </p:clrMapOvr>
+</p:notes>
+</file>
+
+<file path=ppt/notesSlides/notesSlide32.xml><?xml version="1.0" encoding="utf-8"?>
+<p:notes xmlns:a="http://schemas.openxmlformats.org/drawingml/2006/main" xmlns:p="http://schemas.openxmlformats.org/presentationml/2006/main" xmlns:r="http://schemas.openxmlformats.org/officeDocument/2006/relationships">
+  <p:cSld>
+    <p:spTree>
+      <p:nvGrpSpPr>
+        <p:cNvPr id="1" name=""/>
+        <p:cNvGrpSpPr/>
+        <p:nvPr/>
+      </p:nvGrpSpPr>
+      <p:grpSpPr>
+        <a:xfrm>
+          <a:off x="0" y="0"/>
+          <a:ext cx="0" cy="0"/>
+          <a:chOff x="0" y="0"/>
+          <a:chExt cx="0" cy="0"/>
+        </a:xfrm>
+      </p:grpSpPr>
+      <p:sp>
+        <p:nvSpPr>
+          <p:cNvPr id="3" name="Notes Placeholder 2"/>
+          <p:cNvSpPr>
+            <a:spLocks noGrp="1"/>
+          </p:cNvSpPr>
+          <p:nvPr>
+            <p:ph type="body" idx="1"/>
+          </p:nvPr>
+        </p:nvSpPr>
+        <p:spPr/>
+        <p:txBody>
+          <a:bodyPr/>
+          <a:lstStyle/>
+          <a:p>
+            <a:r>
+              <a:t>Respuesta a la situación 3: competencia digital. Usa una herramienta digital para hacer bien su tarea, pero no cambia cómo se trabaja.</a:t>
+            </a:r>
+          </a:p>
+          <a:p/>
+          <a:p>
+            <a:r>
+              <a:t>Criterio para resolver las dudas: ¿es solo una idea o ya se ha puesto en práctica? ¿Aporta valor?</a:t>
+            </a:r>
+          </a:p>
+        </p:txBody>
+      </p:sp>
+    </p:spTree>
+  </p:cSld>
+  <p:clrMapOvr>
+    <a:masterClrMapping/>
+  </p:clrMapOvr>
+</p:notes>
+</file>
+
+<file path=ppt/notesSlides/notesSlide33.xml><?xml version="1.0" encoding="utf-8"?>
+<p:notes xmlns:a="http://schemas.openxmlformats.org/drawingml/2006/main" xmlns:p="http://schemas.openxmlformats.org/presentationml/2006/main" xmlns:r="http://schemas.openxmlformats.org/officeDocument/2006/relationships">
+  <p:cSld>
+    <p:spTree>
+      <p:nvGrpSpPr>
+        <p:cNvPr id="1" name=""/>
+        <p:cNvGrpSpPr/>
+        <p:nvPr/>
+      </p:nvGrpSpPr>
+      <p:grpSpPr>
+        <a:xfrm>
+          <a:off x="0" y="0"/>
+          <a:ext cx="0" cy="0"/>
+          <a:chOff x="0" y="0"/>
+          <a:chExt cx="0" cy="0"/>
+        </a:xfrm>
+      </p:grpSpPr>
+      <p:sp>
+        <p:nvSpPr>
+          <p:cNvPr id="3" name="Notes Placeholder 2"/>
+          <p:cNvSpPr>
+            <a:spLocks noGrp="1"/>
+          </p:cNvSpPr>
+          <p:nvPr>
+            <p:ph type="body" idx="1"/>
+          </p:nvPr>
+        </p:nvSpPr>
+        <p:spPr/>
+        <p:txBody>
+          <a:bodyPr/>
+          <a:lstStyle/>
+          <a:p>
+            <a:r>
+              <a:t>Respuesta a la situación 4: innovación. Es un cambio ya puesto en práctica que aporta valor: el cliente está informado y el taller recibe menos llamadas.</a:t>
+            </a:r>
+          </a:p>
+          <a:p/>
+          <a:p>
+            <a:r>
+              <a:t>Criterio para resolver las dudas: ¿es solo una idea o ya se ha puesto en práctica? ¿Aporta valor?</a:t>
+            </a:r>
+          </a:p>
+        </p:txBody>
+      </p:sp>
+    </p:spTree>
+  </p:cSld>
+  <p:clrMapOvr>
+    <a:masterClrMapping/>
+  </p:clrMapOvr>
+</p:notes>
+</file>
+
+<file path=ppt/notesSlides/notesSlide34.xml><?xml version="1.0" encoding="utf-8"?>
+<p:notes xmlns:a="http://schemas.openxmlformats.org/drawingml/2006/main" xmlns:p="http://schemas.openxmlformats.org/presentationml/2006/main" xmlns:r="http://schemas.openxmlformats.org/officeDocument/2006/relationships">
+  <p:cSld>
+    <p:spTree>
+      <p:nvGrpSpPr>
+        <p:cNvPr id="1" name=""/>
+        <p:cNvGrpSpPr/>
+        <p:nvPr/>
+      </p:nvGrpSpPr>
+      <p:grpSpPr>
+        <a:xfrm>
+          <a:off x="0" y="0"/>
+          <a:ext cx="0" cy="0"/>
+          <a:chOff x="0" y="0"/>
+          <a:chExt cx="0" cy="0"/>
+        </a:xfrm>
+      </p:grpSpPr>
+      <p:sp>
+        <p:nvSpPr>
+          <p:cNvPr id="3" name="Notes Placeholder 2"/>
+          <p:cNvSpPr>
+            <a:spLocks noGrp="1"/>
+          </p:cNvSpPr>
+          <p:nvPr>
+            <p:ph type="body" idx="1"/>
+          </p:nvPr>
+        </p:nvSpPr>
+        <p:spPr/>
+        <p:txBody>
+          <a:bodyPr/>
+          <a:lstStyle/>
+          <a:p>
+            <a:r>
+              <a:t>Respuesta a la situación 5: creatividad. Por ahora es solo una idea. Si se pone en práctica y funciona, pasa a ser innovación. Es discutible a propósito: si hay votos repartidos, que cada opción explique su razonamiento.</a:t>
+            </a:r>
+          </a:p>
+          <a:p/>
+          <a:p>
+            <a:r>
+              <a:t>Criterio para resolver las dudas: ¿es solo una idea o ya se ha puesto en práctica? ¿Aporta valor?</a:t>
+            </a:r>
+          </a:p>
+        </p:txBody>
+      </p:sp>
+    </p:spTree>
+  </p:cSld>
+  <p:clrMapOvr>
+    <a:masterClrMapping/>
+  </p:clrMapOvr>
+</p:notes>
+</file>
+
+<file path=ppt/notesSlides/notesSlide35.xml><?xml version="1.0" encoding="utf-8"?>
+<p:notes xmlns:a="http://schemas.openxmlformats.org/drawingml/2006/main" xmlns:p="http://schemas.openxmlformats.org/presentationml/2006/main" xmlns:r="http://schemas.openxmlformats.org/officeDocument/2006/relationships">
+  <p:cSld>
+    <p:spTree>
+      <p:nvGrpSpPr>
+        <p:cNvPr id="1" name=""/>
+        <p:cNvGrpSpPr/>
+        <p:nvPr/>
+      </p:nvGrpSpPr>
+      <p:grpSpPr>
+        <a:xfrm>
+          <a:off x="0" y="0"/>
+          <a:ext cx="0" cy="0"/>
+          <a:chOff x="0" y="0"/>
+          <a:chExt cx="0" cy="0"/>
+        </a:xfrm>
+      </p:grpSpPr>
+      <p:sp>
+        <p:nvSpPr>
+          <p:cNvPr id="3" name="Notes Placeholder 2"/>
+          <p:cNvSpPr>
+            <a:spLocks noGrp="1"/>
+          </p:cNvSpPr>
+          <p:nvPr>
+            <p:ph type="body" idx="1"/>
+          </p:nvPr>
+        </p:nvSpPr>
+        <p:spPr/>
+        <p:txBody>
+          <a:bodyPr/>
+          <a:lstStyle/>
+          <a:p>
+            <a:r>
+              <a:t>Respuesta a la situación 6: competencia digital. Usa la IA para una tarea concreta, sin cambiar cómo se atiende. Sería innovación si cambiara la forma de atender a los clientes extranjeros. Es discutible a propósito: si hay votos repartidos, que cada opción explique su razonamiento.</a:t>
+            </a:r>
+          </a:p>
+          <a:p/>
+          <a:p>
+            <a:r>
+              <a:t>Criterio para resolver las dudas: ¿es solo una idea o ya se ha puesto en práctica? ¿Aporta valor?</a:t>
+            </a:r>
+          </a:p>
+        </p:txBody>
+      </p:sp>
+    </p:spTree>
   </p:cSld>
   <p:clrMapOvr>
     <a:masterClrMapping/>
@@ -17898,6 +18222,2742 @@
               <a:t>3</a:t>
             </a:fld>
             <a:endParaRPr lang="en-US"/>
+          </a:p>
+        </p:txBody>
+      </p:sp>
+    </p:spTree>
+  </p:cSld>
+  <p:clrMapOvr>
+    <a:masterClrMapping/>
+  </p:clrMapOvr>
+</p:sld>
+</file>
+
+<file path=ppt/slides/slide30.xml><?xml version="1.0" encoding="utf-8"?>
+<p:sld xmlns:a="http://schemas.openxmlformats.org/drawingml/2006/main" xmlns:p="http://schemas.openxmlformats.org/presentationml/2006/main" xmlns:r="http://schemas.openxmlformats.org/officeDocument/2006/relationships">
+  <p:cSld>
+    <p:spTree>
+      <p:nvGrpSpPr>
+        <p:cNvPr id="1" name=""/>
+        <p:cNvGrpSpPr/>
+        <p:nvPr/>
+      </p:nvGrpSpPr>
+      <p:grpSpPr/>
+      <p:sp>
+        <p:nvSpPr>
+          <p:cNvPr id="2" name="Text 0"/>
+          <p:cNvSpPr>
+            <a:spLocks noGrp="1"/>
+          </p:cNvSpPr>
+          <p:nvPr>
+            <p:ph type="title" idx="100" hasCustomPrompt="1"/>
+          </p:nvPr>
+        </p:nvSpPr>
+        <p:spPr>
+          <a:xfrm>
+            <a:off x="548640" y="411480"/>
+            <a:ext cx="11094415" cy="777240"/>
+          </a:xfrm>
+          <a:prstGeom prst="rect">
+            <a:avLst/>
+          </a:prstGeom>
+          <a:noFill/>
+          <a:ln/>
+        </p:spPr>
+        <p:txBody>
+          <a:bodyPr wrap="square" lIns="0" tIns="0" rIns="0" bIns="0" rtlCol="0" anchor="ctr"/>
+          <a:lstStyle/>
+          <a:p>
+            <a:pPr marL="0" indent="0" algn="l">
+              <a:buNone/>
+            </a:pPr>
+            <a:r>
+              <a:rPr lang="en-US" sz="3200" b="1" dirty="0">
+                <a:solidFill>
+                  <a:schemeClr val="tx1"/>
+                </a:solidFill>
+              </a:rPr>
+              <a:t>Situación 1: respuesta</a:t>
+            </a:r>
+            <a:endParaRPr lang="en-US" sz="3200" dirty="0"/>
+          </a:p>
+        </p:txBody>
+      </p:sp>
+      <p:sp>
+        <p:nvSpPr>
+          <p:cNvPr id="3" name="Etiqueta de tiempo"/>
+          <p:cNvSpPr/>
+          <p:nvPr/>
+        </p:nvSpPr>
+        <p:spPr>
+          <a:xfrm>
+            <a:off x="8556955" y="548640"/>
+            <a:ext cx="3086100" cy="457200"/>
+          </a:xfrm>
+          <a:prstGeom prst="roundRect">
+            <a:avLst>
+              <a:gd name="adj" fmla="val 50000"/>
+            </a:avLst>
+          </a:prstGeom>
+          <a:solidFill>
+            <a:schemeClr val="accent1"/>
+          </a:solidFill>
+          <a:ln/>
+        </p:spPr>
+      </p:sp>
+      <p:sp>
+        <p:nvSpPr>
+          <p:cNvPr id="4" name="Text 2"/>
+          <p:cNvSpPr txBox="1"/>
+          <p:nvPr/>
+        </p:nvSpPr>
+        <p:spPr>
+          <a:xfrm>
+            <a:off x="8556955" y="548640"/>
+            <a:ext cx="3086100" cy="457200"/>
+          </a:xfrm>
+          <a:prstGeom prst="rect">
+            <a:avLst/>
+          </a:prstGeom>
+          <a:noFill/>
+          <a:ln/>
+        </p:spPr>
+        <p:txBody>
+          <a:bodyPr wrap="square" lIns="0" tIns="0" rIns="0" bIns="0" rtlCol="0" anchor="ctr"/>
+          <a:lstStyle/>
+          <a:p>
+            <a:pPr marL="0" indent="0" algn="ctr">
+              <a:buNone/>
+            </a:pPr>
+            <a:r>
+              <a:rPr lang="en-US" sz="1400" b="1" dirty="0">
+                <a:solidFill>
+                  <a:schemeClr val="tx1"/>
+                </a:solidFill>
+              </a:rPr>
+              <a:t>Min. 5–10 · Todo el grupo</a:t>
+            </a:r>
+            <a:endParaRPr lang="en-US" sz="1400" dirty="0"/>
+          </a:p>
+        </p:txBody>
+      </p:sp>
+      <p:sp>
+        <p:nvSpPr>
+          <p:cNvPr id="25" name="Slide Number Placeholder 0"/>
+          <p:cNvSpPr>
+            <a:spLocks noGrp="1"/>
+          </p:cNvSpPr>
+          <p:nvPr>
+            <p:ph type="sldNum" sz="quarter" idx="4294967295"/>
+          </p:nvPr>
+        </p:nvSpPr>
+        <p:spPr>
+          <a:xfrm>
+            <a:off x="11091672" y="6355080"/>
+            <a:ext cx="548640" cy="320040"/>
+          </a:xfrm>
+          <a:prstGeom prst="rect">
+            <a:avLst/>
+          </a:prstGeom>
+          <a:extLst>
+            <a:ext uri="{C572A759-6A51-4108-AA02-DFA0A04FC94B}">
+              <ma14:wrappingTextBoxFlag xmlns:ma14="http://schemas.microsoft.com/office/mac/drawingml/2011/main" xmlns="" val="0"/>
+            </a:ext>
+          </a:extLst>
+        </p:spPr>
+        <p:txBody>
+          <a:bodyPr/>
+          <a:lstStyle>
+            <a:lvl1pPr>
+              <a:defRPr sz="1100">
+                <a:solidFill>
+                  <a:srgbClr val="8A94A6"/>
+                </a:solidFill>
+              </a:defRPr>
+            </a:lvl1pPr>
+          </a:lstStyle>
+          <a:p>
+            <a:pPr algn="r"/>
+            <a:fld id="{F7021451-1387-4CA6-816F-3879F97B5CBC}" type="slidenum">
+              <a:rPr lang="en-US" b="0"/>
+              <a:t>8</a:t>
+            </a:fld>
+            <a:endParaRPr lang="en-US"/>
+          </a:p>
+        </p:txBody>
+      </p:sp>
+      <p:sp>
+        <p:nvSpPr>
+          <p:cNvPr id="26" name="Situación"/>
+          <p:cNvSpPr txBox="1"/>
+          <p:nvPr/>
+        </p:nvSpPr>
+        <p:spPr>
+          <a:xfrm>
+            <a:off x="548640" y="1325880"/>
+            <a:ext cx="11094415" cy="685800"/>
+          </a:xfrm>
+          <a:prstGeom prst="rect">
+            <a:avLst/>
+          </a:prstGeom>
+          <a:noFill/>
+        </p:spPr>
+        <p:txBody>
+          <a:bodyPr wrap="square" anchor="ctr" lIns="0" rIns="0" tIns="0" bIns="0">
+            <a:spAutoFit/>
+          </a:bodyPr>
+          <a:lstStyle/>
+          <a:p>
+            <a:r>
+              <a:rPr sz="1800" b="0" i="1">
+                <a:solidFill>
+                  <a:schemeClr val="tx2"/>
+                </a:solidFill>
+              </a:rPr>
+              <a:t>«Una dependienta propone en una reunión que los clientes puedan reservar por WhatsApp.»</a:t>
+            </a:r>
+          </a:p>
+        </p:txBody>
+      </p:sp>
+      <p:sp>
+        <p:nvSpPr>
+          <p:cNvPr id="27" name="Respuesta"/>
+          <p:cNvSpPr/>
+          <p:nvPr/>
+        </p:nvSpPr>
+        <p:spPr>
+          <a:xfrm>
+            <a:off x="548640" y="2194560"/>
+            <a:ext cx="11094415" cy="1463040"/>
+          </a:xfrm>
+          <a:prstGeom prst="roundRect">
+            <a:avLst>
+              <a:gd name="adj" fmla="val 9374"/>
+            </a:avLst>
+          </a:prstGeom>
+          <a:solidFill>
+            <a:schemeClr val="accent1"/>
+          </a:solidFill>
+          <a:ln>
+            <a:noFill/>
+          </a:ln>
+          <a:effectLst/>
+        </p:spPr>
+        <p:style>
+          <a:lnRef idx="1">
+            <a:schemeClr val="accent1"/>
+          </a:lnRef>
+          <a:fillRef idx="3">
+            <a:schemeClr val="accent1"/>
+          </a:fillRef>
+          <a:effectRef idx="2">
+            <a:schemeClr val="accent1"/>
+          </a:effectRef>
+          <a:fontRef idx="minor">
+            <a:schemeClr val="lt1"/>
+          </a:fontRef>
+        </p:style>
+        <p:txBody>
+          <a:bodyPr rtlCol="0" anchor="ctr"/>
+          <a:lstStyle/>
+          <a:p>
+            <a:pPr algn="ctr"/>
+          </a:p>
+        </p:txBody>
+      </p:sp>
+      <p:sp>
+        <p:nvSpPr>
+          <p:cNvPr id="28" name="Número"/>
+          <p:cNvSpPr/>
+          <p:nvPr/>
+        </p:nvSpPr>
+        <p:spPr>
+          <a:xfrm>
+            <a:off x="868680" y="2377440"/>
+            <a:ext cx="1097280" cy="1097280"/>
+          </a:xfrm>
+          <a:prstGeom prst="ellipse">
+            <a:avLst/>
+          </a:prstGeom>
+          <a:solidFill>
+            <a:schemeClr val="bg1"/>
+          </a:solidFill>
+          <a:ln>
+            <a:noFill/>
+          </a:ln>
+          <a:effectLst/>
+        </p:spPr>
+        <p:style>
+          <a:lnRef idx="1">
+            <a:schemeClr val="accent1"/>
+          </a:lnRef>
+          <a:fillRef idx="3">
+            <a:schemeClr val="accent1"/>
+          </a:fillRef>
+          <a:effectRef idx="2">
+            <a:schemeClr val="accent1"/>
+          </a:effectRef>
+          <a:fontRef idx="minor">
+            <a:schemeClr val="lt1"/>
+          </a:fontRef>
+        </p:style>
+        <p:txBody>
+          <a:bodyPr rtlCol="0" anchor="ctr"/>
+          <a:lstStyle/>
+          <a:p>
+            <a:pPr algn="ctr"/>
+          </a:p>
+        </p:txBody>
+      </p:sp>
+      <p:sp>
+        <p:nvSpPr>
+          <p:cNvPr id="29" name="Número de la opción"/>
+          <p:cNvSpPr txBox="1"/>
+          <p:nvPr/>
+        </p:nvSpPr>
+        <p:spPr>
+          <a:xfrm>
+            <a:off x="868680" y="2377440"/>
+            <a:ext cx="1097280" cy="1097280"/>
+          </a:xfrm>
+          <a:prstGeom prst="rect">
+            <a:avLst/>
+          </a:prstGeom>
+          <a:noFill/>
+        </p:spPr>
+        <p:txBody>
+          <a:bodyPr wrap="square" anchor="ctr" lIns="0" rIns="0" tIns="0" bIns="0">
+            <a:spAutoFit/>
+          </a:bodyPr>
+          <a:lstStyle/>
+          <a:p>
+            <a:pPr algn="ctr"/>
+            <a:r>
+              <a:rPr sz="4800" b="1" i="0">
+                <a:solidFill>
+                  <a:schemeClr val="accent1"/>
+                </a:solidFill>
+              </a:rPr>
+              <a:t>1</a:t>
+            </a:r>
+          </a:p>
+        </p:txBody>
+      </p:sp>
+      <p:sp>
+        <p:nvSpPr>
+          <p:cNvPr id="30" name="Nombre de la respuesta"/>
+          <p:cNvSpPr txBox="1"/>
+          <p:nvPr/>
+        </p:nvSpPr>
+        <p:spPr>
+          <a:xfrm>
+            <a:off x="2286000" y="2194560"/>
+            <a:ext cx="9082735" cy="1463040"/>
+          </a:xfrm>
+          <a:prstGeom prst="rect">
+            <a:avLst/>
+          </a:prstGeom>
+          <a:noFill/>
+        </p:spPr>
+        <p:txBody>
+          <a:bodyPr wrap="square" anchor="ctr" lIns="0" rIns="0" tIns="0" bIns="0">
+            <a:spAutoFit/>
+          </a:bodyPr>
+          <a:lstStyle/>
+          <a:p>
+            <a:r>
+              <a:rPr sz="4000" b="1" i="0">
+                <a:solidFill>
+                  <a:schemeClr val="tx1"/>
+                </a:solidFill>
+              </a:rPr>
+              <a:t>Creatividad</a:t>
+            </a:r>
+          </a:p>
+        </p:txBody>
+      </p:sp>
+      <p:sp>
+        <p:nvSpPr>
+          <p:cNvPr id="31" name="Por qué"/>
+          <p:cNvSpPr/>
+          <p:nvPr/>
+        </p:nvSpPr>
+        <p:spPr>
+          <a:xfrm>
+            <a:off x="548640" y="3931920"/>
+            <a:ext cx="11094415" cy="1600200"/>
+          </a:xfrm>
+          <a:prstGeom prst="roundRect">
+            <a:avLst>
+              <a:gd name="adj" fmla="val 8571"/>
+            </a:avLst>
+          </a:prstGeom>
+          <a:solidFill>
+            <a:schemeClr val="bg2"/>
+          </a:solidFill>
+          <a:ln>
+            <a:noFill/>
+          </a:ln>
+          <a:effectLst/>
+        </p:spPr>
+        <p:style>
+          <a:lnRef idx="1">
+            <a:schemeClr val="accent1"/>
+          </a:lnRef>
+          <a:fillRef idx="3">
+            <a:schemeClr val="accent1"/>
+          </a:fillRef>
+          <a:effectRef idx="2">
+            <a:schemeClr val="accent1"/>
+          </a:effectRef>
+          <a:fontRef idx="minor">
+            <a:schemeClr val="lt1"/>
+          </a:fontRef>
+        </p:style>
+        <p:txBody>
+          <a:bodyPr rtlCol="0" anchor="ctr"/>
+          <a:lstStyle/>
+          <a:p>
+            <a:pPr algn="ctr"/>
+          </a:p>
+        </p:txBody>
+      </p:sp>
+      <p:sp>
+        <p:nvSpPr>
+          <p:cNvPr id="32" name="Explicación"/>
+          <p:cNvSpPr txBox="1"/>
+          <p:nvPr/>
+        </p:nvSpPr>
+        <p:spPr>
+          <a:xfrm>
+            <a:off x="914400" y="3931920"/>
+            <a:ext cx="10362895" cy="1600200"/>
+          </a:xfrm>
+          <a:prstGeom prst="rect">
+            <a:avLst/>
+          </a:prstGeom>
+          <a:noFill/>
+        </p:spPr>
+        <p:txBody>
+          <a:bodyPr wrap="square" anchor="ctr" lIns="0" rIns="0" tIns="0" bIns="0">
+            <a:spAutoFit/>
+          </a:bodyPr>
+          <a:lstStyle/>
+          <a:p>
+            <a:r>
+              <a:rPr sz="1600" b="1" i="0">
+                <a:solidFill>
+                  <a:schemeClr val="tx2"/>
+                </a:solidFill>
+              </a:rPr>
+              <a:t>Por qué</a:t>
+            </a:r>
+          </a:p>
+          <a:p>
+            <a:pPr>
+              <a:spcBef>
+                <a:spcPts val="600"/>
+              </a:spcBef>
+            </a:pPr>
+            <a:r>
+              <a:rPr sz="2200" b="0" i="0">
+                <a:solidFill>
+                  <a:schemeClr val="tx1"/>
+                </a:solidFill>
+              </a:rPr>
+              <a:t>Es una idea nueva y útil, pero todavía no se ha puesto en práctica.</a:t>
+            </a:r>
+          </a:p>
+        </p:txBody>
+      </p:sp>
+    </p:spTree>
+  </p:cSld>
+  <p:clrMapOvr>
+    <a:masterClrMapping/>
+  </p:clrMapOvr>
+</p:sld>
+</file>
+
+<file path=ppt/slides/slide31.xml><?xml version="1.0" encoding="utf-8"?>
+<p:sld xmlns:a="http://schemas.openxmlformats.org/drawingml/2006/main" xmlns:p="http://schemas.openxmlformats.org/presentationml/2006/main" xmlns:r="http://schemas.openxmlformats.org/officeDocument/2006/relationships">
+  <p:cSld>
+    <p:spTree>
+      <p:nvGrpSpPr>
+        <p:cNvPr id="1" name=""/>
+        <p:cNvGrpSpPr/>
+        <p:nvPr/>
+      </p:nvGrpSpPr>
+      <p:grpSpPr/>
+      <p:sp>
+        <p:nvSpPr>
+          <p:cNvPr id="2" name="Text 0"/>
+          <p:cNvSpPr>
+            <a:spLocks noGrp="1"/>
+          </p:cNvSpPr>
+          <p:nvPr>
+            <p:ph type="title" idx="100" hasCustomPrompt="1"/>
+          </p:nvPr>
+        </p:nvSpPr>
+        <p:spPr>
+          <a:xfrm>
+            <a:off x="548640" y="411480"/>
+            <a:ext cx="11094415" cy="777240"/>
+          </a:xfrm>
+          <a:prstGeom prst="rect">
+            <a:avLst/>
+          </a:prstGeom>
+          <a:noFill/>
+          <a:ln/>
+        </p:spPr>
+        <p:txBody>
+          <a:bodyPr wrap="square" lIns="0" tIns="0" rIns="0" bIns="0" rtlCol="0" anchor="ctr"/>
+          <a:lstStyle/>
+          <a:p>
+            <a:pPr marL="0" indent="0" algn="l">
+              <a:buNone/>
+            </a:pPr>
+            <a:r>
+              <a:rPr lang="en-US" sz="3200" b="1" dirty="0">
+                <a:solidFill>
+                  <a:schemeClr val="tx1"/>
+                </a:solidFill>
+              </a:rPr>
+              <a:t>Situación 2: respuesta</a:t>
+            </a:r>
+            <a:endParaRPr lang="en-US" sz="3200" dirty="0"/>
+          </a:p>
+        </p:txBody>
+      </p:sp>
+      <p:sp>
+        <p:nvSpPr>
+          <p:cNvPr id="3" name="Etiqueta de tiempo"/>
+          <p:cNvSpPr/>
+          <p:nvPr/>
+        </p:nvSpPr>
+        <p:spPr>
+          <a:xfrm>
+            <a:off x="8556955" y="548640"/>
+            <a:ext cx="3086100" cy="457200"/>
+          </a:xfrm>
+          <a:prstGeom prst="roundRect">
+            <a:avLst>
+              <a:gd name="adj" fmla="val 50000"/>
+            </a:avLst>
+          </a:prstGeom>
+          <a:solidFill>
+            <a:schemeClr val="accent1"/>
+          </a:solidFill>
+          <a:ln/>
+        </p:spPr>
+      </p:sp>
+      <p:sp>
+        <p:nvSpPr>
+          <p:cNvPr id="4" name="Text 2"/>
+          <p:cNvSpPr txBox="1"/>
+          <p:nvPr/>
+        </p:nvSpPr>
+        <p:spPr>
+          <a:xfrm>
+            <a:off x="8556955" y="548640"/>
+            <a:ext cx="3086100" cy="457200"/>
+          </a:xfrm>
+          <a:prstGeom prst="rect">
+            <a:avLst/>
+          </a:prstGeom>
+          <a:noFill/>
+          <a:ln/>
+        </p:spPr>
+        <p:txBody>
+          <a:bodyPr wrap="square" lIns="0" tIns="0" rIns="0" bIns="0" rtlCol="0" anchor="ctr"/>
+          <a:lstStyle/>
+          <a:p>
+            <a:pPr marL="0" indent="0" algn="ctr">
+              <a:buNone/>
+            </a:pPr>
+            <a:r>
+              <a:rPr lang="en-US" sz="1400" b="1" dirty="0">
+                <a:solidFill>
+                  <a:schemeClr val="tx1"/>
+                </a:solidFill>
+              </a:rPr>
+              <a:t>Min. 5–10 · Todo el grupo</a:t>
+            </a:r>
+            <a:endParaRPr lang="en-US" sz="1400" dirty="0"/>
+          </a:p>
+        </p:txBody>
+      </p:sp>
+      <p:sp>
+        <p:nvSpPr>
+          <p:cNvPr id="25" name="Slide Number Placeholder 0"/>
+          <p:cNvSpPr>
+            <a:spLocks noGrp="1"/>
+          </p:cNvSpPr>
+          <p:nvPr>
+            <p:ph type="sldNum" sz="quarter" idx="4294967295"/>
+          </p:nvPr>
+        </p:nvSpPr>
+        <p:spPr>
+          <a:xfrm>
+            <a:off x="11091672" y="6355080"/>
+            <a:ext cx="548640" cy="320040"/>
+          </a:xfrm>
+          <a:prstGeom prst="rect">
+            <a:avLst/>
+          </a:prstGeom>
+          <a:extLst>
+            <a:ext uri="{C572A759-6A51-4108-AA02-DFA0A04FC94B}">
+              <ma14:wrappingTextBoxFlag xmlns:ma14="http://schemas.microsoft.com/office/mac/drawingml/2011/main" xmlns="" val="0"/>
+            </a:ext>
+          </a:extLst>
+        </p:spPr>
+        <p:txBody>
+          <a:bodyPr/>
+          <a:lstStyle>
+            <a:lvl1pPr>
+              <a:defRPr sz="1100">
+                <a:solidFill>
+                  <a:srgbClr val="8A94A6"/>
+                </a:solidFill>
+              </a:defRPr>
+            </a:lvl1pPr>
+          </a:lstStyle>
+          <a:p>
+            <a:pPr algn="r"/>
+            <a:fld id="{F7021451-1387-4CA6-816F-3879F97B5CBC}" type="slidenum">
+              <a:rPr lang="en-US" b="0"/>
+              <a:t>9</a:t>
+            </a:fld>
+            <a:endParaRPr lang="en-US"/>
+          </a:p>
+        </p:txBody>
+      </p:sp>
+      <p:sp>
+        <p:nvSpPr>
+          <p:cNvPr id="26" name="Situación"/>
+          <p:cNvSpPr txBox="1"/>
+          <p:nvPr/>
+        </p:nvSpPr>
+        <p:spPr>
+          <a:xfrm>
+            <a:off x="548640" y="1325880"/>
+            <a:ext cx="11094415" cy="685800"/>
+          </a:xfrm>
+          <a:prstGeom prst="rect">
+            <a:avLst/>
+          </a:prstGeom>
+          <a:noFill/>
+        </p:spPr>
+        <p:txBody>
+          <a:bodyPr wrap="square" anchor="ctr" lIns="0" rIns="0" tIns="0" bIns="0">
+            <a:spAutoFit/>
+          </a:bodyPr>
+          <a:lstStyle/>
+          <a:p>
+            <a:r>
+              <a:rPr sz="1800" b="0" i="1">
+                <a:solidFill>
+                  <a:schemeClr val="tx2"/>
+                </a:solidFill>
+              </a:rPr>
+              <a:t>«La tienda pone en marcha las reservas por WhatsApp y las esperas se reducen.»</a:t>
+            </a:r>
+          </a:p>
+        </p:txBody>
+      </p:sp>
+      <p:sp>
+        <p:nvSpPr>
+          <p:cNvPr id="27" name="Respuesta"/>
+          <p:cNvSpPr/>
+          <p:nvPr/>
+        </p:nvSpPr>
+        <p:spPr>
+          <a:xfrm>
+            <a:off x="548640" y="2194560"/>
+            <a:ext cx="11094415" cy="1463040"/>
+          </a:xfrm>
+          <a:prstGeom prst="roundRect">
+            <a:avLst>
+              <a:gd name="adj" fmla="val 9374"/>
+            </a:avLst>
+          </a:prstGeom>
+          <a:solidFill>
+            <a:schemeClr val="accent3"/>
+          </a:solidFill>
+          <a:ln>
+            <a:noFill/>
+          </a:ln>
+          <a:effectLst/>
+        </p:spPr>
+        <p:style>
+          <a:lnRef idx="1">
+            <a:schemeClr val="accent1"/>
+          </a:lnRef>
+          <a:fillRef idx="3">
+            <a:schemeClr val="accent1"/>
+          </a:fillRef>
+          <a:effectRef idx="2">
+            <a:schemeClr val="accent1"/>
+          </a:effectRef>
+          <a:fontRef idx="minor">
+            <a:schemeClr val="lt1"/>
+          </a:fontRef>
+        </p:style>
+        <p:txBody>
+          <a:bodyPr rtlCol="0" anchor="ctr"/>
+          <a:lstStyle/>
+          <a:p>
+            <a:pPr algn="ctr"/>
+          </a:p>
+        </p:txBody>
+      </p:sp>
+      <p:sp>
+        <p:nvSpPr>
+          <p:cNvPr id="28" name="Número"/>
+          <p:cNvSpPr/>
+          <p:nvPr/>
+        </p:nvSpPr>
+        <p:spPr>
+          <a:xfrm>
+            <a:off x="868680" y="2377440"/>
+            <a:ext cx="1097280" cy="1097280"/>
+          </a:xfrm>
+          <a:prstGeom prst="ellipse">
+            <a:avLst/>
+          </a:prstGeom>
+          <a:solidFill>
+            <a:schemeClr val="bg1"/>
+          </a:solidFill>
+          <a:ln>
+            <a:noFill/>
+          </a:ln>
+          <a:effectLst/>
+        </p:spPr>
+        <p:style>
+          <a:lnRef idx="1">
+            <a:schemeClr val="accent1"/>
+          </a:lnRef>
+          <a:fillRef idx="3">
+            <a:schemeClr val="accent1"/>
+          </a:fillRef>
+          <a:effectRef idx="2">
+            <a:schemeClr val="accent1"/>
+          </a:effectRef>
+          <a:fontRef idx="minor">
+            <a:schemeClr val="lt1"/>
+          </a:fontRef>
+        </p:style>
+        <p:txBody>
+          <a:bodyPr rtlCol="0" anchor="ctr"/>
+          <a:lstStyle/>
+          <a:p>
+            <a:pPr algn="ctr"/>
+          </a:p>
+        </p:txBody>
+      </p:sp>
+      <p:sp>
+        <p:nvSpPr>
+          <p:cNvPr id="29" name="Número de la opción"/>
+          <p:cNvSpPr txBox="1"/>
+          <p:nvPr/>
+        </p:nvSpPr>
+        <p:spPr>
+          <a:xfrm>
+            <a:off x="868680" y="2377440"/>
+            <a:ext cx="1097280" cy="1097280"/>
+          </a:xfrm>
+          <a:prstGeom prst="rect">
+            <a:avLst/>
+          </a:prstGeom>
+          <a:noFill/>
+        </p:spPr>
+        <p:txBody>
+          <a:bodyPr wrap="square" anchor="ctr" lIns="0" rIns="0" tIns="0" bIns="0">
+            <a:spAutoFit/>
+          </a:bodyPr>
+          <a:lstStyle/>
+          <a:p>
+            <a:pPr algn="ctr"/>
+            <a:r>
+              <a:rPr sz="4800" b="1" i="0">
+                <a:solidFill>
+                  <a:schemeClr val="accent3"/>
+                </a:solidFill>
+              </a:rPr>
+              <a:t>2</a:t>
+            </a:r>
+          </a:p>
+        </p:txBody>
+      </p:sp>
+      <p:sp>
+        <p:nvSpPr>
+          <p:cNvPr id="30" name="Nombre de la respuesta"/>
+          <p:cNvSpPr txBox="1"/>
+          <p:nvPr/>
+        </p:nvSpPr>
+        <p:spPr>
+          <a:xfrm>
+            <a:off x="2286000" y="2194560"/>
+            <a:ext cx="9082735" cy="1463040"/>
+          </a:xfrm>
+          <a:prstGeom prst="rect">
+            <a:avLst/>
+          </a:prstGeom>
+          <a:noFill/>
+        </p:spPr>
+        <p:txBody>
+          <a:bodyPr wrap="square" anchor="ctr" lIns="0" rIns="0" tIns="0" bIns="0">
+            <a:spAutoFit/>
+          </a:bodyPr>
+          <a:lstStyle/>
+          <a:p>
+            <a:r>
+              <a:rPr sz="4000" b="1" i="0">
+                <a:solidFill>
+                  <a:schemeClr val="bg1"/>
+                </a:solidFill>
+              </a:rPr>
+              <a:t>Innovación</a:t>
+            </a:r>
+          </a:p>
+        </p:txBody>
+      </p:sp>
+      <p:sp>
+        <p:nvSpPr>
+          <p:cNvPr id="31" name="Por qué"/>
+          <p:cNvSpPr/>
+          <p:nvPr/>
+        </p:nvSpPr>
+        <p:spPr>
+          <a:xfrm>
+            <a:off x="548640" y="3931920"/>
+            <a:ext cx="11094415" cy="1600200"/>
+          </a:xfrm>
+          <a:prstGeom prst="roundRect">
+            <a:avLst>
+              <a:gd name="adj" fmla="val 8571"/>
+            </a:avLst>
+          </a:prstGeom>
+          <a:solidFill>
+            <a:schemeClr val="bg2"/>
+          </a:solidFill>
+          <a:ln>
+            <a:noFill/>
+          </a:ln>
+          <a:effectLst/>
+        </p:spPr>
+        <p:style>
+          <a:lnRef idx="1">
+            <a:schemeClr val="accent1"/>
+          </a:lnRef>
+          <a:fillRef idx="3">
+            <a:schemeClr val="accent1"/>
+          </a:fillRef>
+          <a:effectRef idx="2">
+            <a:schemeClr val="accent1"/>
+          </a:effectRef>
+          <a:fontRef idx="minor">
+            <a:schemeClr val="lt1"/>
+          </a:fontRef>
+        </p:style>
+        <p:txBody>
+          <a:bodyPr rtlCol="0" anchor="ctr"/>
+          <a:lstStyle/>
+          <a:p>
+            <a:pPr algn="ctr"/>
+          </a:p>
+        </p:txBody>
+      </p:sp>
+      <p:sp>
+        <p:nvSpPr>
+          <p:cNvPr id="32" name="Explicación"/>
+          <p:cNvSpPr txBox="1"/>
+          <p:nvPr/>
+        </p:nvSpPr>
+        <p:spPr>
+          <a:xfrm>
+            <a:off x="914400" y="3931920"/>
+            <a:ext cx="10362895" cy="1600200"/>
+          </a:xfrm>
+          <a:prstGeom prst="rect">
+            <a:avLst/>
+          </a:prstGeom>
+          <a:noFill/>
+        </p:spPr>
+        <p:txBody>
+          <a:bodyPr wrap="square" anchor="ctr" lIns="0" rIns="0" tIns="0" bIns="0">
+            <a:spAutoFit/>
+          </a:bodyPr>
+          <a:lstStyle/>
+          <a:p>
+            <a:r>
+              <a:rPr sz="1600" b="1" i="0">
+                <a:solidFill>
+                  <a:schemeClr val="tx2"/>
+                </a:solidFill>
+              </a:rPr>
+              <a:t>Por qué</a:t>
+            </a:r>
+          </a:p>
+          <a:p>
+            <a:pPr>
+              <a:spcBef>
+                <a:spcPts val="600"/>
+              </a:spcBef>
+            </a:pPr>
+            <a:r>
+              <a:rPr sz="2200" b="0" i="0">
+                <a:solidFill>
+                  <a:schemeClr val="tx1"/>
+                </a:solidFill>
+              </a:rPr>
+              <a:t>La idea se ha puesto en práctica y aporta valor: las esperas se reducen.</a:t>
+            </a:r>
+          </a:p>
+        </p:txBody>
+      </p:sp>
+    </p:spTree>
+  </p:cSld>
+  <p:clrMapOvr>
+    <a:masterClrMapping/>
+  </p:clrMapOvr>
+</p:sld>
+</file>
+
+<file path=ppt/slides/slide32.xml><?xml version="1.0" encoding="utf-8"?>
+<p:sld xmlns:a="http://schemas.openxmlformats.org/drawingml/2006/main" xmlns:p="http://schemas.openxmlformats.org/presentationml/2006/main" xmlns:r="http://schemas.openxmlformats.org/officeDocument/2006/relationships">
+  <p:cSld>
+    <p:spTree>
+      <p:nvGrpSpPr>
+        <p:cNvPr id="1" name=""/>
+        <p:cNvGrpSpPr/>
+        <p:nvPr/>
+      </p:nvGrpSpPr>
+      <p:grpSpPr/>
+      <p:sp>
+        <p:nvSpPr>
+          <p:cNvPr id="2" name="Text 0"/>
+          <p:cNvSpPr>
+            <a:spLocks noGrp="1"/>
+          </p:cNvSpPr>
+          <p:nvPr>
+            <p:ph type="title" idx="100" hasCustomPrompt="1"/>
+          </p:nvPr>
+        </p:nvSpPr>
+        <p:spPr>
+          <a:xfrm>
+            <a:off x="548640" y="411480"/>
+            <a:ext cx="11094415" cy="777240"/>
+          </a:xfrm>
+          <a:prstGeom prst="rect">
+            <a:avLst/>
+          </a:prstGeom>
+          <a:noFill/>
+          <a:ln/>
+        </p:spPr>
+        <p:txBody>
+          <a:bodyPr wrap="square" lIns="0" tIns="0" rIns="0" bIns="0" rtlCol="0" anchor="ctr"/>
+          <a:lstStyle/>
+          <a:p>
+            <a:pPr marL="0" indent="0" algn="l">
+              <a:buNone/>
+            </a:pPr>
+            <a:r>
+              <a:rPr lang="en-US" sz="3200" b="1" dirty="0">
+                <a:solidFill>
+                  <a:schemeClr val="tx1"/>
+                </a:solidFill>
+              </a:rPr>
+              <a:t>Situación 3: respuesta</a:t>
+            </a:r>
+            <a:endParaRPr lang="en-US" sz="3200" dirty="0"/>
+          </a:p>
+        </p:txBody>
+      </p:sp>
+      <p:sp>
+        <p:nvSpPr>
+          <p:cNvPr id="3" name="Etiqueta de tiempo"/>
+          <p:cNvSpPr/>
+          <p:nvPr/>
+        </p:nvSpPr>
+        <p:spPr>
+          <a:xfrm>
+            <a:off x="8556955" y="548640"/>
+            <a:ext cx="3086100" cy="457200"/>
+          </a:xfrm>
+          <a:prstGeom prst="roundRect">
+            <a:avLst>
+              <a:gd name="adj" fmla="val 50000"/>
+            </a:avLst>
+          </a:prstGeom>
+          <a:solidFill>
+            <a:schemeClr val="accent1"/>
+          </a:solidFill>
+          <a:ln/>
+        </p:spPr>
+      </p:sp>
+      <p:sp>
+        <p:nvSpPr>
+          <p:cNvPr id="4" name="Text 2"/>
+          <p:cNvSpPr txBox="1"/>
+          <p:nvPr/>
+        </p:nvSpPr>
+        <p:spPr>
+          <a:xfrm>
+            <a:off x="8556955" y="548640"/>
+            <a:ext cx="3086100" cy="457200"/>
+          </a:xfrm>
+          <a:prstGeom prst="rect">
+            <a:avLst/>
+          </a:prstGeom>
+          <a:noFill/>
+          <a:ln/>
+        </p:spPr>
+        <p:txBody>
+          <a:bodyPr wrap="square" lIns="0" tIns="0" rIns="0" bIns="0" rtlCol="0" anchor="ctr"/>
+          <a:lstStyle/>
+          <a:p>
+            <a:pPr marL="0" indent="0" algn="ctr">
+              <a:buNone/>
+            </a:pPr>
+            <a:r>
+              <a:rPr lang="en-US" sz="1400" b="1" dirty="0">
+                <a:solidFill>
+                  <a:schemeClr val="tx1"/>
+                </a:solidFill>
+              </a:rPr>
+              <a:t>Min. 5–10 · Todo el grupo</a:t>
+            </a:r>
+            <a:endParaRPr lang="en-US" sz="1400" dirty="0"/>
+          </a:p>
+        </p:txBody>
+      </p:sp>
+      <p:sp>
+        <p:nvSpPr>
+          <p:cNvPr id="25" name="Slide Number Placeholder 0"/>
+          <p:cNvSpPr>
+            <a:spLocks noGrp="1"/>
+          </p:cNvSpPr>
+          <p:nvPr>
+            <p:ph type="sldNum" sz="quarter" idx="4294967295"/>
+          </p:nvPr>
+        </p:nvSpPr>
+        <p:spPr>
+          <a:xfrm>
+            <a:off x="11091672" y="6355080"/>
+            <a:ext cx="548640" cy="320040"/>
+          </a:xfrm>
+          <a:prstGeom prst="rect">
+            <a:avLst/>
+          </a:prstGeom>
+          <a:extLst>
+            <a:ext uri="{C572A759-6A51-4108-AA02-DFA0A04FC94B}">
+              <ma14:wrappingTextBoxFlag xmlns:ma14="http://schemas.microsoft.com/office/mac/drawingml/2011/main" xmlns="" val="0"/>
+            </a:ext>
+          </a:extLst>
+        </p:spPr>
+        <p:txBody>
+          <a:bodyPr/>
+          <a:lstStyle>
+            <a:lvl1pPr>
+              <a:defRPr sz="1100">
+                <a:solidFill>
+                  <a:srgbClr val="8A94A6"/>
+                </a:solidFill>
+              </a:defRPr>
+            </a:lvl1pPr>
+          </a:lstStyle>
+          <a:p>
+            <a:pPr algn="r"/>
+            <a:fld id="{F7021451-1387-4CA6-816F-3879F97B5CBC}" type="slidenum">
+              <a:rPr lang="en-US" b="0"/>
+              <a:t>10</a:t>
+            </a:fld>
+            <a:endParaRPr lang="en-US"/>
+          </a:p>
+        </p:txBody>
+      </p:sp>
+      <p:sp>
+        <p:nvSpPr>
+          <p:cNvPr id="26" name="Situación"/>
+          <p:cNvSpPr txBox="1"/>
+          <p:nvPr/>
+        </p:nvSpPr>
+        <p:spPr>
+          <a:xfrm>
+            <a:off x="548640" y="1325880"/>
+            <a:ext cx="11094415" cy="685800"/>
+          </a:xfrm>
+          <a:prstGeom prst="rect">
+            <a:avLst/>
+          </a:prstGeom>
+          <a:noFill/>
+        </p:spPr>
+        <p:txBody>
+          <a:bodyPr wrap="square" anchor="ctr" lIns="0" rIns="0" tIns="0" bIns="0">
+            <a:spAutoFit/>
+          </a:bodyPr>
+          <a:lstStyle/>
+          <a:p>
+            <a:r>
+              <a:rPr sz="1800" b="0" i="1">
+                <a:solidFill>
+                  <a:schemeClr val="tx2"/>
+                </a:solidFill>
+              </a:rPr>
+              <a:t>«Un administrativo usa una tabla dinámica para resumir las ventas del mes.»</a:t>
+            </a:r>
+          </a:p>
+        </p:txBody>
+      </p:sp>
+      <p:sp>
+        <p:nvSpPr>
+          <p:cNvPr id="27" name="Respuesta"/>
+          <p:cNvSpPr/>
+          <p:nvPr/>
+        </p:nvSpPr>
+        <p:spPr>
+          <a:xfrm>
+            <a:off x="548640" y="2194560"/>
+            <a:ext cx="11094415" cy="1463040"/>
+          </a:xfrm>
+          <a:prstGeom prst="roundRect">
+            <a:avLst>
+              <a:gd name="adj" fmla="val 9374"/>
+            </a:avLst>
+          </a:prstGeom>
+          <a:solidFill>
+            <a:schemeClr val="accent4"/>
+          </a:solidFill>
+          <a:ln>
+            <a:noFill/>
+          </a:ln>
+          <a:effectLst/>
+        </p:spPr>
+        <p:style>
+          <a:lnRef idx="1">
+            <a:schemeClr val="accent1"/>
+          </a:lnRef>
+          <a:fillRef idx="3">
+            <a:schemeClr val="accent1"/>
+          </a:fillRef>
+          <a:effectRef idx="2">
+            <a:schemeClr val="accent1"/>
+          </a:effectRef>
+          <a:fontRef idx="minor">
+            <a:schemeClr val="lt1"/>
+          </a:fontRef>
+        </p:style>
+        <p:txBody>
+          <a:bodyPr rtlCol="0" anchor="ctr"/>
+          <a:lstStyle/>
+          <a:p>
+            <a:pPr algn="ctr"/>
+          </a:p>
+        </p:txBody>
+      </p:sp>
+      <p:sp>
+        <p:nvSpPr>
+          <p:cNvPr id="28" name="Número"/>
+          <p:cNvSpPr/>
+          <p:nvPr/>
+        </p:nvSpPr>
+        <p:spPr>
+          <a:xfrm>
+            <a:off x="868680" y="2377440"/>
+            <a:ext cx="1097280" cy="1097280"/>
+          </a:xfrm>
+          <a:prstGeom prst="ellipse">
+            <a:avLst/>
+          </a:prstGeom>
+          <a:solidFill>
+            <a:schemeClr val="bg1"/>
+          </a:solidFill>
+          <a:ln>
+            <a:noFill/>
+          </a:ln>
+          <a:effectLst/>
+        </p:spPr>
+        <p:style>
+          <a:lnRef idx="1">
+            <a:schemeClr val="accent1"/>
+          </a:lnRef>
+          <a:fillRef idx="3">
+            <a:schemeClr val="accent1"/>
+          </a:fillRef>
+          <a:effectRef idx="2">
+            <a:schemeClr val="accent1"/>
+          </a:effectRef>
+          <a:fontRef idx="minor">
+            <a:schemeClr val="lt1"/>
+          </a:fontRef>
+        </p:style>
+        <p:txBody>
+          <a:bodyPr rtlCol="0" anchor="ctr"/>
+          <a:lstStyle/>
+          <a:p>
+            <a:pPr algn="ctr"/>
+          </a:p>
+        </p:txBody>
+      </p:sp>
+      <p:sp>
+        <p:nvSpPr>
+          <p:cNvPr id="29" name="Número de la opción"/>
+          <p:cNvSpPr txBox="1"/>
+          <p:nvPr/>
+        </p:nvSpPr>
+        <p:spPr>
+          <a:xfrm>
+            <a:off x="868680" y="2377440"/>
+            <a:ext cx="1097280" cy="1097280"/>
+          </a:xfrm>
+          <a:prstGeom prst="rect">
+            <a:avLst/>
+          </a:prstGeom>
+          <a:noFill/>
+        </p:spPr>
+        <p:txBody>
+          <a:bodyPr wrap="square" anchor="ctr" lIns="0" rIns="0" tIns="0" bIns="0">
+            <a:spAutoFit/>
+          </a:bodyPr>
+          <a:lstStyle/>
+          <a:p>
+            <a:pPr algn="ctr"/>
+            <a:r>
+              <a:rPr sz="4800" b="1" i="0">
+                <a:solidFill>
+                  <a:schemeClr val="accent4"/>
+                </a:solidFill>
+              </a:rPr>
+              <a:t>3</a:t>
+            </a:r>
+          </a:p>
+        </p:txBody>
+      </p:sp>
+      <p:sp>
+        <p:nvSpPr>
+          <p:cNvPr id="30" name="Nombre de la respuesta"/>
+          <p:cNvSpPr txBox="1"/>
+          <p:nvPr/>
+        </p:nvSpPr>
+        <p:spPr>
+          <a:xfrm>
+            <a:off x="2286000" y="2194560"/>
+            <a:ext cx="9082735" cy="1463040"/>
+          </a:xfrm>
+          <a:prstGeom prst="rect">
+            <a:avLst/>
+          </a:prstGeom>
+          <a:noFill/>
+        </p:spPr>
+        <p:txBody>
+          <a:bodyPr wrap="square" anchor="ctr" lIns="0" rIns="0" tIns="0" bIns="0">
+            <a:spAutoFit/>
+          </a:bodyPr>
+          <a:lstStyle/>
+          <a:p>
+            <a:r>
+              <a:rPr sz="4000" b="1" i="0">
+                <a:solidFill>
+                  <a:schemeClr val="bg1"/>
+                </a:solidFill>
+              </a:rPr>
+              <a:t>Competencia digital</a:t>
+            </a:r>
+          </a:p>
+        </p:txBody>
+      </p:sp>
+      <p:sp>
+        <p:nvSpPr>
+          <p:cNvPr id="31" name="Por qué"/>
+          <p:cNvSpPr/>
+          <p:nvPr/>
+        </p:nvSpPr>
+        <p:spPr>
+          <a:xfrm>
+            <a:off x="548640" y="3931920"/>
+            <a:ext cx="11094415" cy="1600200"/>
+          </a:xfrm>
+          <a:prstGeom prst="roundRect">
+            <a:avLst>
+              <a:gd name="adj" fmla="val 8571"/>
+            </a:avLst>
+          </a:prstGeom>
+          <a:solidFill>
+            <a:schemeClr val="bg2"/>
+          </a:solidFill>
+          <a:ln>
+            <a:noFill/>
+          </a:ln>
+          <a:effectLst/>
+        </p:spPr>
+        <p:style>
+          <a:lnRef idx="1">
+            <a:schemeClr val="accent1"/>
+          </a:lnRef>
+          <a:fillRef idx="3">
+            <a:schemeClr val="accent1"/>
+          </a:fillRef>
+          <a:effectRef idx="2">
+            <a:schemeClr val="accent1"/>
+          </a:effectRef>
+          <a:fontRef idx="minor">
+            <a:schemeClr val="lt1"/>
+          </a:fontRef>
+        </p:style>
+        <p:txBody>
+          <a:bodyPr rtlCol="0" anchor="ctr"/>
+          <a:lstStyle/>
+          <a:p>
+            <a:pPr algn="ctr"/>
+          </a:p>
+        </p:txBody>
+      </p:sp>
+      <p:sp>
+        <p:nvSpPr>
+          <p:cNvPr id="32" name="Explicación"/>
+          <p:cNvSpPr txBox="1"/>
+          <p:nvPr/>
+        </p:nvSpPr>
+        <p:spPr>
+          <a:xfrm>
+            <a:off x="914400" y="3931920"/>
+            <a:ext cx="10362895" cy="1600200"/>
+          </a:xfrm>
+          <a:prstGeom prst="rect">
+            <a:avLst/>
+          </a:prstGeom>
+          <a:noFill/>
+        </p:spPr>
+        <p:txBody>
+          <a:bodyPr wrap="square" anchor="ctr" lIns="0" rIns="0" tIns="0" bIns="0">
+            <a:spAutoFit/>
+          </a:bodyPr>
+          <a:lstStyle/>
+          <a:p>
+            <a:r>
+              <a:rPr sz="1600" b="1" i="0">
+                <a:solidFill>
+                  <a:schemeClr val="tx2"/>
+                </a:solidFill>
+              </a:rPr>
+              <a:t>Por qué</a:t>
+            </a:r>
+          </a:p>
+          <a:p>
+            <a:pPr>
+              <a:spcBef>
+                <a:spcPts val="600"/>
+              </a:spcBef>
+            </a:pPr>
+            <a:r>
+              <a:rPr sz="2200" b="0" i="0">
+                <a:solidFill>
+                  <a:schemeClr val="tx1"/>
+                </a:solidFill>
+              </a:rPr>
+              <a:t>Usa una herramienta digital para hacer bien su tarea, pero no cambia cómo se trabaja.</a:t>
+            </a:r>
+          </a:p>
+        </p:txBody>
+      </p:sp>
+    </p:spTree>
+  </p:cSld>
+  <p:clrMapOvr>
+    <a:masterClrMapping/>
+  </p:clrMapOvr>
+</p:sld>
+</file>
+
+<file path=ppt/slides/slide33.xml><?xml version="1.0" encoding="utf-8"?>
+<p:sld xmlns:a="http://schemas.openxmlformats.org/drawingml/2006/main" xmlns:p="http://schemas.openxmlformats.org/presentationml/2006/main" xmlns:r="http://schemas.openxmlformats.org/officeDocument/2006/relationships">
+  <p:cSld>
+    <p:spTree>
+      <p:nvGrpSpPr>
+        <p:cNvPr id="1" name=""/>
+        <p:cNvGrpSpPr/>
+        <p:nvPr/>
+      </p:nvGrpSpPr>
+      <p:grpSpPr/>
+      <p:sp>
+        <p:nvSpPr>
+          <p:cNvPr id="2" name="Text 0"/>
+          <p:cNvSpPr>
+            <a:spLocks noGrp="1"/>
+          </p:cNvSpPr>
+          <p:nvPr>
+            <p:ph type="title" idx="100" hasCustomPrompt="1"/>
+          </p:nvPr>
+        </p:nvSpPr>
+        <p:spPr>
+          <a:xfrm>
+            <a:off x="548640" y="411480"/>
+            <a:ext cx="11094415" cy="777240"/>
+          </a:xfrm>
+          <a:prstGeom prst="rect">
+            <a:avLst/>
+          </a:prstGeom>
+          <a:noFill/>
+          <a:ln/>
+        </p:spPr>
+        <p:txBody>
+          <a:bodyPr wrap="square" lIns="0" tIns="0" rIns="0" bIns="0" rtlCol="0" anchor="ctr"/>
+          <a:lstStyle/>
+          <a:p>
+            <a:pPr marL="0" indent="0" algn="l">
+              <a:buNone/>
+            </a:pPr>
+            <a:r>
+              <a:rPr lang="en-US" sz="3200" b="1" dirty="0">
+                <a:solidFill>
+                  <a:schemeClr val="tx1"/>
+                </a:solidFill>
+              </a:rPr>
+              <a:t>Situación 4: respuesta</a:t>
+            </a:r>
+            <a:endParaRPr lang="en-US" sz="3200" dirty="0"/>
+          </a:p>
+        </p:txBody>
+      </p:sp>
+      <p:sp>
+        <p:nvSpPr>
+          <p:cNvPr id="3" name="Etiqueta de tiempo"/>
+          <p:cNvSpPr/>
+          <p:nvPr/>
+        </p:nvSpPr>
+        <p:spPr>
+          <a:xfrm>
+            <a:off x="8556955" y="548640"/>
+            <a:ext cx="3086100" cy="457200"/>
+          </a:xfrm>
+          <a:prstGeom prst="roundRect">
+            <a:avLst>
+              <a:gd name="adj" fmla="val 50000"/>
+            </a:avLst>
+          </a:prstGeom>
+          <a:solidFill>
+            <a:schemeClr val="accent1"/>
+          </a:solidFill>
+          <a:ln/>
+        </p:spPr>
+      </p:sp>
+      <p:sp>
+        <p:nvSpPr>
+          <p:cNvPr id="4" name="Text 2"/>
+          <p:cNvSpPr txBox="1"/>
+          <p:nvPr/>
+        </p:nvSpPr>
+        <p:spPr>
+          <a:xfrm>
+            <a:off x="8556955" y="548640"/>
+            <a:ext cx="3086100" cy="457200"/>
+          </a:xfrm>
+          <a:prstGeom prst="rect">
+            <a:avLst/>
+          </a:prstGeom>
+          <a:noFill/>
+          <a:ln/>
+        </p:spPr>
+        <p:txBody>
+          <a:bodyPr wrap="square" lIns="0" tIns="0" rIns="0" bIns="0" rtlCol="0" anchor="ctr"/>
+          <a:lstStyle/>
+          <a:p>
+            <a:pPr marL="0" indent="0" algn="ctr">
+              <a:buNone/>
+            </a:pPr>
+            <a:r>
+              <a:rPr lang="en-US" sz="1400" b="1" dirty="0">
+                <a:solidFill>
+                  <a:schemeClr val="tx1"/>
+                </a:solidFill>
+              </a:rPr>
+              <a:t>Min. 5–10 · Todo el grupo</a:t>
+            </a:r>
+            <a:endParaRPr lang="en-US" sz="1400" dirty="0"/>
+          </a:p>
+        </p:txBody>
+      </p:sp>
+      <p:sp>
+        <p:nvSpPr>
+          <p:cNvPr id="25" name="Slide Number Placeholder 0"/>
+          <p:cNvSpPr>
+            <a:spLocks noGrp="1"/>
+          </p:cNvSpPr>
+          <p:nvPr>
+            <p:ph type="sldNum" sz="quarter" idx="4294967295"/>
+          </p:nvPr>
+        </p:nvSpPr>
+        <p:spPr>
+          <a:xfrm>
+            <a:off x="11091672" y="6355080"/>
+            <a:ext cx="548640" cy="320040"/>
+          </a:xfrm>
+          <a:prstGeom prst="rect">
+            <a:avLst/>
+          </a:prstGeom>
+          <a:extLst>
+            <a:ext uri="{C572A759-6A51-4108-AA02-DFA0A04FC94B}">
+              <ma14:wrappingTextBoxFlag xmlns:ma14="http://schemas.microsoft.com/office/mac/drawingml/2011/main" xmlns="" val="0"/>
+            </a:ext>
+          </a:extLst>
+        </p:spPr>
+        <p:txBody>
+          <a:bodyPr/>
+          <a:lstStyle>
+            <a:lvl1pPr>
+              <a:defRPr sz="1100">
+                <a:solidFill>
+                  <a:srgbClr val="8A94A6"/>
+                </a:solidFill>
+              </a:defRPr>
+            </a:lvl1pPr>
+          </a:lstStyle>
+          <a:p>
+            <a:pPr algn="r"/>
+            <a:fld id="{F7021451-1387-4CA6-816F-3879F97B5CBC}" type="slidenum">
+              <a:rPr lang="en-US" b="0"/>
+              <a:t>11</a:t>
+            </a:fld>
+            <a:endParaRPr lang="en-US"/>
+          </a:p>
+        </p:txBody>
+      </p:sp>
+      <p:sp>
+        <p:nvSpPr>
+          <p:cNvPr id="26" name="Situación"/>
+          <p:cNvSpPr txBox="1"/>
+          <p:nvPr/>
+        </p:nvSpPr>
+        <p:spPr>
+          <a:xfrm>
+            <a:off x="548640" y="1325880"/>
+            <a:ext cx="11094415" cy="685800"/>
+          </a:xfrm>
+          <a:prstGeom prst="rect">
+            <a:avLst/>
+          </a:prstGeom>
+          <a:noFill/>
+        </p:spPr>
+        <p:txBody>
+          <a:bodyPr wrap="square" anchor="ctr" lIns="0" rIns="0" tIns="0" bIns="0">
+            <a:spAutoFit/>
+          </a:bodyPr>
+          <a:lstStyle/>
+          <a:p>
+            <a:r>
+              <a:rPr sz="1800" b="0" i="1">
+                <a:solidFill>
+                  <a:schemeClr val="tx2"/>
+                </a:solidFill>
+              </a:rPr>
+              <a:t>«Un taller empieza a enviar al cliente fotos del coche a medida que lo repara y recibe menos llamadas preguntando.»</a:t>
+            </a:r>
+          </a:p>
+        </p:txBody>
+      </p:sp>
+      <p:sp>
+        <p:nvSpPr>
+          <p:cNvPr id="27" name="Respuesta"/>
+          <p:cNvSpPr/>
+          <p:nvPr/>
+        </p:nvSpPr>
+        <p:spPr>
+          <a:xfrm>
+            <a:off x="548640" y="2194560"/>
+            <a:ext cx="11094415" cy="1463040"/>
+          </a:xfrm>
+          <a:prstGeom prst="roundRect">
+            <a:avLst>
+              <a:gd name="adj" fmla="val 9374"/>
+            </a:avLst>
+          </a:prstGeom>
+          <a:solidFill>
+            <a:schemeClr val="accent3"/>
+          </a:solidFill>
+          <a:ln>
+            <a:noFill/>
+          </a:ln>
+          <a:effectLst/>
+        </p:spPr>
+        <p:style>
+          <a:lnRef idx="1">
+            <a:schemeClr val="accent1"/>
+          </a:lnRef>
+          <a:fillRef idx="3">
+            <a:schemeClr val="accent1"/>
+          </a:fillRef>
+          <a:effectRef idx="2">
+            <a:schemeClr val="accent1"/>
+          </a:effectRef>
+          <a:fontRef idx="minor">
+            <a:schemeClr val="lt1"/>
+          </a:fontRef>
+        </p:style>
+        <p:txBody>
+          <a:bodyPr rtlCol="0" anchor="ctr"/>
+          <a:lstStyle/>
+          <a:p>
+            <a:pPr algn="ctr"/>
+          </a:p>
+        </p:txBody>
+      </p:sp>
+      <p:sp>
+        <p:nvSpPr>
+          <p:cNvPr id="28" name="Número"/>
+          <p:cNvSpPr/>
+          <p:nvPr/>
+        </p:nvSpPr>
+        <p:spPr>
+          <a:xfrm>
+            <a:off x="868680" y="2377440"/>
+            <a:ext cx="1097280" cy="1097280"/>
+          </a:xfrm>
+          <a:prstGeom prst="ellipse">
+            <a:avLst/>
+          </a:prstGeom>
+          <a:solidFill>
+            <a:schemeClr val="bg1"/>
+          </a:solidFill>
+          <a:ln>
+            <a:noFill/>
+          </a:ln>
+          <a:effectLst/>
+        </p:spPr>
+        <p:style>
+          <a:lnRef idx="1">
+            <a:schemeClr val="accent1"/>
+          </a:lnRef>
+          <a:fillRef idx="3">
+            <a:schemeClr val="accent1"/>
+          </a:fillRef>
+          <a:effectRef idx="2">
+            <a:schemeClr val="accent1"/>
+          </a:effectRef>
+          <a:fontRef idx="minor">
+            <a:schemeClr val="lt1"/>
+          </a:fontRef>
+        </p:style>
+        <p:txBody>
+          <a:bodyPr rtlCol="0" anchor="ctr"/>
+          <a:lstStyle/>
+          <a:p>
+            <a:pPr algn="ctr"/>
+          </a:p>
+        </p:txBody>
+      </p:sp>
+      <p:sp>
+        <p:nvSpPr>
+          <p:cNvPr id="29" name="Número de la opción"/>
+          <p:cNvSpPr txBox="1"/>
+          <p:nvPr/>
+        </p:nvSpPr>
+        <p:spPr>
+          <a:xfrm>
+            <a:off x="868680" y="2377440"/>
+            <a:ext cx="1097280" cy="1097280"/>
+          </a:xfrm>
+          <a:prstGeom prst="rect">
+            <a:avLst/>
+          </a:prstGeom>
+          <a:noFill/>
+        </p:spPr>
+        <p:txBody>
+          <a:bodyPr wrap="square" anchor="ctr" lIns="0" rIns="0" tIns="0" bIns="0">
+            <a:spAutoFit/>
+          </a:bodyPr>
+          <a:lstStyle/>
+          <a:p>
+            <a:pPr algn="ctr"/>
+            <a:r>
+              <a:rPr sz="4800" b="1" i="0">
+                <a:solidFill>
+                  <a:schemeClr val="accent3"/>
+                </a:solidFill>
+              </a:rPr>
+              <a:t>2</a:t>
+            </a:r>
+          </a:p>
+        </p:txBody>
+      </p:sp>
+      <p:sp>
+        <p:nvSpPr>
+          <p:cNvPr id="30" name="Nombre de la respuesta"/>
+          <p:cNvSpPr txBox="1"/>
+          <p:nvPr/>
+        </p:nvSpPr>
+        <p:spPr>
+          <a:xfrm>
+            <a:off x="2286000" y="2194560"/>
+            <a:ext cx="9082735" cy="1463040"/>
+          </a:xfrm>
+          <a:prstGeom prst="rect">
+            <a:avLst/>
+          </a:prstGeom>
+          <a:noFill/>
+        </p:spPr>
+        <p:txBody>
+          <a:bodyPr wrap="square" anchor="ctr" lIns="0" rIns="0" tIns="0" bIns="0">
+            <a:spAutoFit/>
+          </a:bodyPr>
+          <a:lstStyle/>
+          <a:p>
+            <a:r>
+              <a:rPr sz="4000" b="1" i="0">
+                <a:solidFill>
+                  <a:schemeClr val="bg1"/>
+                </a:solidFill>
+              </a:rPr>
+              <a:t>Innovación</a:t>
+            </a:r>
+          </a:p>
+        </p:txBody>
+      </p:sp>
+      <p:sp>
+        <p:nvSpPr>
+          <p:cNvPr id="31" name="Por qué"/>
+          <p:cNvSpPr/>
+          <p:nvPr/>
+        </p:nvSpPr>
+        <p:spPr>
+          <a:xfrm>
+            <a:off x="548640" y="3931920"/>
+            <a:ext cx="11094415" cy="1600200"/>
+          </a:xfrm>
+          <a:prstGeom prst="roundRect">
+            <a:avLst>
+              <a:gd name="adj" fmla="val 8571"/>
+            </a:avLst>
+          </a:prstGeom>
+          <a:solidFill>
+            <a:schemeClr val="bg2"/>
+          </a:solidFill>
+          <a:ln>
+            <a:noFill/>
+          </a:ln>
+          <a:effectLst/>
+        </p:spPr>
+        <p:style>
+          <a:lnRef idx="1">
+            <a:schemeClr val="accent1"/>
+          </a:lnRef>
+          <a:fillRef idx="3">
+            <a:schemeClr val="accent1"/>
+          </a:fillRef>
+          <a:effectRef idx="2">
+            <a:schemeClr val="accent1"/>
+          </a:effectRef>
+          <a:fontRef idx="minor">
+            <a:schemeClr val="lt1"/>
+          </a:fontRef>
+        </p:style>
+        <p:txBody>
+          <a:bodyPr rtlCol="0" anchor="ctr"/>
+          <a:lstStyle/>
+          <a:p>
+            <a:pPr algn="ctr"/>
+          </a:p>
+        </p:txBody>
+      </p:sp>
+      <p:sp>
+        <p:nvSpPr>
+          <p:cNvPr id="32" name="Explicación"/>
+          <p:cNvSpPr txBox="1"/>
+          <p:nvPr/>
+        </p:nvSpPr>
+        <p:spPr>
+          <a:xfrm>
+            <a:off x="914400" y="3931920"/>
+            <a:ext cx="10362895" cy="1600200"/>
+          </a:xfrm>
+          <a:prstGeom prst="rect">
+            <a:avLst/>
+          </a:prstGeom>
+          <a:noFill/>
+        </p:spPr>
+        <p:txBody>
+          <a:bodyPr wrap="square" anchor="ctr" lIns="0" rIns="0" tIns="0" bIns="0">
+            <a:spAutoFit/>
+          </a:bodyPr>
+          <a:lstStyle/>
+          <a:p>
+            <a:r>
+              <a:rPr sz="1600" b="1" i="0">
+                <a:solidFill>
+                  <a:schemeClr val="tx2"/>
+                </a:solidFill>
+              </a:rPr>
+              <a:t>Por qué</a:t>
+            </a:r>
+          </a:p>
+          <a:p>
+            <a:pPr>
+              <a:spcBef>
+                <a:spcPts val="600"/>
+              </a:spcBef>
+            </a:pPr>
+            <a:r>
+              <a:rPr sz="2200" b="0" i="0">
+                <a:solidFill>
+                  <a:schemeClr val="tx1"/>
+                </a:solidFill>
+              </a:rPr>
+              <a:t>Es un cambio ya puesto en práctica que aporta valor: el cliente está informado y el taller recibe menos llamadas.</a:t>
+            </a:r>
+          </a:p>
+        </p:txBody>
+      </p:sp>
+    </p:spTree>
+  </p:cSld>
+  <p:clrMapOvr>
+    <a:masterClrMapping/>
+  </p:clrMapOvr>
+</p:sld>
+</file>
+
+<file path=ppt/slides/slide34.xml><?xml version="1.0" encoding="utf-8"?>
+<p:sld xmlns:a="http://schemas.openxmlformats.org/drawingml/2006/main" xmlns:p="http://schemas.openxmlformats.org/presentationml/2006/main" xmlns:r="http://schemas.openxmlformats.org/officeDocument/2006/relationships">
+  <p:cSld>
+    <p:spTree>
+      <p:nvGrpSpPr>
+        <p:cNvPr id="1" name=""/>
+        <p:cNvGrpSpPr/>
+        <p:nvPr/>
+      </p:nvGrpSpPr>
+      <p:grpSpPr/>
+      <p:sp>
+        <p:nvSpPr>
+          <p:cNvPr id="2" name="Text 0"/>
+          <p:cNvSpPr>
+            <a:spLocks noGrp="1"/>
+          </p:cNvSpPr>
+          <p:nvPr>
+            <p:ph type="title" idx="100" hasCustomPrompt="1"/>
+          </p:nvPr>
+        </p:nvSpPr>
+        <p:spPr>
+          <a:xfrm>
+            <a:off x="548640" y="411480"/>
+            <a:ext cx="11094415" cy="777240"/>
+          </a:xfrm>
+          <a:prstGeom prst="rect">
+            <a:avLst/>
+          </a:prstGeom>
+          <a:noFill/>
+          <a:ln/>
+        </p:spPr>
+        <p:txBody>
+          <a:bodyPr wrap="square" lIns="0" tIns="0" rIns="0" bIns="0" rtlCol="0" anchor="ctr"/>
+          <a:lstStyle/>
+          <a:p>
+            <a:pPr marL="0" indent="0" algn="l">
+              <a:buNone/>
+            </a:pPr>
+            <a:r>
+              <a:rPr lang="en-US" sz="3200" b="1" dirty="0">
+                <a:solidFill>
+                  <a:schemeClr val="tx1"/>
+                </a:solidFill>
+              </a:rPr>
+              <a:t>Situación 5: respuesta</a:t>
+            </a:r>
+            <a:endParaRPr lang="en-US" sz="3200" dirty="0"/>
+          </a:p>
+        </p:txBody>
+      </p:sp>
+      <p:sp>
+        <p:nvSpPr>
+          <p:cNvPr id="3" name="Etiqueta de tiempo"/>
+          <p:cNvSpPr/>
+          <p:nvPr/>
+        </p:nvSpPr>
+        <p:spPr>
+          <a:xfrm>
+            <a:off x="8556955" y="548640"/>
+            <a:ext cx="3086100" cy="457200"/>
+          </a:xfrm>
+          <a:prstGeom prst="roundRect">
+            <a:avLst>
+              <a:gd name="adj" fmla="val 50000"/>
+            </a:avLst>
+          </a:prstGeom>
+          <a:solidFill>
+            <a:schemeClr val="accent1"/>
+          </a:solidFill>
+          <a:ln/>
+        </p:spPr>
+      </p:sp>
+      <p:sp>
+        <p:nvSpPr>
+          <p:cNvPr id="4" name="Text 2"/>
+          <p:cNvSpPr txBox="1"/>
+          <p:nvPr/>
+        </p:nvSpPr>
+        <p:spPr>
+          <a:xfrm>
+            <a:off x="8556955" y="548640"/>
+            <a:ext cx="3086100" cy="457200"/>
+          </a:xfrm>
+          <a:prstGeom prst="rect">
+            <a:avLst/>
+          </a:prstGeom>
+          <a:noFill/>
+          <a:ln/>
+        </p:spPr>
+        <p:txBody>
+          <a:bodyPr wrap="square" lIns="0" tIns="0" rIns="0" bIns="0" rtlCol="0" anchor="ctr"/>
+          <a:lstStyle/>
+          <a:p>
+            <a:pPr marL="0" indent="0" algn="ctr">
+              <a:buNone/>
+            </a:pPr>
+            <a:r>
+              <a:rPr lang="en-US" sz="1400" b="1" dirty="0">
+                <a:solidFill>
+                  <a:schemeClr val="tx1"/>
+                </a:solidFill>
+              </a:rPr>
+              <a:t>Min. 5–10 · Todo el grupo</a:t>
+            </a:r>
+            <a:endParaRPr lang="en-US" sz="1400" dirty="0"/>
+          </a:p>
+        </p:txBody>
+      </p:sp>
+      <p:sp>
+        <p:nvSpPr>
+          <p:cNvPr id="25" name="Slide Number Placeholder 0"/>
+          <p:cNvSpPr>
+            <a:spLocks noGrp="1"/>
+          </p:cNvSpPr>
+          <p:nvPr>
+            <p:ph type="sldNum" sz="quarter" idx="4294967295"/>
+          </p:nvPr>
+        </p:nvSpPr>
+        <p:spPr>
+          <a:xfrm>
+            <a:off x="11091672" y="6355080"/>
+            <a:ext cx="548640" cy="320040"/>
+          </a:xfrm>
+          <a:prstGeom prst="rect">
+            <a:avLst/>
+          </a:prstGeom>
+          <a:extLst>
+            <a:ext uri="{C572A759-6A51-4108-AA02-DFA0A04FC94B}">
+              <ma14:wrappingTextBoxFlag xmlns:ma14="http://schemas.microsoft.com/office/mac/drawingml/2011/main" xmlns="" val="0"/>
+            </a:ext>
+          </a:extLst>
+        </p:spPr>
+        <p:txBody>
+          <a:bodyPr/>
+          <a:lstStyle>
+            <a:lvl1pPr>
+              <a:defRPr sz="1100">
+                <a:solidFill>
+                  <a:srgbClr val="8A94A6"/>
+                </a:solidFill>
+              </a:defRPr>
+            </a:lvl1pPr>
+          </a:lstStyle>
+          <a:p>
+            <a:pPr algn="r"/>
+            <a:fld id="{F7021451-1387-4CA6-816F-3879F97B5CBC}" type="slidenum">
+              <a:rPr lang="en-US" b="0"/>
+              <a:t>12</a:t>
+            </a:fld>
+            <a:endParaRPr lang="en-US"/>
+          </a:p>
+        </p:txBody>
+      </p:sp>
+      <p:sp>
+        <p:nvSpPr>
+          <p:cNvPr id="26" name="Situación"/>
+          <p:cNvSpPr txBox="1"/>
+          <p:nvPr/>
+        </p:nvSpPr>
+        <p:spPr>
+          <a:xfrm>
+            <a:off x="548640" y="1325880"/>
+            <a:ext cx="11094415" cy="685800"/>
+          </a:xfrm>
+          <a:prstGeom prst="rect">
+            <a:avLst/>
+          </a:prstGeom>
+          <a:noFill/>
+        </p:spPr>
+        <p:txBody>
+          <a:bodyPr wrap="square" anchor="ctr" lIns="0" rIns="0" tIns="0" bIns="0">
+            <a:spAutoFit/>
+          </a:bodyPr>
+          <a:lstStyle/>
+          <a:p>
+            <a:r>
+              <a:rPr sz="1800" b="0" i="1">
+                <a:solidFill>
+                  <a:schemeClr val="tx2"/>
+                </a:solidFill>
+              </a:rPr>
+              <a:t>«A un empleado se le ocurre usar las cajas de los pedidos como expositor en el mostrador.»</a:t>
+            </a:r>
+          </a:p>
+        </p:txBody>
+      </p:sp>
+      <p:sp>
+        <p:nvSpPr>
+          <p:cNvPr id="27" name="Respuesta"/>
+          <p:cNvSpPr/>
+          <p:nvPr/>
+        </p:nvSpPr>
+        <p:spPr>
+          <a:xfrm>
+            <a:off x="548640" y="2194560"/>
+            <a:ext cx="11094415" cy="1463040"/>
+          </a:xfrm>
+          <a:prstGeom prst="roundRect">
+            <a:avLst>
+              <a:gd name="adj" fmla="val 9374"/>
+            </a:avLst>
+          </a:prstGeom>
+          <a:solidFill>
+            <a:schemeClr val="accent1"/>
+          </a:solidFill>
+          <a:ln>
+            <a:noFill/>
+          </a:ln>
+          <a:effectLst/>
+        </p:spPr>
+        <p:style>
+          <a:lnRef idx="1">
+            <a:schemeClr val="accent1"/>
+          </a:lnRef>
+          <a:fillRef idx="3">
+            <a:schemeClr val="accent1"/>
+          </a:fillRef>
+          <a:effectRef idx="2">
+            <a:schemeClr val="accent1"/>
+          </a:effectRef>
+          <a:fontRef idx="minor">
+            <a:schemeClr val="lt1"/>
+          </a:fontRef>
+        </p:style>
+        <p:txBody>
+          <a:bodyPr rtlCol="0" anchor="ctr"/>
+          <a:lstStyle/>
+          <a:p>
+            <a:pPr algn="ctr"/>
+          </a:p>
+        </p:txBody>
+      </p:sp>
+      <p:sp>
+        <p:nvSpPr>
+          <p:cNvPr id="28" name="Número"/>
+          <p:cNvSpPr/>
+          <p:nvPr/>
+        </p:nvSpPr>
+        <p:spPr>
+          <a:xfrm>
+            <a:off x="868680" y="2377440"/>
+            <a:ext cx="1097280" cy="1097280"/>
+          </a:xfrm>
+          <a:prstGeom prst="ellipse">
+            <a:avLst/>
+          </a:prstGeom>
+          <a:solidFill>
+            <a:schemeClr val="bg1"/>
+          </a:solidFill>
+          <a:ln>
+            <a:noFill/>
+          </a:ln>
+          <a:effectLst/>
+        </p:spPr>
+        <p:style>
+          <a:lnRef idx="1">
+            <a:schemeClr val="accent1"/>
+          </a:lnRef>
+          <a:fillRef idx="3">
+            <a:schemeClr val="accent1"/>
+          </a:fillRef>
+          <a:effectRef idx="2">
+            <a:schemeClr val="accent1"/>
+          </a:effectRef>
+          <a:fontRef idx="minor">
+            <a:schemeClr val="lt1"/>
+          </a:fontRef>
+        </p:style>
+        <p:txBody>
+          <a:bodyPr rtlCol="0" anchor="ctr"/>
+          <a:lstStyle/>
+          <a:p>
+            <a:pPr algn="ctr"/>
+          </a:p>
+        </p:txBody>
+      </p:sp>
+      <p:sp>
+        <p:nvSpPr>
+          <p:cNvPr id="29" name="Número de la opción"/>
+          <p:cNvSpPr txBox="1"/>
+          <p:nvPr/>
+        </p:nvSpPr>
+        <p:spPr>
+          <a:xfrm>
+            <a:off x="868680" y="2377440"/>
+            <a:ext cx="1097280" cy="1097280"/>
+          </a:xfrm>
+          <a:prstGeom prst="rect">
+            <a:avLst/>
+          </a:prstGeom>
+          <a:noFill/>
+        </p:spPr>
+        <p:txBody>
+          <a:bodyPr wrap="square" anchor="ctr" lIns="0" rIns="0" tIns="0" bIns="0">
+            <a:spAutoFit/>
+          </a:bodyPr>
+          <a:lstStyle/>
+          <a:p>
+            <a:pPr algn="ctr"/>
+            <a:r>
+              <a:rPr sz="4800" b="1" i="0">
+                <a:solidFill>
+                  <a:schemeClr val="accent1"/>
+                </a:solidFill>
+              </a:rPr>
+              <a:t>1</a:t>
+            </a:r>
+          </a:p>
+        </p:txBody>
+      </p:sp>
+      <p:sp>
+        <p:nvSpPr>
+          <p:cNvPr id="30" name="Nombre de la respuesta"/>
+          <p:cNvSpPr txBox="1"/>
+          <p:nvPr/>
+        </p:nvSpPr>
+        <p:spPr>
+          <a:xfrm>
+            <a:off x="2286000" y="2194560"/>
+            <a:ext cx="9082735" cy="1463040"/>
+          </a:xfrm>
+          <a:prstGeom prst="rect">
+            <a:avLst/>
+          </a:prstGeom>
+          <a:noFill/>
+        </p:spPr>
+        <p:txBody>
+          <a:bodyPr wrap="square" anchor="ctr" lIns="0" rIns="0" tIns="0" bIns="0">
+            <a:spAutoFit/>
+          </a:bodyPr>
+          <a:lstStyle/>
+          <a:p>
+            <a:r>
+              <a:rPr sz="4000" b="1" i="0">
+                <a:solidFill>
+                  <a:schemeClr val="tx1"/>
+                </a:solidFill>
+              </a:rPr>
+              <a:t>Creatividad</a:t>
+            </a:r>
+          </a:p>
+        </p:txBody>
+      </p:sp>
+      <p:sp>
+        <p:nvSpPr>
+          <p:cNvPr id="31" name="Por qué"/>
+          <p:cNvSpPr/>
+          <p:nvPr/>
+        </p:nvSpPr>
+        <p:spPr>
+          <a:xfrm>
+            <a:off x="548640" y="3931920"/>
+            <a:ext cx="11094415" cy="1600200"/>
+          </a:xfrm>
+          <a:prstGeom prst="roundRect">
+            <a:avLst>
+              <a:gd name="adj" fmla="val 8571"/>
+            </a:avLst>
+          </a:prstGeom>
+          <a:solidFill>
+            <a:schemeClr val="bg2"/>
+          </a:solidFill>
+          <a:ln>
+            <a:noFill/>
+          </a:ln>
+          <a:effectLst/>
+        </p:spPr>
+        <p:style>
+          <a:lnRef idx="1">
+            <a:schemeClr val="accent1"/>
+          </a:lnRef>
+          <a:fillRef idx="3">
+            <a:schemeClr val="accent1"/>
+          </a:fillRef>
+          <a:effectRef idx="2">
+            <a:schemeClr val="accent1"/>
+          </a:effectRef>
+          <a:fontRef idx="minor">
+            <a:schemeClr val="lt1"/>
+          </a:fontRef>
+        </p:style>
+        <p:txBody>
+          <a:bodyPr rtlCol="0" anchor="ctr"/>
+          <a:lstStyle/>
+          <a:p>
+            <a:pPr algn="ctr"/>
+          </a:p>
+        </p:txBody>
+      </p:sp>
+      <p:sp>
+        <p:nvSpPr>
+          <p:cNvPr id="32" name="Explicación"/>
+          <p:cNvSpPr txBox="1"/>
+          <p:nvPr/>
+        </p:nvSpPr>
+        <p:spPr>
+          <a:xfrm>
+            <a:off x="914400" y="3931920"/>
+            <a:ext cx="10362895" cy="1600200"/>
+          </a:xfrm>
+          <a:prstGeom prst="rect">
+            <a:avLst/>
+          </a:prstGeom>
+          <a:noFill/>
+        </p:spPr>
+        <p:txBody>
+          <a:bodyPr wrap="square" anchor="ctr" lIns="0" rIns="0" tIns="0" bIns="0">
+            <a:spAutoFit/>
+          </a:bodyPr>
+          <a:lstStyle/>
+          <a:p>
+            <a:r>
+              <a:rPr sz="1600" b="1" i="0">
+                <a:solidFill>
+                  <a:schemeClr val="tx2"/>
+                </a:solidFill>
+              </a:rPr>
+              <a:t>Por qué</a:t>
+            </a:r>
+          </a:p>
+          <a:p>
+            <a:pPr>
+              <a:spcBef>
+                <a:spcPts val="600"/>
+              </a:spcBef>
+            </a:pPr>
+            <a:r>
+              <a:rPr sz="2200" b="0" i="0">
+                <a:solidFill>
+                  <a:schemeClr val="tx1"/>
+                </a:solidFill>
+              </a:rPr>
+              <a:t>Por ahora es solo una idea. Si se pone en práctica y funciona, pasa a ser innovación.</a:t>
+            </a:r>
+          </a:p>
+        </p:txBody>
+      </p:sp>
+      <p:sp>
+        <p:nvSpPr>
+          <p:cNvPr id="33" name="Aviso"/>
+          <p:cNvSpPr txBox="1"/>
+          <p:nvPr/>
+        </p:nvSpPr>
+        <p:spPr>
+          <a:xfrm>
+            <a:off x="548640" y="5669280"/>
+            <a:ext cx="11094415" cy="411480"/>
+          </a:xfrm>
+          <a:prstGeom prst="rect">
+            <a:avLst/>
+          </a:prstGeom>
+          <a:noFill/>
+        </p:spPr>
+        <p:txBody>
+          <a:bodyPr wrap="square" anchor="ctr" lIns="0" rIns="0" tIns="0" bIns="0">
+            <a:spAutoFit/>
+          </a:bodyPr>
+          <a:lstStyle/>
+          <a:p>
+            <a:r>
+              <a:rPr sz="1600" b="1" i="1">
+                <a:solidFill>
+                  <a:schemeClr val="accent3"/>
+                </a:solidFill>
+              </a:rPr>
+              <a:t>Situación discutible a propósito: lo importante es el razonamiento, no acertar.</a:t>
+            </a:r>
+          </a:p>
+        </p:txBody>
+      </p:sp>
+    </p:spTree>
+  </p:cSld>
+  <p:clrMapOvr>
+    <a:masterClrMapping/>
+  </p:clrMapOvr>
+</p:sld>
+</file>
+
+<file path=ppt/slides/slide35.xml><?xml version="1.0" encoding="utf-8"?>
+<p:sld xmlns:a="http://schemas.openxmlformats.org/drawingml/2006/main" xmlns:p="http://schemas.openxmlformats.org/presentationml/2006/main" xmlns:r="http://schemas.openxmlformats.org/officeDocument/2006/relationships">
+  <p:cSld>
+    <p:spTree>
+      <p:nvGrpSpPr>
+        <p:cNvPr id="1" name=""/>
+        <p:cNvGrpSpPr/>
+        <p:nvPr/>
+      </p:nvGrpSpPr>
+      <p:grpSpPr/>
+      <p:sp>
+        <p:nvSpPr>
+          <p:cNvPr id="2" name="Text 0"/>
+          <p:cNvSpPr>
+            <a:spLocks noGrp="1"/>
+          </p:cNvSpPr>
+          <p:nvPr>
+            <p:ph type="title" idx="100" hasCustomPrompt="1"/>
+          </p:nvPr>
+        </p:nvSpPr>
+        <p:spPr>
+          <a:xfrm>
+            <a:off x="548640" y="411480"/>
+            <a:ext cx="11094415" cy="777240"/>
+          </a:xfrm>
+          <a:prstGeom prst="rect">
+            <a:avLst/>
+          </a:prstGeom>
+          <a:noFill/>
+          <a:ln/>
+        </p:spPr>
+        <p:txBody>
+          <a:bodyPr wrap="square" lIns="0" tIns="0" rIns="0" bIns="0" rtlCol="0" anchor="ctr"/>
+          <a:lstStyle/>
+          <a:p>
+            <a:pPr marL="0" indent="0" algn="l">
+              <a:buNone/>
+            </a:pPr>
+            <a:r>
+              <a:rPr lang="en-US" sz="3200" b="1" dirty="0">
+                <a:solidFill>
+                  <a:schemeClr val="tx1"/>
+                </a:solidFill>
+              </a:rPr>
+              <a:t>Situación 6: respuesta</a:t>
+            </a:r>
+            <a:endParaRPr lang="en-US" sz="3200" dirty="0"/>
+          </a:p>
+        </p:txBody>
+      </p:sp>
+      <p:sp>
+        <p:nvSpPr>
+          <p:cNvPr id="3" name="Etiqueta de tiempo"/>
+          <p:cNvSpPr/>
+          <p:nvPr/>
+        </p:nvSpPr>
+        <p:spPr>
+          <a:xfrm>
+            <a:off x="8556955" y="548640"/>
+            <a:ext cx="3086100" cy="457200"/>
+          </a:xfrm>
+          <a:prstGeom prst="roundRect">
+            <a:avLst>
+              <a:gd name="adj" fmla="val 50000"/>
+            </a:avLst>
+          </a:prstGeom>
+          <a:solidFill>
+            <a:schemeClr val="accent1"/>
+          </a:solidFill>
+          <a:ln/>
+        </p:spPr>
+      </p:sp>
+      <p:sp>
+        <p:nvSpPr>
+          <p:cNvPr id="4" name="Text 2"/>
+          <p:cNvSpPr txBox="1"/>
+          <p:nvPr/>
+        </p:nvSpPr>
+        <p:spPr>
+          <a:xfrm>
+            <a:off x="8556955" y="548640"/>
+            <a:ext cx="3086100" cy="457200"/>
+          </a:xfrm>
+          <a:prstGeom prst="rect">
+            <a:avLst/>
+          </a:prstGeom>
+          <a:noFill/>
+          <a:ln/>
+        </p:spPr>
+        <p:txBody>
+          <a:bodyPr wrap="square" lIns="0" tIns="0" rIns="0" bIns="0" rtlCol="0" anchor="ctr"/>
+          <a:lstStyle/>
+          <a:p>
+            <a:pPr marL="0" indent="0" algn="ctr">
+              <a:buNone/>
+            </a:pPr>
+            <a:r>
+              <a:rPr lang="en-US" sz="1400" b="1" dirty="0">
+                <a:solidFill>
+                  <a:schemeClr val="tx1"/>
+                </a:solidFill>
+              </a:rPr>
+              <a:t>Min. 5–10 · Todo el grupo</a:t>
+            </a:r>
+            <a:endParaRPr lang="en-US" sz="1400" dirty="0"/>
+          </a:p>
+        </p:txBody>
+      </p:sp>
+      <p:sp>
+        <p:nvSpPr>
+          <p:cNvPr id="25" name="Slide Number Placeholder 0"/>
+          <p:cNvSpPr>
+            <a:spLocks noGrp="1"/>
+          </p:cNvSpPr>
+          <p:nvPr>
+            <p:ph type="sldNum" sz="quarter" idx="4294967295"/>
+          </p:nvPr>
+        </p:nvSpPr>
+        <p:spPr>
+          <a:xfrm>
+            <a:off x="11091672" y="6355080"/>
+            <a:ext cx="548640" cy="320040"/>
+          </a:xfrm>
+          <a:prstGeom prst="rect">
+            <a:avLst/>
+          </a:prstGeom>
+          <a:extLst>
+            <a:ext uri="{C572A759-6A51-4108-AA02-DFA0A04FC94B}">
+              <ma14:wrappingTextBoxFlag xmlns:ma14="http://schemas.microsoft.com/office/mac/drawingml/2011/main" xmlns="" val="0"/>
+            </a:ext>
+          </a:extLst>
+        </p:spPr>
+        <p:txBody>
+          <a:bodyPr/>
+          <a:lstStyle>
+            <a:lvl1pPr>
+              <a:defRPr sz="1100">
+                <a:solidFill>
+                  <a:srgbClr val="8A94A6"/>
+                </a:solidFill>
+              </a:defRPr>
+            </a:lvl1pPr>
+          </a:lstStyle>
+          <a:p>
+            <a:pPr algn="r"/>
+            <a:fld id="{F7021451-1387-4CA6-816F-3879F97B5CBC}" type="slidenum">
+              <a:rPr lang="en-US" b="0"/>
+              <a:t>13</a:t>
+            </a:fld>
+            <a:endParaRPr lang="en-US"/>
+          </a:p>
+        </p:txBody>
+      </p:sp>
+      <p:sp>
+        <p:nvSpPr>
+          <p:cNvPr id="26" name="Situación"/>
+          <p:cNvSpPr txBox="1"/>
+          <p:nvPr/>
+        </p:nvSpPr>
+        <p:spPr>
+          <a:xfrm>
+            <a:off x="548640" y="1325880"/>
+            <a:ext cx="11094415" cy="685800"/>
+          </a:xfrm>
+          <a:prstGeom prst="rect">
+            <a:avLst/>
+          </a:prstGeom>
+          <a:noFill/>
+        </p:spPr>
+        <p:txBody>
+          <a:bodyPr wrap="square" anchor="ctr" lIns="0" rIns="0" tIns="0" bIns="0">
+            <a:spAutoFit/>
+          </a:bodyPr>
+          <a:lstStyle/>
+          <a:p>
+            <a:r>
+              <a:rPr sz="1800" b="0" i="1">
+                <a:solidFill>
+                  <a:schemeClr val="tx2"/>
+                </a:solidFill>
+              </a:rPr>
+              <a:t>«Una camarera usa una IA para traducir la carta al inglés.»</a:t>
+            </a:r>
+          </a:p>
+        </p:txBody>
+      </p:sp>
+      <p:sp>
+        <p:nvSpPr>
+          <p:cNvPr id="27" name="Respuesta"/>
+          <p:cNvSpPr/>
+          <p:nvPr/>
+        </p:nvSpPr>
+        <p:spPr>
+          <a:xfrm>
+            <a:off x="548640" y="2194560"/>
+            <a:ext cx="11094415" cy="1463040"/>
+          </a:xfrm>
+          <a:prstGeom prst="roundRect">
+            <a:avLst>
+              <a:gd name="adj" fmla="val 9374"/>
+            </a:avLst>
+          </a:prstGeom>
+          <a:solidFill>
+            <a:schemeClr val="accent4"/>
+          </a:solidFill>
+          <a:ln>
+            <a:noFill/>
+          </a:ln>
+          <a:effectLst/>
+        </p:spPr>
+        <p:style>
+          <a:lnRef idx="1">
+            <a:schemeClr val="accent1"/>
+          </a:lnRef>
+          <a:fillRef idx="3">
+            <a:schemeClr val="accent1"/>
+          </a:fillRef>
+          <a:effectRef idx="2">
+            <a:schemeClr val="accent1"/>
+          </a:effectRef>
+          <a:fontRef idx="minor">
+            <a:schemeClr val="lt1"/>
+          </a:fontRef>
+        </p:style>
+        <p:txBody>
+          <a:bodyPr rtlCol="0" anchor="ctr"/>
+          <a:lstStyle/>
+          <a:p>
+            <a:pPr algn="ctr"/>
+          </a:p>
+        </p:txBody>
+      </p:sp>
+      <p:sp>
+        <p:nvSpPr>
+          <p:cNvPr id="28" name="Número"/>
+          <p:cNvSpPr/>
+          <p:nvPr/>
+        </p:nvSpPr>
+        <p:spPr>
+          <a:xfrm>
+            <a:off x="868680" y="2377440"/>
+            <a:ext cx="1097280" cy="1097280"/>
+          </a:xfrm>
+          <a:prstGeom prst="ellipse">
+            <a:avLst/>
+          </a:prstGeom>
+          <a:solidFill>
+            <a:schemeClr val="bg1"/>
+          </a:solidFill>
+          <a:ln>
+            <a:noFill/>
+          </a:ln>
+          <a:effectLst/>
+        </p:spPr>
+        <p:style>
+          <a:lnRef idx="1">
+            <a:schemeClr val="accent1"/>
+          </a:lnRef>
+          <a:fillRef idx="3">
+            <a:schemeClr val="accent1"/>
+          </a:fillRef>
+          <a:effectRef idx="2">
+            <a:schemeClr val="accent1"/>
+          </a:effectRef>
+          <a:fontRef idx="minor">
+            <a:schemeClr val="lt1"/>
+          </a:fontRef>
+        </p:style>
+        <p:txBody>
+          <a:bodyPr rtlCol="0" anchor="ctr"/>
+          <a:lstStyle/>
+          <a:p>
+            <a:pPr algn="ctr"/>
+          </a:p>
+        </p:txBody>
+      </p:sp>
+      <p:sp>
+        <p:nvSpPr>
+          <p:cNvPr id="29" name="Número de la opción"/>
+          <p:cNvSpPr txBox="1"/>
+          <p:nvPr/>
+        </p:nvSpPr>
+        <p:spPr>
+          <a:xfrm>
+            <a:off x="868680" y="2377440"/>
+            <a:ext cx="1097280" cy="1097280"/>
+          </a:xfrm>
+          <a:prstGeom prst="rect">
+            <a:avLst/>
+          </a:prstGeom>
+          <a:noFill/>
+        </p:spPr>
+        <p:txBody>
+          <a:bodyPr wrap="square" anchor="ctr" lIns="0" rIns="0" tIns="0" bIns="0">
+            <a:spAutoFit/>
+          </a:bodyPr>
+          <a:lstStyle/>
+          <a:p>
+            <a:pPr algn="ctr"/>
+            <a:r>
+              <a:rPr sz="4800" b="1" i="0">
+                <a:solidFill>
+                  <a:schemeClr val="accent4"/>
+                </a:solidFill>
+              </a:rPr>
+              <a:t>3</a:t>
+            </a:r>
+          </a:p>
+        </p:txBody>
+      </p:sp>
+      <p:sp>
+        <p:nvSpPr>
+          <p:cNvPr id="30" name="Nombre de la respuesta"/>
+          <p:cNvSpPr txBox="1"/>
+          <p:nvPr/>
+        </p:nvSpPr>
+        <p:spPr>
+          <a:xfrm>
+            <a:off x="2286000" y="2194560"/>
+            <a:ext cx="9082735" cy="1463040"/>
+          </a:xfrm>
+          <a:prstGeom prst="rect">
+            <a:avLst/>
+          </a:prstGeom>
+          <a:noFill/>
+        </p:spPr>
+        <p:txBody>
+          <a:bodyPr wrap="square" anchor="ctr" lIns="0" rIns="0" tIns="0" bIns="0">
+            <a:spAutoFit/>
+          </a:bodyPr>
+          <a:lstStyle/>
+          <a:p>
+            <a:r>
+              <a:rPr sz="4000" b="1" i="0">
+                <a:solidFill>
+                  <a:schemeClr val="bg1"/>
+                </a:solidFill>
+              </a:rPr>
+              <a:t>Competencia digital</a:t>
+            </a:r>
+          </a:p>
+        </p:txBody>
+      </p:sp>
+      <p:sp>
+        <p:nvSpPr>
+          <p:cNvPr id="31" name="Por qué"/>
+          <p:cNvSpPr/>
+          <p:nvPr/>
+        </p:nvSpPr>
+        <p:spPr>
+          <a:xfrm>
+            <a:off x="548640" y="3931920"/>
+            <a:ext cx="11094415" cy="1600200"/>
+          </a:xfrm>
+          <a:prstGeom prst="roundRect">
+            <a:avLst>
+              <a:gd name="adj" fmla="val 8571"/>
+            </a:avLst>
+          </a:prstGeom>
+          <a:solidFill>
+            <a:schemeClr val="bg2"/>
+          </a:solidFill>
+          <a:ln>
+            <a:noFill/>
+          </a:ln>
+          <a:effectLst/>
+        </p:spPr>
+        <p:style>
+          <a:lnRef idx="1">
+            <a:schemeClr val="accent1"/>
+          </a:lnRef>
+          <a:fillRef idx="3">
+            <a:schemeClr val="accent1"/>
+          </a:fillRef>
+          <a:effectRef idx="2">
+            <a:schemeClr val="accent1"/>
+          </a:effectRef>
+          <a:fontRef idx="minor">
+            <a:schemeClr val="lt1"/>
+          </a:fontRef>
+        </p:style>
+        <p:txBody>
+          <a:bodyPr rtlCol="0" anchor="ctr"/>
+          <a:lstStyle/>
+          <a:p>
+            <a:pPr algn="ctr"/>
+          </a:p>
+        </p:txBody>
+      </p:sp>
+      <p:sp>
+        <p:nvSpPr>
+          <p:cNvPr id="32" name="Explicación"/>
+          <p:cNvSpPr txBox="1"/>
+          <p:nvPr/>
+        </p:nvSpPr>
+        <p:spPr>
+          <a:xfrm>
+            <a:off x="914400" y="3931920"/>
+            <a:ext cx="10362895" cy="1600200"/>
+          </a:xfrm>
+          <a:prstGeom prst="rect">
+            <a:avLst/>
+          </a:prstGeom>
+          <a:noFill/>
+        </p:spPr>
+        <p:txBody>
+          <a:bodyPr wrap="square" anchor="ctr" lIns="0" rIns="0" tIns="0" bIns="0">
+            <a:spAutoFit/>
+          </a:bodyPr>
+          <a:lstStyle/>
+          <a:p>
+            <a:r>
+              <a:rPr sz="1600" b="1" i="0">
+                <a:solidFill>
+                  <a:schemeClr val="tx2"/>
+                </a:solidFill>
+              </a:rPr>
+              <a:t>Por qué</a:t>
+            </a:r>
+          </a:p>
+          <a:p>
+            <a:pPr>
+              <a:spcBef>
+                <a:spcPts val="600"/>
+              </a:spcBef>
+            </a:pPr>
+            <a:r>
+              <a:rPr sz="2200" b="0" i="0">
+                <a:solidFill>
+                  <a:schemeClr val="tx1"/>
+                </a:solidFill>
+              </a:rPr>
+              <a:t>Usa la IA para una tarea concreta, sin cambiar cómo se atiende. Sería innovación si cambiara la forma de atender a los clientes extranjeros.</a:t>
+            </a:r>
+          </a:p>
+        </p:txBody>
+      </p:sp>
+      <p:sp>
+        <p:nvSpPr>
+          <p:cNvPr id="33" name="Aviso"/>
+          <p:cNvSpPr txBox="1"/>
+          <p:nvPr/>
+        </p:nvSpPr>
+        <p:spPr>
+          <a:xfrm>
+            <a:off x="548640" y="5669280"/>
+            <a:ext cx="11094415" cy="411480"/>
+          </a:xfrm>
+          <a:prstGeom prst="rect">
+            <a:avLst/>
+          </a:prstGeom>
+          <a:noFill/>
+        </p:spPr>
+        <p:txBody>
+          <a:bodyPr wrap="square" anchor="ctr" lIns="0" rIns="0" tIns="0" bIns="0">
+            <a:spAutoFit/>
+          </a:bodyPr>
+          <a:lstStyle/>
+          <a:p>
+            <a:r>
+              <a:rPr sz="1600" b="1" i="1">
+                <a:solidFill>
+                  <a:schemeClr val="accent3"/>
+                </a:solidFill>
+              </a:rPr>
+              <a:t>Situación discutible a propósito: lo importante es el razonamiento, no acertar.</a:t>
+            </a:r>
           </a:p>
         </p:txBody>
       </p:sp>
